--- a/slides/05-soan-thao-van-ban.pptx
+++ b/slides/05-soan-thao-van-ban.pptx
@@ -14141,108 +14141,14 @@
     </a:clrScheme>
     <a:fontScheme name="Office">
       <a:majorFont>
-        <a:latin typeface="Calibri Light" panose="020F0302020204030204"/>
-        <a:ea typeface=""/>
-        <a:cs typeface=""/>
-        <a:font script="Jpan" typeface="游ゴシック Light"/>
-        <a:font script="Hang" typeface="맑은 고딕"/>
-        <a:font script="Hans" typeface="等线 Light"/>
-        <a:font script="Hant" typeface="新細明體"/>
-        <a:font script="Arab" typeface="Times New Roman"/>
-        <a:font script="Hebr" typeface="Times New Roman"/>
-        <a:font script="Thai" typeface="Angsana New"/>
-        <a:font script="Ethi" typeface="Nyala"/>
-        <a:font script="Beng" typeface="Vrinda"/>
-        <a:font script="Gujr" typeface="Shruti"/>
-        <a:font script="Khmr" typeface="MoolBoran"/>
-        <a:font script="Knda" typeface="Tunga"/>
-        <a:font script="Guru" typeface="Raavi"/>
-        <a:font script="Cans" typeface="Euphemia"/>
-        <a:font script="Cher" typeface="Plantagenet Cherokee"/>
-        <a:font script="Yiii" typeface="Microsoft Yi Baiti"/>
-        <a:font script="Tibt" typeface="Microsoft Himalaya"/>
-        <a:font script="Thaa" typeface="MV Boli"/>
-        <a:font script="Deva" typeface="Mangal"/>
-        <a:font script="Telu" typeface="Gautami"/>
-        <a:font script="Taml" typeface="Latha"/>
-        <a:font script="Syrc" typeface="Estrangelo Edessa"/>
-        <a:font script="Orya" typeface="Kalinga"/>
-        <a:font script="Mlym" typeface="Kartika"/>
-        <a:font script="Laoo" typeface="DokChampa"/>
-        <a:font script="Sinh" typeface="Iskoola Pota"/>
-        <a:font script="Mong" typeface="Mongolian Baiti"/>
-        <a:font script="Viet" typeface="Times New Roman"/>
-        <a:font script="Uigh" typeface="Microsoft Uighur"/>
-        <a:font script="Geor" typeface="Sylfaen"/>
-        <a:font script="Armn" typeface="Arial"/>
-        <a:font script="Bugi" typeface="Leelawadee UI"/>
-        <a:font script="Bopo" typeface="Microsoft JhengHei"/>
-        <a:font script="Java" typeface="Javanese Text"/>
-        <a:font script="Lisu" typeface="Segoe UI"/>
-        <a:font script="Mymr" typeface="Myanmar Text"/>
-        <a:font script="Nkoo" typeface="Ebrima"/>
-        <a:font script="Olck" typeface="Nirmala UI"/>
-        <a:font script="Osma" typeface="Ebrima"/>
-        <a:font script="Phag" typeface="Phagspa"/>
-        <a:font script="Syrn" typeface="Estrangelo Edessa"/>
-        <a:font script="Syrj" typeface="Estrangelo Edessa"/>
-        <a:font script="Syre" typeface="Estrangelo Edessa"/>
-        <a:font script="Sora" typeface="Nirmala UI"/>
-        <a:font script="Tale" typeface="Microsoft Tai Le"/>
-        <a:font script="Talu" typeface="Microsoft New Tai Lue"/>
-        <a:font script="Tfng" typeface="Ebrima"/>
+        <a:latin typeface="Cambria" panose="020F0302020204030204"/>
+        <a:ea typeface="Cambria"/>
+        <a:cs typeface="Cambria"/>
       </a:majorFont>
       <a:minorFont>
         <a:latin typeface="Calibri" panose="020F0502020204030204"/>
-        <a:ea typeface=""/>
-        <a:cs typeface=""/>
-        <a:font script="Jpan" typeface="游ゴシック"/>
-        <a:font script="Hang" typeface="맑은 고딕"/>
-        <a:font script="Hans" typeface="等线"/>
-        <a:font script="Hant" typeface="新細明體"/>
-        <a:font script="Arab" typeface="Arial"/>
-        <a:font script="Hebr" typeface="Arial"/>
-        <a:font script="Thai" typeface="Cordia New"/>
-        <a:font script="Ethi" typeface="Nyala"/>
-        <a:font script="Beng" typeface="Vrinda"/>
-        <a:font script="Gujr" typeface="Shruti"/>
-        <a:font script="Khmr" typeface="DaunPenh"/>
-        <a:font script="Knda" typeface="Tunga"/>
-        <a:font script="Guru" typeface="Raavi"/>
-        <a:font script="Cans" typeface="Euphemia"/>
-        <a:font script="Cher" typeface="Plantagenet Cherokee"/>
-        <a:font script="Yiii" typeface="Microsoft Yi Baiti"/>
-        <a:font script="Tibt" typeface="Microsoft Himalaya"/>
-        <a:font script="Thaa" typeface="MV Boli"/>
-        <a:font script="Deva" typeface="Mangal"/>
-        <a:font script="Telu" typeface="Gautami"/>
-        <a:font script="Taml" typeface="Latha"/>
-        <a:font script="Syrc" typeface="Estrangelo Edessa"/>
-        <a:font script="Orya" typeface="Kalinga"/>
-        <a:font script="Mlym" typeface="Kartika"/>
-        <a:font script="Laoo" typeface="DokChampa"/>
-        <a:font script="Sinh" typeface="Iskoola Pota"/>
-        <a:font script="Mong" typeface="Mongolian Baiti"/>
-        <a:font script="Viet" typeface="Arial"/>
-        <a:font script="Uigh" typeface="Microsoft Uighur"/>
-        <a:font script="Geor" typeface="Sylfaen"/>
-        <a:font script="Armn" typeface="Arial"/>
-        <a:font script="Bugi" typeface="Leelawadee UI"/>
-        <a:font script="Bopo" typeface="Microsoft JhengHei"/>
-        <a:font script="Java" typeface="Javanese Text"/>
-        <a:font script="Lisu" typeface="Segoe UI"/>
-        <a:font script="Mymr" typeface="Myanmar Text"/>
-        <a:font script="Nkoo" typeface="Ebrima"/>
-        <a:font script="Olck" typeface="Nirmala UI"/>
-        <a:font script="Osma" typeface="Ebrima"/>
-        <a:font script="Phag" typeface="Phagspa"/>
-        <a:font script="Syrn" typeface="Estrangelo Edessa"/>
-        <a:font script="Syrj" typeface="Estrangelo Edessa"/>
-        <a:font script="Syre" typeface="Estrangelo Edessa"/>
-        <a:font script="Sora" typeface="Nirmala UI"/>
-        <a:font script="Tale" typeface="Microsoft Tai Le"/>
-        <a:font script="Talu" typeface="Microsoft New Tai Lue"/>
-        <a:font script="Tfng" typeface="Ebrima"/>
+        <a:ea typeface="Calibri"/>
+        <a:cs typeface="Calibri"/>
       </a:minorFont>
     </a:fontScheme>
     <a:fmtScheme name="Office">

--- a/slides/05-soan-thao-van-ban.pptx
+++ b/slides/05-soan-thao-van-ban.pptx
@@ -9279,7 +9279,7 @@
         <p:spPr>
           <a:xfrm>
             <a:off x="1051560" y="1545336"/>
-            <a:ext cx="10652760" cy="1131570"/>
+            <a:ext cx="10652760" cy="960120"/>
           </a:xfrm>
           <a:prstGeom prst="rect">
             <a:avLst/>
@@ -9331,7 +9331,7 @@
         </p:nvSpPr>
         <p:spPr>
           <a:xfrm>
-            <a:off x="502920" y="2750058"/>
+            <a:off x="502920" y="2578608"/>
             <a:ext cx="384048" cy="384048"/>
           </a:xfrm>
           <a:prstGeom prst="ellipse">
@@ -9355,7 +9355,7 @@
         </p:nvSpPr>
         <p:spPr>
           <a:xfrm>
-            <a:off x="502920" y="2750058"/>
+            <a:off x="502920" y="2578608"/>
             <a:ext cx="384048" cy="384048"/>
           </a:xfrm>
           <a:prstGeom prst="rect">
@@ -9394,8 +9394,8 @@
         </p:nvSpPr>
         <p:spPr>
           <a:xfrm>
-            <a:off x="1051560" y="2676906"/>
-            <a:ext cx="10652760" cy="1131570"/>
+            <a:off x="1051560" y="2505456"/>
+            <a:ext cx="10652760" cy="960120"/>
           </a:xfrm>
           <a:prstGeom prst="rect">
             <a:avLst/>
@@ -9447,7 +9447,7 @@
         </p:nvSpPr>
         <p:spPr>
           <a:xfrm>
-            <a:off x="502920" y="3881628"/>
+            <a:off x="502920" y="3538728"/>
             <a:ext cx="384048" cy="384048"/>
           </a:xfrm>
           <a:prstGeom prst="ellipse">
@@ -9471,7 +9471,7 @@
         </p:nvSpPr>
         <p:spPr>
           <a:xfrm>
-            <a:off x="502920" y="3881628"/>
+            <a:off x="502920" y="3538728"/>
             <a:ext cx="384048" cy="384048"/>
           </a:xfrm>
           <a:prstGeom prst="rect">
@@ -9510,8 +9510,8 @@
         </p:nvSpPr>
         <p:spPr>
           <a:xfrm>
-            <a:off x="1051560" y="3808476"/>
-            <a:ext cx="10652760" cy="1131570"/>
+            <a:off x="1051560" y="3465576"/>
+            <a:ext cx="10652760" cy="960120"/>
           </a:xfrm>
           <a:prstGeom prst="rect">
             <a:avLst/>
@@ -9563,7 +9563,7 @@
         </p:nvSpPr>
         <p:spPr>
           <a:xfrm>
-            <a:off x="502920" y="5013198"/>
+            <a:off x="502920" y="4498848"/>
             <a:ext cx="384048" cy="384048"/>
           </a:xfrm>
           <a:prstGeom prst="ellipse">
@@ -9587,7 +9587,7 @@
         </p:nvSpPr>
         <p:spPr>
           <a:xfrm>
-            <a:off x="502920" y="5013198"/>
+            <a:off x="502920" y="4498848"/>
             <a:ext cx="384048" cy="384048"/>
           </a:xfrm>
           <a:prstGeom prst="rect">
@@ -9626,8 +9626,8 @@
         </p:nvSpPr>
         <p:spPr>
           <a:xfrm>
-            <a:off x="1051560" y="4940046"/>
-            <a:ext cx="10652760" cy="1131570"/>
+            <a:off x="1051560" y="4425696"/>
+            <a:ext cx="10652760" cy="960120"/>
           </a:xfrm>
           <a:prstGeom prst="rect">
             <a:avLst/>
@@ -10660,7 +10660,7 @@
         <p:spPr>
           <a:xfrm>
             <a:off x="1051560" y="1545336"/>
-            <a:ext cx="10652760" cy="1131570"/>
+            <a:ext cx="10652760" cy="960120"/>
           </a:xfrm>
           <a:prstGeom prst="rect">
             <a:avLst/>
@@ -10712,7 +10712,7 @@
         </p:nvSpPr>
         <p:spPr>
           <a:xfrm>
-            <a:off x="502920" y="2750058"/>
+            <a:off x="502920" y="2578608"/>
             <a:ext cx="384048" cy="384048"/>
           </a:xfrm>
           <a:prstGeom prst="ellipse">
@@ -10736,7 +10736,7 @@
         </p:nvSpPr>
         <p:spPr>
           <a:xfrm>
-            <a:off x="502920" y="2750058"/>
+            <a:off x="502920" y="2578608"/>
             <a:ext cx="384048" cy="384048"/>
           </a:xfrm>
           <a:prstGeom prst="rect">
@@ -10775,8 +10775,8 @@
         </p:nvSpPr>
         <p:spPr>
           <a:xfrm>
-            <a:off x="1051560" y="2676906"/>
-            <a:ext cx="10652760" cy="1131570"/>
+            <a:off x="1051560" y="2505456"/>
+            <a:ext cx="10652760" cy="960120"/>
           </a:xfrm>
           <a:prstGeom prst="rect">
             <a:avLst/>
@@ -10828,7 +10828,7 @@
         </p:nvSpPr>
         <p:spPr>
           <a:xfrm>
-            <a:off x="502920" y="3881628"/>
+            <a:off x="502920" y="3538728"/>
             <a:ext cx="384048" cy="384048"/>
           </a:xfrm>
           <a:prstGeom prst="ellipse">
@@ -10852,7 +10852,7 @@
         </p:nvSpPr>
         <p:spPr>
           <a:xfrm>
-            <a:off x="502920" y="3881628"/>
+            <a:off x="502920" y="3538728"/>
             <a:ext cx="384048" cy="384048"/>
           </a:xfrm>
           <a:prstGeom prst="rect">
@@ -10891,8 +10891,8 @@
         </p:nvSpPr>
         <p:spPr>
           <a:xfrm>
-            <a:off x="1051560" y="3808476"/>
-            <a:ext cx="10652760" cy="1131570"/>
+            <a:off x="1051560" y="3465576"/>
+            <a:ext cx="10652760" cy="960120"/>
           </a:xfrm>
           <a:prstGeom prst="rect">
             <a:avLst/>
@@ -10944,7 +10944,7 @@
         </p:nvSpPr>
         <p:spPr>
           <a:xfrm>
-            <a:off x="502920" y="5013198"/>
+            <a:off x="502920" y="4498848"/>
             <a:ext cx="384048" cy="384048"/>
           </a:xfrm>
           <a:prstGeom prst="ellipse">
@@ -10968,7 +10968,7 @@
         </p:nvSpPr>
         <p:spPr>
           <a:xfrm>
-            <a:off x="502920" y="5013198"/>
+            <a:off x="502920" y="4498848"/>
             <a:ext cx="384048" cy="384048"/>
           </a:xfrm>
           <a:prstGeom prst="rect">
@@ -11007,8 +11007,8 @@
         </p:nvSpPr>
         <p:spPr>
           <a:xfrm>
-            <a:off x="1051560" y="4940046"/>
-            <a:ext cx="10652760" cy="1131570"/>
+            <a:off x="1051560" y="4425696"/>
+            <a:ext cx="10652760" cy="960120"/>
           </a:xfrm>
           <a:prstGeom prst="rect">
             <a:avLst/>

--- a/slides/05-soan-thao-van-ban.pptx
+++ b/slides/05-soan-thao-van-ban.pptx
@@ -2802,7 +2802,7 @@
       </p:sp>
       <p:pic>
         <p:nvPicPr>
-          <p:cNvPr id="3" name="Image 0" descr="assets/logo_tron.png">    </p:cNvPr>
+          <p:cNvPr id="3" name="Image 0" descr="/home/user/comdraft/assets/img/dau-huong.png">    </p:cNvPr>
           <p:cNvPicPr>
             <a:picLocks noChangeAspect="1"/>
           </p:cNvPicPr>
@@ -2828,7 +2828,7 @@
       </p:pic>
       <p:pic>
         <p:nvPicPr>
-          <p:cNvPr id="4" name="Image 1" descr="assets/logo_ngang.png">    </p:cNvPr>
+          <p:cNvPr id="4" name="Image 1" descr="/home/user/comdraft/assets/img/lockup-huong.png">    </p:cNvPr>
           <p:cNvPicPr>
             <a:picLocks noChangeAspect="1"/>
           </p:cNvPicPr>
@@ -3136,6 +3136,1257 @@
 </file>
 
 <file path=ppt/slides/slide10.xml><?xml version="1.0" encoding="utf-8"?>
+<p:sld xmlns:a="http://schemas.openxmlformats.org/drawingml/2006/main" xmlns:p="http://schemas.openxmlformats.org/presentationml/2006/main" xmlns:r="http://schemas.openxmlformats.org/officeDocument/2006/relationships">
+  <p:cSld>
+    <p:spTree>
+      <p:nvGrpSpPr>
+        <p:cNvPr id="1" name=""/>
+        <p:cNvGrpSpPr/>
+        <p:nvPr/>
+      </p:nvGrpSpPr>
+      <p:grpSpPr/>
+      <p:sp>
+        <p:nvSpPr>
+          <p:cNvPr id="2" name="Rectangle 1"/>
+          <p:cNvSpPr/>
+          <p:nvPr/>
+        </p:nvSpPr>
+        <p:spPr>
+          <a:xfrm>
+            <a:off x="0" y="0"/>
+            <a:ext cx="12191695" cy="6858000"/>
+          </a:xfrm>
+          <a:prstGeom prst="rect">
+            <a:avLst/>
+          </a:prstGeom>
+          <a:solidFill>
+            <a:srgbClr val="FDFBF8"/>
+          </a:solidFill>
+          <a:ln>
+            <a:noFill/>
+          </a:ln>
+          <a:effectLst/>
+        </p:spPr>
+        <p:style>
+          <a:lnRef idx="1">
+            <a:schemeClr val="accent1"/>
+          </a:lnRef>
+          <a:fillRef idx="3">
+            <a:schemeClr val="accent1"/>
+          </a:fillRef>
+          <a:effectRef idx="2">
+            <a:schemeClr val="accent1"/>
+          </a:effectRef>
+          <a:fontRef idx="minor">
+            <a:schemeClr val="lt1"/>
+          </a:fontRef>
+        </p:style>
+        <p:txBody>
+          <a:bodyPr rtlCol="0" anchor="ctr"/>
+          <a:lstStyle/>
+          <a:p>
+            <a:pPr algn="ctr"/>
+          </a:p>
+        </p:txBody>
+      </p:sp>
+      <p:sp>
+        <p:nvSpPr>
+          <p:cNvPr id="3" name="TextBox 2"/>
+          <p:cNvSpPr txBox="1"/>
+          <p:nvPr/>
+        </p:nvSpPr>
+        <p:spPr>
+          <a:xfrm>
+            <a:off x="502920" y="292608"/>
+            <a:ext cx="11155680" cy="292608"/>
+          </a:xfrm>
+          <a:prstGeom prst="rect">
+            <a:avLst/>
+          </a:prstGeom>
+          <a:noFill/>
+        </p:spPr>
+        <p:txBody>
+          <a:bodyPr wrap="none">
+            <a:spAutoFit/>
+          </a:bodyPr>
+          <a:lstStyle/>
+          <a:p>
+            <a:r>
+              <a:rPr sz="1100" b="1">
+                <a:solidFill>
+                  <a:srgbClr val="DC756A"/>
+                </a:solidFill>
+                <a:latin typeface="Calibri"/>
+              </a:rPr>
+              <a:t>CON SỐ PHẢI NHỚ</a:t>
+            </a:r>
+          </a:p>
+        </p:txBody>
+      </p:sp>
+      <p:sp>
+        <p:nvSpPr>
+          <p:cNvPr id="4" name="TextBox 3"/>
+          <p:cNvSpPr txBox="1"/>
+          <p:nvPr/>
+        </p:nvSpPr>
+        <p:spPr>
+          <a:xfrm>
+            <a:off x="502920" y="603504"/>
+            <a:ext cx="11155680" cy="731520"/>
+          </a:xfrm>
+          <a:prstGeom prst="rect">
+            <a:avLst/>
+          </a:prstGeom>
+          <a:noFill/>
+        </p:spPr>
+        <p:txBody>
+          <a:bodyPr wrap="square">
+            <a:spAutoFit/>
+          </a:bodyPr>
+          <a:lstStyle/>
+          <a:p>
+            <a:r>
+              <a:rPr sz="2700" b="1">
+                <a:solidFill>
+                  <a:srgbClr val="3A2B28"/>
+                </a:solidFill>
+                <a:latin typeface="Cambria"/>
+              </a:rPr>
+              <a:t>Bốn con số của một trang văn bản đúng chuẩn</a:t>
+            </a:r>
+          </a:p>
+        </p:txBody>
+      </p:sp>
+      <p:sp>
+        <p:nvSpPr>
+          <p:cNvPr id="5" name="Rounded Rectangle 4"/>
+          <p:cNvSpPr/>
+          <p:nvPr/>
+        </p:nvSpPr>
+        <p:spPr>
+          <a:xfrm>
+            <a:off x="502920" y="1783080"/>
+            <a:ext cx="2622042" cy="3429000"/>
+          </a:xfrm>
+          <a:prstGeom prst="roundRect">
+            <a:avLst>
+              <a:gd name="adj" fmla="val 7000"/>
+            </a:avLst>
+          </a:prstGeom>
+          <a:solidFill>
+            <a:srgbClr val="FFFFFF"/>
+          </a:solidFill>
+          <a:ln w="15875">
+            <a:solidFill>
+              <a:srgbClr val="FBCEC9"/>
+            </a:solidFill>
+          </a:ln>
+          <a:effectLst/>
+        </p:spPr>
+        <p:style>
+          <a:lnRef idx="1">
+            <a:schemeClr val="accent1"/>
+          </a:lnRef>
+          <a:fillRef idx="3">
+            <a:schemeClr val="accent1"/>
+          </a:fillRef>
+          <a:effectRef idx="2">
+            <a:schemeClr val="accent1"/>
+          </a:effectRef>
+          <a:fontRef idx="minor">
+            <a:schemeClr val="lt1"/>
+          </a:fontRef>
+        </p:style>
+        <p:txBody>
+          <a:bodyPr rtlCol="0" anchor="ctr" wrap="square" lIns="182880" rIns="182880" tIns="274320" bIns="182880"/>
+          <a:lstStyle/>
+          <a:p>
+            <a:pPr algn="ctr"/>
+            <a:r>
+              <a:rPr sz="5800" b="1">
+                <a:solidFill>
+                  <a:srgbClr val="DC756A"/>
+                </a:solidFill>
+                <a:latin typeface="Cambria"/>
+              </a:rPr>
+              <a:t>A4</a:t>
+            </a:r>
+          </a:p>
+          <a:p>
+            <a:pPr algn="ctr"/>
+            <a:r>
+              <a:rPr sz="1400" b="1">
+                <a:solidFill>
+                  <a:srgbClr val="AC4D33"/>
+                </a:solidFill>
+                <a:latin typeface="Calibri"/>
+              </a:rPr>
+              <a:t>KHỔ GIẤY</a:t>
+            </a:r>
+          </a:p>
+          <a:p>
+            <a:pPr algn="ctr">
+              <a:spcBef>
+                <a:spcPts val="1200"/>
+              </a:spcBef>
+            </a:pPr>
+            <a:r>
+              <a:rPr sz="1250">
+                <a:solidFill>
+                  <a:srgbClr val="3A2B28"/>
+                </a:solidFill>
+                <a:latin typeface="Calibri"/>
+              </a:rPr>
+              <a:t>210 × 297 mm — không dùng khổ Letter</a:t>
+            </a:r>
+          </a:p>
+        </p:txBody>
+      </p:sp>
+      <p:sp>
+        <p:nvSpPr>
+          <p:cNvPr id="6" name="Rounded Rectangle 5"/>
+          <p:cNvSpPr/>
+          <p:nvPr/>
+        </p:nvSpPr>
+        <p:spPr>
+          <a:xfrm>
+            <a:off x="3362706" y="1783080"/>
+            <a:ext cx="2622042" cy="3429000"/>
+          </a:xfrm>
+          <a:prstGeom prst="roundRect">
+            <a:avLst>
+              <a:gd name="adj" fmla="val 7000"/>
+            </a:avLst>
+          </a:prstGeom>
+          <a:solidFill>
+            <a:srgbClr val="FFFFFF"/>
+          </a:solidFill>
+          <a:ln w="15875">
+            <a:solidFill>
+              <a:srgbClr val="FBCEC9"/>
+            </a:solidFill>
+          </a:ln>
+          <a:effectLst/>
+        </p:spPr>
+        <p:style>
+          <a:lnRef idx="1">
+            <a:schemeClr val="accent1"/>
+          </a:lnRef>
+          <a:fillRef idx="3">
+            <a:schemeClr val="accent1"/>
+          </a:fillRef>
+          <a:effectRef idx="2">
+            <a:schemeClr val="accent1"/>
+          </a:effectRef>
+          <a:fontRef idx="minor">
+            <a:schemeClr val="lt1"/>
+          </a:fontRef>
+        </p:style>
+        <p:txBody>
+          <a:bodyPr rtlCol="0" anchor="ctr" wrap="square" lIns="182880" rIns="182880" tIns="274320" bIns="182880"/>
+          <a:lstStyle/>
+          <a:p>
+            <a:pPr algn="ctr"/>
+            <a:r>
+              <a:rPr sz="5800" b="1">
+                <a:solidFill>
+                  <a:srgbClr val="DC756A"/>
+                </a:solidFill>
+                <a:latin typeface="Cambria"/>
+              </a:rPr>
+              <a:t>30–35</a:t>
+            </a:r>
+          </a:p>
+          <a:p>
+            <a:pPr algn="ctr"/>
+            <a:r>
+              <a:rPr sz="1400" b="1">
+                <a:solidFill>
+                  <a:srgbClr val="AC4D33"/>
+                </a:solidFill>
+                <a:latin typeface="Calibri"/>
+              </a:rPr>
+              <a:t>MILIMET</a:t>
+            </a:r>
+          </a:p>
+          <a:p>
+            <a:pPr algn="ctr">
+              <a:spcBef>
+                <a:spcPts val="1200"/>
+              </a:spcBef>
+            </a:pPr>
+            <a:r>
+              <a:rPr sz="1250">
+                <a:solidFill>
+                  <a:srgbClr val="3A2B28"/>
+                </a:solidFill>
+                <a:latin typeface="Calibri"/>
+              </a:rPr>
+              <a:t>Lề trái, rộng nhất để đóng gáy lưu trữ</a:t>
+            </a:r>
+          </a:p>
+        </p:txBody>
+      </p:sp>
+      <p:sp>
+        <p:nvSpPr>
+          <p:cNvPr id="7" name="Rounded Rectangle 6"/>
+          <p:cNvSpPr/>
+          <p:nvPr/>
+        </p:nvSpPr>
+        <p:spPr>
+          <a:xfrm>
+            <a:off x="6222492" y="1783080"/>
+            <a:ext cx="2622042" cy="3429000"/>
+          </a:xfrm>
+          <a:prstGeom prst="roundRect">
+            <a:avLst>
+              <a:gd name="adj" fmla="val 7000"/>
+            </a:avLst>
+          </a:prstGeom>
+          <a:solidFill>
+            <a:srgbClr val="FFFFFF"/>
+          </a:solidFill>
+          <a:ln w="15875">
+            <a:solidFill>
+              <a:srgbClr val="FBCEC9"/>
+            </a:solidFill>
+          </a:ln>
+          <a:effectLst/>
+        </p:spPr>
+        <p:style>
+          <a:lnRef idx="1">
+            <a:schemeClr val="accent1"/>
+          </a:lnRef>
+          <a:fillRef idx="3">
+            <a:schemeClr val="accent1"/>
+          </a:fillRef>
+          <a:effectRef idx="2">
+            <a:schemeClr val="accent1"/>
+          </a:effectRef>
+          <a:fontRef idx="minor">
+            <a:schemeClr val="lt1"/>
+          </a:fontRef>
+        </p:style>
+        <p:txBody>
+          <a:bodyPr rtlCol="0" anchor="ctr" wrap="square" lIns="182880" rIns="182880" tIns="274320" bIns="182880"/>
+          <a:lstStyle/>
+          <a:p>
+            <a:pPr algn="ctr"/>
+            <a:r>
+              <a:rPr sz="5800" b="1">
+                <a:solidFill>
+                  <a:srgbClr val="DC756A"/>
+                </a:solidFill>
+                <a:latin typeface="Cambria"/>
+              </a:rPr>
+              <a:t>13–14</a:t>
+            </a:r>
+          </a:p>
+          <a:p>
+            <a:pPr algn="ctr"/>
+            <a:r>
+              <a:rPr sz="1400" b="1">
+                <a:solidFill>
+                  <a:srgbClr val="AC4D33"/>
+                </a:solidFill>
+                <a:latin typeface="Calibri"/>
+              </a:rPr>
+              <a:t>CỠ CHỮ</a:t>
+            </a:r>
+          </a:p>
+          <a:p>
+            <a:pPr algn="ctr">
+              <a:spcBef>
+                <a:spcPts val="1200"/>
+              </a:spcBef>
+            </a:pPr>
+            <a:r>
+              <a:rPr sz="1250">
+                <a:solidFill>
+                  <a:srgbClr val="3A2B28"/>
+                </a:solidFill>
+                <a:latin typeface="Calibri"/>
+              </a:rPr>
+              <a:t>Times New Roman, bộ mã Unicode, màu đen</a:t>
+            </a:r>
+          </a:p>
+        </p:txBody>
+      </p:sp>
+      <p:sp>
+        <p:nvSpPr>
+          <p:cNvPr id="8" name="Rounded Rectangle 7"/>
+          <p:cNvSpPr/>
+          <p:nvPr/>
+        </p:nvSpPr>
+        <p:spPr>
+          <a:xfrm>
+            <a:off x="9082278" y="1783080"/>
+            <a:ext cx="2622042" cy="3429000"/>
+          </a:xfrm>
+          <a:prstGeom prst="roundRect">
+            <a:avLst>
+              <a:gd name="adj" fmla="val 7000"/>
+            </a:avLst>
+          </a:prstGeom>
+          <a:solidFill>
+            <a:srgbClr val="FFFFFF"/>
+          </a:solidFill>
+          <a:ln w="15875">
+            <a:solidFill>
+              <a:srgbClr val="FBCEC9"/>
+            </a:solidFill>
+          </a:ln>
+          <a:effectLst/>
+        </p:spPr>
+        <p:style>
+          <a:lnRef idx="1">
+            <a:schemeClr val="accent1"/>
+          </a:lnRef>
+          <a:fillRef idx="3">
+            <a:schemeClr val="accent1"/>
+          </a:fillRef>
+          <a:effectRef idx="2">
+            <a:schemeClr val="accent1"/>
+          </a:effectRef>
+          <a:fontRef idx="minor">
+            <a:schemeClr val="lt1"/>
+          </a:fontRef>
+        </p:style>
+        <p:txBody>
+          <a:bodyPr rtlCol="0" anchor="ctr" wrap="square" lIns="182880" rIns="182880" tIns="274320" bIns="182880"/>
+          <a:lstStyle/>
+          <a:p>
+            <a:pPr algn="ctr"/>
+            <a:r>
+              <a:rPr sz="5800" b="1">
+                <a:solidFill>
+                  <a:srgbClr val="DC756A"/>
+                </a:solidFill>
+                <a:latin typeface="Cambria"/>
+              </a:rPr>
+              <a:t>9</a:t>
+            </a:r>
+          </a:p>
+          <a:p>
+            <a:pPr algn="ctr"/>
+            <a:r>
+              <a:rPr sz="1400" b="1">
+                <a:solidFill>
+                  <a:srgbClr val="AC4D33"/>
+                </a:solidFill>
+                <a:latin typeface="Calibri"/>
+              </a:rPr>
+              <a:t>THÀNH PHẦN</a:t>
+            </a:r>
+          </a:p>
+          <a:p>
+            <a:pPr algn="ctr">
+              <a:spcBef>
+                <a:spcPts val="1200"/>
+              </a:spcBef>
+            </a:pPr>
+            <a:r>
+              <a:rPr sz="1250">
+                <a:solidFill>
+                  <a:srgbClr val="3A2B28"/>
+                </a:solidFill>
+                <a:latin typeface="Calibri"/>
+              </a:rPr>
+              <a:t>Số thành phần thể thức bắt buộc theo NĐ 30/2020</a:t>
+            </a:r>
+          </a:p>
+        </p:txBody>
+      </p:sp>
+      <p:sp>
+        <p:nvSpPr>
+          <p:cNvPr id="9" name="Rounded Rectangle 8"/>
+          <p:cNvSpPr/>
+          <p:nvPr/>
+        </p:nvSpPr>
+        <p:spPr>
+          <a:xfrm>
+            <a:off x="502920" y="5440680"/>
+            <a:ext cx="11201400" cy="685800"/>
+          </a:xfrm>
+          <a:prstGeom prst="roundRect">
+            <a:avLst>
+              <a:gd name="adj" fmla="val 12000"/>
+            </a:avLst>
+          </a:prstGeom>
+          <a:solidFill>
+            <a:srgbClr val="FDF1EF"/>
+          </a:solidFill>
+          <a:ln w="12700">
+            <a:solidFill>
+              <a:srgbClr val="FBCEC9"/>
+            </a:solidFill>
+          </a:ln>
+          <a:effectLst/>
+        </p:spPr>
+        <p:style>
+          <a:lnRef idx="1">
+            <a:schemeClr val="accent1"/>
+          </a:lnRef>
+          <a:fillRef idx="3">
+            <a:schemeClr val="accent1"/>
+          </a:fillRef>
+          <a:effectRef idx="2">
+            <a:schemeClr val="accent1"/>
+          </a:effectRef>
+          <a:fontRef idx="minor">
+            <a:schemeClr val="lt1"/>
+          </a:fontRef>
+        </p:style>
+        <p:txBody>
+          <a:bodyPr rtlCol="0" anchor="ctr" wrap="square" lIns="201168" rIns="201168"/>
+          <a:lstStyle/>
+          <a:p>
+            <a:pPr algn="ctr"/>
+            <a:r>
+              <a:rPr sz="1300">
+                <a:solidFill>
+                  <a:srgbClr val="3A2B28"/>
+                </a:solidFill>
+                <a:latin typeface="Calibri"/>
+              </a:rPr>
+              <a:t>Lề trên và dưới 20 – 25 mm • lề phải 15 – 20 mm • số trang đánh từ trang thứ hai, canh giữa theo lề trên.</a:t>
+            </a:r>
+          </a:p>
+        </p:txBody>
+      </p:sp>
+      <p:sp>
+        <p:nvSpPr>
+          <p:cNvPr id="10" name="TextBox 9"/>
+          <p:cNvSpPr txBox="1"/>
+          <p:nvPr/>
+        </p:nvSpPr>
+        <p:spPr>
+          <a:xfrm>
+            <a:off x="502920" y="6419088"/>
+            <a:ext cx="7772400" cy="292608"/>
+          </a:xfrm>
+          <a:prstGeom prst="rect">
+            <a:avLst/>
+          </a:prstGeom>
+          <a:noFill/>
+        </p:spPr>
+        <p:txBody>
+          <a:bodyPr wrap="none">
+            <a:spAutoFit/>
+          </a:bodyPr>
+          <a:lstStyle/>
+          <a:p>
+            <a:r>
+              <a:rPr sz="900">
+                <a:solidFill>
+                  <a:srgbClr val="8A7A76"/>
+                </a:solidFill>
+                <a:latin typeface="Calibri"/>
+              </a:rPr>
+              <a:t>Je m'appelle Huong  •  GV. Đỗ Thùy Hương  •  EC1103</a:t>
+            </a:r>
+          </a:p>
+        </p:txBody>
+      </p:sp>
+      <p:sp>
+        <p:nvSpPr>
+          <p:cNvPr id="11" name="TextBox 10"/>
+          <p:cNvSpPr txBox="1"/>
+          <p:nvPr/>
+        </p:nvSpPr>
+        <p:spPr>
+          <a:xfrm>
+            <a:off x="9326880" y="6419088"/>
+            <a:ext cx="1920240" cy="292608"/>
+          </a:xfrm>
+          <a:prstGeom prst="rect">
+            <a:avLst/>
+          </a:prstGeom>
+          <a:noFill/>
+        </p:spPr>
+        <p:txBody>
+          <a:bodyPr wrap="none">
+            <a:spAutoFit/>
+          </a:bodyPr>
+          <a:lstStyle/>
+          <a:p>
+            <a:pPr algn="r"/>
+            <a:r>
+              <a:rPr sz="900">
+                <a:solidFill>
+                  <a:srgbClr val="8A7A76"/>
+                </a:solidFill>
+                <a:latin typeface="Calibri"/>
+              </a:rPr>
+              <a:t>Chương 5</a:t>
+            </a:r>
+          </a:p>
+        </p:txBody>
+      </p:sp>
+    </p:spTree>
+  </p:cSld>
+  <p:clrMapOvr>
+    <a:masterClrMapping/>
+  </p:clrMapOvr>
+</p:sld>
+</file>
+
+<file path=ppt/slides/slide11.xml><?xml version="1.0" encoding="utf-8"?>
+<p:sld xmlns:a="http://schemas.openxmlformats.org/drawingml/2006/main" xmlns:p="http://schemas.openxmlformats.org/presentationml/2006/main" xmlns:r="http://schemas.openxmlformats.org/officeDocument/2006/relationships">
+  <p:cSld>
+    <p:spTree>
+      <p:nvGrpSpPr>
+        <p:cNvPr id="1" name=""/>
+        <p:cNvGrpSpPr/>
+        <p:nvPr/>
+      </p:nvGrpSpPr>
+      <p:grpSpPr/>
+      <p:sp>
+        <p:nvSpPr>
+          <p:cNvPr id="2" name="Rectangle 1"/>
+          <p:cNvSpPr/>
+          <p:nvPr/>
+        </p:nvSpPr>
+        <p:spPr>
+          <a:xfrm>
+            <a:off x="0" y="0"/>
+            <a:ext cx="12191695" cy="6858000"/>
+          </a:xfrm>
+          <a:prstGeom prst="rect">
+            <a:avLst/>
+          </a:prstGeom>
+          <a:solidFill>
+            <a:srgbClr val="FDFBF8"/>
+          </a:solidFill>
+          <a:ln>
+            <a:noFill/>
+          </a:ln>
+          <a:effectLst/>
+        </p:spPr>
+        <p:style>
+          <a:lnRef idx="1">
+            <a:schemeClr val="accent1"/>
+          </a:lnRef>
+          <a:fillRef idx="3">
+            <a:schemeClr val="accent1"/>
+          </a:fillRef>
+          <a:effectRef idx="2">
+            <a:schemeClr val="accent1"/>
+          </a:effectRef>
+          <a:fontRef idx="minor">
+            <a:schemeClr val="lt1"/>
+          </a:fontRef>
+        </p:style>
+        <p:txBody>
+          <a:bodyPr rtlCol="0" anchor="ctr"/>
+          <a:lstStyle/>
+          <a:p>
+            <a:pPr algn="ctr"/>
+          </a:p>
+        </p:txBody>
+      </p:sp>
+      <p:sp>
+        <p:nvSpPr>
+          <p:cNvPr id="3" name="Rectangle 2"/>
+          <p:cNvSpPr/>
+          <p:nvPr/>
+        </p:nvSpPr>
+        <p:spPr>
+          <a:xfrm>
+            <a:off x="0" y="2103120"/>
+            <a:ext cx="12191695" cy="2743200"/>
+          </a:xfrm>
+          <a:prstGeom prst="rect">
+            <a:avLst/>
+          </a:prstGeom>
+          <a:solidFill>
+            <a:srgbClr val="FDF1EF"/>
+          </a:solidFill>
+          <a:ln>
+            <a:noFill/>
+          </a:ln>
+          <a:effectLst/>
+        </p:spPr>
+        <p:style>
+          <a:lnRef idx="1">
+            <a:schemeClr val="accent1"/>
+          </a:lnRef>
+          <a:fillRef idx="3">
+            <a:schemeClr val="accent1"/>
+          </a:fillRef>
+          <a:effectRef idx="2">
+            <a:schemeClr val="accent1"/>
+          </a:effectRef>
+          <a:fontRef idx="minor">
+            <a:schemeClr val="lt1"/>
+          </a:fontRef>
+        </p:style>
+        <p:txBody>
+          <a:bodyPr rtlCol="0" anchor="ctr"/>
+          <a:lstStyle/>
+          <a:p>
+            <a:pPr algn="ctr"/>
+          </a:p>
+        </p:txBody>
+      </p:sp>
+      <p:sp>
+        <p:nvSpPr>
+          <p:cNvPr id="4" name="Rectangle 3"/>
+          <p:cNvSpPr/>
+          <p:nvPr/>
+        </p:nvSpPr>
+        <p:spPr>
+          <a:xfrm>
+            <a:off x="0" y="0"/>
+            <a:ext cx="274320" cy="6858000"/>
+          </a:xfrm>
+          <a:prstGeom prst="rect">
+            <a:avLst/>
+          </a:prstGeom>
+          <a:solidFill>
+            <a:srgbClr val="DC756A"/>
+          </a:solidFill>
+          <a:ln>
+            <a:noFill/>
+          </a:ln>
+          <a:effectLst/>
+        </p:spPr>
+        <p:style>
+          <a:lnRef idx="1">
+            <a:schemeClr val="accent1"/>
+          </a:lnRef>
+          <a:fillRef idx="3">
+            <a:schemeClr val="accent1"/>
+          </a:fillRef>
+          <a:effectRef idx="2">
+            <a:schemeClr val="accent1"/>
+          </a:effectRef>
+          <a:fontRef idx="minor">
+            <a:schemeClr val="lt1"/>
+          </a:fontRef>
+        </p:style>
+        <p:txBody>
+          <a:bodyPr rtlCol="0" anchor="ctr"/>
+          <a:lstStyle/>
+          <a:p>
+            <a:pPr algn="ctr"/>
+          </a:p>
+        </p:txBody>
+      </p:sp>
+      <p:sp>
+        <p:nvSpPr>
+          <p:cNvPr id="5" name="TextBox 4"/>
+          <p:cNvSpPr txBox="1"/>
+          <p:nvPr/>
+        </p:nvSpPr>
+        <p:spPr>
+          <a:xfrm>
+            <a:off x="1280160" y="2377440"/>
+            <a:ext cx="9692640" cy="411480"/>
+          </a:xfrm>
+          <a:prstGeom prst="rect">
+            <a:avLst/>
+          </a:prstGeom>
+          <a:noFill/>
+        </p:spPr>
+        <p:txBody>
+          <a:bodyPr wrap="none">
+            <a:spAutoFit/>
+          </a:bodyPr>
+          <a:lstStyle/>
+          <a:p>
+            <a:r>
+              <a:rPr sz="1500" b="1">
+                <a:solidFill>
+                  <a:srgbClr val="DC756A"/>
+                </a:solidFill>
+                <a:latin typeface="Calibri"/>
+              </a:rPr>
+              <a:t>MỤC 5.3</a:t>
+            </a:r>
+          </a:p>
+        </p:txBody>
+      </p:sp>
+      <p:sp>
+        <p:nvSpPr>
+          <p:cNvPr id="6" name="TextBox 5"/>
+          <p:cNvSpPr txBox="1"/>
+          <p:nvPr/>
+        </p:nvSpPr>
+        <p:spPr>
+          <a:xfrm>
+            <a:off x="1280160" y="2788920"/>
+            <a:ext cx="9601200" cy="1371600"/>
+          </a:xfrm>
+          <a:prstGeom prst="rect">
+            <a:avLst/>
+          </a:prstGeom>
+          <a:noFill/>
+        </p:spPr>
+        <p:txBody>
+          <a:bodyPr wrap="square">
+            <a:spAutoFit/>
+          </a:bodyPr>
+          <a:lstStyle/>
+          <a:p>
+            <a:r>
+              <a:rPr sz="3300" b="1">
+                <a:solidFill>
+                  <a:srgbClr val="AC4D33"/>
+                </a:solidFill>
+                <a:latin typeface="Cambria"/>
+              </a:rPr>
+              <a:t>Soạn thảo văn bản hành chính thông dụng</a:t>
+            </a:r>
+          </a:p>
+        </p:txBody>
+      </p:sp>
+      <p:sp>
+        <p:nvSpPr>
+          <p:cNvPr id="7" name="TextBox 6"/>
+          <p:cNvSpPr txBox="1"/>
+          <p:nvPr/>
+        </p:nvSpPr>
+        <p:spPr>
+          <a:xfrm>
+            <a:off x="1280160" y="4224528"/>
+            <a:ext cx="9418320" cy="640080"/>
+          </a:xfrm>
+          <a:prstGeom prst="rect">
+            <a:avLst/>
+          </a:prstGeom>
+          <a:noFill/>
+        </p:spPr>
+        <p:txBody>
+          <a:bodyPr wrap="square">
+            <a:spAutoFit/>
+          </a:bodyPr>
+          <a:lstStyle/>
+          <a:p>
+            <a:r>
+              <a:rPr sz="1450" i="1">
+                <a:solidFill>
+                  <a:srgbClr val="8A7A76"/>
+                </a:solidFill>
+                <a:latin typeface="Calibri"/>
+              </a:rPr>
+              <a:t>Năm loại văn bản dùng hằng ngày trong mọi cơ quan, tổ chức.</a:t>
+            </a:r>
+          </a:p>
+        </p:txBody>
+      </p:sp>
+      <p:sp>
+        <p:nvSpPr>
+          <p:cNvPr id="8" name="TextBox 7"/>
+          <p:cNvSpPr txBox="1"/>
+          <p:nvPr/>
+        </p:nvSpPr>
+        <p:spPr>
+          <a:xfrm>
+            <a:off x="502920" y="6419088"/>
+            <a:ext cx="7772400" cy="292608"/>
+          </a:xfrm>
+          <a:prstGeom prst="rect">
+            <a:avLst/>
+          </a:prstGeom>
+          <a:noFill/>
+        </p:spPr>
+        <p:txBody>
+          <a:bodyPr wrap="none">
+            <a:spAutoFit/>
+          </a:bodyPr>
+          <a:lstStyle/>
+          <a:p>
+            <a:r>
+              <a:rPr sz="900">
+                <a:solidFill>
+                  <a:srgbClr val="8A7A76"/>
+                </a:solidFill>
+                <a:latin typeface="Calibri"/>
+              </a:rPr>
+              <a:t>Je m'appelle Huong  •  GV. Đỗ Thùy Hương  •  EC1103</a:t>
+            </a:r>
+          </a:p>
+        </p:txBody>
+      </p:sp>
+      <p:sp>
+        <p:nvSpPr>
+          <p:cNvPr id="9" name="TextBox 8"/>
+          <p:cNvSpPr txBox="1"/>
+          <p:nvPr/>
+        </p:nvSpPr>
+        <p:spPr>
+          <a:xfrm>
+            <a:off x="9326880" y="6419088"/>
+            <a:ext cx="1920240" cy="292608"/>
+          </a:xfrm>
+          <a:prstGeom prst="rect">
+            <a:avLst/>
+          </a:prstGeom>
+          <a:noFill/>
+        </p:spPr>
+        <p:txBody>
+          <a:bodyPr wrap="none">
+            <a:spAutoFit/>
+          </a:bodyPr>
+          <a:lstStyle/>
+          <a:p>
+            <a:pPr algn="r"/>
+            <a:r>
+              <a:rPr sz="900">
+                <a:solidFill>
+                  <a:srgbClr val="8A7A76"/>
+                </a:solidFill>
+                <a:latin typeface="Calibri"/>
+              </a:rPr>
+              <a:t>Chương 5</a:t>
+            </a:r>
+          </a:p>
+        </p:txBody>
+      </p:sp>
+    </p:spTree>
+  </p:cSld>
+  <p:clrMapOvr>
+    <a:masterClrMapping/>
+  </p:clrMapOvr>
+</p:sld>
+</file>
+
+<file path=ppt/slides/slide12.xml><?xml version="1.0" encoding="utf-8"?>
+<p:sld xmlns:a="http://schemas.openxmlformats.org/drawingml/2006/main" xmlns:r="http://schemas.openxmlformats.org/officeDocument/2006/relationships" xmlns:p="http://schemas.openxmlformats.org/presentationml/2006/main">
+  <p:cSld name="Slide 9">
+    <p:bg>
+      <p:bgPr>
+        <a:solidFill>
+          <a:srgbClr val="FDFBF8"/>
+        </a:solidFill>
+      </p:bgPr>
+    </p:bg>
+    <p:spTree>
+      <p:nvGrpSpPr>
+        <p:cNvPr id="1" name=""/>
+        <p:cNvGrpSpPr/>
+        <p:nvPr/>
+      </p:nvGrpSpPr>
+      <p:grpSpPr>
+        <a:xfrm>
+          <a:off x="0" y="0"/>
+          <a:ext cx="0" cy="0"/>
+          <a:chOff x="0" y="0"/>
+          <a:chExt cx="0" cy="0"/>
+        </a:xfrm>
+      </p:grpSpPr>
+      <p:pic>
+        <p:nvPicPr>
+          <p:cNvPr id="2" name="Image 0" descr="/home/user/comdraft/assets/img/dau-huong.png">    </p:cNvPr>
+          <p:cNvPicPr>
+            <a:picLocks noChangeAspect="1"/>
+          </p:cNvPicPr>
+          <p:nvPr/>
+        </p:nvPicPr>
+        <p:blipFill>
+          <a:blip r:embed="rId1"/>
+          <a:stretch>
+            <a:fillRect/>
+          </a:stretch>
+        </p:blipFill>
+        <p:spPr>
+          <a:xfrm>
+            <a:off x="411480" y="6327648"/>
+            <a:ext cx="384048" cy="384048"/>
+          </a:xfrm>
+          <a:prstGeom prst="rect">
+            <a:avLst/>
+          </a:prstGeom>
+        </p:spPr>
+      </p:pic>
+      <p:sp>
+        <p:nvSpPr>
+          <p:cNvPr id="3" name="Text 0"/>
+          <p:cNvSpPr/>
+          <p:nvPr/>
+        </p:nvSpPr>
+        <p:spPr>
+          <a:xfrm>
+            <a:off x="868680" y="6355080"/>
+            <a:ext cx="7498080" cy="310896"/>
+          </a:xfrm>
+          <a:prstGeom prst="rect">
+            <a:avLst/>
+          </a:prstGeom>
+          <a:noFill/>
+          <a:ln/>
+        </p:spPr>
+        <p:txBody>
+          <a:bodyPr wrap="square" lIns="0" tIns="0" rIns="0" bIns="0" rtlCol="0" anchor="ctr"/>
+          <a:lstStyle/>
+          <a:p>
+            <a:pPr indent="0" marL="0">
+              <a:buNone/>
+            </a:pPr>
+            <a:r>
+              <a:rPr lang="en-US" sz="900" dirty="0">
+                <a:solidFill>
+                  <a:srgbClr val="8A7A76"/>
+                </a:solidFill>
+                <a:latin typeface="Calibri" pitchFamily="34" charset="0"/>
+                <a:ea typeface="Calibri" pitchFamily="34" charset="-122"/>
+                <a:cs typeface="Calibri" pitchFamily="34" charset="-120"/>
+              </a:rPr>
+              <a:t>Je m'appelle Huong  •  GV. Đỗ Thùy Hương  •  EC1103</a:t>
+            </a:r>
+            <a:endParaRPr lang="en-US" sz="900" dirty="0"/>
+          </a:p>
+        </p:txBody>
+      </p:sp>
+      <p:sp>
+        <p:nvSpPr>
+          <p:cNvPr id="4" name="Text 1"/>
+          <p:cNvSpPr/>
+          <p:nvPr/>
+        </p:nvSpPr>
+        <p:spPr>
+          <a:xfrm>
+            <a:off x="8503920" y="6355080"/>
+            <a:ext cx="2743200" cy="310896"/>
+          </a:xfrm>
+          <a:prstGeom prst="rect">
+            <a:avLst/>
+          </a:prstGeom>
+          <a:noFill/>
+          <a:ln/>
+        </p:spPr>
+        <p:txBody>
+          <a:bodyPr wrap="square" lIns="0" tIns="0" rIns="0" bIns="0" rtlCol="0" anchor="ctr"/>
+          <a:lstStyle/>
+          <a:p>
+            <a:pPr algn="r" indent="0" marL="0">
+              <a:buNone/>
+            </a:pPr>
+            <a:r>
+              <a:rPr lang="en-US" sz="900" dirty="0">
+                <a:solidFill>
+                  <a:srgbClr val="8A7A76"/>
+                </a:solidFill>
+                <a:latin typeface="Calibri" pitchFamily="34" charset="0"/>
+                <a:ea typeface="Calibri" pitchFamily="34" charset="-122"/>
+                <a:cs typeface="Calibri" pitchFamily="34" charset="-120"/>
+              </a:rPr>
+              <a:t>Chương 5</a:t>
+            </a:r>
+            <a:endParaRPr lang="en-US" sz="900" dirty="0"/>
+          </a:p>
+        </p:txBody>
+      </p:sp>
+      <p:sp>
+        <p:nvSpPr>
+          <p:cNvPr id="5" name="Shape 2"/>
+          <p:cNvSpPr/>
+          <p:nvPr/>
+        </p:nvSpPr>
+        <p:spPr>
+          <a:xfrm>
+            <a:off x="11430000" y="6327648"/>
+            <a:ext cx="365760" cy="365760"/>
+          </a:xfrm>
+          <a:prstGeom prst="ellipse">
+            <a:avLst/>
+          </a:prstGeom>
+          <a:solidFill>
+            <a:srgbClr val="DC756A"/>
+          </a:solidFill>
+          <a:ln/>
+        </p:spPr>
+        <p:txBody>
+          <a:bodyPr/>
+          <a:p/>
+        </p:txBody>
+      </p:sp>
+      <p:sp>
+        <p:nvSpPr>
+          <p:cNvPr id="6" name="Text 3"/>
+          <p:cNvSpPr/>
+          <p:nvPr/>
+        </p:nvSpPr>
+        <p:spPr>
+          <a:xfrm>
+            <a:off x="11430000" y="6327648"/>
+            <a:ext cx="365760" cy="365760"/>
+          </a:xfrm>
+          <a:prstGeom prst="rect">
+            <a:avLst/>
+          </a:prstGeom>
+          <a:noFill/>
+          <a:ln/>
+        </p:spPr>
+        <p:txBody>
+          <a:bodyPr wrap="square" lIns="0" tIns="0" rIns="0" bIns="0" rtlCol="0" anchor="ctr"/>
+          <a:lstStyle/>
+          <a:p>
+            <a:pPr algn="ctr" indent="0" marL="0">
+              <a:buNone/>
+            </a:pPr>
+            <a:r>
+              <a:rPr lang="en-US" sz="1000" b="1" dirty="0">
+                <a:solidFill>
+                  <a:srgbClr val="FFFFFF"/>
+                </a:solidFill>
+                <a:latin typeface="Calibri" pitchFamily="34" charset="0"/>
+                <a:ea typeface="Calibri" pitchFamily="34" charset="-122"/>
+                <a:cs typeface="Calibri" pitchFamily="34" charset="-120"/>
+              </a:rPr>
+              <a:t>9</a:t>
+            </a:r>
+            <a:endParaRPr lang="en-US" sz="1000" dirty="0"/>
+          </a:p>
+        </p:txBody>
+      </p:sp>
+      <p:sp>
+        <p:nvSpPr>
+          <p:cNvPr id="7" name="Text 4"/>
+          <p:cNvSpPr/>
+          <p:nvPr/>
+        </p:nvSpPr>
+        <p:spPr>
+          <a:xfrm>
+            <a:off x="502920" y="310896"/>
+            <a:ext cx="11155680" cy="274320"/>
+          </a:xfrm>
+          <a:prstGeom prst="rect">
+            <a:avLst/>
+          </a:prstGeom>
+          <a:noFill/>
+          <a:ln/>
+        </p:spPr>
+        <p:txBody>
+          <a:bodyPr wrap="square" lIns="0" tIns="0" rIns="0" bIns="0" rtlCol="0" anchor="ctr"/>
+          <a:lstStyle/>
+          <a:p>
+            <a:pPr indent="0" marL="0">
+              <a:buNone/>
+            </a:pPr>
+            <a:r>
+              <a:rPr lang="en-US" sz="1100" b="1" spc="300" kern="0" dirty="0">
+                <a:solidFill>
+                  <a:srgbClr val="DC756A"/>
+                </a:solidFill>
+                <a:latin typeface="Calibri" pitchFamily="34" charset="0"/>
+                <a:ea typeface="Calibri" pitchFamily="34" charset="-122"/>
+                <a:cs typeface="Calibri" pitchFamily="34" charset="-120"/>
+              </a:rPr>
+              <a:t>5.3</a:t>
+            </a:r>
+            <a:endParaRPr lang="en-US" sz="1100" dirty="0"/>
+          </a:p>
+        </p:txBody>
+      </p:sp>
+      <p:sp>
+        <p:nvSpPr>
+          <p:cNvPr id="8" name="Text 5"/>
+          <p:cNvSpPr/>
+          <p:nvPr/>
+        </p:nvSpPr>
+        <p:spPr>
+          <a:xfrm>
+            <a:off x="502920" y="576072"/>
+            <a:ext cx="11155680" cy="713232"/>
+          </a:xfrm>
+          <a:prstGeom prst="rect">
+            <a:avLst/>
+          </a:prstGeom>
+          <a:noFill/>
+          <a:ln/>
+        </p:spPr>
+        <p:txBody>
+          <a:bodyPr wrap="square" lIns="0" tIns="0" rIns="0" bIns="0" rtlCol="0" anchor="ctr"/>
+          <a:lstStyle/>
+          <a:p>
+            <a:pPr indent="0" marL="0">
+              <a:buNone/>
+            </a:pPr>
+            <a:r>
+              <a:rPr lang="en-US" sz="2700" b="1" dirty="0">
+                <a:solidFill>
+                  <a:srgbClr val="AC4D33"/>
+                </a:solidFill>
+                <a:latin typeface="Cambria" pitchFamily="34" charset="0"/>
+                <a:ea typeface="Cambria" pitchFamily="34" charset="-122"/>
+                <a:cs typeface="Cambria" pitchFamily="34" charset="-120"/>
+              </a:rPr>
+              <a:t>Năm văn bản hành chính thông dụng</a:t>
+            </a:r>
+            <a:endParaRPr lang="en-US" sz="2700" dirty="0"/>
+          </a:p>
+        </p:txBody>
+      </p:sp>
+      <p:pic>
+        <p:nvPicPr>
+          <p:cNvPr id="9" name="Picture 8" descr="c5-chuoi-van-ban-nt.png"/>
+          <p:cNvPicPr>
+            <a:picLocks noChangeAspect="1"/>
+          </p:cNvPicPr>
+          <p:nvPr/>
+        </p:nvPicPr>
+        <p:blipFill>
+          <a:blip r:embed="rId4"/>
+          <a:stretch>
+            <a:fillRect/>
+          </a:stretch>
+        </p:blipFill>
+        <p:spPr>
+          <a:xfrm>
+            <a:off x="981171" y="2365438"/>
+            <a:ext cx="10229353" cy="2940939"/>
+          </a:xfrm>
+          <a:prstGeom prst="rect">
+            <a:avLst/>
+          </a:prstGeom>
+        </p:spPr>
+      </p:pic>
+      <p:sp>
+        <p:nvSpPr>
+          <p:cNvPr id="10" name="TextBox 9"/>
+          <p:cNvSpPr txBox="1"/>
+          <p:nvPr/>
+        </p:nvSpPr>
+        <p:spPr>
+          <a:xfrm>
+            <a:off x="548640" y="5379529"/>
+            <a:ext cx="11109960" cy="310896"/>
+          </a:xfrm>
+          <a:prstGeom prst="rect">
+            <a:avLst/>
+          </a:prstGeom>
+          <a:noFill/>
+        </p:spPr>
+        <p:txBody>
+          <a:bodyPr wrap="square">
+            <a:spAutoFit/>
+          </a:bodyPr>
+          <a:lstStyle/>
+          <a:p>
+            <a:pPr algn="ctr"/>
+            <a:r>
+              <a:rPr sz="1150" i="1">
+                <a:solidFill>
+                  <a:srgbClr val="8A7A76"/>
+                </a:solidFill>
+                <a:latin typeface="Calibri"/>
+              </a:rPr>
+              <a:t>Chuỗi văn bản của một thương vụ — sinh viên sẽ soạn lại đúng chuỗi này trong phần thực hành.</a:t>
+            </a:r>
+          </a:p>
+        </p:txBody>
+      </p:sp>
+    </p:spTree>
+  </p:cSld>
+  <p:clrMapOvr>
+    <a:masterClrMapping/>
+  </p:clrMapOvr>
+</p:sld>
+</file>
+
+<file path=ppt/slides/slide13.xml><?xml version="1.0" encoding="utf-8"?>
 <p:sld xmlns:a="http://schemas.openxmlformats.org/drawingml/2006/main" xmlns:r="http://schemas.openxmlformats.org/officeDocument/2006/relationships" xmlns:p="http://schemas.openxmlformats.org/presentationml/2006/main">
   <p:cSld name="Slide 10">
     <p:bg>
@@ -3161,7 +4412,7 @@
       </p:grpSpPr>
       <p:pic>
         <p:nvPicPr>
-          <p:cNvPr id="2" name="Image 0" descr="assets/logo_tron.png">    </p:cNvPr>
+          <p:cNvPr id="2" name="Image 0" descr="/home/user/comdraft/assets/img/dau-huong.png">    </p:cNvPr>
           <p:cNvPicPr>
             <a:picLocks noChangeAspect="1"/>
           </p:cNvPicPr>
@@ -3758,7 +5009,7 @@
 </p:sld>
 </file>
 
-<file path=ppt/slides/slide11.xml><?xml version="1.0" encoding="utf-8"?>
+<file path=ppt/slides/slide14.xml><?xml version="1.0" encoding="utf-8"?>
 <p:sld xmlns:a="http://schemas.openxmlformats.org/drawingml/2006/main" xmlns:r="http://schemas.openxmlformats.org/officeDocument/2006/relationships" xmlns:p="http://schemas.openxmlformats.org/presentationml/2006/main">
   <p:cSld name="Slide 11">
     <p:bg>
@@ -3784,7 +5035,7 @@
       </p:grpSpPr>
       <p:pic>
         <p:nvPicPr>
-          <p:cNvPr id="2" name="Image 0" descr="assets/logo_tron.png">    </p:cNvPr>
+          <p:cNvPr id="2" name="Image 0" descr="/home/user/comdraft/assets/img/dau-huong.png">    </p:cNvPr>
           <p:cNvPicPr>
             <a:picLocks noChangeAspect="1"/>
           </p:cNvPicPr>
@@ -4294,7 +5545,328 @@
 </p:sld>
 </file>
 
-<file path=ppt/slides/slide12.xml><?xml version="1.0" encoding="utf-8"?>
+<file path=ppt/slides/slide15.xml><?xml version="1.0" encoding="utf-8"?>
+<p:sld xmlns:a="http://schemas.openxmlformats.org/drawingml/2006/main" xmlns:p="http://schemas.openxmlformats.org/presentationml/2006/main" xmlns:r="http://schemas.openxmlformats.org/officeDocument/2006/relationships">
+  <p:cSld>
+    <p:spTree>
+      <p:nvGrpSpPr>
+        <p:cNvPr id="1" name=""/>
+        <p:cNvGrpSpPr/>
+        <p:nvPr/>
+      </p:nvGrpSpPr>
+      <p:grpSpPr/>
+      <p:sp>
+        <p:nvSpPr>
+          <p:cNvPr id="2" name="Rectangle 1"/>
+          <p:cNvSpPr/>
+          <p:nvPr/>
+        </p:nvSpPr>
+        <p:spPr>
+          <a:xfrm>
+            <a:off x="0" y="0"/>
+            <a:ext cx="12191695" cy="6858000"/>
+          </a:xfrm>
+          <a:prstGeom prst="rect">
+            <a:avLst/>
+          </a:prstGeom>
+          <a:solidFill>
+            <a:srgbClr val="FDFBF8"/>
+          </a:solidFill>
+          <a:ln>
+            <a:noFill/>
+          </a:ln>
+          <a:effectLst/>
+        </p:spPr>
+        <p:style>
+          <a:lnRef idx="1">
+            <a:schemeClr val="accent1"/>
+          </a:lnRef>
+          <a:fillRef idx="3">
+            <a:schemeClr val="accent1"/>
+          </a:fillRef>
+          <a:effectRef idx="2">
+            <a:schemeClr val="accent1"/>
+          </a:effectRef>
+          <a:fontRef idx="minor">
+            <a:schemeClr val="lt1"/>
+          </a:fontRef>
+        </p:style>
+        <p:txBody>
+          <a:bodyPr rtlCol="0" anchor="ctr"/>
+          <a:lstStyle/>
+          <a:p>
+            <a:pPr algn="ctr"/>
+          </a:p>
+        </p:txBody>
+      </p:sp>
+      <p:sp>
+        <p:nvSpPr>
+          <p:cNvPr id="3" name="Rectangle 2"/>
+          <p:cNvSpPr/>
+          <p:nvPr/>
+        </p:nvSpPr>
+        <p:spPr>
+          <a:xfrm>
+            <a:off x="0" y="2103120"/>
+            <a:ext cx="12191695" cy="2743200"/>
+          </a:xfrm>
+          <a:prstGeom prst="rect">
+            <a:avLst/>
+          </a:prstGeom>
+          <a:solidFill>
+            <a:srgbClr val="FDF1EF"/>
+          </a:solidFill>
+          <a:ln>
+            <a:noFill/>
+          </a:ln>
+          <a:effectLst/>
+        </p:spPr>
+        <p:style>
+          <a:lnRef idx="1">
+            <a:schemeClr val="accent1"/>
+          </a:lnRef>
+          <a:fillRef idx="3">
+            <a:schemeClr val="accent1"/>
+          </a:fillRef>
+          <a:effectRef idx="2">
+            <a:schemeClr val="accent1"/>
+          </a:effectRef>
+          <a:fontRef idx="minor">
+            <a:schemeClr val="lt1"/>
+          </a:fontRef>
+        </p:style>
+        <p:txBody>
+          <a:bodyPr rtlCol="0" anchor="ctr"/>
+          <a:lstStyle/>
+          <a:p>
+            <a:pPr algn="ctr"/>
+          </a:p>
+        </p:txBody>
+      </p:sp>
+      <p:sp>
+        <p:nvSpPr>
+          <p:cNvPr id="4" name="Rectangle 3"/>
+          <p:cNvSpPr/>
+          <p:nvPr/>
+        </p:nvSpPr>
+        <p:spPr>
+          <a:xfrm>
+            <a:off x="0" y="0"/>
+            <a:ext cx="274320" cy="6858000"/>
+          </a:xfrm>
+          <a:prstGeom prst="rect">
+            <a:avLst/>
+          </a:prstGeom>
+          <a:solidFill>
+            <a:srgbClr val="DC756A"/>
+          </a:solidFill>
+          <a:ln>
+            <a:noFill/>
+          </a:ln>
+          <a:effectLst/>
+        </p:spPr>
+        <p:style>
+          <a:lnRef idx="1">
+            <a:schemeClr val="accent1"/>
+          </a:lnRef>
+          <a:fillRef idx="3">
+            <a:schemeClr val="accent1"/>
+          </a:fillRef>
+          <a:effectRef idx="2">
+            <a:schemeClr val="accent1"/>
+          </a:effectRef>
+          <a:fontRef idx="minor">
+            <a:schemeClr val="lt1"/>
+          </a:fontRef>
+        </p:style>
+        <p:txBody>
+          <a:bodyPr rtlCol="0" anchor="ctr"/>
+          <a:lstStyle/>
+          <a:p>
+            <a:pPr algn="ctr"/>
+          </a:p>
+        </p:txBody>
+      </p:sp>
+      <p:sp>
+        <p:nvSpPr>
+          <p:cNvPr id="5" name="TextBox 4"/>
+          <p:cNvSpPr txBox="1"/>
+          <p:nvPr/>
+        </p:nvSpPr>
+        <p:spPr>
+          <a:xfrm>
+            <a:off x="1280160" y="2377440"/>
+            <a:ext cx="9692640" cy="411480"/>
+          </a:xfrm>
+          <a:prstGeom prst="rect">
+            <a:avLst/>
+          </a:prstGeom>
+          <a:noFill/>
+        </p:spPr>
+        <p:txBody>
+          <a:bodyPr wrap="none">
+            <a:spAutoFit/>
+          </a:bodyPr>
+          <a:lstStyle/>
+          <a:p>
+            <a:r>
+              <a:rPr sz="1500" b="1">
+                <a:solidFill>
+                  <a:srgbClr val="DC756A"/>
+                </a:solidFill>
+                <a:latin typeface="Calibri"/>
+              </a:rPr>
+              <a:t>MỤC 5.4</a:t>
+            </a:r>
+          </a:p>
+        </p:txBody>
+      </p:sp>
+      <p:sp>
+        <p:nvSpPr>
+          <p:cNvPr id="6" name="TextBox 5"/>
+          <p:cNvSpPr txBox="1"/>
+          <p:nvPr/>
+        </p:nvSpPr>
+        <p:spPr>
+          <a:xfrm>
+            <a:off x="1280160" y="2788920"/>
+            <a:ext cx="9601200" cy="1371600"/>
+          </a:xfrm>
+          <a:prstGeom prst="rect">
+            <a:avLst/>
+          </a:prstGeom>
+          <a:noFill/>
+        </p:spPr>
+        <p:txBody>
+          <a:bodyPr wrap="square">
+            <a:spAutoFit/>
+          </a:bodyPr>
+          <a:lstStyle/>
+          <a:p>
+            <a:r>
+              <a:rPr sz="3800" b="1">
+                <a:solidFill>
+                  <a:srgbClr val="AC4D33"/>
+                </a:solidFill>
+                <a:latin typeface="Cambria"/>
+              </a:rPr>
+              <a:t>Soạn thảo văn bản thương mại</a:t>
+            </a:r>
+          </a:p>
+        </p:txBody>
+      </p:sp>
+      <p:sp>
+        <p:nvSpPr>
+          <p:cNvPr id="7" name="TextBox 6"/>
+          <p:cNvSpPr txBox="1"/>
+          <p:nvPr/>
+        </p:nvSpPr>
+        <p:spPr>
+          <a:xfrm>
+            <a:off x="1280160" y="4224528"/>
+            <a:ext cx="9418320" cy="640080"/>
+          </a:xfrm>
+          <a:prstGeom prst="rect">
+            <a:avLst/>
+          </a:prstGeom>
+          <a:noFill/>
+        </p:spPr>
+        <p:txBody>
+          <a:bodyPr wrap="square">
+            <a:spAutoFit/>
+          </a:bodyPr>
+          <a:lstStyle/>
+          <a:p>
+            <a:r>
+              <a:rPr sz="1450" i="1">
+                <a:solidFill>
+                  <a:srgbClr val="8A7A76"/>
+                </a:solidFill>
+                <a:latin typeface="Calibri"/>
+              </a:rPr>
+              <a:t>Thư tín, báo giá và hợp đồng — bộ hồ sơ đưa một thương vụ đi đến đích.</a:t>
+            </a:r>
+          </a:p>
+        </p:txBody>
+      </p:sp>
+      <p:sp>
+        <p:nvSpPr>
+          <p:cNvPr id="8" name="TextBox 7"/>
+          <p:cNvSpPr txBox="1"/>
+          <p:nvPr/>
+        </p:nvSpPr>
+        <p:spPr>
+          <a:xfrm>
+            <a:off x="502920" y="6419088"/>
+            <a:ext cx="7772400" cy="292608"/>
+          </a:xfrm>
+          <a:prstGeom prst="rect">
+            <a:avLst/>
+          </a:prstGeom>
+          <a:noFill/>
+        </p:spPr>
+        <p:txBody>
+          <a:bodyPr wrap="none">
+            <a:spAutoFit/>
+          </a:bodyPr>
+          <a:lstStyle/>
+          <a:p>
+            <a:r>
+              <a:rPr sz="900">
+                <a:solidFill>
+                  <a:srgbClr val="8A7A76"/>
+                </a:solidFill>
+                <a:latin typeface="Calibri"/>
+              </a:rPr>
+              <a:t>Je m'appelle Huong  •  GV. Đỗ Thùy Hương  •  EC1103</a:t>
+            </a:r>
+          </a:p>
+        </p:txBody>
+      </p:sp>
+      <p:sp>
+        <p:nvSpPr>
+          <p:cNvPr id="9" name="TextBox 8"/>
+          <p:cNvSpPr txBox="1"/>
+          <p:nvPr/>
+        </p:nvSpPr>
+        <p:spPr>
+          <a:xfrm>
+            <a:off x="9326880" y="6419088"/>
+            <a:ext cx="1920240" cy="292608"/>
+          </a:xfrm>
+          <a:prstGeom prst="rect">
+            <a:avLst/>
+          </a:prstGeom>
+          <a:noFill/>
+        </p:spPr>
+        <p:txBody>
+          <a:bodyPr wrap="none">
+            <a:spAutoFit/>
+          </a:bodyPr>
+          <a:lstStyle/>
+          <a:p>
+            <a:pPr algn="r"/>
+            <a:r>
+              <a:rPr sz="900">
+                <a:solidFill>
+                  <a:srgbClr val="8A7A76"/>
+                </a:solidFill>
+                <a:latin typeface="Calibri"/>
+              </a:rPr>
+              <a:t>Chương 5</a:t>
+            </a:r>
+          </a:p>
+        </p:txBody>
+      </p:sp>
+    </p:spTree>
+  </p:cSld>
+  <p:clrMapOvr>
+    <a:masterClrMapping/>
+  </p:clrMapOvr>
+</p:sld>
+</file>
+
+<file path=ppt/slides/slide16.xml><?xml version="1.0" encoding="utf-8"?>
 <p:sld xmlns:a="http://schemas.openxmlformats.org/drawingml/2006/main" xmlns:r="http://schemas.openxmlformats.org/officeDocument/2006/relationships" xmlns:p="http://schemas.openxmlformats.org/presentationml/2006/main">
   <p:cSld name="Slide 12">
     <p:bg>
@@ -4320,7 +5892,7 @@
       </p:grpSpPr>
       <p:pic>
         <p:nvPicPr>
-          <p:cNvPr id="2" name="Image 0" descr="assets/logo_tron.png">    </p:cNvPr>
+          <p:cNvPr id="2" name="Image 0" descr="/home/user/comdraft/assets/img/dau-huong.png">    </p:cNvPr>
           <p:cNvPicPr>
             <a:picLocks noChangeAspect="1"/>
           </p:cNvPicPr>
@@ -4917,7 +6489,7 @@
 </p:sld>
 </file>
 
-<file path=ppt/slides/slide13.xml><?xml version="1.0" encoding="utf-8"?>
+<file path=ppt/slides/slide17.xml><?xml version="1.0" encoding="utf-8"?>
 <p:sld xmlns:a="http://schemas.openxmlformats.org/drawingml/2006/main" xmlns:r="http://schemas.openxmlformats.org/officeDocument/2006/relationships" xmlns:p="http://schemas.openxmlformats.org/presentationml/2006/main">
   <p:cSld name="Slide 13">
     <p:bg>
@@ -4943,7 +6515,7 @@
       </p:grpSpPr>
       <p:pic>
         <p:nvPicPr>
-          <p:cNvPr id="2" name="Image 0" descr="assets/logo_tron.png">    </p:cNvPr>
+          <p:cNvPr id="2" name="Image 0" descr="/home/user/comdraft/assets/img/dau-huong.png">    </p:cNvPr>
           <p:cNvPicPr>
             <a:picLocks noChangeAspect="1"/>
           </p:cNvPicPr>
@@ -5453,7 +7025,7 @@
 </p:sld>
 </file>
 
-<file path=ppt/slides/slide14.xml><?xml version="1.0" encoding="utf-8"?>
+<file path=ppt/slides/slide18.xml><?xml version="1.0" encoding="utf-8"?>
 <p:sld xmlns:a="http://schemas.openxmlformats.org/drawingml/2006/main" xmlns:r="http://schemas.openxmlformats.org/officeDocument/2006/relationships" xmlns:p="http://schemas.openxmlformats.org/presentationml/2006/main">
   <p:cSld name="Slide 14">
     <p:bg>
@@ -5479,7 +7051,7 @@
       </p:grpSpPr>
       <p:pic>
         <p:nvPicPr>
-          <p:cNvPr id="2" name="Image 0" descr="assets/logo_tron.png">    </p:cNvPr>
+          <p:cNvPr id="2" name="Image 0" descr="/home/user/comdraft/assets/img/dau-huong.png">    </p:cNvPr>
           <p:cNvPicPr>
             <a:picLocks noChangeAspect="1"/>
           </p:cNvPicPr>
@@ -6184,7 +7756,7 @@
 </p:sld>
 </file>
 
-<file path=ppt/slides/slide15.xml><?xml version="1.0" encoding="utf-8"?>
+<file path=ppt/slides/slide19.xml><?xml version="1.0" encoding="utf-8"?>
 <p:sld xmlns:a="http://schemas.openxmlformats.org/drawingml/2006/main" xmlns:r="http://schemas.openxmlformats.org/officeDocument/2006/relationships" xmlns:p="http://schemas.openxmlformats.org/presentationml/2006/main">
   <p:cSld name="Slide 15">
     <p:bg>
@@ -6210,7 +7782,7 @@
       </p:grpSpPr>
       <p:pic>
         <p:nvPicPr>
-          <p:cNvPr id="2" name="Image 0" descr="assets/logo_tron.png">    </p:cNvPr>
+          <p:cNvPr id="2" name="Image 0" descr="/home/user/comdraft/assets/img/dau-huong.png">    </p:cNvPr>
           <p:cNvPicPr>
             <a:picLocks noChangeAspect="1"/>
           </p:cNvPicPr>
@@ -6709,2226 +8281,6 @@
               <a:t>Thư tín đạt 5C, báo giá có hiệu lực rõ, hợp đồng đủ điều khoản — bộ ba hợp đồng, nghiệm thu, thanh lý khép kín thương vụ.</a:t>
             </a:r>
             <a:endParaRPr lang="en-US" sz="1500" dirty="0"/>
-          </a:p>
-        </p:txBody>
-      </p:sp>
-    </p:spTree>
-  </p:cSld>
-  <p:clrMapOvr>
-    <a:masterClrMapping/>
-  </p:clrMapOvr>
-</p:sld>
-</file>
-
-<file path=ppt/slides/slide16.xml><?xml version="1.0" encoding="utf-8"?>
-<p:sld xmlns:a="http://schemas.openxmlformats.org/drawingml/2006/main" xmlns:r="http://schemas.openxmlformats.org/officeDocument/2006/relationships" xmlns:p="http://schemas.openxmlformats.org/presentationml/2006/main">
-  <p:cSld name="Slide 16">
-    <p:bg>
-      <p:bgPr>
-        <a:solidFill>
-          <a:srgbClr val="FDFBF8"/>
-        </a:solidFill>
-      </p:bgPr>
-    </p:bg>
-    <p:spTree>
-      <p:nvGrpSpPr>
-        <p:cNvPr id="1" name=""/>
-        <p:cNvGrpSpPr/>
-        <p:nvPr/>
-      </p:nvGrpSpPr>
-      <p:grpSpPr>
-        <a:xfrm>
-          <a:off x="0" y="0"/>
-          <a:ext cx="0" cy="0"/>
-          <a:chOff x="0" y="0"/>
-          <a:chExt cx="0" cy="0"/>
-        </a:xfrm>
-      </p:grpSpPr>
-      <p:pic>
-        <p:nvPicPr>
-          <p:cNvPr id="2" name="Image 0" descr="assets/logo_tron.png">    </p:cNvPr>
-          <p:cNvPicPr>
-            <a:picLocks noChangeAspect="1"/>
-          </p:cNvPicPr>
-          <p:nvPr/>
-        </p:nvPicPr>
-        <p:blipFill>
-          <a:blip r:embed="rId1"/>
-          <a:stretch>
-            <a:fillRect/>
-          </a:stretch>
-        </p:blipFill>
-        <p:spPr>
-          <a:xfrm>
-            <a:off x="411480" y="6327648"/>
-            <a:ext cx="384048" cy="384048"/>
-          </a:xfrm>
-          <a:prstGeom prst="rect">
-            <a:avLst/>
-          </a:prstGeom>
-        </p:spPr>
-      </p:pic>
-      <p:sp>
-        <p:nvSpPr>
-          <p:cNvPr id="3" name="Text 0"/>
-          <p:cNvSpPr/>
-          <p:nvPr/>
-        </p:nvSpPr>
-        <p:spPr>
-          <a:xfrm>
-            <a:off x="868680" y="6355080"/>
-            <a:ext cx="7498080" cy="310896"/>
-          </a:xfrm>
-          <a:prstGeom prst="rect">
-            <a:avLst/>
-          </a:prstGeom>
-          <a:noFill/>
-          <a:ln/>
-        </p:spPr>
-        <p:txBody>
-          <a:bodyPr wrap="square" lIns="0" tIns="0" rIns="0" bIns="0" rtlCol="0" anchor="ctr"/>
-          <a:lstStyle/>
-          <a:p>
-            <a:pPr indent="0" marL="0">
-              <a:buNone/>
-            </a:pPr>
-            <a:r>
-              <a:rPr lang="en-US" sz="900" dirty="0">
-                <a:solidFill>
-                  <a:srgbClr val="8A7A76"/>
-                </a:solidFill>
-                <a:latin typeface="Calibri" pitchFamily="34" charset="0"/>
-                <a:ea typeface="Calibri" pitchFamily="34" charset="-122"/>
-                <a:cs typeface="Calibri" pitchFamily="34" charset="-120"/>
-              </a:rPr>
-              <a:t>Je m'appelle Huong  •  GV. Đỗ Thùy Hương  •  EC1103</a:t>
-            </a:r>
-            <a:endParaRPr lang="en-US" sz="900" dirty="0"/>
-          </a:p>
-        </p:txBody>
-      </p:sp>
-      <p:sp>
-        <p:nvSpPr>
-          <p:cNvPr id="4" name="Text 1"/>
-          <p:cNvSpPr/>
-          <p:nvPr/>
-        </p:nvSpPr>
-        <p:spPr>
-          <a:xfrm>
-            <a:off x="8503920" y="6355080"/>
-            <a:ext cx="2743200" cy="310896"/>
-          </a:xfrm>
-          <a:prstGeom prst="rect">
-            <a:avLst/>
-          </a:prstGeom>
-          <a:noFill/>
-          <a:ln/>
-        </p:spPr>
-        <p:txBody>
-          <a:bodyPr wrap="square" lIns="0" tIns="0" rIns="0" bIns="0" rtlCol="0" anchor="ctr"/>
-          <a:lstStyle/>
-          <a:p>
-            <a:pPr algn="r" indent="0" marL="0">
-              <a:buNone/>
-            </a:pPr>
-            <a:r>
-              <a:rPr lang="en-US" sz="900" dirty="0">
-                <a:solidFill>
-                  <a:srgbClr val="8A7A76"/>
-                </a:solidFill>
-                <a:latin typeface="Calibri" pitchFamily="34" charset="0"/>
-                <a:ea typeface="Calibri" pitchFamily="34" charset="-122"/>
-                <a:cs typeface="Calibri" pitchFamily="34" charset="-120"/>
-              </a:rPr>
-              <a:t>Chương 5</a:t>
-            </a:r>
-            <a:endParaRPr lang="en-US" sz="900" dirty="0"/>
-          </a:p>
-        </p:txBody>
-      </p:sp>
-      <p:sp>
-        <p:nvSpPr>
-          <p:cNvPr id="5" name="Shape 2"/>
-          <p:cNvSpPr/>
-          <p:nvPr/>
-        </p:nvSpPr>
-        <p:spPr>
-          <a:xfrm>
-            <a:off x="11430000" y="6327648"/>
-            <a:ext cx="365760" cy="365760"/>
-          </a:xfrm>
-          <a:prstGeom prst="ellipse">
-            <a:avLst/>
-          </a:prstGeom>
-          <a:solidFill>
-            <a:srgbClr val="DC756A"/>
-          </a:solidFill>
-          <a:ln/>
-        </p:spPr>
-        <p:txBody>
-          <a:bodyPr/>
-          <a:p/>
-        </p:txBody>
-      </p:sp>
-      <p:sp>
-        <p:nvSpPr>
-          <p:cNvPr id="6" name="Text 3"/>
-          <p:cNvSpPr/>
-          <p:nvPr/>
-        </p:nvSpPr>
-        <p:spPr>
-          <a:xfrm>
-            <a:off x="11430000" y="6327648"/>
-            <a:ext cx="365760" cy="365760"/>
-          </a:xfrm>
-          <a:prstGeom prst="rect">
-            <a:avLst/>
-          </a:prstGeom>
-          <a:noFill/>
-          <a:ln/>
-        </p:spPr>
-        <p:txBody>
-          <a:bodyPr wrap="square" lIns="0" tIns="0" rIns="0" bIns="0" rtlCol="0" anchor="ctr"/>
-          <a:lstStyle/>
-          <a:p>
-            <a:pPr algn="ctr" indent="0" marL="0">
-              <a:buNone/>
-            </a:pPr>
-            <a:r>
-              <a:rPr lang="en-US" sz="1000" b="1" dirty="0">
-                <a:solidFill>
-                  <a:srgbClr val="FFFFFF"/>
-                </a:solidFill>
-                <a:latin typeface="Calibri" pitchFamily="34" charset="0"/>
-                <a:ea typeface="Calibri" pitchFamily="34" charset="-122"/>
-                <a:cs typeface="Calibri" pitchFamily="34" charset="-120"/>
-              </a:rPr>
-              <a:t>16</a:t>
-            </a:r>
-            <a:endParaRPr lang="en-US" sz="1000" dirty="0"/>
-          </a:p>
-        </p:txBody>
-      </p:sp>
-      <p:sp>
-        <p:nvSpPr>
-          <p:cNvPr id="7" name="Text 4"/>
-          <p:cNvSpPr/>
-          <p:nvPr/>
-        </p:nvSpPr>
-        <p:spPr>
-          <a:xfrm>
-            <a:off x="502920" y="310896"/>
-            <a:ext cx="11155680" cy="274320"/>
-          </a:xfrm>
-          <a:prstGeom prst="rect">
-            <a:avLst/>
-          </a:prstGeom>
-          <a:noFill/>
-          <a:ln/>
-        </p:spPr>
-        <p:txBody>
-          <a:bodyPr wrap="square" lIns="0" tIns="0" rIns="0" bIns="0" rtlCol="0" anchor="ctr"/>
-          <a:lstStyle/>
-          <a:p>
-            <a:pPr indent="0" marL="0">
-              <a:buNone/>
-            </a:pPr>
-            <a:r>
-              <a:rPr lang="en-US" sz="1100" b="1" spc="300" kern="0" dirty="0">
-                <a:solidFill>
-                  <a:srgbClr val="DC756A"/>
-                </a:solidFill>
-                <a:latin typeface="Calibri" pitchFamily="34" charset="0"/>
-                <a:ea typeface="Calibri" pitchFamily="34" charset="-122"/>
-                <a:cs typeface="Calibri" pitchFamily="34" charset="-120"/>
-              </a:rPr>
-              <a:t>ÔN TẬP &amp; CHUẨN BỊ</a:t>
-            </a:r>
-            <a:endParaRPr lang="en-US" sz="1100" dirty="0"/>
-          </a:p>
-        </p:txBody>
-      </p:sp>
-      <p:sp>
-        <p:nvSpPr>
-          <p:cNvPr id="8" name="Text 5"/>
-          <p:cNvSpPr/>
-          <p:nvPr/>
-        </p:nvSpPr>
-        <p:spPr>
-          <a:xfrm>
-            <a:off x="502920" y="576072"/>
-            <a:ext cx="11155680" cy="713232"/>
-          </a:xfrm>
-          <a:prstGeom prst="rect">
-            <a:avLst/>
-          </a:prstGeom>
-          <a:noFill/>
-          <a:ln/>
-        </p:spPr>
-        <p:txBody>
-          <a:bodyPr wrap="square" lIns="0" tIns="0" rIns="0" bIns="0" rtlCol="0" anchor="ctr"/>
-          <a:lstStyle/>
-          <a:p>
-            <a:pPr indent="0" marL="0">
-              <a:buNone/>
-            </a:pPr>
-            <a:r>
-              <a:rPr lang="en-US" sz="2700" b="1" dirty="0">
-                <a:solidFill>
-                  <a:srgbClr val="AC4D33"/>
-                </a:solidFill>
-                <a:latin typeface="Cambria" pitchFamily="34" charset="0"/>
-                <a:ea typeface="Cambria" pitchFamily="34" charset="-122"/>
-                <a:cs typeface="Cambria" pitchFamily="34" charset="-120"/>
-              </a:rPr>
-              <a:t>Câu hỏi ôn tập</a:t>
-            </a:r>
-            <a:endParaRPr lang="en-US" sz="2700" dirty="0"/>
-          </a:p>
-        </p:txBody>
-      </p:sp>
-      <p:sp>
-        <p:nvSpPr>
-          <p:cNvPr id="9" name="Shape 6"/>
-          <p:cNvSpPr/>
-          <p:nvPr/>
-        </p:nvSpPr>
-        <p:spPr>
-          <a:xfrm>
-            <a:off x="502920" y="1572768"/>
-            <a:ext cx="384048" cy="384048"/>
-          </a:xfrm>
-          <a:prstGeom prst="ellipse">
-            <a:avLst/>
-          </a:prstGeom>
-          <a:solidFill>
-            <a:srgbClr val="DC756A"/>
-          </a:solidFill>
-          <a:ln/>
-        </p:spPr>
-        <p:txBody>
-          <a:bodyPr/>
-          <a:p/>
-        </p:txBody>
-      </p:sp>
-      <p:sp>
-        <p:nvSpPr>
-          <p:cNvPr id="10" name="Text 7"/>
-          <p:cNvSpPr/>
-          <p:nvPr/>
-        </p:nvSpPr>
-        <p:spPr>
-          <a:xfrm>
-            <a:off x="502920" y="1572768"/>
-            <a:ext cx="384048" cy="384048"/>
-          </a:xfrm>
-          <a:prstGeom prst="rect">
-            <a:avLst/>
-          </a:prstGeom>
-          <a:noFill/>
-          <a:ln/>
-        </p:spPr>
-        <p:txBody>
-          <a:bodyPr wrap="square" lIns="0" tIns="0" rIns="0" bIns="0" rtlCol="0" anchor="ctr"/>
-          <a:lstStyle/>
-          <a:p>
-            <a:pPr algn="ctr" indent="0" marL="0">
-              <a:buNone/>
-            </a:pPr>
-            <a:r>
-              <a:rPr lang="en-US" sz="1400" b="1" dirty="0">
-                <a:solidFill>
-                  <a:srgbClr val="FFFFFF"/>
-                </a:solidFill>
-                <a:latin typeface="Calibri" pitchFamily="34" charset="0"/>
-                <a:ea typeface="Calibri" pitchFamily="34" charset="-122"/>
-                <a:cs typeface="Calibri" pitchFamily="34" charset="-120"/>
-              </a:rPr>
-              <a:t>1</a:t>
-            </a:r>
-            <a:endParaRPr lang="en-US" sz="1400" dirty="0"/>
-          </a:p>
-        </p:txBody>
-      </p:sp>
-      <p:sp>
-        <p:nvSpPr>
-          <p:cNvPr id="11" name="Text 8"/>
-          <p:cNvSpPr/>
-          <p:nvPr/>
-        </p:nvSpPr>
-        <p:spPr>
-          <a:xfrm>
-            <a:off x="1051560" y="1499616"/>
-            <a:ext cx="10652760" cy="822960"/>
-          </a:xfrm>
-          <a:prstGeom prst="rect">
-            <a:avLst/>
-          </a:prstGeom>
-          <a:noFill/>
-          <a:ln/>
-        </p:spPr>
-        <p:txBody>
-          <a:bodyPr wrap="square" lIns="0" tIns="0" rIns="0" bIns="0" rtlCol="0" anchor="t"/>
-          <a:lstStyle/>
-          <a:p>
-            <a:pPr indent="0" marL="0">
-              <a:buNone/>
-            </a:pPr>
-            <a:r>
-              <a:rPr lang="en-US" sz="1400" dirty="0">
-                <a:solidFill>
-                  <a:srgbClr val="3A2B28"/>
-                </a:solidFill>
-                <a:latin typeface="Calibri" pitchFamily="34" charset="0"/>
-                <a:ea typeface="Calibri" pitchFamily="34" charset="-122"/>
-                <a:cs typeface="Calibri" pitchFamily="34" charset="-120"/>
-              </a:rPr>
-              <a:t>Trình bày khái niệm văn bản và các nhóm văn bản trong tổ chức.</a:t>
-            </a:r>
-            <a:endParaRPr lang="en-US" sz="1400" dirty="0"/>
-          </a:p>
-        </p:txBody>
-      </p:sp>
-      <p:sp>
-        <p:nvSpPr>
-          <p:cNvPr id="12" name="Shape 9"/>
-          <p:cNvSpPr/>
-          <p:nvPr/>
-        </p:nvSpPr>
-        <p:spPr>
-          <a:xfrm>
-            <a:off x="502920" y="2395728"/>
-            <a:ext cx="384048" cy="384048"/>
-          </a:xfrm>
-          <a:prstGeom prst="ellipse">
-            <a:avLst/>
-          </a:prstGeom>
-          <a:solidFill>
-            <a:srgbClr val="DC756A"/>
-          </a:solidFill>
-          <a:ln/>
-        </p:spPr>
-        <p:txBody>
-          <a:bodyPr/>
-          <a:p/>
-        </p:txBody>
-      </p:sp>
-      <p:sp>
-        <p:nvSpPr>
-          <p:cNvPr id="13" name="Text 10"/>
-          <p:cNvSpPr/>
-          <p:nvPr/>
-        </p:nvSpPr>
-        <p:spPr>
-          <a:xfrm>
-            <a:off x="502920" y="2395728"/>
-            <a:ext cx="384048" cy="384048"/>
-          </a:xfrm>
-          <a:prstGeom prst="rect">
-            <a:avLst/>
-          </a:prstGeom>
-          <a:noFill/>
-          <a:ln/>
-        </p:spPr>
-        <p:txBody>
-          <a:bodyPr wrap="square" lIns="0" tIns="0" rIns="0" bIns="0" rtlCol="0" anchor="ctr"/>
-          <a:lstStyle/>
-          <a:p>
-            <a:pPr algn="ctr" indent="0" marL="0">
-              <a:buNone/>
-            </a:pPr>
-            <a:r>
-              <a:rPr lang="en-US" sz="1400" b="1" dirty="0">
-                <a:solidFill>
-                  <a:srgbClr val="FFFFFF"/>
-                </a:solidFill>
-                <a:latin typeface="Calibri" pitchFamily="34" charset="0"/>
-                <a:ea typeface="Calibri" pitchFamily="34" charset="-122"/>
-                <a:cs typeface="Calibri" pitchFamily="34" charset="-120"/>
-              </a:rPr>
-              <a:t>2</a:t>
-            </a:r>
-            <a:endParaRPr lang="en-US" sz="1400" dirty="0"/>
-          </a:p>
-        </p:txBody>
-      </p:sp>
-      <p:sp>
-        <p:nvSpPr>
-          <p:cNvPr id="14" name="Text 11"/>
-          <p:cNvSpPr/>
-          <p:nvPr/>
-        </p:nvSpPr>
-        <p:spPr>
-          <a:xfrm>
-            <a:off x="1051560" y="2322576"/>
-            <a:ext cx="10652760" cy="822960"/>
-          </a:xfrm>
-          <a:prstGeom prst="rect">
-            <a:avLst/>
-          </a:prstGeom>
-          <a:noFill/>
-          <a:ln/>
-        </p:spPr>
-        <p:txBody>
-          <a:bodyPr wrap="square" lIns="0" tIns="0" rIns="0" bIns="0" rtlCol="0" anchor="t"/>
-          <a:lstStyle/>
-          <a:p>
-            <a:pPr indent="0" marL="0">
-              <a:buNone/>
-            </a:pPr>
-            <a:r>
-              <a:rPr lang="en-US" sz="1400" dirty="0">
-                <a:solidFill>
-                  <a:srgbClr val="3A2B28"/>
-                </a:solidFill>
-                <a:latin typeface="Calibri" pitchFamily="34" charset="0"/>
-                <a:ea typeface="Calibri" pitchFamily="34" charset="-122"/>
-                <a:cs typeface="Calibri" pitchFamily="34" charset="-120"/>
-              </a:rPr>
-              <a:t>Nêu 9 thành phần thể thức văn bản hành chính và các quy định về lề trang, phông chữ.</a:t>
-            </a:r>
-            <a:endParaRPr lang="en-US" sz="1400" dirty="0"/>
-          </a:p>
-        </p:txBody>
-      </p:sp>
-      <p:sp>
-        <p:nvSpPr>
-          <p:cNvPr id="15" name="Shape 12"/>
-          <p:cNvSpPr/>
-          <p:nvPr/>
-        </p:nvSpPr>
-        <p:spPr>
-          <a:xfrm>
-            <a:off x="502920" y="3218688"/>
-            <a:ext cx="384048" cy="384048"/>
-          </a:xfrm>
-          <a:prstGeom prst="ellipse">
-            <a:avLst/>
-          </a:prstGeom>
-          <a:solidFill>
-            <a:srgbClr val="DC756A"/>
-          </a:solidFill>
-          <a:ln/>
-        </p:spPr>
-        <p:txBody>
-          <a:bodyPr/>
-          <a:p/>
-        </p:txBody>
-      </p:sp>
-      <p:sp>
-        <p:nvSpPr>
-          <p:cNvPr id="16" name="Text 13"/>
-          <p:cNvSpPr/>
-          <p:nvPr/>
-        </p:nvSpPr>
-        <p:spPr>
-          <a:xfrm>
-            <a:off x="502920" y="3218688"/>
-            <a:ext cx="384048" cy="384048"/>
-          </a:xfrm>
-          <a:prstGeom prst="rect">
-            <a:avLst/>
-          </a:prstGeom>
-          <a:noFill/>
-          <a:ln/>
-        </p:spPr>
-        <p:txBody>
-          <a:bodyPr wrap="square" lIns="0" tIns="0" rIns="0" bIns="0" rtlCol="0" anchor="ctr"/>
-          <a:lstStyle/>
-          <a:p>
-            <a:pPr algn="ctr" indent="0" marL="0">
-              <a:buNone/>
-            </a:pPr>
-            <a:r>
-              <a:rPr lang="en-US" sz="1400" b="1" dirty="0">
-                <a:solidFill>
-                  <a:srgbClr val="FFFFFF"/>
-                </a:solidFill>
-                <a:latin typeface="Calibri" pitchFamily="34" charset="0"/>
-                <a:ea typeface="Calibri" pitchFamily="34" charset="-122"/>
-                <a:cs typeface="Calibri" pitchFamily="34" charset="-120"/>
-              </a:rPr>
-              <a:t>3</a:t>
-            </a:r>
-            <a:endParaRPr lang="en-US" sz="1400" dirty="0"/>
-          </a:p>
-        </p:txBody>
-      </p:sp>
-      <p:sp>
-        <p:nvSpPr>
-          <p:cNvPr id="17" name="Text 14"/>
-          <p:cNvSpPr/>
-          <p:nvPr/>
-        </p:nvSpPr>
-        <p:spPr>
-          <a:xfrm>
-            <a:off x="1051560" y="3145536"/>
-            <a:ext cx="10652760" cy="822960"/>
-          </a:xfrm>
-          <a:prstGeom prst="rect">
-            <a:avLst/>
-          </a:prstGeom>
-          <a:noFill/>
-          <a:ln/>
-        </p:spPr>
-        <p:txBody>
-          <a:bodyPr wrap="square" lIns="0" tIns="0" rIns="0" bIns="0" rtlCol="0" anchor="t"/>
-          <a:lstStyle/>
-          <a:p>
-            <a:pPr indent="0" marL="0">
-              <a:buNone/>
-            </a:pPr>
-            <a:r>
-              <a:rPr lang="en-US" sz="1400" dirty="0">
-                <a:solidFill>
-                  <a:srgbClr val="3A2B28"/>
-                </a:solidFill>
-                <a:latin typeface="Calibri" pitchFamily="34" charset="0"/>
-                <a:ea typeface="Calibri" pitchFamily="34" charset="-122"/>
-                <a:cs typeface="Calibri" pitchFamily="34" charset="-120"/>
-              </a:rPr>
-              <a:t>So sánh bố cục của quyết định, tờ trình và công văn.</a:t>
-            </a:r>
-            <a:endParaRPr lang="en-US" sz="1400" dirty="0"/>
-          </a:p>
-        </p:txBody>
-      </p:sp>
-      <p:sp>
-        <p:nvSpPr>
-          <p:cNvPr id="18" name="Shape 15"/>
-          <p:cNvSpPr/>
-          <p:nvPr/>
-        </p:nvSpPr>
-        <p:spPr>
-          <a:xfrm>
-            <a:off x="502920" y="4041648"/>
-            <a:ext cx="384048" cy="384048"/>
-          </a:xfrm>
-          <a:prstGeom prst="ellipse">
-            <a:avLst/>
-          </a:prstGeom>
-          <a:solidFill>
-            <a:srgbClr val="DC756A"/>
-          </a:solidFill>
-          <a:ln/>
-        </p:spPr>
-        <p:txBody>
-          <a:bodyPr/>
-          <a:p/>
-        </p:txBody>
-      </p:sp>
-      <p:sp>
-        <p:nvSpPr>
-          <p:cNvPr id="19" name="Text 16"/>
-          <p:cNvSpPr/>
-          <p:nvPr/>
-        </p:nvSpPr>
-        <p:spPr>
-          <a:xfrm>
-            <a:off x="502920" y="4041648"/>
-            <a:ext cx="384048" cy="384048"/>
-          </a:xfrm>
-          <a:prstGeom prst="rect">
-            <a:avLst/>
-          </a:prstGeom>
-          <a:noFill/>
-          <a:ln/>
-        </p:spPr>
-        <p:txBody>
-          <a:bodyPr wrap="square" lIns="0" tIns="0" rIns="0" bIns="0" rtlCol="0" anchor="ctr"/>
-          <a:lstStyle/>
-          <a:p>
-            <a:pPr algn="ctr" indent="0" marL="0">
-              <a:buNone/>
-            </a:pPr>
-            <a:r>
-              <a:rPr lang="en-US" sz="1400" b="1" dirty="0">
-                <a:solidFill>
-                  <a:srgbClr val="FFFFFF"/>
-                </a:solidFill>
-                <a:latin typeface="Calibri" pitchFamily="34" charset="0"/>
-                <a:ea typeface="Calibri" pitchFamily="34" charset="-122"/>
-                <a:cs typeface="Calibri" pitchFamily="34" charset="-120"/>
-              </a:rPr>
-              <a:t>4</a:t>
-            </a:r>
-            <a:endParaRPr lang="en-US" sz="1400" dirty="0"/>
-          </a:p>
-        </p:txBody>
-      </p:sp>
-      <p:sp>
-        <p:nvSpPr>
-          <p:cNvPr id="20" name="Text 17"/>
-          <p:cNvSpPr/>
-          <p:nvPr/>
-        </p:nvSpPr>
-        <p:spPr>
-          <a:xfrm>
-            <a:off x="1051560" y="3968496"/>
-            <a:ext cx="10652760" cy="822960"/>
-          </a:xfrm>
-          <a:prstGeom prst="rect">
-            <a:avLst/>
-          </a:prstGeom>
-          <a:noFill/>
-          <a:ln/>
-        </p:spPr>
-        <p:txBody>
-          <a:bodyPr wrap="square" lIns="0" tIns="0" rIns="0" bIns="0" rtlCol="0" anchor="t"/>
-          <a:lstStyle/>
-          <a:p>
-            <a:pPr indent="0" marL="0">
-              <a:buNone/>
-            </a:pPr>
-            <a:r>
-              <a:rPr lang="en-US" sz="1400" dirty="0">
-                <a:solidFill>
-                  <a:srgbClr val="3A2B28"/>
-                </a:solidFill>
-                <a:latin typeface="Calibri" pitchFamily="34" charset="0"/>
-                <a:ea typeface="Calibri" pitchFamily="34" charset="-122"/>
-                <a:cs typeface="Calibri" pitchFamily="34" charset="-120"/>
-              </a:rPr>
-              <a:t>Nêu nguyên tắc 5C và các điều khoản cơ bản của hợp đồng thương mại.</a:t>
-            </a:r>
-            <a:endParaRPr lang="en-US" sz="1400" dirty="0"/>
-          </a:p>
-        </p:txBody>
-      </p:sp>
-      <p:sp>
-        <p:nvSpPr>
-          <p:cNvPr id="21" name="Shape 18"/>
-          <p:cNvSpPr/>
-          <p:nvPr/>
-        </p:nvSpPr>
-        <p:spPr>
-          <a:xfrm>
-            <a:off x="502920" y="5074920"/>
-            <a:ext cx="11201400" cy="1097280"/>
-          </a:xfrm>
-          <a:prstGeom prst="roundRect">
-            <a:avLst>
-              <a:gd name="adj" fmla="val 7500"/>
-            </a:avLst>
-          </a:prstGeom>
-          <a:solidFill>
-            <a:srgbClr val="FBEDE0"/>
-          </a:solidFill>
-          <a:ln w="12700">
-            <a:solidFill>
-              <a:srgbClr val="C9A227"/>
-            </a:solidFill>
-            <a:prstDash val="solid"/>
-          </a:ln>
-        </p:spPr>
-        <p:txBody>
-          <a:bodyPr/>
-          <a:p/>
-        </p:txBody>
-      </p:sp>
-      <p:sp>
-        <p:nvSpPr>
-          <p:cNvPr id="22" name="Text 19"/>
-          <p:cNvSpPr/>
-          <p:nvPr/>
-        </p:nvSpPr>
-        <p:spPr>
-          <a:xfrm>
-            <a:off x="777240" y="5120640"/>
-            <a:ext cx="10698480" cy="1005840"/>
-          </a:xfrm>
-          <a:prstGeom prst="rect">
-            <a:avLst/>
-          </a:prstGeom>
-          <a:noFill/>
-          <a:ln/>
-        </p:spPr>
-        <p:txBody>
-          <a:bodyPr wrap="square" lIns="0" tIns="0" rIns="0" bIns="0" rtlCol="0" anchor="ctr"/>
-          <a:lstStyle/>
-          <a:p>
-            <a:pPr indent="0" marL="0">
-              <a:buNone/>
-            </a:pPr>
-            <a:r>
-              <a:rPr lang="en-US" sz="1300" b="1" dirty="0">
-                <a:solidFill>
-                  <a:srgbClr val="8A6510"/>
-                </a:solidFill>
-                <a:latin typeface="Calibri" pitchFamily="34" charset="0"/>
-                <a:ea typeface="Calibri" pitchFamily="34" charset="-122"/>
-                <a:cs typeface="Calibri" pitchFamily="34" charset="-120"/>
-              </a:rPr>
-              <a:t>CHUẨN BỊ CHO BUỔI SAU:  </a:t>
-            </a:r>
-            <a:pPr indent="0" marL="0">
-              <a:buNone/>
-            </a:pPr>
-            <a:r>
-              <a:rPr lang="en-US" sz="1300" dirty="0">
-                <a:solidFill>
-                  <a:srgbClr val="3A2B28"/>
-                </a:solidFill>
-                <a:latin typeface="Calibri" pitchFamily="34" charset="0"/>
-                <a:ea typeface="Calibri" pitchFamily="34" charset="-122"/>
-                <a:cs typeface="Calibri" pitchFamily="34" charset="-120"/>
-              </a:rPr>
-              <a:t>Phần thực hành tại phòng A0105 — Bài 1: Thể thức văn bản. Mang theo laptop, cài sẵn Microsoft Word và tải Nghị định 30/2020/NĐ-CP.</a:t>
-            </a:r>
-            <a:endParaRPr lang="en-US" sz="1300" dirty="0"/>
-          </a:p>
-        </p:txBody>
-      </p:sp>
-    </p:spTree>
-  </p:cSld>
-  <p:clrMapOvr>
-    <a:masterClrMapping/>
-  </p:clrMapOvr>
-</p:sld>
-</file>
-
-<file path=ppt/slides/slide17.xml><?xml version="1.0" encoding="utf-8"?>
-<p:sld xmlns:a="http://schemas.openxmlformats.org/drawingml/2006/main" xmlns:r="http://schemas.openxmlformats.org/officeDocument/2006/relationships" xmlns:p="http://schemas.openxmlformats.org/presentationml/2006/main">
-  <p:cSld name="Slide 17">
-    <p:bg>
-      <p:bgPr>
-        <a:solidFill>
-          <a:srgbClr val="FDFBF8"/>
-        </a:solidFill>
-      </p:bgPr>
-    </p:bg>
-    <p:spTree>
-      <p:nvGrpSpPr>
-        <p:cNvPr id="1" name=""/>
-        <p:cNvGrpSpPr/>
-        <p:nvPr/>
-      </p:nvGrpSpPr>
-      <p:grpSpPr>
-        <a:xfrm>
-          <a:off x="0" y="0"/>
-          <a:ext cx="0" cy="0"/>
-          <a:chOff x="0" y="0"/>
-          <a:chExt cx="0" cy="0"/>
-        </a:xfrm>
-      </p:grpSpPr>
-      <p:pic>
-        <p:nvPicPr>
-          <p:cNvPr id="2" name="Image 0" descr="assets/logo_tron.png">    </p:cNvPr>
-          <p:cNvPicPr>
-            <a:picLocks noChangeAspect="1"/>
-          </p:cNvPicPr>
-          <p:nvPr/>
-        </p:nvPicPr>
-        <p:blipFill>
-          <a:blip r:embed="rId1"/>
-          <a:stretch>
-            <a:fillRect/>
-          </a:stretch>
-        </p:blipFill>
-        <p:spPr>
-          <a:xfrm>
-            <a:off x="411480" y="6327648"/>
-            <a:ext cx="384048" cy="384048"/>
-          </a:xfrm>
-          <a:prstGeom prst="rect">
-            <a:avLst/>
-          </a:prstGeom>
-        </p:spPr>
-      </p:pic>
-      <p:sp>
-        <p:nvSpPr>
-          <p:cNvPr id="3" name="Text 0"/>
-          <p:cNvSpPr/>
-          <p:nvPr/>
-        </p:nvSpPr>
-        <p:spPr>
-          <a:xfrm>
-            <a:off x="868680" y="6355080"/>
-            <a:ext cx="7498080" cy="310896"/>
-          </a:xfrm>
-          <a:prstGeom prst="rect">
-            <a:avLst/>
-          </a:prstGeom>
-          <a:noFill/>
-          <a:ln/>
-        </p:spPr>
-        <p:txBody>
-          <a:bodyPr wrap="square" lIns="0" tIns="0" rIns="0" bIns="0" rtlCol="0" anchor="ctr"/>
-          <a:lstStyle/>
-          <a:p>
-            <a:pPr indent="0" marL="0">
-              <a:buNone/>
-            </a:pPr>
-            <a:r>
-              <a:rPr lang="en-US" sz="900" dirty="0">
-                <a:solidFill>
-                  <a:srgbClr val="8A7A76"/>
-                </a:solidFill>
-                <a:latin typeface="Calibri" pitchFamily="34" charset="0"/>
-                <a:ea typeface="Calibri" pitchFamily="34" charset="-122"/>
-                <a:cs typeface="Calibri" pitchFamily="34" charset="-120"/>
-              </a:rPr>
-              <a:t>Je m'appelle Huong  •  GV. Đỗ Thùy Hương  •  EC1103</a:t>
-            </a:r>
-            <a:endParaRPr lang="en-US" sz="900" dirty="0"/>
-          </a:p>
-        </p:txBody>
-      </p:sp>
-      <p:sp>
-        <p:nvSpPr>
-          <p:cNvPr id="4" name="Text 1"/>
-          <p:cNvSpPr/>
-          <p:nvPr/>
-        </p:nvSpPr>
-        <p:spPr>
-          <a:xfrm>
-            <a:off x="8503920" y="6355080"/>
-            <a:ext cx="2743200" cy="310896"/>
-          </a:xfrm>
-          <a:prstGeom prst="rect">
-            <a:avLst/>
-          </a:prstGeom>
-          <a:noFill/>
-          <a:ln/>
-        </p:spPr>
-        <p:txBody>
-          <a:bodyPr wrap="square" lIns="0" tIns="0" rIns="0" bIns="0" rtlCol="0" anchor="ctr"/>
-          <a:lstStyle/>
-          <a:p>
-            <a:pPr algn="r" indent="0" marL="0">
-              <a:buNone/>
-            </a:pPr>
-            <a:r>
-              <a:rPr lang="en-US" sz="900" dirty="0">
-                <a:solidFill>
-                  <a:srgbClr val="8A7A76"/>
-                </a:solidFill>
-                <a:latin typeface="Calibri" pitchFamily="34" charset="0"/>
-                <a:ea typeface="Calibri" pitchFamily="34" charset="-122"/>
-                <a:cs typeface="Calibri" pitchFamily="34" charset="-120"/>
-              </a:rPr>
-              <a:t>Chương 5</a:t>
-            </a:r>
-            <a:endParaRPr lang="en-US" sz="900" dirty="0"/>
-          </a:p>
-        </p:txBody>
-      </p:sp>
-      <p:sp>
-        <p:nvSpPr>
-          <p:cNvPr id="5" name="Shape 2"/>
-          <p:cNvSpPr/>
-          <p:nvPr/>
-        </p:nvSpPr>
-        <p:spPr>
-          <a:xfrm>
-            <a:off x="11430000" y="6327648"/>
-            <a:ext cx="365760" cy="365760"/>
-          </a:xfrm>
-          <a:prstGeom prst="ellipse">
-            <a:avLst/>
-          </a:prstGeom>
-          <a:solidFill>
-            <a:srgbClr val="DC756A"/>
-          </a:solidFill>
-          <a:ln/>
-        </p:spPr>
-        <p:txBody>
-          <a:bodyPr/>
-          <a:p/>
-        </p:txBody>
-      </p:sp>
-      <p:sp>
-        <p:nvSpPr>
-          <p:cNvPr id="6" name="Text 3"/>
-          <p:cNvSpPr/>
-          <p:nvPr/>
-        </p:nvSpPr>
-        <p:spPr>
-          <a:xfrm>
-            <a:off x="11430000" y="6327648"/>
-            <a:ext cx="365760" cy="365760"/>
-          </a:xfrm>
-          <a:prstGeom prst="rect">
-            <a:avLst/>
-          </a:prstGeom>
-          <a:noFill/>
-          <a:ln/>
-        </p:spPr>
-        <p:txBody>
-          <a:bodyPr wrap="square" lIns="0" tIns="0" rIns="0" bIns="0" rtlCol="0" anchor="ctr"/>
-          <a:lstStyle/>
-          <a:p>
-            <a:pPr algn="ctr" indent="0" marL="0">
-              <a:buNone/>
-            </a:pPr>
-            <a:r>
-              <a:rPr lang="en-US" sz="1000" b="1" dirty="0">
-                <a:solidFill>
-                  <a:srgbClr val="FFFFFF"/>
-                </a:solidFill>
-                <a:latin typeface="Calibri" pitchFamily="34" charset="0"/>
-                <a:ea typeface="Calibri" pitchFamily="34" charset="-122"/>
-                <a:cs typeface="Calibri" pitchFamily="34" charset="-120"/>
-              </a:rPr>
-              <a:t>17</a:t>
-            </a:r>
-            <a:endParaRPr lang="en-US" sz="1000" dirty="0"/>
-          </a:p>
-        </p:txBody>
-      </p:sp>
-      <p:sp>
-        <p:nvSpPr>
-          <p:cNvPr id="7" name="Text 4"/>
-          <p:cNvSpPr/>
-          <p:nvPr/>
-        </p:nvSpPr>
-        <p:spPr>
-          <a:xfrm>
-            <a:off x="502920" y="310896"/>
-            <a:ext cx="11155680" cy="274320"/>
-          </a:xfrm>
-          <a:prstGeom prst="rect">
-            <a:avLst/>
-          </a:prstGeom>
-          <a:noFill/>
-          <a:ln/>
-        </p:spPr>
-        <p:txBody>
-          <a:bodyPr wrap="square" lIns="0" tIns="0" rIns="0" bIns="0" rtlCol="0" anchor="ctr"/>
-          <a:lstStyle/>
-          <a:p>
-            <a:pPr indent="0" marL="0">
-              <a:buNone/>
-            </a:pPr>
-            <a:r>
-              <a:rPr lang="en-US" sz="1100" b="1" spc="300" kern="0" dirty="0">
-                <a:solidFill>
-                  <a:srgbClr val="DC756A"/>
-                </a:solidFill>
-                <a:latin typeface="Calibri" pitchFamily="34" charset="0"/>
-                <a:ea typeface="Calibri" pitchFamily="34" charset="-122"/>
-                <a:cs typeface="Calibri" pitchFamily="34" charset="-120"/>
-              </a:rPr>
-              <a:t>TÀI LIỆU</a:t>
-            </a:r>
-            <a:endParaRPr lang="en-US" sz="1100" dirty="0"/>
-          </a:p>
-        </p:txBody>
-      </p:sp>
-      <p:sp>
-        <p:nvSpPr>
-          <p:cNvPr id="8" name="Text 5"/>
-          <p:cNvSpPr/>
-          <p:nvPr/>
-        </p:nvSpPr>
-        <p:spPr>
-          <a:xfrm>
-            <a:off x="502920" y="576072"/>
-            <a:ext cx="11155680" cy="713232"/>
-          </a:xfrm>
-          <a:prstGeom prst="rect">
-            <a:avLst/>
-          </a:prstGeom>
-          <a:noFill/>
-          <a:ln/>
-        </p:spPr>
-        <p:txBody>
-          <a:bodyPr wrap="square" lIns="0" tIns="0" rIns="0" bIns="0" rtlCol="0" anchor="ctr"/>
-          <a:lstStyle/>
-          <a:p>
-            <a:pPr indent="0" marL="0">
-              <a:buNone/>
-            </a:pPr>
-            <a:r>
-              <a:rPr lang="en-US" sz="2700" b="1" dirty="0">
-                <a:solidFill>
-                  <a:srgbClr val="AC4D33"/>
-                </a:solidFill>
-                <a:latin typeface="Cambria" pitchFamily="34" charset="0"/>
-                <a:ea typeface="Cambria" pitchFamily="34" charset="-122"/>
-                <a:cs typeface="Cambria" pitchFamily="34" charset="-120"/>
-              </a:rPr>
-              <a:t>Tài liệu học tập</a:t>
-            </a:r>
-            <a:endParaRPr lang="en-US" sz="2700" dirty="0"/>
-          </a:p>
-        </p:txBody>
-      </p:sp>
-      <p:sp>
-        <p:nvSpPr>
-          <p:cNvPr id="9" name="Shape 6"/>
-          <p:cNvSpPr/>
-          <p:nvPr/>
-        </p:nvSpPr>
-        <p:spPr>
-          <a:xfrm>
-            <a:off x="502920" y="1463040"/>
-            <a:ext cx="11201400" cy="1322832"/>
-          </a:xfrm>
-          <a:prstGeom prst="roundRect">
-            <a:avLst>
-              <a:gd name="adj" fmla="val 6221"/>
-            </a:avLst>
-          </a:prstGeom>
-          <a:solidFill>
-            <a:srgbClr val="FDF1EF"/>
-          </a:solidFill>
-          <a:ln w="15875">
-            <a:solidFill>
-              <a:srgbClr val="FBCEC9"/>
-            </a:solidFill>
-            <a:prstDash val="solid"/>
-          </a:ln>
-        </p:spPr>
-        <p:txBody>
-          <a:bodyPr/>
-          <a:p/>
-        </p:txBody>
-      </p:sp>
-      <p:sp>
-        <p:nvSpPr>
-          <p:cNvPr id="10" name="Text 7"/>
-          <p:cNvSpPr/>
-          <p:nvPr/>
-        </p:nvSpPr>
-        <p:spPr>
-          <a:xfrm>
-            <a:off x="722376" y="1517904"/>
-            <a:ext cx="10762488" cy="1213104"/>
-          </a:xfrm>
-          <a:prstGeom prst="rect">
-            <a:avLst/>
-          </a:prstGeom>
-          <a:noFill/>
-          <a:ln/>
-        </p:spPr>
-        <p:txBody>
-          <a:bodyPr wrap="square" lIns="0" tIns="0" rIns="0" bIns="0" rtlCol="0" anchor="ctr"/>
-          <a:lstStyle/>
-          <a:p>
-            <a:pPr indent="0" marL="0">
-              <a:buNone/>
-            </a:pPr>
-            <a:r>
-              <a:rPr lang="en-US" sz="1500" b="1" dirty="0">
-                <a:solidFill>
-                  <a:srgbClr val="AC4D33"/>
-                </a:solidFill>
-                <a:latin typeface="Calibri" pitchFamily="34" charset="0"/>
-                <a:ea typeface="Calibri" pitchFamily="34" charset="-122"/>
-                <a:cs typeface="Calibri" pitchFamily="34" charset="-120"/>
-              </a:rPr>
-              <a:t>Giáo trình chính</a:t>
-            </a:r>
-            <a:endParaRPr lang="en-US" sz="1500" dirty="0"/>
-          </a:p>
-          <a:p>
-            <a:pPr indent="0" marL="0">
-              <a:buNone/>
-            </a:pPr>
-            <a:r>
-              <a:rPr lang="en-US" sz="1300" dirty="0">
-                <a:solidFill>
-                  <a:srgbClr val="3A2B28"/>
-                </a:solidFill>
-                <a:latin typeface="Calibri" pitchFamily="34" charset="0"/>
-                <a:ea typeface="Calibri" pitchFamily="34" charset="-122"/>
-                <a:cs typeface="Calibri" pitchFamily="34" charset="-120"/>
-              </a:rPr>
-              <a:t>Hà Nam Khánh Giao (2023), Giáo trình Giao tiếp kinh doanh, NXB Tài chính.</a:t>
-            </a:r>
-            <a:endParaRPr lang="en-US" sz="1500" dirty="0"/>
-          </a:p>
-        </p:txBody>
-      </p:sp>
-      <p:sp>
-        <p:nvSpPr>
-          <p:cNvPr id="11" name="Shape 8"/>
-          <p:cNvSpPr/>
-          <p:nvPr/>
-        </p:nvSpPr>
-        <p:spPr>
-          <a:xfrm>
-            <a:off x="502920" y="2950464"/>
-            <a:ext cx="11201400" cy="1322832"/>
-          </a:xfrm>
-          <a:prstGeom prst="roundRect">
-            <a:avLst>
-              <a:gd name="adj" fmla="val 6221"/>
-            </a:avLst>
-          </a:prstGeom>
-          <a:solidFill>
-            <a:srgbClr val="FDF1EF"/>
-          </a:solidFill>
-          <a:ln w="15875">
-            <a:solidFill>
-              <a:srgbClr val="FBCEC9"/>
-            </a:solidFill>
-            <a:prstDash val="solid"/>
-          </a:ln>
-        </p:spPr>
-        <p:txBody>
-          <a:bodyPr/>
-          <a:p/>
-        </p:txBody>
-      </p:sp>
-      <p:sp>
-        <p:nvSpPr>
-          <p:cNvPr id="12" name="Text 9"/>
-          <p:cNvSpPr/>
-          <p:nvPr/>
-        </p:nvSpPr>
-        <p:spPr>
-          <a:xfrm>
-            <a:off x="722376" y="3005328"/>
-            <a:ext cx="10762488" cy="1213104"/>
-          </a:xfrm>
-          <a:prstGeom prst="rect">
-            <a:avLst/>
-          </a:prstGeom>
-          <a:noFill/>
-          <a:ln/>
-        </p:spPr>
-        <p:txBody>
-          <a:bodyPr wrap="square" lIns="0" tIns="0" rIns="0" bIns="0" rtlCol="0" anchor="ctr"/>
-          <a:lstStyle/>
-          <a:p>
-            <a:pPr indent="0" marL="0">
-              <a:buNone/>
-            </a:pPr>
-            <a:r>
-              <a:rPr lang="en-US" sz="1500" b="1" dirty="0">
-                <a:solidFill>
-                  <a:srgbClr val="AC4D33"/>
-                </a:solidFill>
-                <a:latin typeface="Calibri" pitchFamily="34" charset="0"/>
-                <a:ea typeface="Calibri" pitchFamily="34" charset="-122"/>
-                <a:cs typeface="Calibri" pitchFamily="34" charset="-120"/>
-              </a:rPr>
-              <a:t>Văn bản pháp lý bắt buộc</a:t>
-            </a:r>
-            <a:endParaRPr lang="en-US" sz="1500" dirty="0"/>
-          </a:p>
-          <a:p>
-            <a:pPr indent="0" marL="0">
-              <a:buNone/>
-            </a:pPr>
-            <a:r>
-              <a:rPr lang="en-US" sz="1300" dirty="0">
-                <a:solidFill>
-                  <a:srgbClr val="3A2B28"/>
-                </a:solidFill>
-                <a:latin typeface="Calibri" pitchFamily="34" charset="0"/>
-                <a:ea typeface="Calibri" pitchFamily="34" charset="-122"/>
-                <a:cs typeface="Calibri" pitchFamily="34" charset="-120"/>
-              </a:rPr>
-              <a:t>Nghị định 30/2020/NĐ-CP ngày 05/3/2020 của Chính phủ về công tác văn thư — hướng dẫn thể thức và kỹ thuật trình bày văn bản hành chính.</a:t>
-            </a:r>
-            <a:endParaRPr lang="en-US" sz="1500" dirty="0"/>
-          </a:p>
-        </p:txBody>
-      </p:sp>
-      <p:sp>
-        <p:nvSpPr>
-          <p:cNvPr id="13" name="Shape 10"/>
-          <p:cNvSpPr/>
-          <p:nvPr/>
-        </p:nvSpPr>
-        <p:spPr>
-          <a:xfrm>
-            <a:off x="502920" y="4437888"/>
-            <a:ext cx="11201400" cy="1322832"/>
-          </a:xfrm>
-          <a:prstGeom prst="roundRect">
-            <a:avLst>
-              <a:gd name="adj" fmla="val 6221"/>
-            </a:avLst>
-          </a:prstGeom>
-          <a:solidFill>
-            <a:srgbClr val="FDF1EF"/>
-          </a:solidFill>
-          <a:ln w="15875">
-            <a:solidFill>
-              <a:srgbClr val="FBCEC9"/>
-            </a:solidFill>
-            <a:prstDash val="solid"/>
-          </a:ln>
-        </p:spPr>
-        <p:txBody>
-          <a:bodyPr/>
-          <a:p/>
-        </p:txBody>
-      </p:sp>
-      <p:sp>
-        <p:nvSpPr>
-          <p:cNvPr id="14" name="Text 11"/>
-          <p:cNvSpPr/>
-          <p:nvPr/>
-        </p:nvSpPr>
-        <p:spPr>
-          <a:xfrm>
-            <a:off x="722376" y="4492752"/>
-            <a:ext cx="10762488" cy="1213104"/>
-          </a:xfrm>
-          <a:prstGeom prst="rect">
-            <a:avLst/>
-          </a:prstGeom>
-          <a:noFill/>
-          <a:ln/>
-        </p:spPr>
-        <p:txBody>
-          <a:bodyPr wrap="square" lIns="0" tIns="0" rIns="0" bIns="0" rtlCol="0" anchor="ctr"/>
-          <a:lstStyle/>
-          <a:p>
-            <a:pPr indent="0" marL="0">
-              <a:buNone/>
-            </a:pPr>
-            <a:r>
-              <a:rPr lang="en-US" sz="1500" b="1" dirty="0">
-                <a:solidFill>
-                  <a:srgbClr val="AC4D33"/>
-                </a:solidFill>
-                <a:latin typeface="Calibri" pitchFamily="34" charset="0"/>
-                <a:ea typeface="Calibri" pitchFamily="34" charset="-122"/>
-                <a:cs typeface="Calibri" pitchFamily="34" charset="-120"/>
-              </a:rPr>
-              <a:t>Học liệu của giảng viên</a:t>
-            </a:r>
-            <a:endParaRPr lang="en-US" sz="1500" dirty="0"/>
-          </a:p>
-          <a:p>
-            <a:pPr indent="0" marL="0">
-              <a:buNone/>
-            </a:pPr>
-            <a:r>
-              <a:rPr lang="en-US" sz="1300" dirty="0">
-                <a:solidFill>
-                  <a:srgbClr val="3A2B28"/>
-                </a:solidFill>
-                <a:latin typeface="Calibri" pitchFamily="34" charset="0"/>
-                <a:ea typeface="Calibri" pitchFamily="34" charset="-122"/>
-                <a:cs typeface="Calibri" pitchFamily="34" charset="-120"/>
-              </a:rPr>
-              <a:t>Slide, biểu mẫu văn bản, tình huống và bài tập do GV. Đỗ Thùy Hương biên soạn; cung cấp sau mỗi buổi học.</a:t>
-            </a:r>
-            <a:endParaRPr lang="en-US" sz="1500" dirty="0"/>
-          </a:p>
-        </p:txBody>
-      </p:sp>
-    </p:spTree>
-  </p:cSld>
-  <p:clrMapOvr>
-    <a:masterClrMapping/>
-  </p:clrMapOvr>
-</p:sld>
-</file>
-
-<file path=ppt/slides/slide18.xml><?xml version="1.0" encoding="utf-8"?>
-<p:sld xmlns:a="http://schemas.openxmlformats.org/drawingml/2006/main" xmlns:p="http://schemas.openxmlformats.org/presentationml/2006/main" xmlns:r="http://schemas.openxmlformats.org/officeDocument/2006/relationships">
-  <p:cSld>
-    <p:spTree>
-      <p:nvGrpSpPr>
-        <p:cNvPr id="1" name=""/>
-        <p:cNvGrpSpPr/>
-        <p:nvPr/>
-      </p:nvGrpSpPr>
-      <p:grpSpPr/>
-      <p:sp>
-        <p:nvSpPr>
-          <p:cNvPr id="2" name="Rectangle 1"/>
-          <p:cNvSpPr/>
-          <p:nvPr/>
-        </p:nvSpPr>
-        <p:spPr>
-          <a:xfrm>
-            <a:off x="0" y="0"/>
-            <a:ext cx="12191695" cy="6858000"/>
-          </a:xfrm>
-          <a:prstGeom prst="rect">
-            <a:avLst/>
-          </a:prstGeom>
-          <a:solidFill>
-            <a:srgbClr val="FDFBF8"/>
-          </a:solidFill>
-          <a:ln>
-            <a:noFill/>
-          </a:ln>
-          <a:effectLst/>
-        </p:spPr>
-        <p:style>
-          <a:lnRef idx="1">
-            <a:schemeClr val="accent1"/>
-          </a:lnRef>
-          <a:fillRef idx="3">
-            <a:schemeClr val="accent1"/>
-          </a:fillRef>
-          <a:effectRef idx="2">
-            <a:schemeClr val="accent1"/>
-          </a:effectRef>
-          <a:fontRef idx="minor">
-            <a:schemeClr val="lt1"/>
-          </a:fontRef>
-        </p:style>
-        <p:txBody>
-          <a:bodyPr rtlCol="0" anchor="ctr"/>
-          <a:lstStyle/>
-          <a:p>
-            <a:pPr algn="ctr"/>
-          </a:p>
-        </p:txBody>
-      </p:sp>
-      <p:sp>
-        <p:nvSpPr>
-          <p:cNvPr id="3" name="TextBox 2"/>
-          <p:cNvSpPr txBox="1"/>
-          <p:nvPr/>
-        </p:nvSpPr>
-        <p:spPr>
-          <a:xfrm>
-            <a:off x="502920" y="292608"/>
-            <a:ext cx="11155680" cy="292608"/>
-          </a:xfrm>
-          <a:prstGeom prst="rect">
-            <a:avLst/>
-          </a:prstGeom>
-          <a:noFill/>
-        </p:spPr>
-        <p:txBody>
-          <a:bodyPr wrap="none">
-            <a:spAutoFit/>
-          </a:bodyPr>
-          <a:lstStyle/>
-          <a:p>
-            <a:r>
-              <a:rPr sz="1100" b="1">
-                <a:solidFill>
-                  <a:srgbClr val="DC756A"/>
-                </a:solidFill>
-                <a:latin typeface="Calibri"/>
-              </a:rPr>
-              <a:t>CON SỐ PHẢI NHỚ</a:t>
-            </a:r>
-          </a:p>
-        </p:txBody>
-      </p:sp>
-      <p:sp>
-        <p:nvSpPr>
-          <p:cNvPr id="4" name="TextBox 3"/>
-          <p:cNvSpPr txBox="1"/>
-          <p:nvPr/>
-        </p:nvSpPr>
-        <p:spPr>
-          <a:xfrm>
-            <a:off x="502920" y="603504"/>
-            <a:ext cx="11155680" cy="731520"/>
-          </a:xfrm>
-          <a:prstGeom prst="rect">
-            <a:avLst/>
-          </a:prstGeom>
-          <a:noFill/>
-        </p:spPr>
-        <p:txBody>
-          <a:bodyPr wrap="square">
-            <a:spAutoFit/>
-          </a:bodyPr>
-          <a:lstStyle/>
-          <a:p>
-            <a:r>
-              <a:rPr sz="2700" b="1">
-                <a:solidFill>
-                  <a:srgbClr val="3A2B28"/>
-                </a:solidFill>
-                <a:latin typeface="Cambria"/>
-              </a:rPr>
-              <a:t>Bốn con số của một trang văn bản đúng chuẩn</a:t>
-            </a:r>
-          </a:p>
-        </p:txBody>
-      </p:sp>
-      <p:sp>
-        <p:nvSpPr>
-          <p:cNvPr id="5" name="Rounded Rectangle 4"/>
-          <p:cNvSpPr/>
-          <p:nvPr/>
-        </p:nvSpPr>
-        <p:spPr>
-          <a:xfrm>
-            <a:off x="502920" y="1783080"/>
-            <a:ext cx="2622042" cy="3429000"/>
-          </a:xfrm>
-          <a:prstGeom prst="roundRect">
-            <a:avLst>
-              <a:gd name="adj" fmla="val 7000"/>
-            </a:avLst>
-          </a:prstGeom>
-          <a:solidFill>
-            <a:srgbClr val="FFFFFF"/>
-          </a:solidFill>
-          <a:ln w="15875">
-            <a:solidFill>
-              <a:srgbClr val="FBCEC9"/>
-            </a:solidFill>
-          </a:ln>
-          <a:effectLst/>
-        </p:spPr>
-        <p:style>
-          <a:lnRef idx="1">
-            <a:schemeClr val="accent1"/>
-          </a:lnRef>
-          <a:fillRef idx="3">
-            <a:schemeClr val="accent1"/>
-          </a:fillRef>
-          <a:effectRef idx="2">
-            <a:schemeClr val="accent1"/>
-          </a:effectRef>
-          <a:fontRef idx="minor">
-            <a:schemeClr val="lt1"/>
-          </a:fontRef>
-        </p:style>
-        <p:txBody>
-          <a:bodyPr rtlCol="0" anchor="ctr" wrap="square" lIns="182880" rIns="182880" tIns="274320" bIns="182880"/>
-          <a:lstStyle/>
-          <a:p>
-            <a:pPr algn="ctr"/>
-            <a:r>
-              <a:rPr sz="5800" b="1">
-                <a:solidFill>
-                  <a:srgbClr val="DC756A"/>
-                </a:solidFill>
-                <a:latin typeface="Cambria"/>
-              </a:rPr>
-              <a:t>A4</a:t>
-            </a:r>
-          </a:p>
-          <a:p>
-            <a:pPr algn="ctr"/>
-            <a:r>
-              <a:rPr sz="1400" b="1">
-                <a:solidFill>
-                  <a:srgbClr val="AC4D33"/>
-                </a:solidFill>
-                <a:latin typeface="Calibri"/>
-              </a:rPr>
-              <a:t>KHỔ GIẤY</a:t>
-            </a:r>
-          </a:p>
-          <a:p>
-            <a:pPr algn="ctr">
-              <a:spcBef>
-                <a:spcPts val="1200"/>
-              </a:spcBef>
-            </a:pPr>
-            <a:r>
-              <a:rPr sz="1250">
-                <a:solidFill>
-                  <a:srgbClr val="3A2B28"/>
-                </a:solidFill>
-                <a:latin typeface="Calibri"/>
-              </a:rPr>
-              <a:t>210 × 297 mm — không dùng khổ Letter</a:t>
-            </a:r>
-          </a:p>
-        </p:txBody>
-      </p:sp>
-      <p:sp>
-        <p:nvSpPr>
-          <p:cNvPr id="6" name="Rounded Rectangle 5"/>
-          <p:cNvSpPr/>
-          <p:nvPr/>
-        </p:nvSpPr>
-        <p:spPr>
-          <a:xfrm>
-            <a:off x="3362706" y="1783080"/>
-            <a:ext cx="2622042" cy="3429000"/>
-          </a:xfrm>
-          <a:prstGeom prst="roundRect">
-            <a:avLst>
-              <a:gd name="adj" fmla="val 7000"/>
-            </a:avLst>
-          </a:prstGeom>
-          <a:solidFill>
-            <a:srgbClr val="FFFFFF"/>
-          </a:solidFill>
-          <a:ln w="15875">
-            <a:solidFill>
-              <a:srgbClr val="FBCEC9"/>
-            </a:solidFill>
-          </a:ln>
-          <a:effectLst/>
-        </p:spPr>
-        <p:style>
-          <a:lnRef idx="1">
-            <a:schemeClr val="accent1"/>
-          </a:lnRef>
-          <a:fillRef idx="3">
-            <a:schemeClr val="accent1"/>
-          </a:fillRef>
-          <a:effectRef idx="2">
-            <a:schemeClr val="accent1"/>
-          </a:effectRef>
-          <a:fontRef idx="minor">
-            <a:schemeClr val="lt1"/>
-          </a:fontRef>
-        </p:style>
-        <p:txBody>
-          <a:bodyPr rtlCol="0" anchor="ctr" wrap="square" lIns="182880" rIns="182880" tIns="274320" bIns="182880"/>
-          <a:lstStyle/>
-          <a:p>
-            <a:pPr algn="ctr"/>
-            <a:r>
-              <a:rPr sz="5800" b="1">
-                <a:solidFill>
-                  <a:srgbClr val="DC756A"/>
-                </a:solidFill>
-                <a:latin typeface="Cambria"/>
-              </a:rPr>
-              <a:t>30–35</a:t>
-            </a:r>
-          </a:p>
-          <a:p>
-            <a:pPr algn="ctr"/>
-            <a:r>
-              <a:rPr sz="1400" b="1">
-                <a:solidFill>
-                  <a:srgbClr val="AC4D33"/>
-                </a:solidFill>
-                <a:latin typeface="Calibri"/>
-              </a:rPr>
-              <a:t>MILIMET</a:t>
-            </a:r>
-          </a:p>
-          <a:p>
-            <a:pPr algn="ctr">
-              <a:spcBef>
-                <a:spcPts val="1200"/>
-              </a:spcBef>
-            </a:pPr>
-            <a:r>
-              <a:rPr sz="1250">
-                <a:solidFill>
-                  <a:srgbClr val="3A2B28"/>
-                </a:solidFill>
-                <a:latin typeface="Calibri"/>
-              </a:rPr>
-              <a:t>Lề trái, rộng nhất để đóng gáy lưu trữ</a:t>
-            </a:r>
-          </a:p>
-        </p:txBody>
-      </p:sp>
-      <p:sp>
-        <p:nvSpPr>
-          <p:cNvPr id="7" name="Rounded Rectangle 6"/>
-          <p:cNvSpPr/>
-          <p:nvPr/>
-        </p:nvSpPr>
-        <p:spPr>
-          <a:xfrm>
-            <a:off x="6222492" y="1783080"/>
-            <a:ext cx="2622042" cy="3429000"/>
-          </a:xfrm>
-          <a:prstGeom prst="roundRect">
-            <a:avLst>
-              <a:gd name="adj" fmla="val 7000"/>
-            </a:avLst>
-          </a:prstGeom>
-          <a:solidFill>
-            <a:srgbClr val="FFFFFF"/>
-          </a:solidFill>
-          <a:ln w="15875">
-            <a:solidFill>
-              <a:srgbClr val="FBCEC9"/>
-            </a:solidFill>
-          </a:ln>
-          <a:effectLst/>
-        </p:spPr>
-        <p:style>
-          <a:lnRef idx="1">
-            <a:schemeClr val="accent1"/>
-          </a:lnRef>
-          <a:fillRef idx="3">
-            <a:schemeClr val="accent1"/>
-          </a:fillRef>
-          <a:effectRef idx="2">
-            <a:schemeClr val="accent1"/>
-          </a:effectRef>
-          <a:fontRef idx="minor">
-            <a:schemeClr val="lt1"/>
-          </a:fontRef>
-        </p:style>
-        <p:txBody>
-          <a:bodyPr rtlCol="0" anchor="ctr" wrap="square" lIns="182880" rIns="182880" tIns="274320" bIns="182880"/>
-          <a:lstStyle/>
-          <a:p>
-            <a:pPr algn="ctr"/>
-            <a:r>
-              <a:rPr sz="5800" b="1">
-                <a:solidFill>
-                  <a:srgbClr val="DC756A"/>
-                </a:solidFill>
-                <a:latin typeface="Cambria"/>
-              </a:rPr>
-              <a:t>13–14</a:t>
-            </a:r>
-          </a:p>
-          <a:p>
-            <a:pPr algn="ctr"/>
-            <a:r>
-              <a:rPr sz="1400" b="1">
-                <a:solidFill>
-                  <a:srgbClr val="AC4D33"/>
-                </a:solidFill>
-                <a:latin typeface="Calibri"/>
-              </a:rPr>
-              <a:t>CỠ CHỮ</a:t>
-            </a:r>
-          </a:p>
-          <a:p>
-            <a:pPr algn="ctr">
-              <a:spcBef>
-                <a:spcPts val="1200"/>
-              </a:spcBef>
-            </a:pPr>
-            <a:r>
-              <a:rPr sz="1250">
-                <a:solidFill>
-                  <a:srgbClr val="3A2B28"/>
-                </a:solidFill>
-                <a:latin typeface="Calibri"/>
-              </a:rPr>
-              <a:t>Times New Roman, bộ mã Unicode, màu đen</a:t>
-            </a:r>
-          </a:p>
-        </p:txBody>
-      </p:sp>
-      <p:sp>
-        <p:nvSpPr>
-          <p:cNvPr id="8" name="Rounded Rectangle 7"/>
-          <p:cNvSpPr/>
-          <p:nvPr/>
-        </p:nvSpPr>
-        <p:spPr>
-          <a:xfrm>
-            <a:off x="9082278" y="1783080"/>
-            <a:ext cx="2622042" cy="3429000"/>
-          </a:xfrm>
-          <a:prstGeom prst="roundRect">
-            <a:avLst>
-              <a:gd name="adj" fmla="val 7000"/>
-            </a:avLst>
-          </a:prstGeom>
-          <a:solidFill>
-            <a:srgbClr val="FFFFFF"/>
-          </a:solidFill>
-          <a:ln w="15875">
-            <a:solidFill>
-              <a:srgbClr val="FBCEC9"/>
-            </a:solidFill>
-          </a:ln>
-          <a:effectLst/>
-        </p:spPr>
-        <p:style>
-          <a:lnRef idx="1">
-            <a:schemeClr val="accent1"/>
-          </a:lnRef>
-          <a:fillRef idx="3">
-            <a:schemeClr val="accent1"/>
-          </a:fillRef>
-          <a:effectRef idx="2">
-            <a:schemeClr val="accent1"/>
-          </a:effectRef>
-          <a:fontRef idx="minor">
-            <a:schemeClr val="lt1"/>
-          </a:fontRef>
-        </p:style>
-        <p:txBody>
-          <a:bodyPr rtlCol="0" anchor="ctr" wrap="square" lIns="182880" rIns="182880" tIns="274320" bIns="182880"/>
-          <a:lstStyle/>
-          <a:p>
-            <a:pPr algn="ctr"/>
-            <a:r>
-              <a:rPr sz="5800" b="1">
-                <a:solidFill>
-                  <a:srgbClr val="DC756A"/>
-                </a:solidFill>
-                <a:latin typeface="Cambria"/>
-              </a:rPr>
-              <a:t>9</a:t>
-            </a:r>
-          </a:p>
-          <a:p>
-            <a:pPr algn="ctr"/>
-            <a:r>
-              <a:rPr sz="1400" b="1">
-                <a:solidFill>
-                  <a:srgbClr val="AC4D33"/>
-                </a:solidFill>
-                <a:latin typeface="Calibri"/>
-              </a:rPr>
-              <a:t>THÀNH PHẦN</a:t>
-            </a:r>
-          </a:p>
-          <a:p>
-            <a:pPr algn="ctr">
-              <a:spcBef>
-                <a:spcPts val="1200"/>
-              </a:spcBef>
-            </a:pPr>
-            <a:r>
-              <a:rPr sz="1250">
-                <a:solidFill>
-                  <a:srgbClr val="3A2B28"/>
-                </a:solidFill>
-                <a:latin typeface="Calibri"/>
-              </a:rPr>
-              <a:t>Số thành phần thể thức bắt buộc theo NĐ 30/2020</a:t>
-            </a:r>
-          </a:p>
-        </p:txBody>
-      </p:sp>
-      <p:sp>
-        <p:nvSpPr>
-          <p:cNvPr id="9" name="Rounded Rectangle 8"/>
-          <p:cNvSpPr/>
-          <p:nvPr/>
-        </p:nvSpPr>
-        <p:spPr>
-          <a:xfrm>
-            <a:off x="502920" y="5440680"/>
-            <a:ext cx="11201400" cy="685800"/>
-          </a:xfrm>
-          <a:prstGeom prst="roundRect">
-            <a:avLst>
-              <a:gd name="adj" fmla="val 12000"/>
-            </a:avLst>
-          </a:prstGeom>
-          <a:solidFill>
-            <a:srgbClr val="FDF1EF"/>
-          </a:solidFill>
-          <a:ln w="12700">
-            <a:solidFill>
-              <a:srgbClr val="FBCEC9"/>
-            </a:solidFill>
-          </a:ln>
-          <a:effectLst/>
-        </p:spPr>
-        <p:style>
-          <a:lnRef idx="1">
-            <a:schemeClr val="accent1"/>
-          </a:lnRef>
-          <a:fillRef idx="3">
-            <a:schemeClr val="accent1"/>
-          </a:fillRef>
-          <a:effectRef idx="2">
-            <a:schemeClr val="accent1"/>
-          </a:effectRef>
-          <a:fontRef idx="minor">
-            <a:schemeClr val="lt1"/>
-          </a:fontRef>
-        </p:style>
-        <p:txBody>
-          <a:bodyPr rtlCol="0" anchor="ctr" wrap="square" lIns="201168" rIns="201168"/>
-          <a:lstStyle/>
-          <a:p>
-            <a:pPr algn="ctr"/>
-            <a:r>
-              <a:rPr sz="1300">
-                <a:solidFill>
-                  <a:srgbClr val="3A2B28"/>
-                </a:solidFill>
-                <a:latin typeface="Calibri"/>
-              </a:rPr>
-              <a:t>Lề trên và dưới 20 – 25 mm • lề phải 15 – 20 mm • số trang đánh từ trang thứ hai, canh giữa theo lề trên.</a:t>
-            </a:r>
-          </a:p>
-        </p:txBody>
-      </p:sp>
-      <p:sp>
-        <p:nvSpPr>
-          <p:cNvPr id="10" name="TextBox 9"/>
-          <p:cNvSpPr txBox="1"/>
-          <p:nvPr/>
-        </p:nvSpPr>
-        <p:spPr>
-          <a:xfrm>
-            <a:off x="502920" y="6419088"/>
-            <a:ext cx="7772400" cy="292608"/>
-          </a:xfrm>
-          <a:prstGeom prst="rect">
-            <a:avLst/>
-          </a:prstGeom>
-          <a:noFill/>
-        </p:spPr>
-        <p:txBody>
-          <a:bodyPr wrap="none">
-            <a:spAutoFit/>
-          </a:bodyPr>
-          <a:lstStyle/>
-          <a:p>
-            <a:r>
-              <a:rPr sz="900">
-                <a:solidFill>
-                  <a:srgbClr val="8A7A76"/>
-                </a:solidFill>
-                <a:latin typeface="Calibri"/>
-              </a:rPr>
-              <a:t>Je m'appelle Huong  •  GV. Đỗ Thùy Hương  •  EC1103</a:t>
-            </a:r>
-          </a:p>
-        </p:txBody>
-      </p:sp>
-      <p:sp>
-        <p:nvSpPr>
-          <p:cNvPr id="11" name="TextBox 10"/>
-          <p:cNvSpPr txBox="1"/>
-          <p:nvPr/>
-        </p:nvSpPr>
-        <p:spPr>
-          <a:xfrm>
-            <a:off x="9326880" y="6419088"/>
-            <a:ext cx="1920240" cy="292608"/>
-          </a:xfrm>
-          <a:prstGeom prst="rect">
-            <a:avLst/>
-          </a:prstGeom>
-          <a:noFill/>
-        </p:spPr>
-        <p:txBody>
-          <a:bodyPr wrap="none">
-            <a:spAutoFit/>
-          </a:bodyPr>
-          <a:lstStyle/>
-          <a:p>
-            <a:pPr algn="r"/>
-            <a:r>
-              <a:rPr sz="900">
-                <a:solidFill>
-                  <a:srgbClr val="8A7A76"/>
-                </a:solidFill>
-                <a:latin typeface="Calibri"/>
-              </a:rPr>
-              <a:t>Chương 5</a:t>
-            </a:r>
-          </a:p>
-        </p:txBody>
-      </p:sp>
-    </p:spTree>
-  </p:cSld>
-  <p:clrMapOvr>
-    <a:masterClrMapping/>
-  </p:clrMapOvr>
-</p:sld>
-</file>
-
-<file path=ppt/slides/slide19.xml><?xml version="1.0" encoding="utf-8"?>
-<p:sld xmlns:a="http://schemas.openxmlformats.org/drawingml/2006/main" xmlns:p="http://schemas.openxmlformats.org/presentationml/2006/main" xmlns:r="http://schemas.openxmlformats.org/officeDocument/2006/relationships">
-  <p:cSld>
-    <p:spTree>
-      <p:nvGrpSpPr>
-        <p:cNvPr id="1" name=""/>
-        <p:cNvGrpSpPr/>
-        <p:nvPr/>
-      </p:nvGrpSpPr>
-      <p:grpSpPr/>
-      <p:sp>
-        <p:nvSpPr>
-          <p:cNvPr id="2" name="Rectangle 1"/>
-          <p:cNvSpPr/>
-          <p:nvPr/>
-        </p:nvSpPr>
-        <p:spPr>
-          <a:xfrm>
-            <a:off x="0" y="0"/>
-            <a:ext cx="12191695" cy="6858000"/>
-          </a:xfrm>
-          <a:prstGeom prst="rect">
-            <a:avLst/>
-          </a:prstGeom>
-          <a:solidFill>
-            <a:srgbClr val="FDFBF8"/>
-          </a:solidFill>
-          <a:ln>
-            <a:noFill/>
-          </a:ln>
-          <a:effectLst/>
-        </p:spPr>
-        <p:style>
-          <a:lnRef idx="1">
-            <a:schemeClr val="accent1"/>
-          </a:lnRef>
-          <a:fillRef idx="3">
-            <a:schemeClr val="accent1"/>
-          </a:fillRef>
-          <a:effectRef idx="2">
-            <a:schemeClr val="accent1"/>
-          </a:effectRef>
-          <a:fontRef idx="minor">
-            <a:schemeClr val="lt1"/>
-          </a:fontRef>
-        </p:style>
-        <p:txBody>
-          <a:bodyPr rtlCol="0" anchor="ctr"/>
-          <a:lstStyle/>
-          <a:p>
-            <a:pPr algn="ctr"/>
-          </a:p>
-        </p:txBody>
-      </p:sp>
-      <p:sp>
-        <p:nvSpPr>
-          <p:cNvPr id="3" name="Rectangle 2"/>
-          <p:cNvSpPr/>
-          <p:nvPr/>
-        </p:nvSpPr>
-        <p:spPr>
-          <a:xfrm>
-            <a:off x="0" y="2103120"/>
-            <a:ext cx="12191695" cy="2743200"/>
-          </a:xfrm>
-          <a:prstGeom prst="rect">
-            <a:avLst/>
-          </a:prstGeom>
-          <a:solidFill>
-            <a:srgbClr val="FDF1EF"/>
-          </a:solidFill>
-          <a:ln>
-            <a:noFill/>
-          </a:ln>
-          <a:effectLst/>
-        </p:spPr>
-        <p:style>
-          <a:lnRef idx="1">
-            <a:schemeClr val="accent1"/>
-          </a:lnRef>
-          <a:fillRef idx="3">
-            <a:schemeClr val="accent1"/>
-          </a:fillRef>
-          <a:effectRef idx="2">
-            <a:schemeClr val="accent1"/>
-          </a:effectRef>
-          <a:fontRef idx="minor">
-            <a:schemeClr val="lt1"/>
-          </a:fontRef>
-        </p:style>
-        <p:txBody>
-          <a:bodyPr rtlCol="0" anchor="ctr"/>
-          <a:lstStyle/>
-          <a:p>
-            <a:pPr algn="ctr"/>
-          </a:p>
-        </p:txBody>
-      </p:sp>
-      <p:sp>
-        <p:nvSpPr>
-          <p:cNvPr id="4" name="Rectangle 3"/>
-          <p:cNvSpPr/>
-          <p:nvPr/>
-        </p:nvSpPr>
-        <p:spPr>
-          <a:xfrm>
-            <a:off x="0" y="0"/>
-            <a:ext cx="274320" cy="6858000"/>
-          </a:xfrm>
-          <a:prstGeom prst="rect">
-            <a:avLst/>
-          </a:prstGeom>
-          <a:solidFill>
-            <a:srgbClr val="DC756A"/>
-          </a:solidFill>
-          <a:ln>
-            <a:noFill/>
-          </a:ln>
-          <a:effectLst/>
-        </p:spPr>
-        <p:style>
-          <a:lnRef idx="1">
-            <a:schemeClr val="accent1"/>
-          </a:lnRef>
-          <a:fillRef idx="3">
-            <a:schemeClr val="accent1"/>
-          </a:fillRef>
-          <a:effectRef idx="2">
-            <a:schemeClr val="accent1"/>
-          </a:effectRef>
-          <a:fontRef idx="minor">
-            <a:schemeClr val="lt1"/>
-          </a:fontRef>
-        </p:style>
-        <p:txBody>
-          <a:bodyPr rtlCol="0" anchor="ctr"/>
-          <a:lstStyle/>
-          <a:p>
-            <a:pPr algn="ctr"/>
-          </a:p>
-        </p:txBody>
-      </p:sp>
-      <p:sp>
-        <p:nvSpPr>
-          <p:cNvPr id="5" name="TextBox 4"/>
-          <p:cNvSpPr txBox="1"/>
-          <p:nvPr/>
-        </p:nvSpPr>
-        <p:spPr>
-          <a:xfrm>
-            <a:off x="1280160" y="2377440"/>
-            <a:ext cx="9692640" cy="411480"/>
-          </a:xfrm>
-          <a:prstGeom prst="rect">
-            <a:avLst/>
-          </a:prstGeom>
-          <a:noFill/>
-        </p:spPr>
-        <p:txBody>
-          <a:bodyPr wrap="none">
-            <a:spAutoFit/>
-          </a:bodyPr>
-          <a:lstStyle/>
-          <a:p>
-            <a:r>
-              <a:rPr sz="1500" b="1">
-                <a:solidFill>
-                  <a:srgbClr val="DC756A"/>
-                </a:solidFill>
-                <a:latin typeface="Calibri"/>
-              </a:rPr>
-              <a:t>MỤC 5.1 – 5.2</a:t>
-            </a:r>
-          </a:p>
-        </p:txBody>
-      </p:sp>
-      <p:sp>
-        <p:nvSpPr>
-          <p:cNvPr id="6" name="TextBox 5"/>
-          <p:cNvSpPr txBox="1"/>
-          <p:nvPr/>
-        </p:nvSpPr>
-        <p:spPr>
-          <a:xfrm>
-            <a:off x="1280160" y="2788920"/>
-            <a:ext cx="9601200" cy="1371600"/>
-          </a:xfrm>
-          <a:prstGeom prst="rect">
-            <a:avLst/>
-          </a:prstGeom>
-          <a:noFill/>
-        </p:spPr>
-        <p:txBody>
-          <a:bodyPr wrap="square">
-            <a:spAutoFit/>
-          </a:bodyPr>
-          <a:lstStyle/>
-          <a:p>
-            <a:r>
-              <a:rPr sz="3300" b="1">
-                <a:solidFill>
-                  <a:srgbClr val="AC4D33"/>
-                </a:solidFill>
-                <a:latin typeface="Cambria"/>
-              </a:rPr>
-              <a:t>Khái niệm, phân loại và thể thức văn bản</a:t>
-            </a:r>
-          </a:p>
-        </p:txBody>
-      </p:sp>
-      <p:sp>
-        <p:nvSpPr>
-          <p:cNvPr id="7" name="TextBox 6"/>
-          <p:cNvSpPr txBox="1"/>
-          <p:nvPr/>
-        </p:nvSpPr>
-        <p:spPr>
-          <a:xfrm>
-            <a:off x="1280160" y="4224528"/>
-            <a:ext cx="9418320" cy="640080"/>
-          </a:xfrm>
-          <a:prstGeom prst="rect">
-            <a:avLst/>
-          </a:prstGeom>
-          <a:noFill/>
-        </p:spPr>
-        <p:txBody>
-          <a:bodyPr wrap="square">
-            <a:spAutoFit/>
-          </a:bodyPr>
-          <a:lstStyle/>
-          <a:p>
-            <a:r>
-              <a:rPr sz="1450" i="1">
-                <a:solidFill>
-                  <a:srgbClr val="8A7A76"/>
-                </a:solidFill>
-                <a:latin typeface="Calibri"/>
-              </a:rPr>
-              <a:t>Nền tảng pháp lý và kỹ thuật: văn bản là gì và một trang văn bản đúng chuẩn trông thế nào.</a:t>
-            </a:r>
-          </a:p>
-        </p:txBody>
-      </p:sp>
-      <p:sp>
-        <p:nvSpPr>
-          <p:cNvPr id="8" name="TextBox 7"/>
-          <p:cNvSpPr txBox="1"/>
-          <p:nvPr/>
-        </p:nvSpPr>
-        <p:spPr>
-          <a:xfrm>
-            <a:off x="502920" y="6419088"/>
-            <a:ext cx="7772400" cy="292608"/>
-          </a:xfrm>
-          <a:prstGeom prst="rect">
-            <a:avLst/>
-          </a:prstGeom>
-          <a:noFill/>
-        </p:spPr>
-        <p:txBody>
-          <a:bodyPr wrap="none">
-            <a:spAutoFit/>
-          </a:bodyPr>
-          <a:lstStyle/>
-          <a:p>
-            <a:r>
-              <a:rPr sz="900">
-                <a:solidFill>
-                  <a:srgbClr val="8A7A76"/>
-                </a:solidFill>
-                <a:latin typeface="Calibri"/>
-              </a:rPr>
-              <a:t>Je m'appelle Huong  •  GV. Đỗ Thùy Hương  •  EC1103</a:t>
-            </a:r>
-          </a:p>
-        </p:txBody>
-      </p:sp>
-      <p:sp>
-        <p:nvSpPr>
-          <p:cNvPr id="9" name="TextBox 8"/>
-          <p:cNvSpPr txBox="1"/>
-          <p:nvPr/>
-        </p:nvSpPr>
-        <p:spPr>
-          <a:xfrm>
-            <a:off x="9326880" y="6419088"/>
-            <a:ext cx="1920240" cy="292608"/>
-          </a:xfrm>
-          <a:prstGeom prst="rect">
-            <a:avLst/>
-          </a:prstGeom>
-          <a:noFill/>
-        </p:spPr>
-        <p:txBody>
-          <a:bodyPr wrap="none">
-            <a:spAutoFit/>
-          </a:bodyPr>
-          <a:lstStyle/>
-          <a:p>
-            <a:pPr algn="r"/>
-            <a:r>
-              <a:rPr sz="900">
-                <a:solidFill>
-                  <a:srgbClr val="8A7A76"/>
-                </a:solidFill>
-                <a:latin typeface="Calibri"/>
-              </a:rPr>
-              <a:t>Chương 5</a:t>
-            </a:r>
           </a:p>
         </p:txBody>
       </p:sp>
@@ -8966,7 +8318,7 @@
       </p:grpSpPr>
       <p:pic>
         <p:nvPicPr>
-          <p:cNvPr id="2" name="Image 0" descr="assets/logo_tron.png">    </p:cNvPr>
+          <p:cNvPr id="2" name="Image 0" descr="/home/user/comdraft/assets/img/dau-huong.png">    </p:cNvPr>
           <p:cNvPicPr>
             <a:picLocks noChangeAspect="1"/>
           </p:cNvPicPr>
@@ -9680,315 +9032,761 @@
 </file>
 
 <file path=ppt/slides/slide20.xml><?xml version="1.0" encoding="utf-8"?>
-<p:sld xmlns:a="http://schemas.openxmlformats.org/drawingml/2006/main" xmlns:p="http://schemas.openxmlformats.org/presentationml/2006/main" xmlns:r="http://schemas.openxmlformats.org/officeDocument/2006/relationships">
-  <p:cSld>
+<p:sld xmlns:a="http://schemas.openxmlformats.org/drawingml/2006/main" xmlns:r="http://schemas.openxmlformats.org/officeDocument/2006/relationships" xmlns:p="http://schemas.openxmlformats.org/presentationml/2006/main">
+  <p:cSld name="Slide 16">
+    <p:bg>
+      <p:bgPr>
+        <a:solidFill>
+          <a:srgbClr val="FDFBF8"/>
+        </a:solidFill>
+      </p:bgPr>
+    </p:bg>
     <p:spTree>
       <p:nvGrpSpPr>
         <p:cNvPr id="1" name=""/>
         <p:cNvGrpSpPr/>
         <p:nvPr/>
       </p:nvGrpSpPr>
-      <p:grpSpPr/>
-      <p:sp>
-        <p:nvSpPr>
-          <p:cNvPr id="2" name="Rectangle 1"/>
-          <p:cNvSpPr/>
-          <p:nvPr/>
-        </p:nvSpPr>
-        <p:spPr>
-          <a:xfrm>
-            <a:off x="0" y="0"/>
-            <a:ext cx="12191695" cy="6858000"/>
-          </a:xfrm>
-          <a:prstGeom prst="rect">
-            <a:avLst/>
-          </a:prstGeom>
-          <a:solidFill>
-            <a:srgbClr val="FDFBF8"/>
-          </a:solidFill>
-          <a:ln>
-            <a:noFill/>
-          </a:ln>
-          <a:effectLst/>
-        </p:spPr>
-        <p:style>
-          <a:lnRef idx="1">
-            <a:schemeClr val="accent1"/>
-          </a:lnRef>
-          <a:fillRef idx="3">
-            <a:schemeClr val="accent1"/>
-          </a:fillRef>
-          <a:effectRef idx="2">
-            <a:schemeClr val="accent1"/>
-          </a:effectRef>
-          <a:fontRef idx="minor">
-            <a:schemeClr val="lt1"/>
-          </a:fontRef>
-        </p:style>
-        <p:txBody>
-          <a:bodyPr rtlCol="0" anchor="ctr"/>
-          <a:lstStyle/>
-          <a:p>
-            <a:pPr algn="ctr"/>
-          </a:p>
-        </p:txBody>
-      </p:sp>
-      <p:sp>
-        <p:nvSpPr>
-          <p:cNvPr id="3" name="Rectangle 2"/>
-          <p:cNvSpPr/>
-          <p:nvPr/>
-        </p:nvSpPr>
-        <p:spPr>
-          <a:xfrm>
-            <a:off x="0" y="2103120"/>
-            <a:ext cx="12191695" cy="2743200"/>
-          </a:xfrm>
-          <a:prstGeom prst="rect">
-            <a:avLst/>
-          </a:prstGeom>
-          <a:solidFill>
-            <a:srgbClr val="FDF1EF"/>
-          </a:solidFill>
-          <a:ln>
-            <a:noFill/>
-          </a:ln>
-          <a:effectLst/>
-        </p:spPr>
-        <p:style>
-          <a:lnRef idx="1">
-            <a:schemeClr val="accent1"/>
-          </a:lnRef>
-          <a:fillRef idx="3">
-            <a:schemeClr val="accent1"/>
-          </a:fillRef>
-          <a:effectRef idx="2">
-            <a:schemeClr val="accent1"/>
-          </a:effectRef>
-          <a:fontRef idx="minor">
-            <a:schemeClr val="lt1"/>
-          </a:fontRef>
-        </p:style>
-        <p:txBody>
-          <a:bodyPr rtlCol="0" anchor="ctr"/>
-          <a:lstStyle/>
-          <a:p>
-            <a:pPr algn="ctr"/>
-          </a:p>
-        </p:txBody>
-      </p:sp>
-      <p:sp>
-        <p:nvSpPr>
-          <p:cNvPr id="4" name="Rectangle 3"/>
-          <p:cNvSpPr/>
-          <p:nvPr/>
-        </p:nvSpPr>
-        <p:spPr>
-          <a:xfrm>
-            <a:off x="0" y="0"/>
-            <a:ext cx="274320" cy="6858000"/>
-          </a:xfrm>
-          <a:prstGeom prst="rect">
+      <p:grpSpPr>
+        <a:xfrm>
+          <a:off x="0" y="0"/>
+          <a:ext cx="0" cy="0"/>
+          <a:chOff x="0" y="0"/>
+          <a:chExt cx="0" cy="0"/>
+        </a:xfrm>
+      </p:grpSpPr>
+      <p:pic>
+        <p:nvPicPr>
+          <p:cNvPr id="2" name="Image 0" descr="/home/user/comdraft/assets/img/dau-huong.png">    </p:cNvPr>
+          <p:cNvPicPr>
+            <a:picLocks noChangeAspect="1"/>
+          </p:cNvPicPr>
+          <p:nvPr/>
+        </p:nvPicPr>
+        <p:blipFill>
+          <a:blip r:embed="rId1"/>
+          <a:stretch>
+            <a:fillRect/>
+          </a:stretch>
+        </p:blipFill>
+        <p:spPr>
+          <a:xfrm>
+            <a:off x="411480" y="6327648"/>
+            <a:ext cx="384048" cy="384048"/>
+          </a:xfrm>
+          <a:prstGeom prst="rect">
+            <a:avLst/>
+          </a:prstGeom>
+        </p:spPr>
+      </p:pic>
+      <p:sp>
+        <p:nvSpPr>
+          <p:cNvPr id="3" name="Text 0"/>
+          <p:cNvSpPr/>
+          <p:nvPr/>
+        </p:nvSpPr>
+        <p:spPr>
+          <a:xfrm>
+            <a:off x="868680" y="6355080"/>
+            <a:ext cx="7498080" cy="310896"/>
+          </a:xfrm>
+          <a:prstGeom prst="rect">
+            <a:avLst/>
+          </a:prstGeom>
+          <a:noFill/>
+          <a:ln/>
+        </p:spPr>
+        <p:txBody>
+          <a:bodyPr wrap="square" lIns="0" tIns="0" rIns="0" bIns="0" rtlCol="0" anchor="ctr"/>
+          <a:lstStyle/>
+          <a:p>
+            <a:pPr indent="0" marL="0">
+              <a:buNone/>
+            </a:pPr>
+            <a:r>
+              <a:rPr lang="en-US" sz="900" dirty="0">
+                <a:solidFill>
+                  <a:srgbClr val="8A7A76"/>
+                </a:solidFill>
+                <a:latin typeface="Calibri" pitchFamily="34" charset="0"/>
+                <a:ea typeface="Calibri" pitchFamily="34" charset="-122"/>
+                <a:cs typeface="Calibri" pitchFamily="34" charset="-120"/>
+              </a:rPr>
+              <a:t>Je m'appelle Huong  •  GV. Đỗ Thùy Hương  •  EC1103</a:t>
+            </a:r>
+            <a:endParaRPr lang="en-US" sz="900" dirty="0"/>
+          </a:p>
+        </p:txBody>
+      </p:sp>
+      <p:sp>
+        <p:nvSpPr>
+          <p:cNvPr id="4" name="Text 1"/>
+          <p:cNvSpPr/>
+          <p:nvPr/>
+        </p:nvSpPr>
+        <p:spPr>
+          <a:xfrm>
+            <a:off x="8503920" y="6355080"/>
+            <a:ext cx="2743200" cy="310896"/>
+          </a:xfrm>
+          <a:prstGeom prst="rect">
+            <a:avLst/>
+          </a:prstGeom>
+          <a:noFill/>
+          <a:ln/>
+        </p:spPr>
+        <p:txBody>
+          <a:bodyPr wrap="square" lIns="0" tIns="0" rIns="0" bIns="0" rtlCol="0" anchor="ctr"/>
+          <a:lstStyle/>
+          <a:p>
+            <a:pPr algn="r" indent="0" marL="0">
+              <a:buNone/>
+            </a:pPr>
+            <a:r>
+              <a:rPr lang="en-US" sz="900" dirty="0">
+                <a:solidFill>
+                  <a:srgbClr val="8A7A76"/>
+                </a:solidFill>
+                <a:latin typeface="Calibri" pitchFamily="34" charset="0"/>
+                <a:ea typeface="Calibri" pitchFamily="34" charset="-122"/>
+                <a:cs typeface="Calibri" pitchFamily="34" charset="-120"/>
+              </a:rPr>
+              <a:t>Chương 5</a:t>
+            </a:r>
+            <a:endParaRPr lang="en-US" sz="900" dirty="0"/>
+          </a:p>
+        </p:txBody>
+      </p:sp>
+      <p:sp>
+        <p:nvSpPr>
+          <p:cNvPr id="5" name="Shape 2"/>
+          <p:cNvSpPr/>
+          <p:nvPr/>
+        </p:nvSpPr>
+        <p:spPr>
+          <a:xfrm>
+            <a:off x="11430000" y="6327648"/>
+            <a:ext cx="365760" cy="365760"/>
+          </a:xfrm>
+          <a:prstGeom prst="ellipse">
             <a:avLst/>
           </a:prstGeom>
           <a:solidFill>
             <a:srgbClr val="DC756A"/>
           </a:solidFill>
-          <a:ln>
-            <a:noFill/>
+          <a:ln/>
+        </p:spPr>
+        <p:txBody>
+          <a:bodyPr/>
+          <a:p/>
+        </p:txBody>
+      </p:sp>
+      <p:sp>
+        <p:nvSpPr>
+          <p:cNvPr id="6" name="Text 3"/>
+          <p:cNvSpPr/>
+          <p:nvPr/>
+        </p:nvSpPr>
+        <p:spPr>
+          <a:xfrm>
+            <a:off x="11430000" y="6327648"/>
+            <a:ext cx="365760" cy="365760"/>
+          </a:xfrm>
+          <a:prstGeom prst="rect">
+            <a:avLst/>
+          </a:prstGeom>
+          <a:noFill/>
+          <a:ln/>
+        </p:spPr>
+        <p:txBody>
+          <a:bodyPr wrap="square" lIns="0" tIns="0" rIns="0" bIns="0" rtlCol="0" anchor="ctr"/>
+          <a:lstStyle/>
+          <a:p>
+            <a:pPr algn="ctr" indent="0" marL="0">
+              <a:buNone/>
+            </a:pPr>
+            <a:r>
+              <a:rPr lang="en-US" sz="1000" b="1" dirty="0">
+                <a:solidFill>
+                  <a:srgbClr val="FFFFFF"/>
+                </a:solidFill>
+                <a:latin typeface="Calibri" pitchFamily="34" charset="0"/>
+                <a:ea typeface="Calibri" pitchFamily="34" charset="-122"/>
+                <a:cs typeface="Calibri" pitchFamily="34" charset="-120"/>
+              </a:rPr>
+              <a:t>16</a:t>
+            </a:r>
+            <a:endParaRPr lang="en-US" sz="1000" dirty="0"/>
+          </a:p>
+        </p:txBody>
+      </p:sp>
+      <p:sp>
+        <p:nvSpPr>
+          <p:cNvPr id="7" name="Text 4"/>
+          <p:cNvSpPr/>
+          <p:nvPr/>
+        </p:nvSpPr>
+        <p:spPr>
+          <a:xfrm>
+            <a:off x="502920" y="310896"/>
+            <a:ext cx="11155680" cy="274320"/>
+          </a:xfrm>
+          <a:prstGeom prst="rect">
+            <a:avLst/>
+          </a:prstGeom>
+          <a:noFill/>
+          <a:ln/>
+        </p:spPr>
+        <p:txBody>
+          <a:bodyPr wrap="square" lIns="0" tIns="0" rIns="0" bIns="0" rtlCol="0" anchor="ctr"/>
+          <a:lstStyle/>
+          <a:p>
+            <a:pPr indent="0" marL="0">
+              <a:buNone/>
+            </a:pPr>
+            <a:r>
+              <a:rPr lang="en-US" sz="1100" b="1" spc="300" kern="0" dirty="0">
+                <a:solidFill>
+                  <a:srgbClr val="DC756A"/>
+                </a:solidFill>
+                <a:latin typeface="Calibri" pitchFamily="34" charset="0"/>
+                <a:ea typeface="Calibri" pitchFamily="34" charset="-122"/>
+                <a:cs typeface="Calibri" pitchFamily="34" charset="-120"/>
+              </a:rPr>
+              <a:t>ÔN TẬP &amp; CHUẨN BỊ</a:t>
+            </a:r>
+            <a:endParaRPr lang="en-US" sz="1100" dirty="0"/>
+          </a:p>
+        </p:txBody>
+      </p:sp>
+      <p:sp>
+        <p:nvSpPr>
+          <p:cNvPr id="8" name="Text 5"/>
+          <p:cNvSpPr/>
+          <p:nvPr/>
+        </p:nvSpPr>
+        <p:spPr>
+          <a:xfrm>
+            <a:off x="502920" y="576072"/>
+            <a:ext cx="11155680" cy="713232"/>
+          </a:xfrm>
+          <a:prstGeom prst="rect">
+            <a:avLst/>
+          </a:prstGeom>
+          <a:noFill/>
+          <a:ln/>
+        </p:spPr>
+        <p:txBody>
+          <a:bodyPr wrap="square" lIns="0" tIns="0" rIns="0" bIns="0" rtlCol="0" anchor="ctr"/>
+          <a:lstStyle/>
+          <a:p>
+            <a:pPr indent="0" marL="0">
+              <a:buNone/>
+            </a:pPr>
+            <a:r>
+              <a:rPr lang="en-US" sz="2700" b="1" dirty="0">
+                <a:solidFill>
+                  <a:srgbClr val="AC4D33"/>
+                </a:solidFill>
+                <a:latin typeface="Cambria" pitchFamily="34" charset="0"/>
+                <a:ea typeface="Cambria" pitchFamily="34" charset="-122"/>
+                <a:cs typeface="Cambria" pitchFamily="34" charset="-120"/>
+              </a:rPr>
+              <a:t>Câu hỏi ôn tập</a:t>
+            </a:r>
+            <a:endParaRPr lang="en-US" sz="2700" dirty="0"/>
+          </a:p>
+        </p:txBody>
+      </p:sp>
+      <p:sp>
+        <p:nvSpPr>
+          <p:cNvPr id="9" name="Shape 6"/>
+          <p:cNvSpPr/>
+          <p:nvPr/>
+        </p:nvSpPr>
+        <p:spPr>
+          <a:xfrm>
+            <a:off x="502920" y="1572768"/>
+            <a:ext cx="384048" cy="384048"/>
+          </a:xfrm>
+          <a:prstGeom prst="ellipse">
+            <a:avLst/>
+          </a:prstGeom>
+          <a:solidFill>
+            <a:srgbClr val="DC756A"/>
+          </a:solidFill>
+          <a:ln/>
+        </p:spPr>
+        <p:txBody>
+          <a:bodyPr/>
+          <a:p/>
+        </p:txBody>
+      </p:sp>
+      <p:sp>
+        <p:nvSpPr>
+          <p:cNvPr id="10" name="Text 7"/>
+          <p:cNvSpPr/>
+          <p:nvPr/>
+        </p:nvSpPr>
+        <p:spPr>
+          <a:xfrm>
+            <a:off x="502920" y="1572768"/>
+            <a:ext cx="384048" cy="384048"/>
+          </a:xfrm>
+          <a:prstGeom prst="rect">
+            <a:avLst/>
+          </a:prstGeom>
+          <a:noFill/>
+          <a:ln/>
+        </p:spPr>
+        <p:txBody>
+          <a:bodyPr wrap="square" lIns="0" tIns="0" rIns="0" bIns="0" rtlCol="0" anchor="ctr"/>
+          <a:lstStyle/>
+          <a:p>
+            <a:pPr algn="ctr" indent="0" marL="0">
+              <a:buNone/>
+            </a:pPr>
+            <a:r>
+              <a:rPr lang="en-US" sz="1400" b="1" dirty="0">
+                <a:solidFill>
+                  <a:srgbClr val="FFFFFF"/>
+                </a:solidFill>
+                <a:latin typeface="Calibri" pitchFamily="34" charset="0"/>
+                <a:ea typeface="Calibri" pitchFamily="34" charset="-122"/>
+                <a:cs typeface="Calibri" pitchFamily="34" charset="-120"/>
+              </a:rPr>
+              <a:t>1</a:t>
+            </a:r>
+            <a:endParaRPr lang="en-US" sz="1400" dirty="0"/>
+          </a:p>
+        </p:txBody>
+      </p:sp>
+      <p:sp>
+        <p:nvSpPr>
+          <p:cNvPr id="11" name="Text 8"/>
+          <p:cNvSpPr/>
+          <p:nvPr/>
+        </p:nvSpPr>
+        <p:spPr>
+          <a:xfrm>
+            <a:off x="1051560" y="1499616"/>
+            <a:ext cx="10652760" cy="822960"/>
+          </a:xfrm>
+          <a:prstGeom prst="rect">
+            <a:avLst/>
+          </a:prstGeom>
+          <a:noFill/>
+          <a:ln/>
+        </p:spPr>
+        <p:txBody>
+          <a:bodyPr wrap="square" lIns="0" tIns="0" rIns="0" bIns="0" rtlCol="0" anchor="t"/>
+          <a:lstStyle/>
+          <a:p>
+            <a:pPr indent="0" marL="0">
+              <a:buNone/>
+            </a:pPr>
+            <a:r>
+              <a:rPr lang="en-US" sz="1400" dirty="0">
+                <a:solidFill>
+                  <a:srgbClr val="3A2B28"/>
+                </a:solidFill>
+                <a:latin typeface="Calibri" pitchFamily="34" charset="0"/>
+                <a:ea typeface="Calibri" pitchFamily="34" charset="-122"/>
+                <a:cs typeface="Calibri" pitchFamily="34" charset="-120"/>
+              </a:rPr>
+              <a:t>Trình bày khái niệm văn bản và các nhóm văn bản trong tổ chức.</a:t>
+            </a:r>
+            <a:endParaRPr lang="en-US" sz="1400" dirty="0"/>
+          </a:p>
+        </p:txBody>
+      </p:sp>
+      <p:sp>
+        <p:nvSpPr>
+          <p:cNvPr id="12" name="Shape 9"/>
+          <p:cNvSpPr/>
+          <p:nvPr/>
+        </p:nvSpPr>
+        <p:spPr>
+          <a:xfrm>
+            <a:off x="502920" y="2395728"/>
+            <a:ext cx="384048" cy="384048"/>
+          </a:xfrm>
+          <a:prstGeom prst="ellipse">
+            <a:avLst/>
+          </a:prstGeom>
+          <a:solidFill>
+            <a:srgbClr val="DC756A"/>
+          </a:solidFill>
+          <a:ln/>
+        </p:spPr>
+        <p:txBody>
+          <a:bodyPr/>
+          <a:p/>
+        </p:txBody>
+      </p:sp>
+      <p:sp>
+        <p:nvSpPr>
+          <p:cNvPr id="13" name="Text 10"/>
+          <p:cNvSpPr/>
+          <p:nvPr/>
+        </p:nvSpPr>
+        <p:spPr>
+          <a:xfrm>
+            <a:off x="502920" y="2395728"/>
+            <a:ext cx="384048" cy="384048"/>
+          </a:xfrm>
+          <a:prstGeom prst="rect">
+            <a:avLst/>
+          </a:prstGeom>
+          <a:noFill/>
+          <a:ln/>
+        </p:spPr>
+        <p:txBody>
+          <a:bodyPr wrap="square" lIns="0" tIns="0" rIns="0" bIns="0" rtlCol="0" anchor="ctr"/>
+          <a:lstStyle/>
+          <a:p>
+            <a:pPr algn="ctr" indent="0" marL="0">
+              <a:buNone/>
+            </a:pPr>
+            <a:r>
+              <a:rPr lang="en-US" sz="1400" b="1" dirty="0">
+                <a:solidFill>
+                  <a:srgbClr val="FFFFFF"/>
+                </a:solidFill>
+                <a:latin typeface="Calibri" pitchFamily="34" charset="0"/>
+                <a:ea typeface="Calibri" pitchFamily="34" charset="-122"/>
+                <a:cs typeface="Calibri" pitchFamily="34" charset="-120"/>
+              </a:rPr>
+              <a:t>2</a:t>
+            </a:r>
+            <a:endParaRPr lang="en-US" sz="1400" dirty="0"/>
+          </a:p>
+        </p:txBody>
+      </p:sp>
+      <p:sp>
+        <p:nvSpPr>
+          <p:cNvPr id="14" name="Text 11"/>
+          <p:cNvSpPr/>
+          <p:nvPr/>
+        </p:nvSpPr>
+        <p:spPr>
+          <a:xfrm>
+            <a:off x="1051560" y="2322576"/>
+            <a:ext cx="10652760" cy="822960"/>
+          </a:xfrm>
+          <a:prstGeom prst="rect">
+            <a:avLst/>
+          </a:prstGeom>
+          <a:noFill/>
+          <a:ln/>
+        </p:spPr>
+        <p:txBody>
+          <a:bodyPr wrap="square" lIns="0" tIns="0" rIns="0" bIns="0" rtlCol="0" anchor="t"/>
+          <a:lstStyle/>
+          <a:p>
+            <a:pPr indent="0" marL="0">
+              <a:buNone/>
+            </a:pPr>
+            <a:r>
+              <a:rPr lang="en-US" sz="1400" dirty="0">
+                <a:solidFill>
+                  <a:srgbClr val="3A2B28"/>
+                </a:solidFill>
+                <a:latin typeface="Calibri" pitchFamily="34" charset="0"/>
+                <a:ea typeface="Calibri" pitchFamily="34" charset="-122"/>
+                <a:cs typeface="Calibri" pitchFamily="34" charset="-120"/>
+              </a:rPr>
+              <a:t>Nêu 9 thành phần thể thức văn bản hành chính và các quy định về lề trang, phông chữ.</a:t>
+            </a:r>
+            <a:endParaRPr lang="en-US" sz="1400" dirty="0"/>
+          </a:p>
+        </p:txBody>
+      </p:sp>
+      <p:sp>
+        <p:nvSpPr>
+          <p:cNvPr id="15" name="Shape 12"/>
+          <p:cNvSpPr/>
+          <p:nvPr/>
+        </p:nvSpPr>
+        <p:spPr>
+          <a:xfrm>
+            <a:off x="502920" y="3218688"/>
+            <a:ext cx="384048" cy="384048"/>
+          </a:xfrm>
+          <a:prstGeom prst="ellipse">
+            <a:avLst/>
+          </a:prstGeom>
+          <a:solidFill>
+            <a:srgbClr val="DC756A"/>
+          </a:solidFill>
+          <a:ln/>
+        </p:spPr>
+        <p:txBody>
+          <a:bodyPr/>
+          <a:p/>
+        </p:txBody>
+      </p:sp>
+      <p:sp>
+        <p:nvSpPr>
+          <p:cNvPr id="16" name="Text 13"/>
+          <p:cNvSpPr/>
+          <p:nvPr/>
+        </p:nvSpPr>
+        <p:spPr>
+          <a:xfrm>
+            <a:off x="502920" y="3218688"/>
+            <a:ext cx="384048" cy="384048"/>
+          </a:xfrm>
+          <a:prstGeom prst="rect">
+            <a:avLst/>
+          </a:prstGeom>
+          <a:noFill/>
+          <a:ln/>
+        </p:spPr>
+        <p:txBody>
+          <a:bodyPr wrap="square" lIns="0" tIns="0" rIns="0" bIns="0" rtlCol="0" anchor="ctr"/>
+          <a:lstStyle/>
+          <a:p>
+            <a:pPr algn="ctr" indent="0" marL="0">
+              <a:buNone/>
+            </a:pPr>
+            <a:r>
+              <a:rPr lang="en-US" sz="1400" b="1" dirty="0">
+                <a:solidFill>
+                  <a:srgbClr val="FFFFFF"/>
+                </a:solidFill>
+                <a:latin typeface="Calibri" pitchFamily="34" charset="0"/>
+                <a:ea typeface="Calibri" pitchFamily="34" charset="-122"/>
+                <a:cs typeface="Calibri" pitchFamily="34" charset="-120"/>
+              </a:rPr>
+              <a:t>3</a:t>
+            </a:r>
+            <a:endParaRPr lang="en-US" sz="1400" dirty="0"/>
+          </a:p>
+        </p:txBody>
+      </p:sp>
+      <p:sp>
+        <p:nvSpPr>
+          <p:cNvPr id="17" name="Text 14"/>
+          <p:cNvSpPr/>
+          <p:nvPr/>
+        </p:nvSpPr>
+        <p:spPr>
+          <a:xfrm>
+            <a:off x="1051560" y="3145536"/>
+            <a:ext cx="10652760" cy="822960"/>
+          </a:xfrm>
+          <a:prstGeom prst="rect">
+            <a:avLst/>
+          </a:prstGeom>
+          <a:noFill/>
+          <a:ln/>
+        </p:spPr>
+        <p:txBody>
+          <a:bodyPr wrap="square" lIns="0" tIns="0" rIns="0" bIns="0" rtlCol="0" anchor="t"/>
+          <a:lstStyle/>
+          <a:p>
+            <a:pPr indent="0" marL="0">
+              <a:buNone/>
+            </a:pPr>
+            <a:r>
+              <a:rPr lang="en-US" sz="1400" dirty="0">
+                <a:solidFill>
+                  <a:srgbClr val="3A2B28"/>
+                </a:solidFill>
+                <a:latin typeface="Calibri" pitchFamily="34" charset="0"/>
+                <a:ea typeface="Calibri" pitchFamily="34" charset="-122"/>
+                <a:cs typeface="Calibri" pitchFamily="34" charset="-120"/>
+              </a:rPr>
+              <a:t>So sánh bố cục của quyết định, tờ trình và công văn.</a:t>
+            </a:r>
+            <a:endParaRPr lang="en-US" sz="1400" dirty="0"/>
+          </a:p>
+        </p:txBody>
+      </p:sp>
+      <p:sp>
+        <p:nvSpPr>
+          <p:cNvPr id="18" name="Shape 15"/>
+          <p:cNvSpPr/>
+          <p:nvPr/>
+        </p:nvSpPr>
+        <p:spPr>
+          <a:xfrm>
+            <a:off x="502920" y="4041648"/>
+            <a:ext cx="384048" cy="384048"/>
+          </a:xfrm>
+          <a:prstGeom prst="ellipse">
+            <a:avLst/>
+          </a:prstGeom>
+          <a:solidFill>
+            <a:srgbClr val="DC756A"/>
+          </a:solidFill>
+          <a:ln/>
+        </p:spPr>
+        <p:txBody>
+          <a:bodyPr/>
+          <a:p/>
+        </p:txBody>
+      </p:sp>
+      <p:sp>
+        <p:nvSpPr>
+          <p:cNvPr id="19" name="Text 16"/>
+          <p:cNvSpPr/>
+          <p:nvPr/>
+        </p:nvSpPr>
+        <p:spPr>
+          <a:xfrm>
+            <a:off x="502920" y="4041648"/>
+            <a:ext cx="384048" cy="384048"/>
+          </a:xfrm>
+          <a:prstGeom prst="rect">
+            <a:avLst/>
+          </a:prstGeom>
+          <a:noFill/>
+          <a:ln/>
+        </p:spPr>
+        <p:txBody>
+          <a:bodyPr wrap="square" lIns="0" tIns="0" rIns="0" bIns="0" rtlCol="0" anchor="ctr"/>
+          <a:lstStyle/>
+          <a:p>
+            <a:pPr algn="ctr" indent="0" marL="0">
+              <a:buNone/>
+            </a:pPr>
+            <a:r>
+              <a:rPr lang="en-US" sz="1400" b="1" dirty="0">
+                <a:solidFill>
+                  <a:srgbClr val="FFFFFF"/>
+                </a:solidFill>
+                <a:latin typeface="Calibri" pitchFamily="34" charset="0"/>
+                <a:ea typeface="Calibri" pitchFamily="34" charset="-122"/>
+                <a:cs typeface="Calibri" pitchFamily="34" charset="-120"/>
+              </a:rPr>
+              <a:t>4</a:t>
+            </a:r>
+            <a:endParaRPr lang="en-US" sz="1400" dirty="0"/>
+          </a:p>
+        </p:txBody>
+      </p:sp>
+      <p:sp>
+        <p:nvSpPr>
+          <p:cNvPr id="20" name="Text 17"/>
+          <p:cNvSpPr/>
+          <p:nvPr/>
+        </p:nvSpPr>
+        <p:spPr>
+          <a:xfrm>
+            <a:off x="1051560" y="3968496"/>
+            <a:ext cx="10652760" cy="822960"/>
+          </a:xfrm>
+          <a:prstGeom prst="rect">
+            <a:avLst/>
+          </a:prstGeom>
+          <a:noFill/>
+          <a:ln/>
+        </p:spPr>
+        <p:txBody>
+          <a:bodyPr wrap="square" lIns="0" tIns="0" rIns="0" bIns="0" rtlCol="0" anchor="t"/>
+          <a:lstStyle/>
+          <a:p>
+            <a:pPr indent="0" marL="0">
+              <a:buNone/>
+            </a:pPr>
+            <a:r>
+              <a:rPr lang="en-US" sz="1400" dirty="0">
+                <a:solidFill>
+                  <a:srgbClr val="3A2B28"/>
+                </a:solidFill>
+                <a:latin typeface="Calibri" pitchFamily="34" charset="0"/>
+                <a:ea typeface="Calibri" pitchFamily="34" charset="-122"/>
+                <a:cs typeface="Calibri" pitchFamily="34" charset="-120"/>
+              </a:rPr>
+              <a:t>Nêu nguyên tắc 5C và các điều khoản cơ bản của hợp đồng thương mại.</a:t>
+            </a:r>
+            <a:endParaRPr lang="en-US" sz="1400" dirty="0"/>
+          </a:p>
+        </p:txBody>
+      </p:sp>
+      <p:sp>
+        <p:nvSpPr>
+          <p:cNvPr id="21" name="Shape 18"/>
+          <p:cNvSpPr/>
+          <p:nvPr/>
+        </p:nvSpPr>
+        <p:spPr>
+          <a:xfrm>
+            <a:off x="502920" y="5074920"/>
+            <a:ext cx="11201400" cy="1097280"/>
+          </a:xfrm>
+          <a:prstGeom prst="roundRect">
+            <a:avLst>
+              <a:gd name="adj" fmla="val 7500"/>
+            </a:avLst>
+          </a:prstGeom>
+          <a:solidFill>
+            <a:srgbClr val="FBEDE0"/>
+          </a:solidFill>
+          <a:ln w="12700">
+            <a:solidFill>
+              <a:srgbClr val="C9A227"/>
+            </a:solidFill>
+            <a:prstDash val="solid"/>
           </a:ln>
-          <a:effectLst/>
-        </p:spPr>
-        <p:style>
-          <a:lnRef idx="1">
-            <a:schemeClr val="accent1"/>
-          </a:lnRef>
-          <a:fillRef idx="3">
-            <a:schemeClr val="accent1"/>
-          </a:fillRef>
-          <a:effectRef idx="2">
-            <a:schemeClr val="accent1"/>
-          </a:effectRef>
-          <a:fontRef idx="minor">
-            <a:schemeClr val="lt1"/>
-          </a:fontRef>
-        </p:style>
-        <p:txBody>
-          <a:bodyPr rtlCol="0" anchor="ctr"/>
-          <a:lstStyle/>
-          <a:p>
-            <a:pPr algn="ctr"/>
-          </a:p>
-        </p:txBody>
-      </p:sp>
-      <p:sp>
-        <p:nvSpPr>
-          <p:cNvPr id="5" name="TextBox 4"/>
-          <p:cNvSpPr txBox="1"/>
-          <p:nvPr/>
-        </p:nvSpPr>
-        <p:spPr>
-          <a:xfrm>
-            <a:off x="1280160" y="2377440"/>
-            <a:ext cx="9692640" cy="411480"/>
-          </a:xfrm>
-          <a:prstGeom prst="rect">
-            <a:avLst/>
-          </a:prstGeom>
-          <a:noFill/>
-        </p:spPr>
-        <p:txBody>
-          <a:bodyPr wrap="none">
-            <a:spAutoFit/>
-          </a:bodyPr>
-          <a:lstStyle/>
-          <a:p>
-            <a:r>
-              <a:rPr sz="1500" b="1">
-                <a:solidFill>
-                  <a:srgbClr val="DC756A"/>
-                </a:solidFill>
-                <a:latin typeface="Calibri"/>
-              </a:rPr>
-              <a:t>MỤC 5.3</a:t>
-            </a:r>
-          </a:p>
-        </p:txBody>
-      </p:sp>
-      <p:sp>
-        <p:nvSpPr>
-          <p:cNvPr id="6" name="TextBox 5"/>
-          <p:cNvSpPr txBox="1"/>
-          <p:nvPr/>
-        </p:nvSpPr>
-        <p:spPr>
-          <a:xfrm>
-            <a:off x="1280160" y="2788920"/>
-            <a:ext cx="9601200" cy="1371600"/>
-          </a:xfrm>
-          <a:prstGeom prst="rect">
-            <a:avLst/>
-          </a:prstGeom>
-          <a:noFill/>
-        </p:spPr>
-        <p:txBody>
-          <a:bodyPr wrap="square">
-            <a:spAutoFit/>
-          </a:bodyPr>
-          <a:lstStyle/>
-          <a:p>
-            <a:r>
-              <a:rPr sz="3300" b="1">
-                <a:solidFill>
-                  <a:srgbClr val="AC4D33"/>
-                </a:solidFill>
-                <a:latin typeface="Cambria"/>
-              </a:rPr>
-              <a:t>Soạn thảo văn bản hành chính thông dụng</a:t>
-            </a:r>
-          </a:p>
-        </p:txBody>
-      </p:sp>
-      <p:sp>
-        <p:nvSpPr>
-          <p:cNvPr id="7" name="TextBox 6"/>
-          <p:cNvSpPr txBox="1"/>
-          <p:nvPr/>
-        </p:nvSpPr>
-        <p:spPr>
-          <a:xfrm>
-            <a:off x="1280160" y="4224528"/>
-            <a:ext cx="9418320" cy="640080"/>
-          </a:xfrm>
-          <a:prstGeom prst="rect">
-            <a:avLst/>
-          </a:prstGeom>
-          <a:noFill/>
-        </p:spPr>
-        <p:txBody>
-          <a:bodyPr wrap="square">
-            <a:spAutoFit/>
-          </a:bodyPr>
-          <a:lstStyle/>
-          <a:p>
-            <a:r>
-              <a:rPr sz="1450" i="1">
-                <a:solidFill>
-                  <a:srgbClr val="8A7A76"/>
-                </a:solidFill>
-                <a:latin typeface="Calibri"/>
-              </a:rPr>
-              <a:t>Năm loại văn bản dùng hằng ngày trong mọi cơ quan, tổ chức.</a:t>
-            </a:r>
-          </a:p>
-        </p:txBody>
-      </p:sp>
-      <p:sp>
-        <p:nvSpPr>
-          <p:cNvPr id="8" name="TextBox 7"/>
-          <p:cNvSpPr txBox="1"/>
-          <p:nvPr/>
-        </p:nvSpPr>
-        <p:spPr>
-          <a:xfrm>
-            <a:off x="502920" y="6419088"/>
-            <a:ext cx="7772400" cy="292608"/>
-          </a:xfrm>
-          <a:prstGeom prst="rect">
-            <a:avLst/>
-          </a:prstGeom>
-          <a:noFill/>
-        </p:spPr>
-        <p:txBody>
-          <a:bodyPr wrap="none">
-            <a:spAutoFit/>
-          </a:bodyPr>
-          <a:lstStyle/>
-          <a:p>
-            <a:r>
-              <a:rPr sz="900">
-                <a:solidFill>
-                  <a:srgbClr val="8A7A76"/>
-                </a:solidFill>
-                <a:latin typeface="Calibri"/>
-              </a:rPr>
-              <a:t>Je m'appelle Huong  •  GV. Đỗ Thùy Hương  •  EC1103</a:t>
-            </a:r>
-          </a:p>
-        </p:txBody>
-      </p:sp>
-      <p:sp>
-        <p:nvSpPr>
-          <p:cNvPr id="9" name="TextBox 8"/>
-          <p:cNvSpPr txBox="1"/>
-          <p:nvPr/>
-        </p:nvSpPr>
-        <p:spPr>
-          <a:xfrm>
-            <a:off x="9326880" y="6419088"/>
-            <a:ext cx="1920240" cy="292608"/>
-          </a:xfrm>
-          <a:prstGeom prst="rect">
-            <a:avLst/>
-          </a:prstGeom>
-          <a:noFill/>
-        </p:spPr>
-        <p:txBody>
-          <a:bodyPr wrap="none">
-            <a:spAutoFit/>
-          </a:bodyPr>
-          <a:lstStyle/>
-          <a:p>
-            <a:pPr algn="r"/>
-            <a:r>
-              <a:rPr sz="900">
-                <a:solidFill>
-                  <a:srgbClr val="8A7A76"/>
-                </a:solidFill>
-                <a:latin typeface="Calibri"/>
-              </a:rPr>
-              <a:t>Chương 5</a:t>
-            </a:r>
+        </p:spPr>
+        <p:txBody>
+          <a:bodyPr/>
+          <a:p/>
+        </p:txBody>
+      </p:sp>
+      <p:sp>
+        <p:nvSpPr>
+          <p:cNvPr id="22" name="Text 19"/>
+          <p:cNvSpPr/>
+          <p:nvPr/>
+        </p:nvSpPr>
+        <p:spPr>
+          <a:xfrm>
+            <a:off x="777240" y="5120640"/>
+            <a:ext cx="10698480" cy="1005840"/>
+          </a:xfrm>
+          <a:prstGeom prst="rect">
+            <a:avLst/>
+          </a:prstGeom>
+          <a:noFill/>
+          <a:ln/>
+        </p:spPr>
+        <p:txBody>
+          <a:bodyPr wrap="square" lIns="0" tIns="0" rIns="0" bIns="0" rtlCol="0" anchor="ctr"/>
+          <a:lstStyle/>
+          <a:p>
+            <a:pPr indent="0" marL="0">
+              <a:buNone/>
+            </a:pPr>
+            <a:r>
+              <a:rPr lang="en-US" sz="1300" b="1" dirty="0">
+                <a:solidFill>
+                  <a:srgbClr val="8A6510"/>
+                </a:solidFill>
+                <a:latin typeface="Calibri" pitchFamily="34" charset="0"/>
+                <a:ea typeface="Calibri" pitchFamily="34" charset="-122"/>
+                <a:cs typeface="Calibri" pitchFamily="34" charset="-120"/>
+              </a:rPr>
+              <a:t>CHUẨN BỊ CHO BUỔI SAU:  </a:t>
+            </a:r>
+            <a:pPr indent="0" marL="0">
+              <a:buNone/>
+            </a:pPr>
+            <a:r>
+              <a:rPr lang="en-US" sz="1300" dirty="0">
+                <a:solidFill>
+                  <a:srgbClr val="3A2B28"/>
+                </a:solidFill>
+                <a:latin typeface="Calibri" pitchFamily="34" charset="0"/>
+                <a:ea typeface="Calibri" pitchFamily="34" charset="-122"/>
+                <a:cs typeface="Calibri" pitchFamily="34" charset="-120"/>
+              </a:rPr>
+              <a:t>Phần thực hành tại phòng A0105 — Bài 1: Thể thức văn bản. Mang theo laptop, cài sẵn Microsoft Word và tải Nghị định 30/2020/NĐ-CP.</a:t>
+            </a:r>
+            <a:endParaRPr lang="en-US" sz="1300" dirty="0"/>
           </a:p>
         </p:txBody>
       </p:sp>
@@ -10001,315 +9799,530 @@
 </file>
 
 <file path=ppt/slides/slide21.xml><?xml version="1.0" encoding="utf-8"?>
-<p:sld xmlns:a="http://schemas.openxmlformats.org/drawingml/2006/main" xmlns:p="http://schemas.openxmlformats.org/presentationml/2006/main" xmlns:r="http://schemas.openxmlformats.org/officeDocument/2006/relationships">
-  <p:cSld>
+<p:sld xmlns:a="http://schemas.openxmlformats.org/drawingml/2006/main" xmlns:r="http://schemas.openxmlformats.org/officeDocument/2006/relationships" xmlns:p="http://schemas.openxmlformats.org/presentationml/2006/main">
+  <p:cSld name="Slide 17">
+    <p:bg>
+      <p:bgPr>
+        <a:solidFill>
+          <a:srgbClr val="FDFBF8"/>
+        </a:solidFill>
+      </p:bgPr>
+    </p:bg>
     <p:spTree>
       <p:nvGrpSpPr>
         <p:cNvPr id="1" name=""/>
         <p:cNvGrpSpPr/>
         <p:nvPr/>
       </p:nvGrpSpPr>
-      <p:grpSpPr/>
-      <p:sp>
-        <p:nvSpPr>
-          <p:cNvPr id="2" name="Rectangle 1"/>
-          <p:cNvSpPr/>
-          <p:nvPr/>
-        </p:nvSpPr>
-        <p:spPr>
-          <a:xfrm>
-            <a:off x="0" y="0"/>
-            <a:ext cx="12191695" cy="6858000"/>
-          </a:xfrm>
-          <a:prstGeom prst="rect">
+      <p:grpSpPr>
+        <a:xfrm>
+          <a:off x="0" y="0"/>
+          <a:ext cx="0" cy="0"/>
+          <a:chOff x="0" y="0"/>
+          <a:chExt cx="0" cy="0"/>
+        </a:xfrm>
+      </p:grpSpPr>
+      <p:pic>
+        <p:nvPicPr>
+          <p:cNvPr id="2" name="Image 0" descr="/home/user/comdraft/assets/img/dau-huong.png">    </p:cNvPr>
+          <p:cNvPicPr>
+            <a:picLocks noChangeAspect="1"/>
+          </p:cNvPicPr>
+          <p:nvPr/>
+        </p:nvPicPr>
+        <p:blipFill>
+          <a:blip r:embed="rId1"/>
+          <a:stretch>
+            <a:fillRect/>
+          </a:stretch>
+        </p:blipFill>
+        <p:spPr>
+          <a:xfrm>
+            <a:off x="411480" y="6327648"/>
+            <a:ext cx="384048" cy="384048"/>
+          </a:xfrm>
+          <a:prstGeom prst="rect">
+            <a:avLst/>
+          </a:prstGeom>
+        </p:spPr>
+      </p:pic>
+      <p:sp>
+        <p:nvSpPr>
+          <p:cNvPr id="3" name="Text 0"/>
+          <p:cNvSpPr/>
+          <p:nvPr/>
+        </p:nvSpPr>
+        <p:spPr>
+          <a:xfrm>
+            <a:off x="868680" y="6355080"/>
+            <a:ext cx="7498080" cy="310896"/>
+          </a:xfrm>
+          <a:prstGeom prst="rect">
+            <a:avLst/>
+          </a:prstGeom>
+          <a:noFill/>
+          <a:ln/>
+        </p:spPr>
+        <p:txBody>
+          <a:bodyPr wrap="square" lIns="0" tIns="0" rIns="0" bIns="0" rtlCol="0" anchor="ctr"/>
+          <a:lstStyle/>
+          <a:p>
+            <a:pPr indent="0" marL="0">
+              <a:buNone/>
+            </a:pPr>
+            <a:r>
+              <a:rPr lang="en-US" sz="900" dirty="0">
+                <a:solidFill>
+                  <a:srgbClr val="8A7A76"/>
+                </a:solidFill>
+                <a:latin typeface="Calibri" pitchFamily="34" charset="0"/>
+                <a:ea typeface="Calibri" pitchFamily="34" charset="-122"/>
+                <a:cs typeface="Calibri" pitchFamily="34" charset="-120"/>
+              </a:rPr>
+              <a:t>Je m'appelle Huong  •  GV. Đỗ Thùy Hương  •  EC1103</a:t>
+            </a:r>
+            <a:endParaRPr lang="en-US" sz="900" dirty="0"/>
+          </a:p>
+        </p:txBody>
+      </p:sp>
+      <p:sp>
+        <p:nvSpPr>
+          <p:cNvPr id="4" name="Text 1"/>
+          <p:cNvSpPr/>
+          <p:nvPr/>
+        </p:nvSpPr>
+        <p:spPr>
+          <a:xfrm>
+            <a:off x="8503920" y="6355080"/>
+            <a:ext cx="2743200" cy="310896"/>
+          </a:xfrm>
+          <a:prstGeom prst="rect">
+            <a:avLst/>
+          </a:prstGeom>
+          <a:noFill/>
+          <a:ln/>
+        </p:spPr>
+        <p:txBody>
+          <a:bodyPr wrap="square" lIns="0" tIns="0" rIns="0" bIns="0" rtlCol="0" anchor="ctr"/>
+          <a:lstStyle/>
+          <a:p>
+            <a:pPr algn="r" indent="0" marL="0">
+              <a:buNone/>
+            </a:pPr>
+            <a:r>
+              <a:rPr lang="en-US" sz="900" dirty="0">
+                <a:solidFill>
+                  <a:srgbClr val="8A7A76"/>
+                </a:solidFill>
+                <a:latin typeface="Calibri" pitchFamily="34" charset="0"/>
+                <a:ea typeface="Calibri" pitchFamily="34" charset="-122"/>
+                <a:cs typeface="Calibri" pitchFamily="34" charset="-120"/>
+              </a:rPr>
+              <a:t>Chương 5</a:t>
+            </a:r>
+            <a:endParaRPr lang="en-US" sz="900" dirty="0"/>
+          </a:p>
+        </p:txBody>
+      </p:sp>
+      <p:sp>
+        <p:nvSpPr>
+          <p:cNvPr id="5" name="Shape 2"/>
+          <p:cNvSpPr/>
+          <p:nvPr/>
+        </p:nvSpPr>
+        <p:spPr>
+          <a:xfrm>
+            <a:off x="11430000" y="6327648"/>
+            <a:ext cx="365760" cy="365760"/>
+          </a:xfrm>
+          <a:prstGeom prst="ellipse">
             <a:avLst/>
           </a:prstGeom>
           <a:solidFill>
-            <a:srgbClr val="FDFBF8"/>
+            <a:srgbClr val="DC756A"/>
           </a:solidFill>
-          <a:ln>
-            <a:noFill/>
-          </a:ln>
-          <a:effectLst/>
-        </p:spPr>
-        <p:style>
-          <a:lnRef idx="1">
-            <a:schemeClr val="accent1"/>
-          </a:lnRef>
-          <a:fillRef idx="3">
-            <a:schemeClr val="accent1"/>
-          </a:fillRef>
-          <a:effectRef idx="2">
-            <a:schemeClr val="accent1"/>
-          </a:effectRef>
-          <a:fontRef idx="minor">
-            <a:schemeClr val="lt1"/>
-          </a:fontRef>
-        </p:style>
-        <p:txBody>
-          <a:bodyPr rtlCol="0" anchor="ctr"/>
-          <a:lstStyle/>
-          <a:p>
-            <a:pPr algn="ctr"/>
-          </a:p>
-        </p:txBody>
-      </p:sp>
-      <p:sp>
-        <p:nvSpPr>
-          <p:cNvPr id="3" name="Rectangle 2"/>
-          <p:cNvSpPr/>
-          <p:nvPr/>
-        </p:nvSpPr>
-        <p:spPr>
-          <a:xfrm>
-            <a:off x="0" y="2103120"/>
-            <a:ext cx="12191695" cy="2743200"/>
-          </a:xfrm>
-          <a:prstGeom prst="rect">
-            <a:avLst/>
+          <a:ln/>
+        </p:spPr>
+        <p:txBody>
+          <a:bodyPr/>
+          <a:p/>
+        </p:txBody>
+      </p:sp>
+      <p:sp>
+        <p:nvSpPr>
+          <p:cNvPr id="6" name="Text 3"/>
+          <p:cNvSpPr/>
+          <p:nvPr/>
+        </p:nvSpPr>
+        <p:spPr>
+          <a:xfrm>
+            <a:off x="11430000" y="6327648"/>
+            <a:ext cx="365760" cy="365760"/>
+          </a:xfrm>
+          <a:prstGeom prst="rect">
+            <a:avLst/>
+          </a:prstGeom>
+          <a:noFill/>
+          <a:ln/>
+        </p:spPr>
+        <p:txBody>
+          <a:bodyPr wrap="square" lIns="0" tIns="0" rIns="0" bIns="0" rtlCol="0" anchor="ctr"/>
+          <a:lstStyle/>
+          <a:p>
+            <a:pPr algn="ctr" indent="0" marL="0">
+              <a:buNone/>
+            </a:pPr>
+            <a:r>
+              <a:rPr lang="en-US" sz="1000" b="1" dirty="0">
+                <a:solidFill>
+                  <a:srgbClr val="FFFFFF"/>
+                </a:solidFill>
+                <a:latin typeface="Calibri" pitchFamily="34" charset="0"/>
+                <a:ea typeface="Calibri" pitchFamily="34" charset="-122"/>
+                <a:cs typeface="Calibri" pitchFamily="34" charset="-120"/>
+              </a:rPr>
+              <a:t>17</a:t>
+            </a:r>
+            <a:endParaRPr lang="en-US" sz="1000" dirty="0"/>
+          </a:p>
+        </p:txBody>
+      </p:sp>
+      <p:sp>
+        <p:nvSpPr>
+          <p:cNvPr id="7" name="Text 4"/>
+          <p:cNvSpPr/>
+          <p:nvPr/>
+        </p:nvSpPr>
+        <p:spPr>
+          <a:xfrm>
+            <a:off x="502920" y="310896"/>
+            <a:ext cx="11155680" cy="274320"/>
+          </a:xfrm>
+          <a:prstGeom prst="rect">
+            <a:avLst/>
+          </a:prstGeom>
+          <a:noFill/>
+          <a:ln/>
+        </p:spPr>
+        <p:txBody>
+          <a:bodyPr wrap="square" lIns="0" tIns="0" rIns="0" bIns="0" rtlCol="0" anchor="ctr"/>
+          <a:lstStyle/>
+          <a:p>
+            <a:pPr indent="0" marL="0">
+              <a:buNone/>
+            </a:pPr>
+            <a:r>
+              <a:rPr lang="en-US" sz="1100" b="1" spc="300" kern="0" dirty="0">
+                <a:solidFill>
+                  <a:srgbClr val="DC756A"/>
+                </a:solidFill>
+                <a:latin typeface="Calibri" pitchFamily="34" charset="0"/>
+                <a:ea typeface="Calibri" pitchFamily="34" charset="-122"/>
+                <a:cs typeface="Calibri" pitchFamily="34" charset="-120"/>
+              </a:rPr>
+              <a:t>TÀI LIỆU</a:t>
+            </a:r>
+            <a:endParaRPr lang="en-US" sz="1100" dirty="0"/>
+          </a:p>
+        </p:txBody>
+      </p:sp>
+      <p:sp>
+        <p:nvSpPr>
+          <p:cNvPr id="8" name="Text 5"/>
+          <p:cNvSpPr/>
+          <p:nvPr/>
+        </p:nvSpPr>
+        <p:spPr>
+          <a:xfrm>
+            <a:off x="502920" y="576072"/>
+            <a:ext cx="11155680" cy="713232"/>
+          </a:xfrm>
+          <a:prstGeom prst="rect">
+            <a:avLst/>
+          </a:prstGeom>
+          <a:noFill/>
+          <a:ln/>
+        </p:spPr>
+        <p:txBody>
+          <a:bodyPr wrap="square" lIns="0" tIns="0" rIns="0" bIns="0" rtlCol="0" anchor="ctr"/>
+          <a:lstStyle/>
+          <a:p>
+            <a:pPr indent="0" marL="0">
+              <a:buNone/>
+            </a:pPr>
+            <a:r>
+              <a:rPr lang="en-US" sz="2700" b="1" dirty="0">
+                <a:solidFill>
+                  <a:srgbClr val="AC4D33"/>
+                </a:solidFill>
+                <a:latin typeface="Cambria" pitchFamily="34" charset="0"/>
+                <a:ea typeface="Cambria" pitchFamily="34" charset="-122"/>
+                <a:cs typeface="Cambria" pitchFamily="34" charset="-120"/>
+              </a:rPr>
+              <a:t>Tài liệu học tập</a:t>
+            </a:r>
+            <a:endParaRPr lang="en-US" sz="2700" dirty="0"/>
+          </a:p>
+        </p:txBody>
+      </p:sp>
+      <p:sp>
+        <p:nvSpPr>
+          <p:cNvPr id="9" name="Shape 6"/>
+          <p:cNvSpPr/>
+          <p:nvPr/>
+        </p:nvSpPr>
+        <p:spPr>
+          <a:xfrm>
+            <a:off x="502920" y="1463040"/>
+            <a:ext cx="11201400" cy="1322832"/>
+          </a:xfrm>
+          <a:prstGeom prst="roundRect">
+            <a:avLst>
+              <a:gd name="adj" fmla="val 6221"/>
+            </a:avLst>
           </a:prstGeom>
           <a:solidFill>
             <a:srgbClr val="FDF1EF"/>
           </a:solidFill>
-          <a:ln>
-            <a:noFill/>
+          <a:ln w="15875">
+            <a:solidFill>
+              <a:srgbClr val="FBCEC9"/>
+            </a:solidFill>
+            <a:prstDash val="solid"/>
           </a:ln>
-          <a:effectLst/>
-        </p:spPr>
-        <p:style>
-          <a:lnRef idx="1">
-            <a:schemeClr val="accent1"/>
-          </a:lnRef>
-          <a:fillRef idx="3">
-            <a:schemeClr val="accent1"/>
-          </a:fillRef>
-          <a:effectRef idx="2">
-            <a:schemeClr val="accent1"/>
-          </a:effectRef>
-          <a:fontRef idx="minor">
-            <a:schemeClr val="lt1"/>
-          </a:fontRef>
-        </p:style>
-        <p:txBody>
-          <a:bodyPr rtlCol="0" anchor="ctr"/>
-          <a:lstStyle/>
-          <a:p>
-            <a:pPr algn="ctr"/>
-          </a:p>
-        </p:txBody>
-      </p:sp>
-      <p:sp>
-        <p:nvSpPr>
-          <p:cNvPr id="4" name="Rectangle 3"/>
-          <p:cNvSpPr/>
-          <p:nvPr/>
-        </p:nvSpPr>
-        <p:spPr>
-          <a:xfrm>
-            <a:off x="0" y="0"/>
-            <a:ext cx="274320" cy="6858000"/>
-          </a:xfrm>
-          <a:prstGeom prst="rect">
-            <a:avLst/>
+        </p:spPr>
+        <p:txBody>
+          <a:bodyPr/>
+          <a:p/>
+        </p:txBody>
+      </p:sp>
+      <p:sp>
+        <p:nvSpPr>
+          <p:cNvPr id="10" name="Text 7"/>
+          <p:cNvSpPr/>
+          <p:nvPr/>
+        </p:nvSpPr>
+        <p:spPr>
+          <a:xfrm>
+            <a:off x="722376" y="1517904"/>
+            <a:ext cx="10762488" cy="1213104"/>
+          </a:xfrm>
+          <a:prstGeom prst="rect">
+            <a:avLst/>
+          </a:prstGeom>
+          <a:noFill/>
+          <a:ln/>
+        </p:spPr>
+        <p:txBody>
+          <a:bodyPr wrap="square" lIns="0" tIns="0" rIns="0" bIns="0" rtlCol="0" anchor="ctr"/>
+          <a:lstStyle/>
+          <a:p>
+            <a:pPr indent="0" marL="0">
+              <a:buNone/>
+            </a:pPr>
+            <a:r>
+              <a:rPr lang="en-US" sz="1500" b="1" dirty="0">
+                <a:solidFill>
+                  <a:srgbClr val="AC4D33"/>
+                </a:solidFill>
+                <a:latin typeface="Calibri" pitchFamily="34" charset="0"/>
+                <a:ea typeface="Calibri" pitchFamily="34" charset="-122"/>
+                <a:cs typeface="Calibri" pitchFamily="34" charset="-120"/>
+              </a:rPr>
+              <a:t>Giáo trình chính</a:t>
+            </a:r>
+            <a:endParaRPr lang="en-US" sz="1500" dirty="0"/>
+          </a:p>
+          <a:p>
+            <a:pPr indent="0" marL="0">
+              <a:buNone/>
+            </a:pPr>
+            <a:r>
+              <a:rPr lang="en-US" sz="1300" dirty="0">
+                <a:solidFill>
+                  <a:srgbClr val="3A2B28"/>
+                </a:solidFill>
+                <a:latin typeface="Calibri" pitchFamily="34" charset="0"/>
+                <a:ea typeface="Calibri" pitchFamily="34" charset="-122"/>
+                <a:cs typeface="Calibri" pitchFamily="34" charset="-120"/>
+              </a:rPr>
+              <a:t>Hà Nam Khánh Giao (2023), Giáo trình Giao tiếp kinh doanh, NXB Tài chính.</a:t>
+            </a:r>
+            <a:endParaRPr lang="en-US" sz="1500" dirty="0"/>
+          </a:p>
+        </p:txBody>
+      </p:sp>
+      <p:sp>
+        <p:nvSpPr>
+          <p:cNvPr id="11" name="Shape 8"/>
+          <p:cNvSpPr/>
+          <p:nvPr/>
+        </p:nvSpPr>
+        <p:spPr>
+          <a:xfrm>
+            <a:off x="502920" y="2950464"/>
+            <a:ext cx="11201400" cy="1322832"/>
+          </a:xfrm>
+          <a:prstGeom prst="roundRect">
+            <a:avLst>
+              <a:gd name="adj" fmla="val 6221"/>
+            </a:avLst>
           </a:prstGeom>
           <a:solidFill>
-            <a:srgbClr val="DC756A"/>
+            <a:srgbClr val="FDF1EF"/>
           </a:solidFill>
-          <a:ln>
-            <a:noFill/>
+          <a:ln w="15875">
+            <a:solidFill>
+              <a:srgbClr val="FBCEC9"/>
+            </a:solidFill>
+            <a:prstDash val="solid"/>
           </a:ln>
-          <a:effectLst/>
-        </p:spPr>
-        <p:style>
-          <a:lnRef idx="1">
-            <a:schemeClr val="accent1"/>
-          </a:lnRef>
-          <a:fillRef idx="3">
-            <a:schemeClr val="accent1"/>
-          </a:fillRef>
-          <a:effectRef idx="2">
-            <a:schemeClr val="accent1"/>
-          </a:effectRef>
-          <a:fontRef idx="minor">
-            <a:schemeClr val="lt1"/>
-          </a:fontRef>
-        </p:style>
-        <p:txBody>
-          <a:bodyPr rtlCol="0" anchor="ctr"/>
-          <a:lstStyle/>
-          <a:p>
-            <a:pPr algn="ctr"/>
-          </a:p>
-        </p:txBody>
-      </p:sp>
-      <p:sp>
-        <p:nvSpPr>
-          <p:cNvPr id="5" name="TextBox 4"/>
-          <p:cNvSpPr txBox="1"/>
-          <p:nvPr/>
-        </p:nvSpPr>
-        <p:spPr>
-          <a:xfrm>
-            <a:off x="1280160" y="2377440"/>
-            <a:ext cx="9692640" cy="411480"/>
-          </a:xfrm>
-          <a:prstGeom prst="rect">
-            <a:avLst/>
-          </a:prstGeom>
-          <a:noFill/>
-        </p:spPr>
-        <p:txBody>
-          <a:bodyPr wrap="none">
-            <a:spAutoFit/>
-          </a:bodyPr>
-          <a:lstStyle/>
-          <a:p>
-            <a:r>
-              <a:rPr sz="1500" b="1">
-                <a:solidFill>
-                  <a:srgbClr val="DC756A"/>
-                </a:solidFill>
-                <a:latin typeface="Calibri"/>
-              </a:rPr>
-              <a:t>MỤC 5.4</a:t>
-            </a:r>
-          </a:p>
-        </p:txBody>
-      </p:sp>
-      <p:sp>
-        <p:nvSpPr>
-          <p:cNvPr id="6" name="TextBox 5"/>
-          <p:cNvSpPr txBox="1"/>
-          <p:nvPr/>
-        </p:nvSpPr>
-        <p:spPr>
-          <a:xfrm>
-            <a:off x="1280160" y="2788920"/>
-            <a:ext cx="9601200" cy="1371600"/>
-          </a:xfrm>
-          <a:prstGeom prst="rect">
-            <a:avLst/>
-          </a:prstGeom>
-          <a:noFill/>
-        </p:spPr>
-        <p:txBody>
-          <a:bodyPr wrap="square">
-            <a:spAutoFit/>
-          </a:bodyPr>
-          <a:lstStyle/>
-          <a:p>
-            <a:r>
-              <a:rPr sz="3800" b="1">
+        </p:spPr>
+        <p:txBody>
+          <a:bodyPr/>
+          <a:p/>
+        </p:txBody>
+      </p:sp>
+      <p:sp>
+        <p:nvSpPr>
+          <p:cNvPr id="12" name="Text 9"/>
+          <p:cNvSpPr/>
+          <p:nvPr/>
+        </p:nvSpPr>
+        <p:spPr>
+          <a:xfrm>
+            <a:off x="722376" y="3005328"/>
+            <a:ext cx="10762488" cy="1213104"/>
+          </a:xfrm>
+          <a:prstGeom prst="rect">
+            <a:avLst/>
+          </a:prstGeom>
+          <a:noFill/>
+          <a:ln/>
+        </p:spPr>
+        <p:txBody>
+          <a:bodyPr wrap="square" lIns="0" tIns="0" rIns="0" bIns="0" rtlCol="0" anchor="ctr"/>
+          <a:lstStyle/>
+          <a:p>
+            <a:pPr indent="0" marL="0">
+              <a:buNone/>
+            </a:pPr>
+            <a:r>
+              <a:rPr lang="en-US" sz="1500" b="1" dirty="0">
                 <a:solidFill>
                   <a:srgbClr val="AC4D33"/>
                 </a:solidFill>
-                <a:latin typeface="Cambria"/>
-              </a:rPr>
-              <a:t>Soạn thảo văn bản thương mại</a:t>
-            </a:r>
-          </a:p>
-        </p:txBody>
-      </p:sp>
-      <p:sp>
-        <p:nvSpPr>
-          <p:cNvPr id="7" name="TextBox 6"/>
-          <p:cNvSpPr txBox="1"/>
-          <p:nvPr/>
-        </p:nvSpPr>
-        <p:spPr>
-          <a:xfrm>
-            <a:off x="1280160" y="4224528"/>
-            <a:ext cx="9418320" cy="640080"/>
-          </a:xfrm>
-          <a:prstGeom prst="rect">
-            <a:avLst/>
-          </a:prstGeom>
-          <a:noFill/>
-        </p:spPr>
-        <p:txBody>
-          <a:bodyPr wrap="square">
-            <a:spAutoFit/>
-          </a:bodyPr>
-          <a:lstStyle/>
-          <a:p>
-            <a:r>
-              <a:rPr sz="1450" i="1">
-                <a:solidFill>
-                  <a:srgbClr val="8A7A76"/>
-                </a:solidFill>
-                <a:latin typeface="Calibri"/>
-              </a:rPr>
-              <a:t>Thư tín, báo giá và hợp đồng — bộ hồ sơ đưa một thương vụ đi đến đích.</a:t>
-            </a:r>
-          </a:p>
-        </p:txBody>
-      </p:sp>
-      <p:sp>
-        <p:nvSpPr>
-          <p:cNvPr id="8" name="TextBox 7"/>
-          <p:cNvSpPr txBox="1"/>
-          <p:nvPr/>
-        </p:nvSpPr>
-        <p:spPr>
-          <a:xfrm>
-            <a:off x="502920" y="6419088"/>
-            <a:ext cx="7772400" cy="292608"/>
-          </a:xfrm>
-          <a:prstGeom prst="rect">
-            <a:avLst/>
-          </a:prstGeom>
-          <a:noFill/>
-        </p:spPr>
-        <p:txBody>
-          <a:bodyPr wrap="none">
-            <a:spAutoFit/>
-          </a:bodyPr>
-          <a:lstStyle/>
-          <a:p>
-            <a:r>
-              <a:rPr sz="900">
-                <a:solidFill>
-                  <a:srgbClr val="8A7A76"/>
-                </a:solidFill>
-                <a:latin typeface="Calibri"/>
-              </a:rPr>
-              <a:t>Je m'appelle Huong  •  GV. Đỗ Thùy Hương  •  EC1103</a:t>
-            </a:r>
-          </a:p>
-        </p:txBody>
-      </p:sp>
-      <p:sp>
-        <p:nvSpPr>
-          <p:cNvPr id="9" name="TextBox 8"/>
-          <p:cNvSpPr txBox="1"/>
-          <p:nvPr/>
-        </p:nvSpPr>
-        <p:spPr>
-          <a:xfrm>
-            <a:off x="9326880" y="6419088"/>
-            <a:ext cx="1920240" cy="292608"/>
-          </a:xfrm>
-          <a:prstGeom prst="rect">
-            <a:avLst/>
-          </a:prstGeom>
-          <a:noFill/>
-        </p:spPr>
-        <p:txBody>
-          <a:bodyPr wrap="none">
-            <a:spAutoFit/>
-          </a:bodyPr>
-          <a:lstStyle/>
-          <a:p>
-            <a:pPr algn="r"/>
-            <a:r>
-              <a:rPr sz="900">
-                <a:solidFill>
-                  <a:srgbClr val="8A7A76"/>
-                </a:solidFill>
-                <a:latin typeface="Calibri"/>
-              </a:rPr>
-              <a:t>Chương 5</a:t>
-            </a:r>
+                <a:latin typeface="Calibri" pitchFamily="34" charset="0"/>
+                <a:ea typeface="Calibri" pitchFamily="34" charset="-122"/>
+                <a:cs typeface="Calibri" pitchFamily="34" charset="-120"/>
+              </a:rPr>
+              <a:t>Văn bản pháp lý bắt buộc</a:t>
+            </a:r>
+            <a:endParaRPr lang="en-US" sz="1500" dirty="0"/>
+          </a:p>
+          <a:p>
+            <a:pPr indent="0" marL="0">
+              <a:buNone/>
+            </a:pPr>
+            <a:r>
+              <a:rPr lang="en-US" sz="1300" dirty="0">
+                <a:solidFill>
+                  <a:srgbClr val="3A2B28"/>
+                </a:solidFill>
+                <a:latin typeface="Calibri" pitchFamily="34" charset="0"/>
+                <a:ea typeface="Calibri" pitchFamily="34" charset="-122"/>
+                <a:cs typeface="Calibri" pitchFamily="34" charset="-120"/>
+              </a:rPr>
+              <a:t>Nghị định 30/2020/NĐ-CP ngày 05/3/2020 của Chính phủ về công tác văn thư — hướng dẫn thể thức và kỹ thuật trình bày văn bản hành chính.</a:t>
+            </a:r>
+            <a:endParaRPr lang="en-US" sz="1500" dirty="0"/>
+          </a:p>
+        </p:txBody>
+      </p:sp>
+      <p:sp>
+        <p:nvSpPr>
+          <p:cNvPr id="13" name="Shape 10"/>
+          <p:cNvSpPr/>
+          <p:nvPr/>
+        </p:nvSpPr>
+        <p:spPr>
+          <a:xfrm>
+            <a:off x="502920" y="4437888"/>
+            <a:ext cx="11201400" cy="1322832"/>
+          </a:xfrm>
+          <a:prstGeom prst="roundRect">
+            <a:avLst>
+              <a:gd name="adj" fmla="val 6221"/>
+            </a:avLst>
+          </a:prstGeom>
+          <a:solidFill>
+            <a:srgbClr val="FDF1EF"/>
+          </a:solidFill>
+          <a:ln w="15875">
+            <a:solidFill>
+              <a:srgbClr val="FBCEC9"/>
+            </a:solidFill>
+            <a:prstDash val="solid"/>
+          </a:ln>
+        </p:spPr>
+        <p:txBody>
+          <a:bodyPr/>
+          <a:p/>
+        </p:txBody>
+      </p:sp>
+      <p:sp>
+        <p:nvSpPr>
+          <p:cNvPr id="14" name="Text 11"/>
+          <p:cNvSpPr/>
+          <p:nvPr/>
+        </p:nvSpPr>
+        <p:spPr>
+          <a:xfrm>
+            <a:off x="722376" y="4492752"/>
+            <a:ext cx="10762488" cy="1213104"/>
+          </a:xfrm>
+          <a:prstGeom prst="rect">
+            <a:avLst/>
+          </a:prstGeom>
+          <a:noFill/>
+          <a:ln/>
+        </p:spPr>
+        <p:txBody>
+          <a:bodyPr wrap="square" lIns="0" tIns="0" rIns="0" bIns="0" rtlCol="0" anchor="ctr"/>
+          <a:lstStyle/>
+          <a:p>
+            <a:pPr indent="0" marL="0">
+              <a:buNone/>
+            </a:pPr>
+            <a:r>
+              <a:rPr lang="en-US" sz="1500" b="1" dirty="0">
+                <a:solidFill>
+                  <a:srgbClr val="AC4D33"/>
+                </a:solidFill>
+                <a:latin typeface="Calibri" pitchFamily="34" charset="0"/>
+                <a:ea typeface="Calibri" pitchFamily="34" charset="-122"/>
+                <a:cs typeface="Calibri" pitchFamily="34" charset="-120"/>
+              </a:rPr>
+              <a:t>Học liệu của giảng viên</a:t>
+            </a:r>
+            <a:endParaRPr lang="en-US" sz="1500" dirty="0"/>
+          </a:p>
+          <a:p>
+            <a:pPr indent="0" marL="0">
+              <a:buNone/>
+            </a:pPr>
+            <a:r>
+              <a:rPr lang="en-US" sz="1300" dirty="0">
+                <a:solidFill>
+                  <a:srgbClr val="3A2B28"/>
+                </a:solidFill>
+                <a:latin typeface="Calibri" pitchFamily="34" charset="0"/>
+                <a:ea typeface="Calibri" pitchFamily="34" charset="-122"/>
+                <a:cs typeface="Calibri" pitchFamily="34" charset="-120"/>
+              </a:rPr>
+              <a:t>Slide, biểu mẫu văn bản, tình huống và bài tập do GV. Đỗ Thùy Hương biên soạn; cung cấp sau mỗi buổi học.</a:t>
+            </a:r>
+            <a:endParaRPr lang="en-US" sz="1500" dirty="0"/>
           </a:p>
         </p:txBody>
       </p:sp>
@@ -10347,7 +10360,7 @@
       </p:grpSpPr>
       <p:pic>
         <p:nvPicPr>
-          <p:cNvPr id="2" name="Image 0" descr="assets/logo_tron.png">    </p:cNvPr>
+          <p:cNvPr id="2" name="Image 0" descr="/home/user/comdraft/assets/img/dau-huong.png">    </p:cNvPr>
           <p:cNvPicPr>
             <a:picLocks noChangeAspect="1"/>
           </p:cNvPicPr>
@@ -11061,6 +11074,327 @@
 </file>
 
 <file path=ppt/slides/slide4.xml><?xml version="1.0" encoding="utf-8"?>
+<p:sld xmlns:a="http://schemas.openxmlformats.org/drawingml/2006/main" xmlns:p="http://schemas.openxmlformats.org/presentationml/2006/main" xmlns:r="http://schemas.openxmlformats.org/officeDocument/2006/relationships">
+  <p:cSld>
+    <p:spTree>
+      <p:nvGrpSpPr>
+        <p:cNvPr id="1" name=""/>
+        <p:cNvGrpSpPr/>
+        <p:nvPr/>
+      </p:nvGrpSpPr>
+      <p:grpSpPr/>
+      <p:sp>
+        <p:nvSpPr>
+          <p:cNvPr id="2" name="Rectangle 1"/>
+          <p:cNvSpPr/>
+          <p:nvPr/>
+        </p:nvSpPr>
+        <p:spPr>
+          <a:xfrm>
+            <a:off x="0" y="0"/>
+            <a:ext cx="12191695" cy="6858000"/>
+          </a:xfrm>
+          <a:prstGeom prst="rect">
+            <a:avLst/>
+          </a:prstGeom>
+          <a:solidFill>
+            <a:srgbClr val="FDFBF8"/>
+          </a:solidFill>
+          <a:ln>
+            <a:noFill/>
+          </a:ln>
+          <a:effectLst/>
+        </p:spPr>
+        <p:style>
+          <a:lnRef idx="1">
+            <a:schemeClr val="accent1"/>
+          </a:lnRef>
+          <a:fillRef idx="3">
+            <a:schemeClr val="accent1"/>
+          </a:fillRef>
+          <a:effectRef idx="2">
+            <a:schemeClr val="accent1"/>
+          </a:effectRef>
+          <a:fontRef idx="minor">
+            <a:schemeClr val="lt1"/>
+          </a:fontRef>
+        </p:style>
+        <p:txBody>
+          <a:bodyPr rtlCol="0" anchor="ctr"/>
+          <a:lstStyle/>
+          <a:p>
+            <a:pPr algn="ctr"/>
+          </a:p>
+        </p:txBody>
+      </p:sp>
+      <p:sp>
+        <p:nvSpPr>
+          <p:cNvPr id="3" name="Rectangle 2"/>
+          <p:cNvSpPr/>
+          <p:nvPr/>
+        </p:nvSpPr>
+        <p:spPr>
+          <a:xfrm>
+            <a:off x="0" y="2103120"/>
+            <a:ext cx="12191695" cy="2743200"/>
+          </a:xfrm>
+          <a:prstGeom prst="rect">
+            <a:avLst/>
+          </a:prstGeom>
+          <a:solidFill>
+            <a:srgbClr val="FDF1EF"/>
+          </a:solidFill>
+          <a:ln>
+            <a:noFill/>
+          </a:ln>
+          <a:effectLst/>
+        </p:spPr>
+        <p:style>
+          <a:lnRef idx="1">
+            <a:schemeClr val="accent1"/>
+          </a:lnRef>
+          <a:fillRef idx="3">
+            <a:schemeClr val="accent1"/>
+          </a:fillRef>
+          <a:effectRef idx="2">
+            <a:schemeClr val="accent1"/>
+          </a:effectRef>
+          <a:fontRef idx="minor">
+            <a:schemeClr val="lt1"/>
+          </a:fontRef>
+        </p:style>
+        <p:txBody>
+          <a:bodyPr rtlCol="0" anchor="ctr"/>
+          <a:lstStyle/>
+          <a:p>
+            <a:pPr algn="ctr"/>
+          </a:p>
+        </p:txBody>
+      </p:sp>
+      <p:sp>
+        <p:nvSpPr>
+          <p:cNvPr id="4" name="Rectangle 3"/>
+          <p:cNvSpPr/>
+          <p:nvPr/>
+        </p:nvSpPr>
+        <p:spPr>
+          <a:xfrm>
+            <a:off x="0" y="0"/>
+            <a:ext cx="274320" cy="6858000"/>
+          </a:xfrm>
+          <a:prstGeom prst="rect">
+            <a:avLst/>
+          </a:prstGeom>
+          <a:solidFill>
+            <a:srgbClr val="DC756A"/>
+          </a:solidFill>
+          <a:ln>
+            <a:noFill/>
+          </a:ln>
+          <a:effectLst/>
+        </p:spPr>
+        <p:style>
+          <a:lnRef idx="1">
+            <a:schemeClr val="accent1"/>
+          </a:lnRef>
+          <a:fillRef idx="3">
+            <a:schemeClr val="accent1"/>
+          </a:fillRef>
+          <a:effectRef idx="2">
+            <a:schemeClr val="accent1"/>
+          </a:effectRef>
+          <a:fontRef idx="minor">
+            <a:schemeClr val="lt1"/>
+          </a:fontRef>
+        </p:style>
+        <p:txBody>
+          <a:bodyPr rtlCol="0" anchor="ctr"/>
+          <a:lstStyle/>
+          <a:p>
+            <a:pPr algn="ctr"/>
+          </a:p>
+        </p:txBody>
+      </p:sp>
+      <p:sp>
+        <p:nvSpPr>
+          <p:cNvPr id="5" name="TextBox 4"/>
+          <p:cNvSpPr txBox="1"/>
+          <p:nvPr/>
+        </p:nvSpPr>
+        <p:spPr>
+          <a:xfrm>
+            <a:off x="1280160" y="2377440"/>
+            <a:ext cx="9692640" cy="411480"/>
+          </a:xfrm>
+          <a:prstGeom prst="rect">
+            <a:avLst/>
+          </a:prstGeom>
+          <a:noFill/>
+        </p:spPr>
+        <p:txBody>
+          <a:bodyPr wrap="none">
+            <a:spAutoFit/>
+          </a:bodyPr>
+          <a:lstStyle/>
+          <a:p>
+            <a:r>
+              <a:rPr sz="1500" b="1">
+                <a:solidFill>
+                  <a:srgbClr val="DC756A"/>
+                </a:solidFill>
+                <a:latin typeface="Calibri"/>
+              </a:rPr>
+              <a:t>MỤC 5.1 – 5.2</a:t>
+            </a:r>
+          </a:p>
+        </p:txBody>
+      </p:sp>
+      <p:sp>
+        <p:nvSpPr>
+          <p:cNvPr id="6" name="TextBox 5"/>
+          <p:cNvSpPr txBox="1"/>
+          <p:nvPr/>
+        </p:nvSpPr>
+        <p:spPr>
+          <a:xfrm>
+            <a:off x="1280160" y="2788920"/>
+            <a:ext cx="9601200" cy="1371600"/>
+          </a:xfrm>
+          <a:prstGeom prst="rect">
+            <a:avLst/>
+          </a:prstGeom>
+          <a:noFill/>
+        </p:spPr>
+        <p:txBody>
+          <a:bodyPr wrap="square">
+            <a:spAutoFit/>
+          </a:bodyPr>
+          <a:lstStyle/>
+          <a:p>
+            <a:r>
+              <a:rPr sz="3300" b="1">
+                <a:solidFill>
+                  <a:srgbClr val="AC4D33"/>
+                </a:solidFill>
+                <a:latin typeface="Cambria"/>
+              </a:rPr>
+              <a:t>Khái niệm, phân loại và thể thức văn bản</a:t>
+            </a:r>
+          </a:p>
+        </p:txBody>
+      </p:sp>
+      <p:sp>
+        <p:nvSpPr>
+          <p:cNvPr id="7" name="TextBox 6"/>
+          <p:cNvSpPr txBox="1"/>
+          <p:nvPr/>
+        </p:nvSpPr>
+        <p:spPr>
+          <a:xfrm>
+            <a:off x="1280160" y="4224528"/>
+            <a:ext cx="9418320" cy="640080"/>
+          </a:xfrm>
+          <a:prstGeom prst="rect">
+            <a:avLst/>
+          </a:prstGeom>
+          <a:noFill/>
+        </p:spPr>
+        <p:txBody>
+          <a:bodyPr wrap="square">
+            <a:spAutoFit/>
+          </a:bodyPr>
+          <a:lstStyle/>
+          <a:p>
+            <a:r>
+              <a:rPr sz="1450" i="1">
+                <a:solidFill>
+                  <a:srgbClr val="8A7A76"/>
+                </a:solidFill>
+                <a:latin typeface="Calibri"/>
+              </a:rPr>
+              <a:t>Nền tảng pháp lý và kỹ thuật: văn bản là gì và một trang văn bản đúng chuẩn trông thế nào.</a:t>
+            </a:r>
+          </a:p>
+        </p:txBody>
+      </p:sp>
+      <p:sp>
+        <p:nvSpPr>
+          <p:cNvPr id="8" name="TextBox 7"/>
+          <p:cNvSpPr txBox="1"/>
+          <p:nvPr/>
+        </p:nvSpPr>
+        <p:spPr>
+          <a:xfrm>
+            <a:off x="502920" y="6419088"/>
+            <a:ext cx="7772400" cy="292608"/>
+          </a:xfrm>
+          <a:prstGeom prst="rect">
+            <a:avLst/>
+          </a:prstGeom>
+          <a:noFill/>
+        </p:spPr>
+        <p:txBody>
+          <a:bodyPr wrap="none">
+            <a:spAutoFit/>
+          </a:bodyPr>
+          <a:lstStyle/>
+          <a:p>
+            <a:r>
+              <a:rPr sz="900">
+                <a:solidFill>
+                  <a:srgbClr val="8A7A76"/>
+                </a:solidFill>
+                <a:latin typeface="Calibri"/>
+              </a:rPr>
+              <a:t>Je m'appelle Huong  •  GV. Đỗ Thùy Hương  •  EC1103</a:t>
+            </a:r>
+          </a:p>
+        </p:txBody>
+      </p:sp>
+      <p:sp>
+        <p:nvSpPr>
+          <p:cNvPr id="9" name="TextBox 8"/>
+          <p:cNvSpPr txBox="1"/>
+          <p:nvPr/>
+        </p:nvSpPr>
+        <p:spPr>
+          <a:xfrm>
+            <a:off x="9326880" y="6419088"/>
+            <a:ext cx="1920240" cy="292608"/>
+          </a:xfrm>
+          <a:prstGeom prst="rect">
+            <a:avLst/>
+          </a:prstGeom>
+          <a:noFill/>
+        </p:spPr>
+        <p:txBody>
+          <a:bodyPr wrap="none">
+            <a:spAutoFit/>
+          </a:bodyPr>
+          <a:lstStyle/>
+          <a:p>
+            <a:pPr algn="r"/>
+            <a:r>
+              <a:rPr sz="900">
+                <a:solidFill>
+                  <a:srgbClr val="8A7A76"/>
+                </a:solidFill>
+                <a:latin typeface="Calibri"/>
+              </a:rPr>
+              <a:t>Chương 5</a:t>
+            </a:r>
+          </a:p>
+        </p:txBody>
+      </p:sp>
+    </p:spTree>
+  </p:cSld>
+  <p:clrMapOvr>
+    <a:masterClrMapping/>
+  </p:clrMapOvr>
+</p:sld>
+</file>
+
+<file path=ppt/slides/slide5.xml><?xml version="1.0" encoding="utf-8"?>
 <p:sld xmlns:a="http://schemas.openxmlformats.org/drawingml/2006/main" xmlns:r="http://schemas.openxmlformats.org/officeDocument/2006/relationships" xmlns:p="http://schemas.openxmlformats.org/presentationml/2006/main">
   <p:cSld name="Slide 4">
     <p:bg>
@@ -11086,7 +11420,7 @@
       </p:grpSpPr>
       <p:pic>
         <p:nvPicPr>
-          <p:cNvPr id="2" name="Image 0" descr="assets/logo_tron.png">    </p:cNvPr>
+          <p:cNvPr id="2" name="Image 0" descr="/home/user/comdraft/assets/img/dau-huong.png">    </p:cNvPr>
           <p:cNvPicPr>
             <a:picLocks noChangeAspect="1"/>
           </p:cNvPicPr>
@@ -11596,7 +11930,7 @@
 </p:sld>
 </file>
 
-<file path=ppt/slides/slide5.xml><?xml version="1.0" encoding="utf-8"?>
+<file path=ppt/slides/slide6.xml><?xml version="1.0" encoding="utf-8"?>
 <p:sld xmlns:a="http://schemas.openxmlformats.org/drawingml/2006/main" xmlns:r="http://schemas.openxmlformats.org/officeDocument/2006/relationships" xmlns:p="http://schemas.openxmlformats.org/presentationml/2006/main">
   <p:cSld name="Slide 5">
     <p:bg>
@@ -11622,7 +11956,7 @@
       </p:grpSpPr>
       <p:pic>
         <p:nvPicPr>
-          <p:cNvPr id="2" name="Image 0" descr="assets/logo_tron.png">    </p:cNvPr>
+          <p:cNvPr id="2" name="Image 0" descr="/home/user/comdraft/assets/img/dau-huong.png">    </p:cNvPr>
           <p:cNvPicPr>
             <a:picLocks noChangeAspect="1"/>
           </p:cNvPicPr>
@@ -11863,351 +12197,62 @@
           </a:p>
         </p:txBody>
       </p:sp>
-      <p:sp>
-        <p:nvSpPr>
-          <p:cNvPr id="9" name="Shape 6"/>
-          <p:cNvSpPr/>
-          <p:nvPr/>
-        </p:nvSpPr>
-        <p:spPr>
-          <a:xfrm>
-            <a:off x="502920" y="1417320"/>
-            <a:ext cx="5509260" cy="2308860"/>
-          </a:xfrm>
-          <a:prstGeom prst="roundRect">
-            <a:avLst>
-              <a:gd name="adj" fmla="val 3564"/>
-            </a:avLst>
-          </a:prstGeom>
-          <a:solidFill>
-            <a:srgbClr val="FDF1EF"/>
-          </a:solidFill>
-          <a:ln w="15875">
-            <a:solidFill>
-              <a:srgbClr val="FBCEC9"/>
-            </a:solidFill>
-            <a:prstDash val="solid"/>
-          </a:ln>
-        </p:spPr>
-        <p:txBody>
-          <a:bodyPr/>
-          <a:p/>
-        </p:txBody>
-      </p:sp>
-      <p:sp>
-        <p:nvSpPr>
-          <p:cNvPr id="10" name="Text 7"/>
-          <p:cNvSpPr/>
-          <p:nvPr/>
-        </p:nvSpPr>
-        <p:spPr>
-          <a:xfrm>
-            <a:off x="722376" y="1490472"/>
-            <a:ext cx="5070348" cy="2162556"/>
-          </a:xfrm>
-          <a:prstGeom prst="rect">
-            <a:avLst/>
-          </a:prstGeom>
-          <a:noFill/>
-          <a:ln/>
-        </p:spPr>
-        <p:txBody>
-          <a:bodyPr wrap="square" lIns="0" tIns="0" rIns="0" bIns="0" rtlCol="0" anchor="ctr"/>
-          <a:lstStyle/>
-          <a:p>
-            <a:pPr indent="0" marL="0">
-              <a:buNone/>
-            </a:pPr>
-            <a:r>
-              <a:rPr lang="en-US" sz="1500" b="1" dirty="0">
-                <a:solidFill>
-                  <a:srgbClr val="AC4D33"/>
-                </a:solidFill>
-                <a:latin typeface="Calibri" pitchFamily="34" charset="0"/>
-                <a:ea typeface="Calibri" pitchFamily="34" charset="-122"/>
-                <a:cs typeface="Calibri" pitchFamily="34" charset="-120"/>
-              </a:rPr>
-              <a:t>Văn bản quy phạm pháp luật</a:t>
-            </a:r>
-            <a:endParaRPr lang="en-US" sz="1500" dirty="0"/>
-          </a:p>
-          <a:p>
-            <a:pPr indent="0" marL="0">
-              <a:buNone/>
-            </a:pPr>
-            <a:r>
-              <a:rPr lang="en-US" sz="1250" dirty="0">
-                <a:solidFill>
-                  <a:srgbClr val="3A2B28"/>
-                </a:solidFill>
-                <a:latin typeface="Calibri" pitchFamily="34" charset="0"/>
-                <a:ea typeface="Calibri" pitchFamily="34" charset="-122"/>
-                <a:cs typeface="Calibri" pitchFamily="34" charset="-120"/>
-              </a:rPr>
-              <a:t>Chứa quy tắc xử sự chung, do cơ quan nhà nước có thẩm quyền ban hành: Luật, Nghị định, Thông tư. Doanh nghiệp không ban hành nhưng phải tuân thủ.</a:t>
-            </a:r>
-            <a:endParaRPr lang="en-US" sz="1500" dirty="0"/>
-          </a:p>
-        </p:txBody>
-      </p:sp>
-      <p:sp>
-        <p:nvSpPr>
-          <p:cNvPr id="11" name="Shape 8"/>
-          <p:cNvSpPr/>
-          <p:nvPr/>
-        </p:nvSpPr>
-        <p:spPr>
-          <a:xfrm>
-            <a:off x="6195060" y="1417320"/>
-            <a:ext cx="5509260" cy="2308860"/>
-          </a:xfrm>
-          <a:prstGeom prst="roundRect">
-            <a:avLst>
-              <a:gd name="adj" fmla="val 3564"/>
-            </a:avLst>
-          </a:prstGeom>
-          <a:solidFill>
-            <a:srgbClr val="FDF1EF"/>
-          </a:solidFill>
-          <a:ln w="15875">
-            <a:solidFill>
-              <a:srgbClr val="FBCEC9"/>
-            </a:solidFill>
-            <a:prstDash val="solid"/>
-          </a:ln>
-        </p:spPr>
-        <p:txBody>
-          <a:bodyPr/>
-          <a:p/>
-        </p:txBody>
-      </p:sp>
-      <p:sp>
-        <p:nvSpPr>
-          <p:cNvPr id="12" name="Text 9"/>
-          <p:cNvSpPr/>
-          <p:nvPr/>
-        </p:nvSpPr>
-        <p:spPr>
-          <a:xfrm>
-            <a:off x="6414516" y="1490472"/>
-            <a:ext cx="5070348" cy="2162556"/>
-          </a:xfrm>
-          <a:prstGeom prst="rect">
-            <a:avLst/>
-          </a:prstGeom>
-          <a:noFill/>
-          <a:ln/>
-        </p:spPr>
-        <p:txBody>
-          <a:bodyPr wrap="square" lIns="0" tIns="0" rIns="0" bIns="0" rtlCol="0" anchor="ctr"/>
-          <a:lstStyle/>
-          <a:p>
-            <a:pPr indent="0" marL="0">
-              <a:buNone/>
-            </a:pPr>
-            <a:r>
-              <a:rPr lang="en-US" sz="1500" b="1" dirty="0">
-                <a:solidFill>
-                  <a:srgbClr val="AC4D33"/>
-                </a:solidFill>
-                <a:latin typeface="Calibri" pitchFamily="34" charset="0"/>
-                <a:ea typeface="Calibri" pitchFamily="34" charset="-122"/>
-                <a:cs typeface="Calibri" pitchFamily="34" charset="-120"/>
-              </a:rPr>
-              <a:t>Văn bản hành chính</a:t>
-            </a:r>
-            <a:endParaRPr lang="en-US" sz="1500" dirty="0"/>
-          </a:p>
-          <a:p>
-            <a:pPr indent="0" marL="0">
-              <a:buNone/>
-            </a:pPr>
-            <a:r>
-              <a:rPr lang="en-US" sz="1250" dirty="0">
-                <a:solidFill>
-                  <a:srgbClr val="3A2B28"/>
-                </a:solidFill>
-                <a:latin typeface="Calibri" pitchFamily="34" charset="0"/>
-                <a:ea typeface="Calibri" pitchFamily="34" charset="-122"/>
-                <a:cs typeface="Calibri" pitchFamily="34" charset="-120"/>
-              </a:rPr>
-              <a:t>Loại gặp nhiều nhất — 29 loại theo NĐ 30/2020: quyết định cá biệt, công văn, thông báo, báo cáo, tờ trình, biên bản…</a:t>
-            </a:r>
-            <a:endParaRPr lang="en-US" sz="1500" dirty="0"/>
-          </a:p>
-        </p:txBody>
-      </p:sp>
-      <p:sp>
-        <p:nvSpPr>
-          <p:cNvPr id="13" name="Shape 10"/>
-          <p:cNvSpPr/>
-          <p:nvPr/>
-        </p:nvSpPr>
-        <p:spPr>
-          <a:xfrm>
-            <a:off x="502920" y="3909060"/>
-            <a:ext cx="5509260" cy="2308860"/>
-          </a:xfrm>
-          <a:prstGeom prst="roundRect">
-            <a:avLst>
-              <a:gd name="adj" fmla="val 3564"/>
-            </a:avLst>
-          </a:prstGeom>
-          <a:solidFill>
-            <a:srgbClr val="FDF1EF"/>
-          </a:solidFill>
-          <a:ln w="15875">
-            <a:solidFill>
-              <a:srgbClr val="FBCEC9"/>
-            </a:solidFill>
-            <a:prstDash val="solid"/>
-          </a:ln>
-        </p:spPr>
-        <p:txBody>
-          <a:bodyPr/>
-          <a:p/>
-        </p:txBody>
-      </p:sp>
-      <p:sp>
-        <p:nvSpPr>
-          <p:cNvPr id="14" name="Text 11"/>
-          <p:cNvSpPr/>
-          <p:nvPr/>
-        </p:nvSpPr>
-        <p:spPr>
-          <a:xfrm>
-            <a:off x="722376" y="3982212"/>
-            <a:ext cx="5070348" cy="2162556"/>
-          </a:xfrm>
-          <a:prstGeom prst="rect">
-            <a:avLst/>
-          </a:prstGeom>
-          <a:noFill/>
-          <a:ln/>
-        </p:spPr>
-        <p:txBody>
-          <a:bodyPr wrap="square" lIns="0" tIns="0" rIns="0" bIns="0" rtlCol="0" anchor="ctr"/>
-          <a:lstStyle/>
-          <a:p>
-            <a:pPr indent="0" marL="0">
-              <a:buNone/>
-            </a:pPr>
-            <a:r>
-              <a:rPr lang="en-US" sz="1500" b="1" dirty="0">
-                <a:solidFill>
-                  <a:srgbClr val="AC4D33"/>
-                </a:solidFill>
-                <a:latin typeface="Calibri" pitchFamily="34" charset="0"/>
-                <a:ea typeface="Calibri" pitchFamily="34" charset="-122"/>
-                <a:cs typeface="Calibri" pitchFamily="34" charset="-120"/>
-              </a:rPr>
-              <a:t>Văn bản chuyên ngành</a:t>
-            </a:r>
-            <a:endParaRPr lang="en-US" sz="1500" dirty="0"/>
-          </a:p>
-          <a:p>
-            <a:pPr indent="0" marL="0">
-              <a:buNone/>
-            </a:pPr>
-            <a:r>
-              <a:rPr lang="en-US" sz="1250" dirty="0">
-                <a:solidFill>
-                  <a:srgbClr val="3A2B28"/>
-                </a:solidFill>
-                <a:latin typeface="Calibri" pitchFamily="34" charset="0"/>
-                <a:ea typeface="Calibri" pitchFamily="34" charset="-122"/>
-                <a:cs typeface="Calibri" pitchFamily="34" charset="-120"/>
-              </a:rPr>
-              <a:t>Hình thành trong nghiệp vụ chuyên môn: chứng từ kế toán, hồ sơ kỹ thuật, hồ sơ mời thầu.</a:t>
-            </a:r>
-            <a:endParaRPr lang="en-US" sz="1500" dirty="0"/>
-          </a:p>
-        </p:txBody>
-      </p:sp>
-      <p:sp>
-        <p:nvSpPr>
-          <p:cNvPr id="15" name="Shape 12"/>
-          <p:cNvSpPr/>
-          <p:nvPr/>
-        </p:nvSpPr>
-        <p:spPr>
-          <a:xfrm>
-            <a:off x="6195060" y="3909060"/>
-            <a:ext cx="5509260" cy="2308860"/>
-          </a:xfrm>
-          <a:prstGeom prst="roundRect">
-            <a:avLst>
-              <a:gd name="adj" fmla="val 3564"/>
-            </a:avLst>
-          </a:prstGeom>
-          <a:solidFill>
-            <a:srgbClr val="FDF1EF"/>
-          </a:solidFill>
-          <a:ln w="15875">
-            <a:solidFill>
-              <a:srgbClr val="FBCEC9"/>
-            </a:solidFill>
-            <a:prstDash val="solid"/>
-          </a:ln>
-        </p:spPr>
-        <p:txBody>
-          <a:bodyPr/>
-          <a:p/>
-        </p:txBody>
-      </p:sp>
-      <p:sp>
-        <p:nvSpPr>
-          <p:cNvPr id="16" name="Text 13"/>
-          <p:cNvSpPr/>
-          <p:nvPr/>
-        </p:nvSpPr>
-        <p:spPr>
-          <a:xfrm>
-            <a:off x="6414516" y="3982212"/>
-            <a:ext cx="5070348" cy="2162556"/>
-          </a:xfrm>
-          <a:prstGeom prst="rect">
-            <a:avLst/>
-          </a:prstGeom>
-          <a:noFill/>
-          <a:ln/>
-        </p:spPr>
-        <p:txBody>
-          <a:bodyPr wrap="square" lIns="0" tIns="0" rIns="0" bIns="0" rtlCol="0" anchor="ctr"/>
-          <a:lstStyle/>
-          <a:p>
-            <a:pPr indent="0" marL="0">
-              <a:buNone/>
-            </a:pPr>
-            <a:r>
-              <a:rPr lang="en-US" sz="1500" b="1" dirty="0">
-                <a:solidFill>
-                  <a:srgbClr val="AC4D33"/>
-                </a:solidFill>
-                <a:latin typeface="Calibri" pitchFamily="34" charset="0"/>
-                <a:ea typeface="Calibri" pitchFamily="34" charset="-122"/>
-                <a:cs typeface="Calibri" pitchFamily="34" charset="-120"/>
-              </a:rPr>
-              <a:t>Văn bản thương mại</a:t>
-            </a:r>
-            <a:endParaRPr lang="en-US" sz="1500" dirty="0"/>
-          </a:p>
-          <a:p>
-            <a:pPr indent="0" marL="0">
-              <a:buNone/>
-            </a:pPr>
-            <a:r>
-              <a:rPr lang="en-US" sz="1250" dirty="0">
-                <a:solidFill>
-                  <a:srgbClr val="3A2B28"/>
-                </a:solidFill>
-                <a:latin typeface="Calibri" pitchFamily="34" charset="0"/>
-                <a:ea typeface="Calibri" pitchFamily="34" charset="-122"/>
-                <a:cs typeface="Calibri" pitchFamily="34" charset="-120"/>
-              </a:rPr>
-              <a:t>Phục vụ giao dịch kinh doanh: thư tín thương mại, báo giá, đơn đặt hàng, hợp đồng — học kỹ ở mục 5.4.</a:t>
-            </a:r>
-            <a:endParaRPr lang="en-US" sz="1500" dirty="0"/>
+      <p:pic>
+        <p:nvPicPr>
+          <p:cNvPr id="9" name="Picture 8" descr="c5-phan-loai-van-ban-nt.png"/>
+          <p:cNvPicPr>
+            <a:picLocks noChangeAspect="1"/>
+          </p:cNvPicPr>
+          <p:nvPr/>
+        </p:nvPicPr>
+        <p:blipFill>
+          <a:blip r:embed="rId4"/>
+          <a:stretch>
+            <a:fillRect/>
+          </a:stretch>
+        </p:blipFill>
+        <p:spPr>
+          <a:xfrm>
+            <a:off x="841173" y="1751850"/>
+            <a:ext cx="10509347" cy="4168114"/>
+          </a:xfrm>
+          <a:prstGeom prst="rect">
+            <a:avLst/>
+          </a:prstGeom>
+        </p:spPr>
+      </p:pic>
+      <p:sp>
+        <p:nvSpPr>
+          <p:cNvPr id="10" name="TextBox 9"/>
+          <p:cNvSpPr txBox="1"/>
+          <p:nvPr/>
+        </p:nvSpPr>
+        <p:spPr>
+          <a:xfrm>
+            <a:off x="548640" y="5993117"/>
+            <a:ext cx="11109960" cy="310896"/>
+          </a:xfrm>
+          <a:prstGeom prst="rect">
+            <a:avLst/>
+          </a:prstGeom>
+          <a:noFill/>
+        </p:spPr>
+        <p:txBody>
+          <a:bodyPr wrap="square">
+            <a:spAutoFit/>
+          </a:bodyPr>
+          <a:lstStyle/>
+          <a:p>
+            <a:pPr algn="ctr"/>
+            <a:r>
+              <a:rPr sz="1150" i="1">
+                <a:solidFill>
+                  <a:srgbClr val="8A7A76"/>
+                </a:solidFill>
+                <a:latin typeface="Calibri"/>
+              </a:rPr>
+              <a:t>Biết văn bản thuộc nhóm nào thì mới biết soạn theo mẫu nào và ai có thẩm quyền ký.</a:t>
+            </a:r>
           </a:p>
         </p:txBody>
       </p:sp>
@@ -12219,7 +12264,7 @@
 </p:sld>
 </file>
 
-<file path=ppt/slides/slide6.xml><?xml version="1.0" encoding="utf-8"?>
+<file path=ppt/slides/slide7.xml><?xml version="1.0" encoding="utf-8"?>
 <p:sld xmlns:a="http://schemas.openxmlformats.org/drawingml/2006/main" xmlns:r="http://schemas.openxmlformats.org/officeDocument/2006/relationships" xmlns:p="http://schemas.openxmlformats.org/presentationml/2006/main">
   <p:cSld name="Slide 6">
     <p:bg>
@@ -12245,7 +12290,7 @@
       </p:grpSpPr>
       <p:pic>
         <p:nvPicPr>
-          <p:cNvPr id="2" name="Image 0" descr="assets/logo_tron.png">    </p:cNvPr>
+          <p:cNvPr id="2" name="Image 0" descr="/home/user/comdraft/assets/img/dau-huong.png">    </p:cNvPr>
           <p:cNvPicPr>
             <a:picLocks noChangeAspect="1"/>
           </p:cNvPicPr>
@@ -12842,7 +12887,7 @@
 </p:sld>
 </file>
 
-<file path=ppt/slides/slide7.xml><?xml version="1.0" encoding="utf-8"?>
+<file path=ppt/slides/slide8.xml><?xml version="1.0" encoding="utf-8"?>
 <p:sld xmlns:a="http://schemas.openxmlformats.org/drawingml/2006/main" xmlns:r="http://schemas.openxmlformats.org/officeDocument/2006/relationships" xmlns:p="http://schemas.openxmlformats.org/presentationml/2006/main">
   <p:cSld name="Slide 7">
     <p:bg>
@@ -12868,7 +12913,7 @@
       </p:grpSpPr>
       <p:pic>
         <p:nvPicPr>
-          <p:cNvPr id="2" name="Image 0" descr="assets/logo_tron.png">    </p:cNvPr>
+          <p:cNvPr id="2" name="Image 0" descr="/home/user/comdraft/assets/img/dau-huong.png">    </p:cNvPr>
           <p:cNvPicPr>
             <a:picLocks noChangeAspect="1"/>
           </p:cNvPicPr>
@@ -13125,7 +13170,7 @@
         </p:blipFill>
         <p:spPr>
           <a:xfrm>
-            <a:off x="472287" y="1481328"/>
+            <a:off x="472287" y="1595135"/>
             <a:ext cx="11247120" cy="4481544"/>
           </a:xfrm>
           <a:prstGeom prst="rect">
@@ -13141,7 +13186,7 @@
 </p:sld>
 </file>
 
-<file path=ppt/slides/slide8.xml><?xml version="1.0" encoding="utf-8"?>
+<file path=ppt/slides/slide9.xml><?xml version="1.0" encoding="utf-8"?>
 <p:sld xmlns:a="http://schemas.openxmlformats.org/drawingml/2006/main" xmlns:r="http://schemas.openxmlformats.org/officeDocument/2006/relationships" xmlns:p="http://schemas.openxmlformats.org/presentationml/2006/main">
   <p:cSld name="Slide 8">
     <p:bg>
@@ -13167,7 +13212,7 @@
       </p:grpSpPr>
       <p:pic>
         <p:nvPicPr>
-          <p:cNvPr id="2" name="Image 0" descr="assets/logo_tron.png">    </p:cNvPr>
+          <p:cNvPr id="2" name="Image 0" descr="/home/user/comdraft/assets/img/dau-huong.png">    </p:cNvPr>
           <p:cNvPicPr>
             <a:picLocks noChangeAspect="1"/>
           </p:cNvPicPr>
@@ -13753,340 +13798,6 @@
               <a:t>Tiếng Việt chuẩn mực; viết hoa, viết tắt đúng quy định; số liệu dùng chữ số Ả Rập.</a:t>
             </a:r>
             <a:endParaRPr lang="en-US" sz="1500" dirty="0"/>
-          </a:p>
-        </p:txBody>
-      </p:sp>
-    </p:spTree>
-  </p:cSld>
-  <p:clrMapOvr>
-    <a:masterClrMapping/>
-  </p:clrMapOvr>
-</p:sld>
-</file>
-
-<file path=ppt/slides/slide9.xml><?xml version="1.0" encoding="utf-8"?>
-<p:sld xmlns:a="http://schemas.openxmlformats.org/drawingml/2006/main" xmlns:r="http://schemas.openxmlformats.org/officeDocument/2006/relationships" xmlns:p="http://schemas.openxmlformats.org/presentationml/2006/main">
-  <p:cSld name="Slide 9">
-    <p:bg>
-      <p:bgPr>
-        <a:solidFill>
-          <a:srgbClr val="FDFBF8"/>
-        </a:solidFill>
-      </p:bgPr>
-    </p:bg>
-    <p:spTree>
-      <p:nvGrpSpPr>
-        <p:cNvPr id="1" name=""/>
-        <p:cNvGrpSpPr/>
-        <p:nvPr/>
-      </p:nvGrpSpPr>
-      <p:grpSpPr>
-        <a:xfrm>
-          <a:off x="0" y="0"/>
-          <a:ext cx="0" cy="0"/>
-          <a:chOff x="0" y="0"/>
-          <a:chExt cx="0" cy="0"/>
-        </a:xfrm>
-      </p:grpSpPr>
-      <p:pic>
-        <p:nvPicPr>
-          <p:cNvPr id="2" name="Image 0" descr="assets/logo_tron.png">    </p:cNvPr>
-          <p:cNvPicPr>
-            <a:picLocks noChangeAspect="1"/>
-          </p:cNvPicPr>
-          <p:nvPr/>
-        </p:nvPicPr>
-        <p:blipFill>
-          <a:blip r:embed="rId1"/>
-          <a:stretch>
-            <a:fillRect/>
-          </a:stretch>
-        </p:blipFill>
-        <p:spPr>
-          <a:xfrm>
-            <a:off x="411480" y="6327648"/>
-            <a:ext cx="384048" cy="384048"/>
-          </a:xfrm>
-          <a:prstGeom prst="rect">
-            <a:avLst/>
-          </a:prstGeom>
-        </p:spPr>
-      </p:pic>
-      <p:sp>
-        <p:nvSpPr>
-          <p:cNvPr id="3" name="Text 0"/>
-          <p:cNvSpPr/>
-          <p:nvPr/>
-        </p:nvSpPr>
-        <p:spPr>
-          <a:xfrm>
-            <a:off x="868680" y="6355080"/>
-            <a:ext cx="7498080" cy="310896"/>
-          </a:xfrm>
-          <a:prstGeom prst="rect">
-            <a:avLst/>
-          </a:prstGeom>
-          <a:noFill/>
-          <a:ln/>
-        </p:spPr>
-        <p:txBody>
-          <a:bodyPr wrap="square" lIns="0" tIns="0" rIns="0" bIns="0" rtlCol="0" anchor="ctr"/>
-          <a:lstStyle/>
-          <a:p>
-            <a:pPr indent="0" marL="0">
-              <a:buNone/>
-            </a:pPr>
-            <a:r>
-              <a:rPr lang="en-US" sz="900" dirty="0">
-                <a:solidFill>
-                  <a:srgbClr val="8A7A76"/>
-                </a:solidFill>
-                <a:latin typeface="Calibri" pitchFamily="34" charset="0"/>
-                <a:ea typeface="Calibri" pitchFamily="34" charset="-122"/>
-                <a:cs typeface="Calibri" pitchFamily="34" charset="-120"/>
-              </a:rPr>
-              <a:t>Je m'appelle Huong  •  GV. Đỗ Thùy Hương  •  EC1103</a:t>
-            </a:r>
-            <a:endParaRPr lang="en-US" sz="900" dirty="0"/>
-          </a:p>
-        </p:txBody>
-      </p:sp>
-      <p:sp>
-        <p:nvSpPr>
-          <p:cNvPr id="4" name="Text 1"/>
-          <p:cNvSpPr/>
-          <p:nvPr/>
-        </p:nvSpPr>
-        <p:spPr>
-          <a:xfrm>
-            <a:off x="8503920" y="6355080"/>
-            <a:ext cx="2743200" cy="310896"/>
-          </a:xfrm>
-          <a:prstGeom prst="rect">
-            <a:avLst/>
-          </a:prstGeom>
-          <a:noFill/>
-          <a:ln/>
-        </p:spPr>
-        <p:txBody>
-          <a:bodyPr wrap="square" lIns="0" tIns="0" rIns="0" bIns="0" rtlCol="0" anchor="ctr"/>
-          <a:lstStyle/>
-          <a:p>
-            <a:pPr algn="r" indent="0" marL="0">
-              <a:buNone/>
-            </a:pPr>
-            <a:r>
-              <a:rPr lang="en-US" sz="900" dirty="0">
-                <a:solidFill>
-                  <a:srgbClr val="8A7A76"/>
-                </a:solidFill>
-                <a:latin typeface="Calibri" pitchFamily="34" charset="0"/>
-                <a:ea typeface="Calibri" pitchFamily="34" charset="-122"/>
-                <a:cs typeface="Calibri" pitchFamily="34" charset="-120"/>
-              </a:rPr>
-              <a:t>Chương 5</a:t>
-            </a:r>
-            <a:endParaRPr lang="en-US" sz="900" dirty="0"/>
-          </a:p>
-        </p:txBody>
-      </p:sp>
-      <p:sp>
-        <p:nvSpPr>
-          <p:cNvPr id="5" name="Shape 2"/>
-          <p:cNvSpPr/>
-          <p:nvPr/>
-        </p:nvSpPr>
-        <p:spPr>
-          <a:xfrm>
-            <a:off x="11430000" y="6327648"/>
-            <a:ext cx="365760" cy="365760"/>
-          </a:xfrm>
-          <a:prstGeom prst="ellipse">
-            <a:avLst/>
-          </a:prstGeom>
-          <a:solidFill>
-            <a:srgbClr val="DC756A"/>
-          </a:solidFill>
-          <a:ln/>
-        </p:spPr>
-        <p:txBody>
-          <a:bodyPr/>
-          <a:p/>
-        </p:txBody>
-      </p:sp>
-      <p:sp>
-        <p:nvSpPr>
-          <p:cNvPr id="6" name="Text 3"/>
-          <p:cNvSpPr/>
-          <p:nvPr/>
-        </p:nvSpPr>
-        <p:spPr>
-          <a:xfrm>
-            <a:off x="11430000" y="6327648"/>
-            <a:ext cx="365760" cy="365760"/>
-          </a:xfrm>
-          <a:prstGeom prst="rect">
-            <a:avLst/>
-          </a:prstGeom>
-          <a:noFill/>
-          <a:ln/>
-        </p:spPr>
-        <p:txBody>
-          <a:bodyPr wrap="square" lIns="0" tIns="0" rIns="0" bIns="0" rtlCol="0" anchor="ctr"/>
-          <a:lstStyle/>
-          <a:p>
-            <a:pPr algn="ctr" indent="0" marL="0">
-              <a:buNone/>
-            </a:pPr>
-            <a:r>
-              <a:rPr lang="en-US" sz="1000" b="1" dirty="0">
-                <a:solidFill>
-                  <a:srgbClr val="FFFFFF"/>
-                </a:solidFill>
-                <a:latin typeface="Calibri" pitchFamily="34" charset="0"/>
-                <a:ea typeface="Calibri" pitchFamily="34" charset="-122"/>
-                <a:cs typeface="Calibri" pitchFamily="34" charset="-120"/>
-              </a:rPr>
-              <a:t>9</a:t>
-            </a:r>
-            <a:endParaRPr lang="en-US" sz="1000" dirty="0"/>
-          </a:p>
-        </p:txBody>
-      </p:sp>
-      <p:sp>
-        <p:nvSpPr>
-          <p:cNvPr id="7" name="Text 4"/>
-          <p:cNvSpPr/>
-          <p:nvPr/>
-        </p:nvSpPr>
-        <p:spPr>
-          <a:xfrm>
-            <a:off x="502920" y="310896"/>
-            <a:ext cx="11155680" cy="274320"/>
-          </a:xfrm>
-          <a:prstGeom prst="rect">
-            <a:avLst/>
-          </a:prstGeom>
-          <a:noFill/>
-          <a:ln/>
-        </p:spPr>
-        <p:txBody>
-          <a:bodyPr wrap="square" lIns="0" tIns="0" rIns="0" bIns="0" rtlCol="0" anchor="ctr"/>
-          <a:lstStyle/>
-          <a:p>
-            <a:pPr indent="0" marL="0">
-              <a:buNone/>
-            </a:pPr>
-            <a:r>
-              <a:rPr lang="en-US" sz="1100" b="1" spc="300" kern="0" dirty="0">
-                <a:solidFill>
-                  <a:srgbClr val="DC756A"/>
-                </a:solidFill>
-                <a:latin typeface="Calibri" pitchFamily="34" charset="0"/>
-                <a:ea typeface="Calibri" pitchFamily="34" charset="-122"/>
-                <a:cs typeface="Calibri" pitchFamily="34" charset="-120"/>
-              </a:rPr>
-              <a:t>5.3</a:t>
-            </a:r>
-            <a:endParaRPr lang="en-US" sz="1100" dirty="0"/>
-          </a:p>
-        </p:txBody>
-      </p:sp>
-      <p:sp>
-        <p:nvSpPr>
-          <p:cNvPr id="8" name="Text 5"/>
-          <p:cNvSpPr/>
-          <p:nvPr/>
-        </p:nvSpPr>
-        <p:spPr>
-          <a:xfrm>
-            <a:off x="502920" y="576072"/>
-            <a:ext cx="11155680" cy="713232"/>
-          </a:xfrm>
-          <a:prstGeom prst="rect">
-            <a:avLst/>
-          </a:prstGeom>
-          <a:noFill/>
-          <a:ln/>
-        </p:spPr>
-        <p:txBody>
-          <a:bodyPr wrap="square" lIns="0" tIns="0" rIns="0" bIns="0" rtlCol="0" anchor="ctr"/>
-          <a:lstStyle/>
-          <a:p>
-            <a:pPr indent="0" marL="0">
-              <a:buNone/>
-            </a:pPr>
-            <a:r>
-              <a:rPr lang="en-US" sz="2700" b="1" dirty="0">
-                <a:solidFill>
-                  <a:srgbClr val="AC4D33"/>
-                </a:solidFill>
-                <a:latin typeface="Cambria" pitchFamily="34" charset="0"/>
-                <a:ea typeface="Cambria" pitchFamily="34" charset="-122"/>
-                <a:cs typeface="Cambria" pitchFamily="34" charset="-120"/>
-              </a:rPr>
-              <a:t>Năm văn bản hành chính thông dụng</a:t>
-            </a:r>
-            <a:endParaRPr lang="en-US" sz="2700" dirty="0"/>
-          </a:p>
-        </p:txBody>
-      </p:sp>
-      <p:pic>
-        <p:nvPicPr>
-          <p:cNvPr id="9" name="Picture 8" descr="c5-chuoi-van-ban-nt.png"/>
-          <p:cNvPicPr>
-            <a:picLocks noChangeAspect="1"/>
-          </p:cNvPicPr>
-          <p:nvPr/>
-        </p:nvPicPr>
-        <p:blipFill>
-          <a:blip r:embed="rId4"/>
-          <a:stretch>
-            <a:fillRect/>
-          </a:stretch>
-        </p:blipFill>
-        <p:spPr>
-          <a:xfrm>
-            <a:off x="981171" y="1481328"/>
-            <a:ext cx="10229353" cy="2940939"/>
-          </a:xfrm>
-          <a:prstGeom prst="rect">
-            <a:avLst/>
-          </a:prstGeom>
-        </p:spPr>
-      </p:pic>
-      <p:sp>
-        <p:nvSpPr>
-          <p:cNvPr id="10" name="TextBox 9"/>
-          <p:cNvSpPr txBox="1"/>
-          <p:nvPr/>
-        </p:nvSpPr>
-        <p:spPr>
-          <a:xfrm>
-            <a:off x="548640" y="4495419"/>
-            <a:ext cx="11109960" cy="310896"/>
-          </a:xfrm>
-          <a:prstGeom prst="rect">
-            <a:avLst/>
-          </a:prstGeom>
-          <a:noFill/>
-        </p:spPr>
-        <p:txBody>
-          <a:bodyPr wrap="square">
-            <a:spAutoFit/>
-          </a:bodyPr>
-          <a:lstStyle/>
-          <a:p>
-            <a:pPr algn="ctr"/>
-            <a:r>
-              <a:rPr sz="1150" i="1">
-                <a:solidFill>
-                  <a:srgbClr val="8A7A76"/>
-                </a:solidFill>
-                <a:latin typeface="Calibri"/>
-              </a:rPr>
-              <a:t>Chuỗi văn bản của một thương vụ — sinh viên sẽ soạn lại đúng chuỗi này trong phần thực hành.</a:t>
-            </a:r>
           </a:p>
         </p:txBody>
       </p:sp>
@@ -14141,14 +13852,108 @@
     </a:clrScheme>
     <a:fontScheme name="Office">
       <a:majorFont>
-        <a:latin typeface="Cambria" panose="020F0302020204030204"/>
-        <a:ea typeface="Cambria"/>
-        <a:cs typeface="Cambria"/>
+        <a:latin typeface="Calibri Light" panose="020F0302020204030204"/>
+        <a:ea typeface=""/>
+        <a:cs typeface=""/>
+        <a:font script="Jpan" typeface="游ゴシック Light"/>
+        <a:font script="Hang" typeface="맑은 고딕"/>
+        <a:font script="Hans" typeface="等线 Light"/>
+        <a:font script="Hant" typeface="新細明體"/>
+        <a:font script="Arab" typeface="Times New Roman"/>
+        <a:font script="Hebr" typeface="Times New Roman"/>
+        <a:font script="Thai" typeface="Angsana New"/>
+        <a:font script="Ethi" typeface="Nyala"/>
+        <a:font script="Beng" typeface="Vrinda"/>
+        <a:font script="Gujr" typeface="Shruti"/>
+        <a:font script="Khmr" typeface="MoolBoran"/>
+        <a:font script="Knda" typeface="Tunga"/>
+        <a:font script="Guru" typeface="Raavi"/>
+        <a:font script="Cans" typeface="Euphemia"/>
+        <a:font script="Cher" typeface="Plantagenet Cherokee"/>
+        <a:font script="Yiii" typeface="Microsoft Yi Baiti"/>
+        <a:font script="Tibt" typeface="Microsoft Himalaya"/>
+        <a:font script="Thaa" typeface="MV Boli"/>
+        <a:font script="Deva" typeface="Mangal"/>
+        <a:font script="Telu" typeface="Gautami"/>
+        <a:font script="Taml" typeface="Latha"/>
+        <a:font script="Syrc" typeface="Estrangelo Edessa"/>
+        <a:font script="Orya" typeface="Kalinga"/>
+        <a:font script="Mlym" typeface="Kartika"/>
+        <a:font script="Laoo" typeface="DokChampa"/>
+        <a:font script="Sinh" typeface="Iskoola Pota"/>
+        <a:font script="Mong" typeface="Mongolian Baiti"/>
+        <a:font script="Viet" typeface="Times New Roman"/>
+        <a:font script="Uigh" typeface="Microsoft Uighur"/>
+        <a:font script="Geor" typeface="Sylfaen"/>
+        <a:font script="Armn" typeface="Arial"/>
+        <a:font script="Bugi" typeface="Leelawadee UI"/>
+        <a:font script="Bopo" typeface="Microsoft JhengHei"/>
+        <a:font script="Java" typeface="Javanese Text"/>
+        <a:font script="Lisu" typeface="Segoe UI"/>
+        <a:font script="Mymr" typeface="Myanmar Text"/>
+        <a:font script="Nkoo" typeface="Ebrima"/>
+        <a:font script="Olck" typeface="Nirmala UI"/>
+        <a:font script="Osma" typeface="Ebrima"/>
+        <a:font script="Phag" typeface="Phagspa"/>
+        <a:font script="Syrn" typeface="Estrangelo Edessa"/>
+        <a:font script="Syrj" typeface="Estrangelo Edessa"/>
+        <a:font script="Syre" typeface="Estrangelo Edessa"/>
+        <a:font script="Sora" typeface="Nirmala UI"/>
+        <a:font script="Tale" typeface="Microsoft Tai Le"/>
+        <a:font script="Talu" typeface="Microsoft New Tai Lue"/>
+        <a:font script="Tfng" typeface="Ebrima"/>
       </a:majorFont>
       <a:minorFont>
         <a:latin typeface="Calibri" panose="020F0502020204030204"/>
-        <a:ea typeface="Calibri"/>
-        <a:cs typeface="Calibri"/>
+        <a:ea typeface=""/>
+        <a:cs typeface=""/>
+        <a:font script="Jpan" typeface="游ゴシック"/>
+        <a:font script="Hang" typeface="맑은 고딕"/>
+        <a:font script="Hans" typeface="等线"/>
+        <a:font script="Hant" typeface="新細明體"/>
+        <a:font script="Arab" typeface="Arial"/>
+        <a:font script="Hebr" typeface="Arial"/>
+        <a:font script="Thai" typeface="Cordia New"/>
+        <a:font script="Ethi" typeface="Nyala"/>
+        <a:font script="Beng" typeface="Vrinda"/>
+        <a:font script="Gujr" typeface="Shruti"/>
+        <a:font script="Khmr" typeface="DaunPenh"/>
+        <a:font script="Knda" typeface="Tunga"/>
+        <a:font script="Guru" typeface="Raavi"/>
+        <a:font script="Cans" typeface="Euphemia"/>
+        <a:font script="Cher" typeface="Plantagenet Cherokee"/>
+        <a:font script="Yiii" typeface="Microsoft Yi Baiti"/>
+        <a:font script="Tibt" typeface="Microsoft Himalaya"/>
+        <a:font script="Thaa" typeface="MV Boli"/>
+        <a:font script="Deva" typeface="Mangal"/>
+        <a:font script="Telu" typeface="Gautami"/>
+        <a:font script="Taml" typeface="Latha"/>
+        <a:font script="Syrc" typeface="Estrangelo Edessa"/>
+        <a:font script="Orya" typeface="Kalinga"/>
+        <a:font script="Mlym" typeface="Kartika"/>
+        <a:font script="Laoo" typeface="DokChampa"/>
+        <a:font script="Sinh" typeface="Iskoola Pota"/>
+        <a:font script="Mong" typeface="Mongolian Baiti"/>
+        <a:font script="Viet" typeface="Arial"/>
+        <a:font script="Uigh" typeface="Microsoft Uighur"/>
+        <a:font script="Geor" typeface="Sylfaen"/>
+        <a:font script="Armn" typeface="Arial"/>
+        <a:font script="Bugi" typeface="Leelawadee UI"/>
+        <a:font script="Bopo" typeface="Microsoft JhengHei"/>
+        <a:font script="Java" typeface="Javanese Text"/>
+        <a:font script="Lisu" typeface="Segoe UI"/>
+        <a:font script="Mymr" typeface="Myanmar Text"/>
+        <a:font script="Nkoo" typeface="Ebrima"/>
+        <a:font script="Olck" typeface="Nirmala UI"/>
+        <a:font script="Osma" typeface="Ebrima"/>
+        <a:font script="Phag" typeface="Phagspa"/>
+        <a:font script="Syrn" typeface="Estrangelo Edessa"/>
+        <a:font script="Syrj" typeface="Estrangelo Edessa"/>
+        <a:font script="Syre" typeface="Estrangelo Edessa"/>
+        <a:font script="Sora" typeface="Nirmala UI"/>
+        <a:font script="Tale" typeface="Microsoft Tai Le"/>
+        <a:font script="Talu" typeface="Microsoft New Tai Lue"/>
+        <a:font script="Tfng" typeface="Ebrima"/>
       </a:minorFont>
     </a:fontScheme>
     <a:fmtScheme name="Office">

--- a/slides/05-soan-thao-van-ban.pptx
+++ b/slides/05-soan-thao-van-ban.pptx
@@ -632,6 +632,22 @@
               <a:t>• Nhấn: tờ trình phải có SỐ LIỆU và DỰ TOÁN, nếu không cấp trên không có cơ sở duyệt.</a:t>
             </a:r>
           </a:p>
+          <a:p/>
+          <a:p>
+            <a:r>
+              <a:t>NÓI ĐỦ Ý (phần đã rút khỏi slide)</a:t>
+            </a:r>
+          </a:p>
+          <a:p>
+            <a:r>
+              <a:t>• Quyết định: phần căn cứ gồm căn cứ PHÁP LÝ và căn cứ THỰC TIỄN, mỗi căn cứ kết thúc bằng dấu chấm phẩy, căn cứ cuối kết thúc bằng dấu chấm. Điều cuối ghi hiệu lực và đối tượng thi hành.</a:t>
+            </a:r>
+          </a:p>
+          <a:p>
+            <a:r>
+              <a:t>• Tờ trình: mở đầu nêu lý do và sự cần thiết; nội dung trình bày phương án, lợi ích, tính khả thi; kết thúc kiến nghị phê duyệt. Nhớ đính kèm hồ sơ, dự toán.</a:t>
+            </a:r>
+          </a:p>
         </p:txBody>
       </p:sp>
       <p:sp>
@@ -733,6 +749,27 @@
               <a:t>• Báo cáo: mạch 4 phần. Nhấn: phải nêu cả HẠN CHẾ, đừng chỉ kể thành tích.</a:t>
             </a:r>
           </a:p>
+          <a:p/>
+          <a:p>
+            <a:r>
+              <a:t>NÓI ĐỦ Ý (phần đã rút khỏi slide)</a:t>
+            </a:r>
+          </a:p>
+          <a:p>
+            <a:r>
+              <a:t>• Công văn các loại: đề nghị, phúc đáp, đôn đốc, hướng dẫn, giải thích, mời họp. Kết thúc bằng “Trân trọng./.”</a:t>
+            </a:r>
+          </a:p>
+          <a:p>
+            <a:r>
+              <a:t>• Biên bản: chữ ký các bên là yếu tố TẠO GIÁ TRỊ PHÁP LÝ — thiếu chữ ký thì biên bản chỉ là tờ giấy ghi chép.</a:t>
+            </a:r>
+          </a:p>
+          <a:p>
+            <a:r>
+              <a:t>• Báo cáo có bốn dạng: định kỳ, đột xuất, chuyên đề, sơ kết – tổng kết.</a:t>
+            </a:r>
+          </a:p>
         </p:txBody>
       </p:sp>
       <p:sp>
@@ -834,6 +871,32 @@
               <a:t>• Báo giá: nhấn mạnh THỜI HẠN HIỆU LỰC. Hỏi lớp vì sao cần — vì giá thị trường biến động, tránh bị ràng buộc giá cũ.</a:t>
             </a:r>
           </a:p>
+          <a:p/>
+          <a:p>
+            <a:r>
+              <a:t>NÓI ĐỦ Ý (phần đã rút khỏi slide)</a:t>
+            </a:r>
+          </a:p>
+          <a:p>
+            <a:r>
+              <a:t>• Nguyên tắc 5C: Clear (rõ) • Concise (gọn) • Correct (đúng) • Complete (đủ) • Courteous (lịch sự).</a:t>
+            </a:r>
+          </a:p>
+          <a:p>
+            <a:r>
+              <a:t>• Kết cấu thư: mở đầu – nội dung – kết thúc.</a:t>
+            </a:r>
+          </a:p>
+          <a:p>
+            <a:r>
+              <a:t>• Báo giá phải có THỜI HẠN HIỆU LỰC — thiếu là tranh chấp khi giá thị trường biến động.</a:t>
+            </a:r>
+          </a:p>
+          <a:p>
+            <a:r>
+              <a:t>• Email: phản hồi trong 24 giờ, kể cả khi chỉ để báo “đã nhận, đang xử lý”.</a:t>
+            </a:r>
+          </a:p>
         </p:txBody>
       </p:sp>
       <p:sp>
@@ -940,6 +1003,32 @@
               <a:t>• Câu chốt: "Đủ bộ ba này thì hồ sơ thương vụ mới trọn vẹn về pháp lý."''</a:t>
             </a:r>
           </a:p>
+          <a:p/>
+          <a:p>
+            <a:r>
+              <a:t>NÓI ĐỦ Ý (phần đã rút khỏi slide)</a:t>
+            </a:r>
+          </a:p>
+          <a:p>
+            <a:r>
+              <a:t>• Hợp đồng thương mại căn cứ Bộ luật Dân sự 2015 và Luật Thương mại 2005.</a:t>
+            </a:r>
+          </a:p>
+          <a:p>
+            <a:r>
+              <a:t>• Bộ ba khép kín một thương vụ: hợp đồng → biên bản nghiệm thu → biên bản thanh lý.</a:t>
+            </a:r>
+          </a:p>
+          <a:p>
+            <a:r>
+              <a:t>• Nghiệm thu xác nhận khối lượng và chất lượng, là căn cứ để thanh toán.</a:t>
+            </a:r>
+          </a:p>
+          <a:p>
+            <a:r>
+              <a:t>• Thanh lý xác nhận hoàn thành nghĩa vụ và quyết toán phần còn lại.</a:t>
+            </a:r>
+          </a:p>
         </p:txBody>
       </p:sp>
       <p:sp>
@@ -1887,6 +1976,27 @@
               <a:t>• Vai trò: nhấn "căn cứ pháp lý" — cho ví dụ tranh chấp hợp đồng ra tòa, cái tòa xem là VĂN BẢN.</a:t>
             </a:r>
           </a:p>
+          <a:p/>
+          <a:p>
+            <a:r>
+              <a:t>NÓI ĐỦ Ý (phần đã rút khỏi slide)</a:t>
+            </a:r>
+          </a:p>
+          <a:p>
+            <a:r>
+              <a:t>• Định nghĩa pháp lý đầy đủ, Nghị định 30/2020/NĐ-CP: “Văn bản là thông tin thành văn được truyền đạt bằng ngôn ngữ hoặc ký hiệu, hình thành trong hoạt động của các cơ quan, tổ chức và được trình bày đúng thể thức, kỹ thuật theo quy định.”</a:t>
+            </a:r>
+          </a:p>
+          <a:p>
+            <a:r>
+              <a:t>• Cách hiểu chung: hình thành trong hoạt động của cơ quan, tổ chức, DOANH NGHIỆP — không chỉ cơ quan nhà nước.</a:t>
+            </a:r>
+          </a:p>
+          <a:p>
+            <a:r>
+              <a:t>• Bốn vai trò: phương tiện quản lý – điều hành; căn cứ pháp lý; lưu trữ thông tin; thể hiện hình ảnh chuyên nghiệp của tổ chức.</a:t>
+            </a:r>
+          </a:p>
         </p:txBody>
       </p:sp>
       <p:sp>
@@ -2089,6 +2199,32 @@
               <a:t>• Yêu cầu 4: đọc vài câu KHẨU NGỮ sai chuẩn cho lớp nhận diện ("mong anh chị thông cảm giúp em nha").</a:t>
             </a:r>
           </a:p>
+          <a:p/>
+          <a:p>
+            <a:r>
+              <a:t>NÓI ĐỦ Ý (phần đã rút khỏi slide)</a:t>
+            </a:r>
+          </a:p>
+          <a:p>
+            <a:r>
+              <a:t>• Đúng mục đích: mỗi văn bản tập trung MỘT chủ đề; ban hành đúng chức năng, nhiệm vụ.</a:t>
+            </a:r>
+          </a:p>
+          <a:p>
+            <a:r>
+              <a:t>• Chính xác: một con số sai có thể tạo hậu quả pháp lý lớn — nhấn mạnh chỗ này cho sinh viên.</a:t>
+            </a:r>
+          </a:p>
+          <a:p>
+            <a:r>
+              <a:t>• Rõ ràng: người nhận đọc MỘT LẦN là hiểu đúng ý người soạn.</a:t>
+            </a:r>
+          </a:p>
+          <a:p>
+            <a:r>
+              <a:t>• Ngôn ngữ hành chính: nghiêm túc, lịch sự, không khẩu ngữ.</a:t>
+            </a:r>
+          </a:p>
         </p:txBody>
       </p:sp>
       <p:sp>
@@ -2304,6 +2440,32 @@
           <a:p>
             <a:r>
               <a:t>• Số trang: TỪ TRANG THỨ HAI, canh giữa LỀ TRÊN (nhiều bạn hay đặt ở dưới — sai).</a:t>
+            </a:r>
+          </a:p>
+          <a:p/>
+          <a:p>
+            <a:r>
+              <a:t>NÓI ĐỦ Ý (phần đã rút khỏi slide)</a:t>
+            </a:r>
+          </a:p>
+          <a:p>
+            <a:r>
+              <a:t>• Lề trái 30–35 mm rộng hơn vì phải chừa chỗ ĐÓNG GÁY.</a:t>
+            </a:r>
+          </a:p>
+          <a:p>
+            <a:r>
+              <a:t>• Phông Times New Roman, bộ mã Unicode, cỡ 13–14, màu đen.</a:t>
+            </a:r>
+          </a:p>
+          <a:p>
+            <a:r>
+              <a:t>• Số trang: đánh từ trang THỨ HAI, chữ số Ả Rập, canh giữa theo lề trên.</a:t>
+            </a:r>
+          </a:p>
+          <a:p>
+            <a:r>
+              <a:t>• Ngôn ngữ: viết hoa và viết tắt phải đúng quy định; số liệu dùng chữ số Ả Rập.</a:t>
             </a:r>
           </a:p>
         </p:txBody>
@@ -4821,7 +4983,7 @@
                 <a:ea typeface="Calibri" pitchFamily="34" charset="-122"/>
                 <a:cs typeface="Calibri" pitchFamily="34" charset="-120"/>
               </a:rPr>
-              <a:t>Phần căn cứ (pháp lý + thực tiễn, kết thúc bằng dấu chấm) → phần nội dung theo các Điều. Điều cuối ghi hiệu lực và đối tượng thi hành.</a:t>
+              <a:t>Phần căn cứ → nội dung theo các Điều → Điều cuối ghi hiệu lực</a:t>
             </a:r>
             <a:endParaRPr lang="en-US" sz="1500" dirty="0"/>
           </a:p>
@@ -4908,7 +5070,7 @@
                 <a:ea typeface="Calibri" pitchFamily="34" charset="-122"/>
                 <a:cs typeface="Calibri" pitchFamily="34" charset="-120"/>
               </a:rPr>
-              <a:t>Văn bản đề xuất cấp có thẩm quyền phê duyệt chủ trương, phương án, đề án hoặc giải quyết công việc.</a:t>
+              <a:t>Đề xuất cấp có thẩm quyền phê duyệt một chủ trương hay phương án</a:t>
             </a:r>
             <a:endParaRPr lang="en-US" sz="1500" dirty="0"/>
           </a:p>
@@ -4995,7 +5157,7 @@
                 <a:ea typeface="Calibri" pitchFamily="34" charset="-122"/>
                 <a:cs typeface="Calibri" pitchFamily="34" charset="-120"/>
               </a:rPr>
-              <a:t>Mở đầu: lý do, sự cần thiết → Nội dung: phương án, lợi ích, tính khả thi → Kết thúc: kiến nghị phê duyệt. Đính kèm hồ sơ, dự toán.</a:t>
+              <a:t>Lý do → phương án, lợi ích → kiến nghị phê duyệt</a:t>
             </a:r>
             <a:endParaRPr lang="en-US" sz="1500" dirty="0"/>
           </a:p>
@@ -5357,7 +5519,7 @@
                 <a:ea typeface="Calibri" pitchFamily="34" charset="-122"/>
                 <a:cs typeface="Calibri" pitchFamily="34" charset="-120"/>
               </a:rPr>
-              <a:t>Không có tên loại — chỉ có số, ký hiệu và trích yếu. Các loại: đề nghị, phúc đáp, đôn đốc, hướng dẫn, giải thích, mời họp. Mỗi công văn một chủ đề; kết thúc “Trân trọng./.”</a:t>
+              <a:t>Không có tên loại — chỉ số, ký hiệu, trích yếu. Mỗi công văn một chủ đề</a:t>
             </a:r>
             <a:endParaRPr lang="en-US" sz="1500" dirty="0"/>
           </a:p>
@@ -5444,7 +5606,7 @@
                 <a:ea typeface="Calibri" pitchFamily="34" charset="-122"/>
                 <a:cs typeface="Calibri" pitchFamily="34" charset="-120"/>
               </a:rPr>
-              <a:t>Ghi tại chỗ, trung thực, khách quan. Kết cấu: thời gian – địa điểm → thành phần tham dự → diễn biến, ý kiến → kết luận → chữ ký các bên (yếu tố tạo giá trị pháp lý).</a:t>
+              <a:t>Ghi tại chỗ. Thời gian – thành phần – diễn biến – kết luận – chữ ký</a:t>
             </a:r>
             <a:endParaRPr lang="en-US" sz="1500" dirty="0"/>
           </a:p>
@@ -5531,7 +5693,7 @@
                 <a:ea typeface="Calibri" pitchFamily="34" charset="-122"/>
                 <a:cs typeface="Calibri" pitchFamily="34" charset="-120"/>
               </a:rPr>
-              <a:t>Định kỳ • đột xuất • chuyên đề • sơ kết, tổng kết. Mạch 4 phần: đặc điểm tình hình → kết quả đạt được → hạn chế và nguyên nhân → phương hướng, kiến nghị.</a:t>
+              <a:t>Tình hình → kết quả → hạn chế và nguyên nhân → phương hướng</a:t>
             </a:r>
             <a:endParaRPr lang="en-US" sz="1500" dirty="0"/>
           </a:p>
@@ -6214,7 +6376,7 @@
                 <a:ea typeface="Calibri" pitchFamily="34" charset="-122"/>
                 <a:cs typeface="Calibri" pitchFamily="34" charset="-120"/>
               </a:rPr>
-              <a:t>Thư hỏi hàng, chào hàng, đặt hàng, xác nhận, khiếu nại, cảm ơn. Kết cấu: mở đầu – nội dung – kết thúc.</a:t>
+              <a:t>Hỏi hàng • chào hàng • đặt hàng • xác nhận • khiếu nại • cảm ơn</a:t>
             </a:r>
             <a:endParaRPr lang="en-US" sz="1500" dirty="0"/>
           </a:p>
@@ -6388,7 +6550,7 @@
                 <a:ea typeface="Calibri" pitchFamily="34" charset="-122"/>
                 <a:cs typeface="Calibri" pitchFamily="34" charset="-120"/>
               </a:rPr>
-              <a:t>Tiêu đề ngắn đúng nội dung; xưng hô phù hợp; chữ ký đầy đủ thông tin; phản hồi trong 24 giờ.</a:t>
+              <a:t>Tiêu đề đúng nội dung • chữ ký đầy đủ • phản hồi trong 24 giờ</a:t>
             </a:r>
             <a:endParaRPr lang="en-US" sz="1500" dirty="0"/>
           </a:p>
@@ -6475,7 +6637,7 @@
                 <a:ea typeface="Calibri" pitchFamily="34" charset="-122"/>
                 <a:cs typeface="Calibri" pitchFamily="34" charset="-120"/>
               </a:rPr>
-              <a:t>Thông tin doanh nghiệp • mô tả hàng hóa • số lượng, đơn giá, thuế • điều kiện giao hàng, thanh toán • thời hạn hiệu lực (tránh tranh chấp khi giá thị trường biến động).</a:t>
+              <a:t>Hàng hóa • số lượng, đơn giá, thuế • giao hàng, thanh toán • thời hạn hiệu lực</a:t>
             </a:r>
             <a:endParaRPr lang="en-US" sz="1500" dirty="0"/>
           </a:p>
@@ -6837,7 +6999,7 @@
                 <a:ea typeface="Calibri" pitchFamily="34" charset="-122"/>
                 <a:cs typeface="Calibri" pitchFamily="34" charset="-120"/>
               </a:rPr>
-              <a:t>Căn cứ Bộ luật Dân sự 2015 và Luật Thương mại 2005. Điều khoản chính: đối tượng; giá và phương thức thanh toán; quyền – nghĩa vụ các bên; phạt vi phạm; giải quyết tranh chấp.</a:t>
+              <a:t>Đối tượng • giá và thanh toán • quyền – nghĩa vụ • phạt • tranh chấp</a:t>
             </a:r>
             <a:endParaRPr lang="en-US" sz="1500" dirty="0"/>
           </a:p>
@@ -6924,7 +7086,7 @@
                 <a:ea typeface="Calibri" pitchFamily="34" charset="-122"/>
                 <a:cs typeface="Calibri" pitchFamily="34" charset="-120"/>
               </a:rPr>
-              <a:t>Xác nhận khối lượng, chất lượng hàng hóa, dịch vụ đã thực hiện — căn cứ để thanh toán.</a:t>
+              <a:t>Xác nhận khối lượng và chất lượng — căn cứ để thanh toán</a:t>
             </a:r>
             <a:endParaRPr lang="en-US" sz="1500" dirty="0"/>
           </a:p>
@@ -7011,7 +7173,7 @@
                 <a:ea typeface="Calibri" pitchFamily="34" charset="-122"/>
                 <a:cs typeface="Calibri" pitchFamily="34" charset="-120"/>
               </a:rPr>
-              <a:t>Xác nhận hoàn thành nghĩa vụ, chấm dứt hiệu lực hợp đồng, quyết toán các quyền và nghĩa vụ còn lại.</a:t>
+              <a:t>Hoàn thành nghĩa vụ, chấm dứt hiệu lực, quyết toán phần còn lại</a:t>
             </a:r>
             <a:endParaRPr lang="en-US" sz="1500" dirty="0"/>
           </a:p>
@@ -11742,7 +11904,7 @@
                 <a:ea typeface="Calibri" pitchFamily="34" charset="-122"/>
                 <a:cs typeface="Calibri" pitchFamily="34" charset="-120"/>
               </a:rPr>
-              <a:t>Văn bản là phương tiện ghi lại và truyền đạt thông tin bằng ngôn ngữ hay ký hiệu nhất định, hình thành trong hoạt động của cơ quan, tổ chức, doanh nghiệp.</a:t>
+              <a:t>Phương tiện ghi lại và truyền đạt thông tin bằng ngôn ngữ hoặc ký hiệu</a:t>
             </a:r>
             <a:endParaRPr lang="en-US" sz="1500" dirty="0"/>
           </a:p>
@@ -11829,7 +11991,7 @@
                 <a:ea typeface="Calibri" pitchFamily="34" charset="-122"/>
                 <a:cs typeface="Calibri" pitchFamily="34" charset="-120"/>
               </a:rPr>
-              <a:t>“Văn bản là thông tin thành văn được truyền đạt bằng ngôn ngữ hoặc ký hiệu, hình thành trong hoạt động của các cơ quan, tổ chức và được trình bày đúng thể thức, kỹ thuật theo quy định.”</a:t>
+              <a:t>“Thông tin thành văn… được trình bày đúng thể thức, kỹ thuật theo quy định.”</a:t>
             </a:r>
             <a:endParaRPr lang="en-US" sz="1500" dirty="0"/>
           </a:p>
@@ -11916,7 +12078,7 @@
                 <a:ea typeface="Calibri" pitchFamily="34" charset="-122"/>
                 <a:cs typeface="Calibri" pitchFamily="34" charset="-120"/>
               </a:rPr>
-              <a:t>Phương tiện quản lý – điều hành • căn cứ pháp lý cho hoạt động • lưu trữ thông tin • thể hiện hình ảnh chuyên nghiệp của tổ chức.</a:t>
+              <a:t>Quản lý – điều hành • căn cứ pháp lý • lưu trữ • hình ảnh tổ chức</a:t>
             </a:r>
             <a:endParaRPr lang="en-US" sz="1500" dirty="0"/>
           </a:p>
@@ -12612,7 +12774,7 @@
                 <a:ea typeface="Calibri" pitchFamily="34" charset="-122"/>
                 <a:cs typeface="Calibri" pitchFamily="34" charset="-120"/>
               </a:rPr>
-              <a:t>Mỗi văn bản tập trung một chủ đề; ban hành đúng chức năng, nhiệm vụ của cơ quan, tổ chức.</a:t>
+              <a:t>Mỗi văn bản một chủ đề, ban hành đúng chức năng</a:t>
             </a:r>
             <a:endParaRPr lang="en-US" sz="1450" dirty="0"/>
           </a:p>
@@ -12699,7 +12861,7 @@
                 <a:ea typeface="Calibri" pitchFamily="34" charset="-122"/>
                 <a:cs typeface="Calibri" pitchFamily="34" charset="-120"/>
               </a:rPr>
-              <a:t>Thông tin, số liệu trung thực, có căn cứ, được kiểm chứng. Một con số sai có thể tạo hậu quả pháp lý lớn.</a:t>
+              <a:t>Số liệu có căn cứ, kiểm chứng được — sai một con số là hậu quả pháp lý</a:t>
             </a:r>
             <a:endParaRPr lang="en-US" sz="1450" dirty="0"/>
           </a:p>
@@ -12786,7 +12948,7 @@
                 <a:ea typeface="Calibri" pitchFamily="34" charset="-122"/>
                 <a:cs typeface="Calibri" pitchFamily="34" charset="-120"/>
               </a:rPr>
-              <a:t>Câu văn mạch lạc, không đa nghĩa; người nhận đọc một lần là hiểu đúng ý người soạn.</a:t>
+              <a:t>Đọc một lần là hiểu đúng ý người soạn</a:t>
             </a:r>
             <a:endParaRPr lang="en-US" sz="1450" dirty="0"/>
           </a:p>
@@ -12873,7 +13035,7 @@
                 <a:ea typeface="Calibri" pitchFamily="34" charset="-122"/>
                 <a:cs typeface="Calibri" pitchFamily="34" charset="-120"/>
               </a:rPr>
-              <a:t>Phù hợp quy định hiện hành; văn phong nghiêm túc, lịch sự, không dùng khẩu ngữ.</a:t>
+              <a:t>Đúng quy định hiện hành; văn phong nghiêm túc, không khẩu ngữ</a:t>
             </a:r>
             <a:endParaRPr lang="en-US" sz="1450" dirty="0"/>
           </a:p>
@@ -13534,7 +13696,7 @@
                 <a:ea typeface="Calibri" pitchFamily="34" charset="-122"/>
                 <a:cs typeface="Calibri" pitchFamily="34" charset="-120"/>
               </a:rPr>
-              <a:t>Khổ A4 (210 × 297 mm). Lề trên, dưới: 20 – 25 mm • lề trái: 30 – 35 mm (để đóng gáy) • lề phải: 15 – 20 mm.</a:t>
+              <a:t>A4 • trên–dưới 20–25 mm • trái 30–35 mm • phải 15–20 mm</a:t>
             </a:r>
             <a:endParaRPr lang="en-US" sz="1500" dirty="0"/>
           </a:p>
@@ -13795,7 +13957,7 @@
                 <a:ea typeface="Calibri" pitchFamily="34" charset="-122"/>
                 <a:cs typeface="Calibri" pitchFamily="34" charset="-120"/>
               </a:rPr>
-              <a:t>Tiếng Việt chuẩn mực; viết hoa, viết tắt đúng quy định; số liệu dùng chữ số Ả Rập.</a:t>
+              <a:t>Tiếng Việt chuẩn mực; viết hoa, viết tắt đúng quy định</a:t>
             </a:r>
             <a:endParaRPr lang="en-US" sz="1500" dirty="0"/>
           </a:p>

--- a/slides/05-soan-thao-van-ban.pptx
+++ b/slides/05-soan-thao-van-ban.pptx
@@ -521,10 +521,18 @@
           <a:lstStyle/>
           <a:p>
             <a:r>
-              <a:rPr lang="en-US" dirty="0"/>
-              <a:t/>
-            </a:r>
-            <a:endParaRPr lang="en-US" dirty="0"/>
+              <a:t>MỞ ĐẦU (2 phút)</a:t>
+            </a:r>
+          </a:p>
+          <a:p>
+            <a:r>
+              <a:t>• Câu dẫn: "Chương 4 dạy các bạn đạt thỏa thuận bằng lời. Chương 5 dạy cách biến lời nói thành văn bản có giá trị pháp lý."</a:t>
+            </a:r>
+          </a:p>
+          <a:p>
+            <a:r>
+              <a:t>• Hỏi lớp: "Ai đã từng viết đơn xin nghỉ học? Có đúng thể thức không?"''</a:t>
+            </a:r>
           </a:p>
         </p:txBody>
       </p:sp>

--- a/slides/05-soan-thao-van-ban.pptx
+++ b/slides/05-soan-thao-van-ban.pptx
@@ -3058,7 +3058,7 @@
                 <a:ea typeface="Calibri" pitchFamily="34" charset="-122"/>
                 <a:cs typeface="Calibri" pitchFamily="34" charset="-120"/>
               </a:rPr>
-              <a:t>EC1103 – Kỹ năng giao tiếp và soạn thảo văn bản (2:1)  •  Lớp 261b, HK1 năm học 2026 – 2027</a:t>
+              <a:t>EC6000TX – Kỹ năng giao tiếp và đàm phán trong kinh doanh (Hệ từ xa)</a:t>
             </a:r>
             <a:endParaRPr lang="en-US" sz="1500" dirty="0"/>
           </a:p>
@@ -3136,6 +3136,1257 @@
 </file>
 
 <file path=ppt/slides/slide10.xml><?xml version="1.0" encoding="utf-8"?>
+<p:sld xmlns:a="http://schemas.openxmlformats.org/drawingml/2006/main" xmlns:p="http://schemas.openxmlformats.org/presentationml/2006/main" xmlns:r="http://schemas.openxmlformats.org/officeDocument/2006/relationships">
+  <p:cSld>
+    <p:spTree>
+      <p:nvGrpSpPr>
+        <p:cNvPr id="1" name=""/>
+        <p:cNvGrpSpPr/>
+        <p:nvPr/>
+      </p:nvGrpSpPr>
+      <p:grpSpPr/>
+      <p:sp>
+        <p:nvSpPr>
+          <p:cNvPr id="2" name="Rectangle 1"/>
+          <p:cNvSpPr/>
+          <p:nvPr/>
+        </p:nvSpPr>
+        <p:spPr>
+          <a:xfrm>
+            <a:off x="0" y="0"/>
+            <a:ext cx="12191695" cy="6858000"/>
+          </a:xfrm>
+          <a:prstGeom prst="rect">
+            <a:avLst/>
+          </a:prstGeom>
+          <a:solidFill>
+            <a:srgbClr val="FDFBF8"/>
+          </a:solidFill>
+          <a:ln>
+            <a:noFill/>
+          </a:ln>
+          <a:effectLst/>
+        </p:spPr>
+        <p:style>
+          <a:lnRef idx="1">
+            <a:schemeClr val="accent1"/>
+          </a:lnRef>
+          <a:fillRef idx="3">
+            <a:schemeClr val="accent1"/>
+          </a:fillRef>
+          <a:effectRef idx="2">
+            <a:schemeClr val="accent1"/>
+          </a:effectRef>
+          <a:fontRef idx="minor">
+            <a:schemeClr val="lt1"/>
+          </a:fontRef>
+        </p:style>
+        <p:txBody>
+          <a:bodyPr rtlCol="0" anchor="ctr"/>
+          <a:lstStyle/>
+          <a:p>
+            <a:pPr algn="ctr"/>
+          </a:p>
+        </p:txBody>
+      </p:sp>
+      <p:sp>
+        <p:nvSpPr>
+          <p:cNvPr id="3" name="TextBox 2"/>
+          <p:cNvSpPr txBox="1"/>
+          <p:nvPr/>
+        </p:nvSpPr>
+        <p:spPr>
+          <a:xfrm>
+            <a:off x="502920" y="292608"/>
+            <a:ext cx="11155680" cy="292608"/>
+          </a:xfrm>
+          <a:prstGeom prst="rect">
+            <a:avLst/>
+          </a:prstGeom>
+          <a:noFill/>
+        </p:spPr>
+        <p:txBody>
+          <a:bodyPr wrap="none">
+            <a:spAutoFit/>
+          </a:bodyPr>
+          <a:lstStyle/>
+          <a:p>
+            <a:r>
+              <a:rPr sz="1100" b="1">
+                <a:solidFill>
+                  <a:srgbClr val="DC756A"/>
+                </a:solidFill>
+                <a:latin typeface="Calibri"/>
+              </a:rPr>
+              <a:t>CON SỐ PHẢI NHỚ</a:t>
+            </a:r>
+          </a:p>
+        </p:txBody>
+      </p:sp>
+      <p:sp>
+        <p:nvSpPr>
+          <p:cNvPr id="4" name="TextBox 3"/>
+          <p:cNvSpPr txBox="1"/>
+          <p:nvPr/>
+        </p:nvSpPr>
+        <p:spPr>
+          <a:xfrm>
+            <a:off x="502920" y="603504"/>
+            <a:ext cx="11155680" cy="731520"/>
+          </a:xfrm>
+          <a:prstGeom prst="rect">
+            <a:avLst/>
+          </a:prstGeom>
+          <a:noFill/>
+        </p:spPr>
+        <p:txBody>
+          <a:bodyPr wrap="square">
+            <a:spAutoFit/>
+          </a:bodyPr>
+          <a:lstStyle/>
+          <a:p>
+            <a:r>
+              <a:rPr sz="2700" b="1">
+                <a:solidFill>
+                  <a:srgbClr val="3A2B28"/>
+                </a:solidFill>
+                <a:latin typeface="Cambria"/>
+              </a:rPr>
+              <a:t>Bốn con số của một trang văn bản đúng chuẩn</a:t>
+            </a:r>
+          </a:p>
+        </p:txBody>
+      </p:sp>
+      <p:sp>
+        <p:nvSpPr>
+          <p:cNvPr id="5" name="Rounded Rectangle 4"/>
+          <p:cNvSpPr/>
+          <p:nvPr/>
+        </p:nvSpPr>
+        <p:spPr>
+          <a:xfrm>
+            <a:off x="502920" y="1783080"/>
+            <a:ext cx="2622042" cy="3429000"/>
+          </a:xfrm>
+          <a:prstGeom prst="roundRect">
+            <a:avLst>
+              <a:gd name="adj" fmla="val 7000"/>
+            </a:avLst>
+          </a:prstGeom>
+          <a:solidFill>
+            <a:srgbClr val="FFFFFF"/>
+          </a:solidFill>
+          <a:ln w="15875">
+            <a:solidFill>
+              <a:srgbClr val="FBCEC9"/>
+            </a:solidFill>
+          </a:ln>
+          <a:effectLst/>
+        </p:spPr>
+        <p:style>
+          <a:lnRef idx="1">
+            <a:schemeClr val="accent1"/>
+          </a:lnRef>
+          <a:fillRef idx="3">
+            <a:schemeClr val="accent1"/>
+          </a:fillRef>
+          <a:effectRef idx="2">
+            <a:schemeClr val="accent1"/>
+          </a:effectRef>
+          <a:fontRef idx="minor">
+            <a:schemeClr val="lt1"/>
+          </a:fontRef>
+        </p:style>
+        <p:txBody>
+          <a:bodyPr rtlCol="0" anchor="ctr" wrap="square" lIns="182880" rIns="182880" tIns="274320" bIns="182880"/>
+          <a:lstStyle/>
+          <a:p>
+            <a:pPr algn="ctr"/>
+            <a:r>
+              <a:rPr sz="5800" b="1">
+                <a:solidFill>
+                  <a:srgbClr val="DC756A"/>
+                </a:solidFill>
+                <a:latin typeface="Cambria"/>
+              </a:rPr>
+              <a:t>A4</a:t>
+            </a:r>
+          </a:p>
+          <a:p>
+            <a:pPr algn="ctr"/>
+            <a:r>
+              <a:rPr sz="1400" b="1">
+                <a:solidFill>
+                  <a:srgbClr val="AC4D33"/>
+                </a:solidFill>
+                <a:latin typeface="Calibri"/>
+              </a:rPr>
+              <a:t>KHỔ GIẤY</a:t>
+            </a:r>
+          </a:p>
+          <a:p>
+            <a:pPr algn="ctr">
+              <a:spcBef>
+                <a:spcPts val="1200"/>
+              </a:spcBef>
+            </a:pPr>
+            <a:r>
+              <a:rPr sz="1250">
+                <a:solidFill>
+                  <a:srgbClr val="3A2B28"/>
+                </a:solidFill>
+                <a:latin typeface="Calibri"/>
+              </a:rPr>
+              <a:t>210 × 297 mm — không dùng khổ Letter</a:t>
+            </a:r>
+          </a:p>
+        </p:txBody>
+      </p:sp>
+      <p:sp>
+        <p:nvSpPr>
+          <p:cNvPr id="6" name="Rounded Rectangle 5"/>
+          <p:cNvSpPr/>
+          <p:nvPr/>
+        </p:nvSpPr>
+        <p:spPr>
+          <a:xfrm>
+            <a:off x="3362706" y="1783080"/>
+            <a:ext cx="2622042" cy="3429000"/>
+          </a:xfrm>
+          <a:prstGeom prst="roundRect">
+            <a:avLst>
+              <a:gd name="adj" fmla="val 7000"/>
+            </a:avLst>
+          </a:prstGeom>
+          <a:solidFill>
+            <a:srgbClr val="FFFFFF"/>
+          </a:solidFill>
+          <a:ln w="15875">
+            <a:solidFill>
+              <a:srgbClr val="FBCEC9"/>
+            </a:solidFill>
+          </a:ln>
+          <a:effectLst/>
+        </p:spPr>
+        <p:style>
+          <a:lnRef idx="1">
+            <a:schemeClr val="accent1"/>
+          </a:lnRef>
+          <a:fillRef idx="3">
+            <a:schemeClr val="accent1"/>
+          </a:fillRef>
+          <a:effectRef idx="2">
+            <a:schemeClr val="accent1"/>
+          </a:effectRef>
+          <a:fontRef idx="minor">
+            <a:schemeClr val="lt1"/>
+          </a:fontRef>
+        </p:style>
+        <p:txBody>
+          <a:bodyPr rtlCol="0" anchor="ctr" wrap="square" lIns="182880" rIns="182880" tIns="274320" bIns="182880"/>
+          <a:lstStyle/>
+          <a:p>
+            <a:pPr algn="ctr"/>
+            <a:r>
+              <a:rPr sz="5800" b="1">
+                <a:solidFill>
+                  <a:srgbClr val="DC756A"/>
+                </a:solidFill>
+                <a:latin typeface="Cambria"/>
+              </a:rPr>
+              <a:t>30–35</a:t>
+            </a:r>
+          </a:p>
+          <a:p>
+            <a:pPr algn="ctr"/>
+            <a:r>
+              <a:rPr sz="1400" b="1">
+                <a:solidFill>
+                  <a:srgbClr val="AC4D33"/>
+                </a:solidFill>
+                <a:latin typeface="Calibri"/>
+              </a:rPr>
+              <a:t>MILIMET</a:t>
+            </a:r>
+          </a:p>
+          <a:p>
+            <a:pPr algn="ctr">
+              <a:spcBef>
+                <a:spcPts val="1200"/>
+              </a:spcBef>
+            </a:pPr>
+            <a:r>
+              <a:rPr sz="1250">
+                <a:solidFill>
+                  <a:srgbClr val="3A2B28"/>
+                </a:solidFill>
+                <a:latin typeface="Calibri"/>
+              </a:rPr>
+              <a:t>Lề trái, rộng nhất để đóng gáy lưu trữ</a:t>
+            </a:r>
+          </a:p>
+        </p:txBody>
+      </p:sp>
+      <p:sp>
+        <p:nvSpPr>
+          <p:cNvPr id="7" name="Rounded Rectangle 6"/>
+          <p:cNvSpPr/>
+          <p:nvPr/>
+        </p:nvSpPr>
+        <p:spPr>
+          <a:xfrm>
+            <a:off x="6222492" y="1783080"/>
+            <a:ext cx="2622042" cy="3429000"/>
+          </a:xfrm>
+          <a:prstGeom prst="roundRect">
+            <a:avLst>
+              <a:gd name="adj" fmla="val 7000"/>
+            </a:avLst>
+          </a:prstGeom>
+          <a:solidFill>
+            <a:srgbClr val="FFFFFF"/>
+          </a:solidFill>
+          <a:ln w="15875">
+            <a:solidFill>
+              <a:srgbClr val="FBCEC9"/>
+            </a:solidFill>
+          </a:ln>
+          <a:effectLst/>
+        </p:spPr>
+        <p:style>
+          <a:lnRef idx="1">
+            <a:schemeClr val="accent1"/>
+          </a:lnRef>
+          <a:fillRef idx="3">
+            <a:schemeClr val="accent1"/>
+          </a:fillRef>
+          <a:effectRef idx="2">
+            <a:schemeClr val="accent1"/>
+          </a:effectRef>
+          <a:fontRef idx="minor">
+            <a:schemeClr val="lt1"/>
+          </a:fontRef>
+        </p:style>
+        <p:txBody>
+          <a:bodyPr rtlCol="0" anchor="ctr" wrap="square" lIns="182880" rIns="182880" tIns="274320" bIns="182880"/>
+          <a:lstStyle/>
+          <a:p>
+            <a:pPr algn="ctr"/>
+            <a:r>
+              <a:rPr sz="5800" b="1">
+                <a:solidFill>
+                  <a:srgbClr val="DC756A"/>
+                </a:solidFill>
+                <a:latin typeface="Cambria"/>
+              </a:rPr>
+              <a:t>13–14</a:t>
+            </a:r>
+          </a:p>
+          <a:p>
+            <a:pPr algn="ctr"/>
+            <a:r>
+              <a:rPr sz="1400" b="1">
+                <a:solidFill>
+                  <a:srgbClr val="AC4D33"/>
+                </a:solidFill>
+                <a:latin typeface="Calibri"/>
+              </a:rPr>
+              <a:t>CỠ CHỮ</a:t>
+            </a:r>
+          </a:p>
+          <a:p>
+            <a:pPr algn="ctr">
+              <a:spcBef>
+                <a:spcPts val="1200"/>
+              </a:spcBef>
+            </a:pPr>
+            <a:r>
+              <a:rPr sz="1250">
+                <a:solidFill>
+                  <a:srgbClr val="3A2B28"/>
+                </a:solidFill>
+                <a:latin typeface="Calibri"/>
+              </a:rPr>
+              <a:t>Times New Roman, bộ mã Unicode, màu đen</a:t>
+            </a:r>
+          </a:p>
+        </p:txBody>
+      </p:sp>
+      <p:sp>
+        <p:nvSpPr>
+          <p:cNvPr id="8" name="Rounded Rectangle 7"/>
+          <p:cNvSpPr/>
+          <p:nvPr/>
+        </p:nvSpPr>
+        <p:spPr>
+          <a:xfrm>
+            <a:off x="9082278" y="1783080"/>
+            <a:ext cx="2622042" cy="3429000"/>
+          </a:xfrm>
+          <a:prstGeom prst="roundRect">
+            <a:avLst>
+              <a:gd name="adj" fmla="val 7000"/>
+            </a:avLst>
+          </a:prstGeom>
+          <a:solidFill>
+            <a:srgbClr val="FFFFFF"/>
+          </a:solidFill>
+          <a:ln w="15875">
+            <a:solidFill>
+              <a:srgbClr val="FBCEC9"/>
+            </a:solidFill>
+          </a:ln>
+          <a:effectLst/>
+        </p:spPr>
+        <p:style>
+          <a:lnRef idx="1">
+            <a:schemeClr val="accent1"/>
+          </a:lnRef>
+          <a:fillRef idx="3">
+            <a:schemeClr val="accent1"/>
+          </a:fillRef>
+          <a:effectRef idx="2">
+            <a:schemeClr val="accent1"/>
+          </a:effectRef>
+          <a:fontRef idx="minor">
+            <a:schemeClr val="lt1"/>
+          </a:fontRef>
+        </p:style>
+        <p:txBody>
+          <a:bodyPr rtlCol="0" anchor="ctr" wrap="square" lIns="182880" rIns="182880" tIns="274320" bIns="182880"/>
+          <a:lstStyle/>
+          <a:p>
+            <a:pPr algn="ctr"/>
+            <a:r>
+              <a:rPr sz="5800" b="1">
+                <a:solidFill>
+                  <a:srgbClr val="DC756A"/>
+                </a:solidFill>
+                <a:latin typeface="Cambria"/>
+              </a:rPr>
+              <a:t>9</a:t>
+            </a:r>
+          </a:p>
+          <a:p>
+            <a:pPr algn="ctr"/>
+            <a:r>
+              <a:rPr sz="1400" b="1">
+                <a:solidFill>
+                  <a:srgbClr val="AC4D33"/>
+                </a:solidFill>
+                <a:latin typeface="Calibri"/>
+              </a:rPr>
+              <a:t>THÀNH PHẦN</a:t>
+            </a:r>
+          </a:p>
+          <a:p>
+            <a:pPr algn="ctr">
+              <a:spcBef>
+                <a:spcPts val="1200"/>
+              </a:spcBef>
+            </a:pPr>
+            <a:r>
+              <a:rPr sz="1250">
+                <a:solidFill>
+                  <a:srgbClr val="3A2B28"/>
+                </a:solidFill>
+                <a:latin typeface="Calibri"/>
+              </a:rPr>
+              <a:t>Số thành phần thể thức bắt buộc theo NĐ 30/2020</a:t>
+            </a:r>
+          </a:p>
+        </p:txBody>
+      </p:sp>
+      <p:sp>
+        <p:nvSpPr>
+          <p:cNvPr id="9" name="Rounded Rectangle 8"/>
+          <p:cNvSpPr/>
+          <p:nvPr/>
+        </p:nvSpPr>
+        <p:spPr>
+          <a:xfrm>
+            <a:off x="502920" y="5440680"/>
+            <a:ext cx="11201400" cy="685800"/>
+          </a:xfrm>
+          <a:prstGeom prst="roundRect">
+            <a:avLst>
+              <a:gd name="adj" fmla="val 12000"/>
+            </a:avLst>
+          </a:prstGeom>
+          <a:solidFill>
+            <a:srgbClr val="FDF1EF"/>
+          </a:solidFill>
+          <a:ln w="12700">
+            <a:solidFill>
+              <a:srgbClr val="FBCEC9"/>
+            </a:solidFill>
+          </a:ln>
+          <a:effectLst/>
+        </p:spPr>
+        <p:style>
+          <a:lnRef idx="1">
+            <a:schemeClr val="accent1"/>
+          </a:lnRef>
+          <a:fillRef idx="3">
+            <a:schemeClr val="accent1"/>
+          </a:fillRef>
+          <a:effectRef idx="2">
+            <a:schemeClr val="accent1"/>
+          </a:effectRef>
+          <a:fontRef idx="minor">
+            <a:schemeClr val="lt1"/>
+          </a:fontRef>
+        </p:style>
+        <p:txBody>
+          <a:bodyPr rtlCol="0" anchor="ctr" wrap="square" lIns="201168" rIns="201168"/>
+          <a:lstStyle/>
+          <a:p>
+            <a:pPr algn="ctr"/>
+            <a:r>
+              <a:rPr sz="1300">
+                <a:solidFill>
+                  <a:srgbClr val="3A2B28"/>
+                </a:solidFill>
+                <a:latin typeface="Calibri"/>
+              </a:rPr>
+              <a:t>Lề trên và dưới 20 – 25 mm • lề phải 15 – 20 mm • số trang đánh từ trang thứ hai, canh giữa theo lề trên.</a:t>
+            </a:r>
+          </a:p>
+        </p:txBody>
+      </p:sp>
+      <p:sp>
+        <p:nvSpPr>
+          <p:cNvPr id="10" name="TextBox 9"/>
+          <p:cNvSpPr txBox="1"/>
+          <p:nvPr/>
+        </p:nvSpPr>
+        <p:spPr>
+          <a:xfrm>
+            <a:off x="502920" y="6419088"/>
+            <a:ext cx="7772400" cy="292608"/>
+          </a:xfrm>
+          <a:prstGeom prst="rect">
+            <a:avLst/>
+          </a:prstGeom>
+          <a:noFill/>
+        </p:spPr>
+        <p:txBody>
+          <a:bodyPr wrap="none">
+            <a:spAutoFit/>
+          </a:bodyPr>
+          <a:lstStyle/>
+          <a:p>
+            <a:r>
+              <a:rPr sz="900">
+                <a:solidFill>
+                  <a:srgbClr val="8A7A76"/>
+                </a:solidFill>
+                <a:latin typeface="Calibri"/>
+              </a:rPr>
+              <a:t>Je m'appelle Huong  •  GV. Đỗ Thùy Hương  •  EC1103</a:t>
+            </a:r>
+          </a:p>
+        </p:txBody>
+      </p:sp>
+      <p:sp>
+        <p:nvSpPr>
+          <p:cNvPr id="11" name="TextBox 10"/>
+          <p:cNvSpPr txBox="1"/>
+          <p:nvPr/>
+        </p:nvSpPr>
+        <p:spPr>
+          <a:xfrm>
+            <a:off x="9326880" y="6419088"/>
+            <a:ext cx="1920240" cy="292608"/>
+          </a:xfrm>
+          <a:prstGeom prst="rect">
+            <a:avLst/>
+          </a:prstGeom>
+          <a:noFill/>
+        </p:spPr>
+        <p:txBody>
+          <a:bodyPr wrap="none">
+            <a:spAutoFit/>
+          </a:bodyPr>
+          <a:lstStyle/>
+          <a:p>
+            <a:pPr algn="r"/>
+            <a:r>
+              <a:rPr sz="900">
+                <a:solidFill>
+                  <a:srgbClr val="8A7A76"/>
+                </a:solidFill>
+                <a:latin typeface="Calibri"/>
+              </a:rPr>
+              <a:t>Chương 5</a:t>
+            </a:r>
+          </a:p>
+        </p:txBody>
+      </p:sp>
+    </p:spTree>
+  </p:cSld>
+  <p:clrMapOvr>
+    <a:masterClrMapping/>
+  </p:clrMapOvr>
+</p:sld>
+</file>
+
+<file path=ppt/slides/slide11.xml><?xml version="1.0" encoding="utf-8"?>
+<p:sld xmlns:a="http://schemas.openxmlformats.org/drawingml/2006/main" xmlns:p="http://schemas.openxmlformats.org/presentationml/2006/main" xmlns:r="http://schemas.openxmlformats.org/officeDocument/2006/relationships">
+  <p:cSld>
+    <p:spTree>
+      <p:nvGrpSpPr>
+        <p:cNvPr id="1" name=""/>
+        <p:cNvGrpSpPr/>
+        <p:nvPr/>
+      </p:nvGrpSpPr>
+      <p:grpSpPr/>
+      <p:sp>
+        <p:nvSpPr>
+          <p:cNvPr id="2" name="Rectangle 1"/>
+          <p:cNvSpPr/>
+          <p:nvPr/>
+        </p:nvSpPr>
+        <p:spPr>
+          <a:xfrm>
+            <a:off x="0" y="0"/>
+            <a:ext cx="12191695" cy="6858000"/>
+          </a:xfrm>
+          <a:prstGeom prst="rect">
+            <a:avLst/>
+          </a:prstGeom>
+          <a:solidFill>
+            <a:srgbClr val="FDFBF8"/>
+          </a:solidFill>
+          <a:ln>
+            <a:noFill/>
+          </a:ln>
+          <a:effectLst/>
+        </p:spPr>
+        <p:style>
+          <a:lnRef idx="1">
+            <a:schemeClr val="accent1"/>
+          </a:lnRef>
+          <a:fillRef idx="3">
+            <a:schemeClr val="accent1"/>
+          </a:fillRef>
+          <a:effectRef idx="2">
+            <a:schemeClr val="accent1"/>
+          </a:effectRef>
+          <a:fontRef idx="minor">
+            <a:schemeClr val="lt1"/>
+          </a:fontRef>
+        </p:style>
+        <p:txBody>
+          <a:bodyPr rtlCol="0" anchor="ctr"/>
+          <a:lstStyle/>
+          <a:p>
+            <a:pPr algn="ctr"/>
+          </a:p>
+        </p:txBody>
+      </p:sp>
+      <p:sp>
+        <p:nvSpPr>
+          <p:cNvPr id="3" name="Rectangle 2"/>
+          <p:cNvSpPr/>
+          <p:nvPr/>
+        </p:nvSpPr>
+        <p:spPr>
+          <a:xfrm>
+            <a:off x="0" y="2103120"/>
+            <a:ext cx="12191695" cy="2743200"/>
+          </a:xfrm>
+          <a:prstGeom prst="rect">
+            <a:avLst/>
+          </a:prstGeom>
+          <a:solidFill>
+            <a:srgbClr val="FDF1EF"/>
+          </a:solidFill>
+          <a:ln>
+            <a:noFill/>
+          </a:ln>
+          <a:effectLst/>
+        </p:spPr>
+        <p:style>
+          <a:lnRef idx="1">
+            <a:schemeClr val="accent1"/>
+          </a:lnRef>
+          <a:fillRef idx="3">
+            <a:schemeClr val="accent1"/>
+          </a:fillRef>
+          <a:effectRef idx="2">
+            <a:schemeClr val="accent1"/>
+          </a:effectRef>
+          <a:fontRef idx="minor">
+            <a:schemeClr val="lt1"/>
+          </a:fontRef>
+        </p:style>
+        <p:txBody>
+          <a:bodyPr rtlCol="0" anchor="ctr"/>
+          <a:lstStyle/>
+          <a:p>
+            <a:pPr algn="ctr"/>
+          </a:p>
+        </p:txBody>
+      </p:sp>
+      <p:sp>
+        <p:nvSpPr>
+          <p:cNvPr id="4" name="Rectangle 3"/>
+          <p:cNvSpPr/>
+          <p:nvPr/>
+        </p:nvSpPr>
+        <p:spPr>
+          <a:xfrm>
+            <a:off x="0" y="0"/>
+            <a:ext cx="274320" cy="6858000"/>
+          </a:xfrm>
+          <a:prstGeom prst="rect">
+            <a:avLst/>
+          </a:prstGeom>
+          <a:solidFill>
+            <a:srgbClr val="DC756A"/>
+          </a:solidFill>
+          <a:ln>
+            <a:noFill/>
+          </a:ln>
+          <a:effectLst/>
+        </p:spPr>
+        <p:style>
+          <a:lnRef idx="1">
+            <a:schemeClr val="accent1"/>
+          </a:lnRef>
+          <a:fillRef idx="3">
+            <a:schemeClr val="accent1"/>
+          </a:fillRef>
+          <a:effectRef idx="2">
+            <a:schemeClr val="accent1"/>
+          </a:effectRef>
+          <a:fontRef idx="minor">
+            <a:schemeClr val="lt1"/>
+          </a:fontRef>
+        </p:style>
+        <p:txBody>
+          <a:bodyPr rtlCol="0" anchor="ctr"/>
+          <a:lstStyle/>
+          <a:p>
+            <a:pPr algn="ctr"/>
+          </a:p>
+        </p:txBody>
+      </p:sp>
+      <p:sp>
+        <p:nvSpPr>
+          <p:cNvPr id="5" name="TextBox 4"/>
+          <p:cNvSpPr txBox="1"/>
+          <p:nvPr/>
+        </p:nvSpPr>
+        <p:spPr>
+          <a:xfrm>
+            <a:off x="1280160" y="2377440"/>
+            <a:ext cx="9692640" cy="411480"/>
+          </a:xfrm>
+          <a:prstGeom prst="rect">
+            <a:avLst/>
+          </a:prstGeom>
+          <a:noFill/>
+        </p:spPr>
+        <p:txBody>
+          <a:bodyPr wrap="none">
+            <a:spAutoFit/>
+          </a:bodyPr>
+          <a:lstStyle/>
+          <a:p>
+            <a:r>
+              <a:rPr sz="1500" b="1">
+                <a:solidFill>
+                  <a:srgbClr val="DC756A"/>
+                </a:solidFill>
+                <a:latin typeface="Calibri"/>
+              </a:rPr>
+              <a:t>MỤC 5.3</a:t>
+            </a:r>
+          </a:p>
+        </p:txBody>
+      </p:sp>
+      <p:sp>
+        <p:nvSpPr>
+          <p:cNvPr id="6" name="TextBox 5"/>
+          <p:cNvSpPr txBox="1"/>
+          <p:nvPr/>
+        </p:nvSpPr>
+        <p:spPr>
+          <a:xfrm>
+            <a:off x="1280160" y="2788920"/>
+            <a:ext cx="9601200" cy="1371600"/>
+          </a:xfrm>
+          <a:prstGeom prst="rect">
+            <a:avLst/>
+          </a:prstGeom>
+          <a:noFill/>
+        </p:spPr>
+        <p:txBody>
+          <a:bodyPr wrap="square">
+            <a:spAutoFit/>
+          </a:bodyPr>
+          <a:lstStyle/>
+          <a:p>
+            <a:r>
+              <a:rPr sz="3300" b="1">
+                <a:solidFill>
+                  <a:srgbClr val="AC4D33"/>
+                </a:solidFill>
+                <a:latin typeface="Cambria"/>
+              </a:rPr>
+              <a:t>Soạn thảo văn bản hành chính thông dụng</a:t>
+            </a:r>
+          </a:p>
+        </p:txBody>
+      </p:sp>
+      <p:sp>
+        <p:nvSpPr>
+          <p:cNvPr id="7" name="TextBox 6"/>
+          <p:cNvSpPr txBox="1"/>
+          <p:nvPr/>
+        </p:nvSpPr>
+        <p:spPr>
+          <a:xfrm>
+            <a:off x="1280160" y="4224528"/>
+            <a:ext cx="9418320" cy="640080"/>
+          </a:xfrm>
+          <a:prstGeom prst="rect">
+            <a:avLst/>
+          </a:prstGeom>
+          <a:noFill/>
+        </p:spPr>
+        <p:txBody>
+          <a:bodyPr wrap="square">
+            <a:spAutoFit/>
+          </a:bodyPr>
+          <a:lstStyle/>
+          <a:p>
+            <a:r>
+              <a:rPr sz="1450" i="1">
+                <a:solidFill>
+                  <a:srgbClr val="8A7A76"/>
+                </a:solidFill>
+                <a:latin typeface="Calibri"/>
+              </a:rPr>
+              <a:t>Năm loại văn bản dùng hằng ngày trong mọi cơ quan, tổ chức.</a:t>
+            </a:r>
+          </a:p>
+        </p:txBody>
+      </p:sp>
+      <p:sp>
+        <p:nvSpPr>
+          <p:cNvPr id="8" name="TextBox 7"/>
+          <p:cNvSpPr txBox="1"/>
+          <p:nvPr/>
+        </p:nvSpPr>
+        <p:spPr>
+          <a:xfrm>
+            <a:off x="502920" y="6419088"/>
+            <a:ext cx="7772400" cy="292608"/>
+          </a:xfrm>
+          <a:prstGeom prst="rect">
+            <a:avLst/>
+          </a:prstGeom>
+          <a:noFill/>
+        </p:spPr>
+        <p:txBody>
+          <a:bodyPr wrap="none">
+            <a:spAutoFit/>
+          </a:bodyPr>
+          <a:lstStyle/>
+          <a:p>
+            <a:r>
+              <a:rPr sz="900">
+                <a:solidFill>
+                  <a:srgbClr val="8A7A76"/>
+                </a:solidFill>
+                <a:latin typeface="Calibri"/>
+              </a:rPr>
+              <a:t>Je m'appelle Huong  •  GV. Đỗ Thùy Hương  •  EC1103</a:t>
+            </a:r>
+          </a:p>
+        </p:txBody>
+      </p:sp>
+      <p:sp>
+        <p:nvSpPr>
+          <p:cNvPr id="9" name="TextBox 8"/>
+          <p:cNvSpPr txBox="1"/>
+          <p:nvPr/>
+        </p:nvSpPr>
+        <p:spPr>
+          <a:xfrm>
+            <a:off x="9326880" y="6419088"/>
+            <a:ext cx="1920240" cy="292608"/>
+          </a:xfrm>
+          <a:prstGeom prst="rect">
+            <a:avLst/>
+          </a:prstGeom>
+          <a:noFill/>
+        </p:spPr>
+        <p:txBody>
+          <a:bodyPr wrap="none">
+            <a:spAutoFit/>
+          </a:bodyPr>
+          <a:lstStyle/>
+          <a:p>
+            <a:pPr algn="r"/>
+            <a:r>
+              <a:rPr sz="900">
+                <a:solidFill>
+                  <a:srgbClr val="8A7A76"/>
+                </a:solidFill>
+                <a:latin typeface="Calibri"/>
+              </a:rPr>
+              <a:t>Chương 5</a:t>
+            </a:r>
+          </a:p>
+        </p:txBody>
+      </p:sp>
+    </p:spTree>
+  </p:cSld>
+  <p:clrMapOvr>
+    <a:masterClrMapping/>
+  </p:clrMapOvr>
+</p:sld>
+</file>
+
+<file path=ppt/slides/slide12.xml><?xml version="1.0" encoding="utf-8"?>
+<p:sld xmlns:a="http://schemas.openxmlformats.org/drawingml/2006/main" xmlns:r="http://schemas.openxmlformats.org/officeDocument/2006/relationships" xmlns:p="http://schemas.openxmlformats.org/presentationml/2006/main">
+  <p:cSld name="Slide 9">
+    <p:bg>
+      <p:bgPr>
+        <a:solidFill>
+          <a:srgbClr val="FDFBF8"/>
+        </a:solidFill>
+      </p:bgPr>
+    </p:bg>
+    <p:spTree>
+      <p:nvGrpSpPr>
+        <p:cNvPr id="1" name=""/>
+        <p:cNvGrpSpPr/>
+        <p:nvPr/>
+      </p:nvGrpSpPr>
+      <p:grpSpPr>
+        <a:xfrm>
+          <a:off x="0" y="0"/>
+          <a:ext cx="0" cy="0"/>
+          <a:chOff x="0" y="0"/>
+          <a:chExt cx="0" cy="0"/>
+        </a:xfrm>
+      </p:grpSpPr>
+      <p:pic>
+        <p:nvPicPr>
+          <p:cNvPr id="2" name="Image 0" descr="assets/logo_tron.png">    </p:cNvPr>
+          <p:cNvPicPr>
+            <a:picLocks noChangeAspect="1"/>
+          </p:cNvPicPr>
+          <p:nvPr/>
+        </p:nvPicPr>
+        <p:blipFill>
+          <a:blip r:embed="rId1"/>
+          <a:stretch>
+            <a:fillRect/>
+          </a:stretch>
+        </p:blipFill>
+        <p:spPr>
+          <a:xfrm>
+            <a:off x="411480" y="6327648"/>
+            <a:ext cx="384048" cy="384048"/>
+          </a:xfrm>
+          <a:prstGeom prst="rect">
+            <a:avLst/>
+          </a:prstGeom>
+        </p:spPr>
+      </p:pic>
+      <p:sp>
+        <p:nvSpPr>
+          <p:cNvPr id="3" name="Text 0"/>
+          <p:cNvSpPr/>
+          <p:nvPr/>
+        </p:nvSpPr>
+        <p:spPr>
+          <a:xfrm>
+            <a:off x="868680" y="6355080"/>
+            <a:ext cx="7498080" cy="310896"/>
+          </a:xfrm>
+          <a:prstGeom prst="rect">
+            <a:avLst/>
+          </a:prstGeom>
+          <a:noFill/>
+          <a:ln/>
+        </p:spPr>
+        <p:txBody>
+          <a:bodyPr wrap="square" lIns="0" tIns="0" rIns="0" bIns="0" rtlCol="0" anchor="ctr"/>
+          <a:lstStyle/>
+          <a:p>
+            <a:pPr indent="0" marL="0">
+              <a:buNone/>
+            </a:pPr>
+            <a:r>
+              <a:rPr lang="en-US" sz="900" dirty="0">
+                <a:solidFill>
+                  <a:srgbClr val="8A7A76"/>
+                </a:solidFill>
+                <a:latin typeface="Calibri" pitchFamily="34" charset="0"/>
+                <a:ea typeface="Calibri" pitchFamily="34" charset="-122"/>
+                <a:cs typeface="Calibri" pitchFamily="34" charset="-120"/>
+              </a:rPr>
+              <a:t>Je m'appelle Huong  •  GV. Đỗ Thùy Hương  •  EC1103</a:t>
+            </a:r>
+            <a:endParaRPr lang="en-US" sz="900" dirty="0"/>
+          </a:p>
+        </p:txBody>
+      </p:sp>
+      <p:sp>
+        <p:nvSpPr>
+          <p:cNvPr id="4" name="Text 1"/>
+          <p:cNvSpPr/>
+          <p:nvPr/>
+        </p:nvSpPr>
+        <p:spPr>
+          <a:xfrm>
+            <a:off x="8503920" y="6355080"/>
+            <a:ext cx="2743200" cy="310896"/>
+          </a:xfrm>
+          <a:prstGeom prst="rect">
+            <a:avLst/>
+          </a:prstGeom>
+          <a:noFill/>
+          <a:ln/>
+        </p:spPr>
+        <p:txBody>
+          <a:bodyPr wrap="square" lIns="0" tIns="0" rIns="0" bIns="0" rtlCol="0" anchor="ctr"/>
+          <a:lstStyle/>
+          <a:p>
+            <a:pPr algn="r" indent="0" marL="0">
+              <a:buNone/>
+            </a:pPr>
+            <a:r>
+              <a:rPr lang="en-US" sz="900" dirty="0">
+                <a:solidFill>
+                  <a:srgbClr val="8A7A76"/>
+                </a:solidFill>
+                <a:latin typeface="Calibri" pitchFamily="34" charset="0"/>
+                <a:ea typeface="Calibri" pitchFamily="34" charset="-122"/>
+                <a:cs typeface="Calibri" pitchFamily="34" charset="-120"/>
+              </a:rPr>
+              <a:t>Chương 5</a:t>
+            </a:r>
+            <a:endParaRPr lang="en-US" sz="900" dirty="0"/>
+          </a:p>
+        </p:txBody>
+      </p:sp>
+      <p:sp>
+        <p:nvSpPr>
+          <p:cNvPr id="5" name="Shape 2"/>
+          <p:cNvSpPr/>
+          <p:nvPr/>
+        </p:nvSpPr>
+        <p:spPr>
+          <a:xfrm>
+            <a:off x="11430000" y="6327648"/>
+            <a:ext cx="365760" cy="365760"/>
+          </a:xfrm>
+          <a:prstGeom prst="ellipse">
+            <a:avLst/>
+          </a:prstGeom>
+          <a:solidFill>
+            <a:srgbClr val="DC756A"/>
+          </a:solidFill>
+          <a:ln/>
+        </p:spPr>
+        <p:txBody>
+          <a:bodyPr/>
+          <a:p/>
+        </p:txBody>
+      </p:sp>
+      <p:sp>
+        <p:nvSpPr>
+          <p:cNvPr id="6" name="Text 3"/>
+          <p:cNvSpPr/>
+          <p:nvPr/>
+        </p:nvSpPr>
+        <p:spPr>
+          <a:xfrm>
+            <a:off x="11430000" y="6327648"/>
+            <a:ext cx="365760" cy="365760"/>
+          </a:xfrm>
+          <a:prstGeom prst="rect">
+            <a:avLst/>
+          </a:prstGeom>
+          <a:noFill/>
+          <a:ln/>
+        </p:spPr>
+        <p:txBody>
+          <a:bodyPr wrap="square" lIns="0" tIns="0" rIns="0" bIns="0" rtlCol="0" anchor="ctr"/>
+          <a:lstStyle/>
+          <a:p>
+            <a:pPr algn="ctr" indent="0" marL="0">
+              <a:buNone/>
+            </a:pPr>
+            <a:r>
+              <a:rPr lang="en-US" sz="1000" b="1" dirty="0">
+                <a:solidFill>
+                  <a:srgbClr val="FFFFFF"/>
+                </a:solidFill>
+                <a:latin typeface="Calibri" pitchFamily="34" charset="0"/>
+                <a:ea typeface="Calibri" pitchFamily="34" charset="-122"/>
+                <a:cs typeface="Calibri" pitchFamily="34" charset="-120"/>
+              </a:rPr>
+              <a:t>9</a:t>
+            </a:r>
+            <a:endParaRPr lang="en-US" sz="1000" dirty="0"/>
+          </a:p>
+        </p:txBody>
+      </p:sp>
+      <p:sp>
+        <p:nvSpPr>
+          <p:cNvPr id="7" name="Text 4"/>
+          <p:cNvSpPr/>
+          <p:nvPr/>
+        </p:nvSpPr>
+        <p:spPr>
+          <a:xfrm>
+            <a:off x="502920" y="310896"/>
+            <a:ext cx="11155680" cy="274320"/>
+          </a:xfrm>
+          <a:prstGeom prst="rect">
+            <a:avLst/>
+          </a:prstGeom>
+          <a:noFill/>
+          <a:ln/>
+        </p:spPr>
+        <p:txBody>
+          <a:bodyPr wrap="square" lIns="0" tIns="0" rIns="0" bIns="0" rtlCol="0" anchor="ctr"/>
+          <a:lstStyle/>
+          <a:p>
+            <a:pPr indent="0" marL="0">
+              <a:buNone/>
+            </a:pPr>
+            <a:r>
+              <a:rPr lang="en-US" sz="1100" b="1" spc="300" kern="0" dirty="0">
+                <a:solidFill>
+                  <a:srgbClr val="DC756A"/>
+                </a:solidFill>
+                <a:latin typeface="Calibri" pitchFamily="34" charset="0"/>
+                <a:ea typeface="Calibri" pitchFamily="34" charset="-122"/>
+                <a:cs typeface="Calibri" pitchFamily="34" charset="-120"/>
+              </a:rPr>
+              <a:t>5.3</a:t>
+            </a:r>
+            <a:endParaRPr lang="en-US" sz="1100" dirty="0"/>
+          </a:p>
+        </p:txBody>
+      </p:sp>
+      <p:sp>
+        <p:nvSpPr>
+          <p:cNvPr id="8" name="Text 5"/>
+          <p:cNvSpPr/>
+          <p:nvPr/>
+        </p:nvSpPr>
+        <p:spPr>
+          <a:xfrm>
+            <a:off x="502920" y="576072"/>
+            <a:ext cx="11155680" cy="713232"/>
+          </a:xfrm>
+          <a:prstGeom prst="rect">
+            <a:avLst/>
+          </a:prstGeom>
+          <a:noFill/>
+          <a:ln/>
+        </p:spPr>
+        <p:txBody>
+          <a:bodyPr wrap="square" lIns="0" tIns="0" rIns="0" bIns="0" rtlCol="0" anchor="ctr"/>
+          <a:lstStyle/>
+          <a:p>
+            <a:pPr indent="0" marL="0">
+              <a:buNone/>
+            </a:pPr>
+            <a:r>
+              <a:rPr lang="en-US" sz="2700" b="1" dirty="0">
+                <a:solidFill>
+                  <a:srgbClr val="AC4D33"/>
+                </a:solidFill>
+                <a:latin typeface="Cambria" pitchFamily="34" charset="0"/>
+                <a:ea typeface="Cambria" pitchFamily="34" charset="-122"/>
+                <a:cs typeface="Cambria" pitchFamily="34" charset="-120"/>
+              </a:rPr>
+              <a:t>Năm văn bản hành chính thông dụng</a:t>
+            </a:r>
+            <a:endParaRPr lang="en-US" sz="2700" dirty="0"/>
+          </a:p>
+        </p:txBody>
+      </p:sp>
+      <p:pic>
+        <p:nvPicPr>
+          <p:cNvPr id="9" name="Picture 8" descr="c5-chuoi-van-ban-nt.png"/>
+          <p:cNvPicPr>
+            <a:picLocks noChangeAspect="1"/>
+          </p:cNvPicPr>
+          <p:nvPr/>
+        </p:nvPicPr>
+        <p:blipFill>
+          <a:blip r:embed="rId4"/>
+          <a:stretch>
+            <a:fillRect/>
+          </a:stretch>
+        </p:blipFill>
+        <p:spPr>
+          <a:xfrm>
+            <a:off x="981171" y="1481328"/>
+            <a:ext cx="10229353" cy="2940939"/>
+          </a:xfrm>
+          <a:prstGeom prst="rect">
+            <a:avLst/>
+          </a:prstGeom>
+        </p:spPr>
+      </p:pic>
+      <p:sp>
+        <p:nvSpPr>
+          <p:cNvPr id="10" name="TextBox 9"/>
+          <p:cNvSpPr txBox="1"/>
+          <p:nvPr/>
+        </p:nvSpPr>
+        <p:spPr>
+          <a:xfrm>
+            <a:off x="548640" y="4495419"/>
+            <a:ext cx="11109960" cy="310896"/>
+          </a:xfrm>
+          <a:prstGeom prst="rect">
+            <a:avLst/>
+          </a:prstGeom>
+          <a:noFill/>
+        </p:spPr>
+        <p:txBody>
+          <a:bodyPr wrap="square">
+            <a:spAutoFit/>
+          </a:bodyPr>
+          <a:lstStyle/>
+          <a:p>
+            <a:pPr algn="ctr"/>
+            <a:r>
+              <a:rPr sz="1150" i="1">
+                <a:solidFill>
+                  <a:srgbClr val="8A7A76"/>
+                </a:solidFill>
+                <a:latin typeface="Calibri"/>
+              </a:rPr>
+              <a:t>Chuỗi văn bản của một thương vụ — sinh viên sẽ soạn lại đúng chuỗi này trong phần thực hành.</a:t>
+            </a:r>
+          </a:p>
+        </p:txBody>
+      </p:sp>
+    </p:spTree>
+  </p:cSld>
+  <p:clrMapOvr>
+    <a:masterClrMapping/>
+  </p:clrMapOvr>
+</p:sld>
+</file>
+
+<file path=ppt/slides/slide13.xml><?xml version="1.0" encoding="utf-8"?>
 <p:sld xmlns:a="http://schemas.openxmlformats.org/drawingml/2006/main" xmlns:r="http://schemas.openxmlformats.org/officeDocument/2006/relationships" xmlns:p="http://schemas.openxmlformats.org/presentationml/2006/main">
   <p:cSld name="Slide 10">
     <p:bg>
@@ -3758,7 +5009,7 @@
 </p:sld>
 </file>
 
-<file path=ppt/slides/slide11.xml><?xml version="1.0" encoding="utf-8"?>
+<file path=ppt/slides/slide14.xml><?xml version="1.0" encoding="utf-8"?>
 <p:sld xmlns:a="http://schemas.openxmlformats.org/drawingml/2006/main" xmlns:r="http://schemas.openxmlformats.org/officeDocument/2006/relationships" xmlns:p="http://schemas.openxmlformats.org/presentationml/2006/main">
   <p:cSld name="Slide 11">
     <p:bg>
@@ -4294,7 +5545,328 @@
 </p:sld>
 </file>
 
-<file path=ppt/slides/slide12.xml><?xml version="1.0" encoding="utf-8"?>
+<file path=ppt/slides/slide15.xml><?xml version="1.0" encoding="utf-8"?>
+<p:sld xmlns:a="http://schemas.openxmlformats.org/drawingml/2006/main" xmlns:p="http://schemas.openxmlformats.org/presentationml/2006/main" xmlns:r="http://schemas.openxmlformats.org/officeDocument/2006/relationships">
+  <p:cSld>
+    <p:spTree>
+      <p:nvGrpSpPr>
+        <p:cNvPr id="1" name=""/>
+        <p:cNvGrpSpPr/>
+        <p:nvPr/>
+      </p:nvGrpSpPr>
+      <p:grpSpPr/>
+      <p:sp>
+        <p:nvSpPr>
+          <p:cNvPr id="2" name="Rectangle 1"/>
+          <p:cNvSpPr/>
+          <p:nvPr/>
+        </p:nvSpPr>
+        <p:spPr>
+          <a:xfrm>
+            <a:off x="0" y="0"/>
+            <a:ext cx="12191695" cy="6858000"/>
+          </a:xfrm>
+          <a:prstGeom prst="rect">
+            <a:avLst/>
+          </a:prstGeom>
+          <a:solidFill>
+            <a:srgbClr val="FDFBF8"/>
+          </a:solidFill>
+          <a:ln>
+            <a:noFill/>
+          </a:ln>
+          <a:effectLst/>
+        </p:spPr>
+        <p:style>
+          <a:lnRef idx="1">
+            <a:schemeClr val="accent1"/>
+          </a:lnRef>
+          <a:fillRef idx="3">
+            <a:schemeClr val="accent1"/>
+          </a:fillRef>
+          <a:effectRef idx="2">
+            <a:schemeClr val="accent1"/>
+          </a:effectRef>
+          <a:fontRef idx="minor">
+            <a:schemeClr val="lt1"/>
+          </a:fontRef>
+        </p:style>
+        <p:txBody>
+          <a:bodyPr rtlCol="0" anchor="ctr"/>
+          <a:lstStyle/>
+          <a:p>
+            <a:pPr algn="ctr"/>
+          </a:p>
+        </p:txBody>
+      </p:sp>
+      <p:sp>
+        <p:nvSpPr>
+          <p:cNvPr id="3" name="Rectangle 2"/>
+          <p:cNvSpPr/>
+          <p:nvPr/>
+        </p:nvSpPr>
+        <p:spPr>
+          <a:xfrm>
+            <a:off x="0" y="2103120"/>
+            <a:ext cx="12191695" cy="2743200"/>
+          </a:xfrm>
+          <a:prstGeom prst="rect">
+            <a:avLst/>
+          </a:prstGeom>
+          <a:solidFill>
+            <a:srgbClr val="FDF1EF"/>
+          </a:solidFill>
+          <a:ln>
+            <a:noFill/>
+          </a:ln>
+          <a:effectLst/>
+        </p:spPr>
+        <p:style>
+          <a:lnRef idx="1">
+            <a:schemeClr val="accent1"/>
+          </a:lnRef>
+          <a:fillRef idx="3">
+            <a:schemeClr val="accent1"/>
+          </a:fillRef>
+          <a:effectRef idx="2">
+            <a:schemeClr val="accent1"/>
+          </a:effectRef>
+          <a:fontRef idx="minor">
+            <a:schemeClr val="lt1"/>
+          </a:fontRef>
+        </p:style>
+        <p:txBody>
+          <a:bodyPr rtlCol="0" anchor="ctr"/>
+          <a:lstStyle/>
+          <a:p>
+            <a:pPr algn="ctr"/>
+          </a:p>
+        </p:txBody>
+      </p:sp>
+      <p:sp>
+        <p:nvSpPr>
+          <p:cNvPr id="4" name="Rectangle 3"/>
+          <p:cNvSpPr/>
+          <p:nvPr/>
+        </p:nvSpPr>
+        <p:spPr>
+          <a:xfrm>
+            <a:off x="0" y="0"/>
+            <a:ext cx="274320" cy="6858000"/>
+          </a:xfrm>
+          <a:prstGeom prst="rect">
+            <a:avLst/>
+          </a:prstGeom>
+          <a:solidFill>
+            <a:srgbClr val="DC756A"/>
+          </a:solidFill>
+          <a:ln>
+            <a:noFill/>
+          </a:ln>
+          <a:effectLst/>
+        </p:spPr>
+        <p:style>
+          <a:lnRef idx="1">
+            <a:schemeClr val="accent1"/>
+          </a:lnRef>
+          <a:fillRef idx="3">
+            <a:schemeClr val="accent1"/>
+          </a:fillRef>
+          <a:effectRef idx="2">
+            <a:schemeClr val="accent1"/>
+          </a:effectRef>
+          <a:fontRef idx="minor">
+            <a:schemeClr val="lt1"/>
+          </a:fontRef>
+        </p:style>
+        <p:txBody>
+          <a:bodyPr rtlCol="0" anchor="ctr"/>
+          <a:lstStyle/>
+          <a:p>
+            <a:pPr algn="ctr"/>
+          </a:p>
+        </p:txBody>
+      </p:sp>
+      <p:sp>
+        <p:nvSpPr>
+          <p:cNvPr id="5" name="TextBox 4"/>
+          <p:cNvSpPr txBox="1"/>
+          <p:nvPr/>
+        </p:nvSpPr>
+        <p:spPr>
+          <a:xfrm>
+            <a:off x="1280160" y="2377440"/>
+            <a:ext cx="9692640" cy="411480"/>
+          </a:xfrm>
+          <a:prstGeom prst="rect">
+            <a:avLst/>
+          </a:prstGeom>
+          <a:noFill/>
+        </p:spPr>
+        <p:txBody>
+          <a:bodyPr wrap="none">
+            <a:spAutoFit/>
+          </a:bodyPr>
+          <a:lstStyle/>
+          <a:p>
+            <a:r>
+              <a:rPr sz="1500" b="1">
+                <a:solidFill>
+                  <a:srgbClr val="DC756A"/>
+                </a:solidFill>
+                <a:latin typeface="Calibri"/>
+              </a:rPr>
+              <a:t>MỤC 5.4</a:t>
+            </a:r>
+          </a:p>
+        </p:txBody>
+      </p:sp>
+      <p:sp>
+        <p:nvSpPr>
+          <p:cNvPr id="6" name="TextBox 5"/>
+          <p:cNvSpPr txBox="1"/>
+          <p:nvPr/>
+        </p:nvSpPr>
+        <p:spPr>
+          <a:xfrm>
+            <a:off x="1280160" y="2788920"/>
+            <a:ext cx="9601200" cy="1371600"/>
+          </a:xfrm>
+          <a:prstGeom prst="rect">
+            <a:avLst/>
+          </a:prstGeom>
+          <a:noFill/>
+        </p:spPr>
+        <p:txBody>
+          <a:bodyPr wrap="square">
+            <a:spAutoFit/>
+          </a:bodyPr>
+          <a:lstStyle/>
+          <a:p>
+            <a:r>
+              <a:rPr sz="3800" b="1">
+                <a:solidFill>
+                  <a:srgbClr val="AC4D33"/>
+                </a:solidFill>
+                <a:latin typeface="Cambria"/>
+              </a:rPr>
+              <a:t>Soạn thảo văn bản thương mại</a:t>
+            </a:r>
+          </a:p>
+        </p:txBody>
+      </p:sp>
+      <p:sp>
+        <p:nvSpPr>
+          <p:cNvPr id="7" name="TextBox 6"/>
+          <p:cNvSpPr txBox="1"/>
+          <p:nvPr/>
+        </p:nvSpPr>
+        <p:spPr>
+          <a:xfrm>
+            <a:off x="1280160" y="4224528"/>
+            <a:ext cx="9418320" cy="640080"/>
+          </a:xfrm>
+          <a:prstGeom prst="rect">
+            <a:avLst/>
+          </a:prstGeom>
+          <a:noFill/>
+        </p:spPr>
+        <p:txBody>
+          <a:bodyPr wrap="square">
+            <a:spAutoFit/>
+          </a:bodyPr>
+          <a:lstStyle/>
+          <a:p>
+            <a:r>
+              <a:rPr sz="1450" i="1">
+                <a:solidFill>
+                  <a:srgbClr val="8A7A76"/>
+                </a:solidFill>
+                <a:latin typeface="Calibri"/>
+              </a:rPr>
+              <a:t>Thư tín, báo giá và hợp đồng — bộ hồ sơ đưa một thương vụ đi đến đích.</a:t>
+            </a:r>
+          </a:p>
+        </p:txBody>
+      </p:sp>
+      <p:sp>
+        <p:nvSpPr>
+          <p:cNvPr id="8" name="TextBox 7"/>
+          <p:cNvSpPr txBox="1"/>
+          <p:nvPr/>
+        </p:nvSpPr>
+        <p:spPr>
+          <a:xfrm>
+            <a:off x="502920" y="6419088"/>
+            <a:ext cx="7772400" cy="292608"/>
+          </a:xfrm>
+          <a:prstGeom prst="rect">
+            <a:avLst/>
+          </a:prstGeom>
+          <a:noFill/>
+        </p:spPr>
+        <p:txBody>
+          <a:bodyPr wrap="none">
+            <a:spAutoFit/>
+          </a:bodyPr>
+          <a:lstStyle/>
+          <a:p>
+            <a:r>
+              <a:rPr sz="900">
+                <a:solidFill>
+                  <a:srgbClr val="8A7A76"/>
+                </a:solidFill>
+                <a:latin typeface="Calibri"/>
+              </a:rPr>
+              <a:t>Je m'appelle Huong  •  GV. Đỗ Thùy Hương  •  EC1103</a:t>
+            </a:r>
+          </a:p>
+        </p:txBody>
+      </p:sp>
+      <p:sp>
+        <p:nvSpPr>
+          <p:cNvPr id="9" name="TextBox 8"/>
+          <p:cNvSpPr txBox="1"/>
+          <p:nvPr/>
+        </p:nvSpPr>
+        <p:spPr>
+          <a:xfrm>
+            <a:off x="9326880" y="6419088"/>
+            <a:ext cx="1920240" cy="292608"/>
+          </a:xfrm>
+          <a:prstGeom prst="rect">
+            <a:avLst/>
+          </a:prstGeom>
+          <a:noFill/>
+        </p:spPr>
+        <p:txBody>
+          <a:bodyPr wrap="none">
+            <a:spAutoFit/>
+          </a:bodyPr>
+          <a:lstStyle/>
+          <a:p>
+            <a:pPr algn="r"/>
+            <a:r>
+              <a:rPr sz="900">
+                <a:solidFill>
+                  <a:srgbClr val="8A7A76"/>
+                </a:solidFill>
+                <a:latin typeface="Calibri"/>
+              </a:rPr>
+              <a:t>Chương 5</a:t>
+            </a:r>
+          </a:p>
+        </p:txBody>
+      </p:sp>
+    </p:spTree>
+  </p:cSld>
+  <p:clrMapOvr>
+    <a:masterClrMapping/>
+  </p:clrMapOvr>
+</p:sld>
+</file>
+
+<file path=ppt/slides/slide16.xml><?xml version="1.0" encoding="utf-8"?>
 <p:sld xmlns:a="http://schemas.openxmlformats.org/drawingml/2006/main" xmlns:r="http://schemas.openxmlformats.org/officeDocument/2006/relationships" xmlns:p="http://schemas.openxmlformats.org/presentationml/2006/main">
   <p:cSld name="Slide 12">
     <p:bg>
@@ -4917,7 +6489,7 @@
 </p:sld>
 </file>
 
-<file path=ppt/slides/slide13.xml><?xml version="1.0" encoding="utf-8"?>
+<file path=ppt/slides/slide17.xml><?xml version="1.0" encoding="utf-8"?>
 <p:sld xmlns:a="http://schemas.openxmlformats.org/drawingml/2006/main" xmlns:r="http://schemas.openxmlformats.org/officeDocument/2006/relationships" xmlns:p="http://schemas.openxmlformats.org/presentationml/2006/main">
   <p:cSld name="Slide 13">
     <p:bg>
@@ -5453,7 +7025,7 @@
 </p:sld>
 </file>
 
-<file path=ppt/slides/slide14.xml><?xml version="1.0" encoding="utf-8"?>
+<file path=ppt/slides/slide18.xml><?xml version="1.0" encoding="utf-8"?>
 <p:sld xmlns:a="http://schemas.openxmlformats.org/drawingml/2006/main" xmlns:r="http://schemas.openxmlformats.org/officeDocument/2006/relationships" xmlns:p="http://schemas.openxmlformats.org/presentationml/2006/main">
   <p:cSld name="Slide 14">
     <p:bg>
@@ -6184,7 +7756,7 @@
 </p:sld>
 </file>
 
-<file path=ppt/slides/slide15.xml><?xml version="1.0" encoding="utf-8"?>
+<file path=ppt/slides/slide19.xml><?xml version="1.0" encoding="utf-8"?>
 <p:sld xmlns:a="http://schemas.openxmlformats.org/drawingml/2006/main" xmlns:r="http://schemas.openxmlformats.org/officeDocument/2006/relationships" xmlns:p="http://schemas.openxmlformats.org/presentationml/2006/main">
   <p:cSld name="Slide 15">
     <p:bg>
@@ -6709,2226 +8281,6 @@
               <a:t>Thư tín đạt 5C, báo giá có hiệu lực rõ, hợp đồng đủ điều khoản — bộ ba hợp đồng, nghiệm thu, thanh lý khép kín thương vụ.</a:t>
             </a:r>
             <a:endParaRPr lang="en-US" sz="1500" dirty="0"/>
-          </a:p>
-        </p:txBody>
-      </p:sp>
-    </p:spTree>
-  </p:cSld>
-  <p:clrMapOvr>
-    <a:masterClrMapping/>
-  </p:clrMapOvr>
-</p:sld>
-</file>
-
-<file path=ppt/slides/slide16.xml><?xml version="1.0" encoding="utf-8"?>
-<p:sld xmlns:a="http://schemas.openxmlformats.org/drawingml/2006/main" xmlns:r="http://schemas.openxmlformats.org/officeDocument/2006/relationships" xmlns:p="http://schemas.openxmlformats.org/presentationml/2006/main">
-  <p:cSld name="Slide 16">
-    <p:bg>
-      <p:bgPr>
-        <a:solidFill>
-          <a:srgbClr val="FDFBF8"/>
-        </a:solidFill>
-      </p:bgPr>
-    </p:bg>
-    <p:spTree>
-      <p:nvGrpSpPr>
-        <p:cNvPr id="1" name=""/>
-        <p:cNvGrpSpPr/>
-        <p:nvPr/>
-      </p:nvGrpSpPr>
-      <p:grpSpPr>
-        <a:xfrm>
-          <a:off x="0" y="0"/>
-          <a:ext cx="0" cy="0"/>
-          <a:chOff x="0" y="0"/>
-          <a:chExt cx="0" cy="0"/>
-        </a:xfrm>
-      </p:grpSpPr>
-      <p:pic>
-        <p:nvPicPr>
-          <p:cNvPr id="2" name="Image 0" descr="assets/logo_tron.png">    </p:cNvPr>
-          <p:cNvPicPr>
-            <a:picLocks noChangeAspect="1"/>
-          </p:cNvPicPr>
-          <p:nvPr/>
-        </p:nvPicPr>
-        <p:blipFill>
-          <a:blip r:embed="rId1"/>
-          <a:stretch>
-            <a:fillRect/>
-          </a:stretch>
-        </p:blipFill>
-        <p:spPr>
-          <a:xfrm>
-            <a:off x="411480" y="6327648"/>
-            <a:ext cx="384048" cy="384048"/>
-          </a:xfrm>
-          <a:prstGeom prst="rect">
-            <a:avLst/>
-          </a:prstGeom>
-        </p:spPr>
-      </p:pic>
-      <p:sp>
-        <p:nvSpPr>
-          <p:cNvPr id="3" name="Text 0"/>
-          <p:cNvSpPr/>
-          <p:nvPr/>
-        </p:nvSpPr>
-        <p:spPr>
-          <a:xfrm>
-            <a:off x="868680" y="6355080"/>
-            <a:ext cx="7498080" cy="310896"/>
-          </a:xfrm>
-          <a:prstGeom prst="rect">
-            <a:avLst/>
-          </a:prstGeom>
-          <a:noFill/>
-          <a:ln/>
-        </p:spPr>
-        <p:txBody>
-          <a:bodyPr wrap="square" lIns="0" tIns="0" rIns="0" bIns="0" rtlCol="0" anchor="ctr"/>
-          <a:lstStyle/>
-          <a:p>
-            <a:pPr indent="0" marL="0">
-              <a:buNone/>
-            </a:pPr>
-            <a:r>
-              <a:rPr lang="en-US" sz="900" dirty="0">
-                <a:solidFill>
-                  <a:srgbClr val="8A7A76"/>
-                </a:solidFill>
-                <a:latin typeface="Calibri" pitchFamily="34" charset="0"/>
-                <a:ea typeface="Calibri" pitchFamily="34" charset="-122"/>
-                <a:cs typeface="Calibri" pitchFamily="34" charset="-120"/>
-              </a:rPr>
-              <a:t>Je m'appelle Huong  •  GV. Đỗ Thùy Hương  •  EC1103</a:t>
-            </a:r>
-            <a:endParaRPr lang="en-US" sz="900" dirty="0"/>
-          </a:p>
-        </p:txBody>
-      </p:sp>
-      <p:sp>
-        <p:nvSpPr>
-          <p:cNvPr id="4" name="Text 1"/>
-          <p:cNvSpPr/>
-          <p:nvPr/>
-        </p:nvSpPr>
-        <p:spPr>
-          <a:xfrm>
-            <a:off x="8503920" y="6355080"/>
-            <a:ext cx="2743200" cy="310896"/>
-          </a:xfrm>
-          <a:prstGeom prst="rect">
-            <a:avLst/>
-          </a:prstGeom>
-          <a:noFill/>
-          <a:ln/>
-        </p:spPr>
-        <p:txBody>
-          <a:bodyPr wrap="square" lIns="0" tIns="0" rIns="0" bIns="0" rtlCol="0" anchor="ctr"/>
-          <a:lstStyle/>
-          <a:p>
-            <a:pPr algn="r" indent="0" marL="0">
-              <a:buNone/>
-            </a:pPr>
-            <a:r>
-              <a:rPr lang="en-US" sz="900" dirty="0">
-                <a:solidFill>
-                  <a:srgbClr val="8A7A76"/>
-                </a:solidFill>
-                <a:latin typeface="Calibri" pitchFamily="34" charset="0"/>
-                <a:ea typeface="Calibri" pitchFamily="34" charset="-122"/>
-                <a:cs typeface="Calibri" pitchFamily="34" charset="-120"/>
-              </a:rPr>
-              <a:t>Chương 5</a:t>
-            </a:r>
-            <a:endParaRPr lang="en-US" sz="900" dirty="0"/>
-          </a:p>
-        </p:txBody>
-      </p:sp>
-      <p:sp>
-        <p:nvSpPr>
-          <p:cNvPr id="5" name="Shape 2"/>
-          <p:cNvSpPr/>
-          <p:nvPr/>
-        </p:nvSpPr>
-        <p:spPr>
-          <a:xfrm>
-            <a:off x="11430000" y="6327648"/>
-            <a:ext cx="365760" cy="365760"/>
-          </a:xfrm>
-          <a:prstGeom prst="ellipse">
-            <a:avLst/>
-          </a:prstGeom>
-          <a:solidFill>
-            <a:srgbClr val="DC756A"/>
-          </a:solidFill>
-          <a:ln/>
-        </p:spPr>
-        <p:txBody>
-          <a:bodyPr/>
-          <a:p/>
-        </p:txBody>
-      </p:sp>
-      <p:sp>
-        <p:nvSpPr>
-          <p:cNvPr id="6" name="Text 3"/>
-          <p:cNvSpPr/>
-          <p:nvPr/>
-        </p:nvSpPr>
-        <p:spPr>
-          <a:xfrm>
-            <a:off x="11430000" y="6327648"/>
-            <a:ext cx="365760" cy="365760"/>
-          </a:xfrm>
-          <a:prstGeom prst="rect">
-            <a:avLst/>
-          </a:prstGeom>
-          <a:noFill/>
-          <a:ln/>
-        </p:spPr>
-        <p:txBody>
-          <a:bodyPr wrap="square" lIns="0" tIns="0" rIns="0" bIns="0" rtlCol="0" anchor="ctr"/>
-          <a:lstStyle/>
-          <a:p>
-            <a:pPr algn="ctr" indent="0" marL="0">
-              <a:buNone/>
-            </a:pPr>
-            <a:r>
-              <a:rPr lang="en-US" sz="1000" b="1" dirty="0">
-                <a:solidFill>
-                  <a:srgbClr val="FFFFFF"/>
-                </a:solidFill>
-                <a:latin typeface="Calibri" pitchFamily="34" charset="0"/>
-                <a:ea typeface="Calibri" pitchFamily="34" charset="-122"/>
-                <a:cs typeface="Calibri" pitchFamily="34" charset="-120"/>
-              </a:rPr>
-              <a:t>16</a:t>
-            </a:r>
-            <a:endParaRPr lang="en-US" sz="1000" dirty="0"/>
-          </a:p>
-        </p:txBody>
-      </p:sp>
-      <p:sp>
-        <p:nvSpPr>
-          <p:cNvPr id="7" name="Text 4"/>
-          <p:cNvSpPr/>
-          <p:nvPr/>
-        </p:nvSpPr>
-        <p:spPr>
-          <a:xfrm>
-            <a:off x="502920" y="310896"/>
-            <a:ext cx="11155680" cy="274320"/>
-          </a:xfrm>
-          <a:prstGeom prst="rect">
-            <a:avLst/>
-          </a:prstGeom>
-          <a:noFill/>
-          <a:ln/>
-        </p:spPr>
-        <p:txBody>
-          <a:bodyPr wrap="square" lIns="0" tIns="0" rIns="0" bIns="0" rtlCol="0" anchor="ctr"/>
-          <a:lstStyle/>
-          <a:p>
-            <a:pPr indent="0" marL="0">
-              <a:buNone/>
-            </a:pPr>
-            <a:r>
-              <a:rPr lang="en-US" sz="1100" b="1" spc="300" kern="0" dirty="0">
-                <a:solidFill>
-                  <a:srgbClr val="DC756A"/>
-                </a:solidFill>
-                <a:latin typeface="Calibri" pitchFamily="34" charset="0"/>
-                <a:ea typeface="Calibri" pitchFamily="34" charset="-122"/>
-                <a:cs typeface="Calibri" pitchFamily="34" charset="-120"/>
-              </a:rPr>
-              <a:t>ÔN TẬP &amp; CHUẨN BỊ</a:t>
-            </a:r>
-            <a:endParaRPr lang="en-US" sz="1100" dirty="0"/>
-          </a:p>
-        </p:txBody>
-      </p:sp>
-      <p:sp>
-        <p:nvSpPr>
-          <p:cNvPr id="8" name="Text 5"/>
-          <p:cNvSpPr/>
-          <p:nvPr/>
-        </p:nvSpPr>
-        <p:spPr>
-          <a:xfrm>
-            <a:off x="502920" y="576072"/>
-            <a:ext cx="11155680" cy="713232"/>
-          </a:xfrm>
-          <a:prstGeom prst="rect">
-            <a:avLst/>
-          </a:prstGeom>
-          <a:noFill/>
-          <a:ln/>
-        </p:spPr>
-        <p:txBody>
-          <a:bodyPr wrap="square" lIns="0" tIns="0" rIns="0" bIns="0" rtlCol="0" anchor="ctr"/>
-          <a:lstStyle/>
-          <a:p>
-            <a:pPr indent="0" marL="0">
-              <a:buNone/>
-            </a:pPr>
-            <a:r>
-              <a:rPr lang="en-US" sz="2700" b="1" dirty="0">
-                <a:solidFill>
-                  <a:srgbClr val="AC4D33"/>
-                </a:solidFill>
-                <a:latin typeface="Cambria" pitchFamily="34" charset="0"/>
-                <a:ea typeface="Cambria" pitchFamily="34" charset="-122"/>
-                <a:cs typeface="Cambria" pitchFamily="34" charset="-120"/>
-              </a:rPr>
-              <a:t>Câu hỏi ôn tập</a:t>
-            </a:r>
-            <a:endParaRPr lang="en-US" sz="2700" dirty="0"/>
-          </a:p>
-        </p:txBody>
-      </p:sp>
-      <p:sp>
-        <p:nvSpPr>
-          <p:cNvPr id="9" name="Shape 6"/>
-          <p:cNvSpPr/>
-          <p:nvPr/>
-        </p:nvSpPr>
-        <p:spPr>
-          <a:xfrm>
-            <a:off x="502920" y="1572768"/>
-            <a:ext cx="384048" cy="384048"/>
-          </a:xfrm>
-          <a:prstGeom prst="ellipse">
-            <a:avLst/>
-          </a:prstGeom>
-          <a:solidFill>
-            <a:srgbClr val="DC756A"/>
-          </a:solidFill>
-          <a:ln/>
-        </p:spPr>
-        <p:txBody>
-          <a:bodyPr/>
-          <a:p/>
-        </p:txBody>
-      </p:sp>
-      <p:sp>
-        <p:nvSpPr>
-          <p:cNvPr id="10" name="Text 7"/>
-          <p:cNvSpPr/>
-          <p:nvPr/>
-        </p:nvSpPr>
-        <p:spPr>
-          <a:xfrm>
-            <a:off x="502920" y="1572768"/>
-            <a:ext cx="384048" cy="384048"/>
-          </a:xfrm>
-          <a:prstGeom prst="rect">
-            <a:avLst/>
-          </a:prstGeom>
-          <a:noFill/>
-          <a:ln/>
-        </p:spPr>
-        <p:txBody>
-          <a:bodyPr wrap="square" lIns="0" tIns="0" rIns="0" bIns="0" rtlCol="0" anchor="ctr"/>
-          <a:lstStyle/>
-          <a:p>
-            <a:pPr algn="ctr" indent="0" marL="0">
-              <a:buNone/>
-            </a:pPr>
-            <a:r>
-              <a:rPr lang="en-US" sz="1400" b="1" dirty="0">
-                <a:solidFill>
-                  <a:srgbClr val="FFFFFF"/>
-                </a:solidFill>
-                <a:latin typeface="Calibri" pitchFamily="34" charset="0"/>
-                <a:ea typeface="Calibri" pitchFamily="34" charset="-122"/>
-                <a:cs typeface="Calibri" pitchFamily="34" charset="-120"/>
-              </a:rPr>
-              <a:t>1</a:t>
-            </a:r>
-            <a:endParaRPr lang="en-US" sz="1400" dirty="0"/>
-          </a:p>
-        </p:txBody>
-      </p:sp>
-      <p:sp>
-        <p:nvSpPr>
-          <p:cNvPr id="11" name="Text 8"/>
-          <p:cNvSpPr/>
-          <p:nvPr/>
-        </p:nvSpPr>
-        <p:spPr>
-          <a:xfrm>
-            <a:off x="1051560" y="1499616"/>
-            <a:ext cx="10652760" cy="822960"/>
-          </a:xfrm>
-          <a:prstGeom prst="rect">
-            <a:avLst/>
-          </a:prstGeom>
-          <a:noFill/>
-          <a:ln/>
-        </p:spPr>
-        <p:txBody>
-          <a:bodyPr wrap="square" lIns="0" tIns="0" rIns="0" bIns="0" rtlCol="0" anchor="t"/>
-          <a:lstStyle/>
-          <a:p>
-            <a:pPr indent="0" marL="0">
-              <a:buNone/>
-            </a:pPr>
-            <a:r>
-              <a:rPr lang="en-US" sz="1400" dirty="0">
-                <a:solidFill>
-                  <a:srgbClr val="3A2B28"/>
-                </a:solidFill>
-                <a:latin typeface="Calibri" pitchFamily="34" charset="0"/>
-                <a:ea typeface="Calibri" pitchFamily="34" charset="-122"/>
-                <a:cs typeface="Calibri" pitchFamily="34" charset="-120"/>
-              </a:rPr>
-              <a:t>Trình bày khái niệm văn bản và các nhóm văn bản trong tổ chức.</a:t>
-            </a:r>
-            <a:endParaRPr lang="en-US" sz="1400" dirty="0"/>
-          </a:p>
-        </p:txBody>
-      </p:sp>
-      <p:sp>
-        <p:nvSpPr>
-          <p:cNvPr id="12" name="Shape 9"/>
-          <p:cNvSpPr/>
-          <p:nvPr/>
-        </p:nvSpPr>
-        <p:spPr>
-          <a:xfrm>
-            <a:off x="502920" y="2395728"/>
-            <a:ext cx="384048" cy="384048"/>
-          </a:xfrm>
-          <a:prstGeom prst="ellipse">
-            <a:avLst/>
-          </a:prstGeom>
-          <a:solidFill>
-            <a:srgbClr val="DC756A"/>
-          </a:solidFill>
-          <a:ln/>
-        </p:spPr>
-        <p:txBody>
-          <a:bodyPr/>
-          <a:p/>
-        </p:txBody>
-      </p:sp>
-      <p:sp>
-        <p:nvSpPr>
-          <p:cNvPr id="13" name="Text 10"/>
-          <p:cNvSpPr/>
-          <p:nvPr/>
-        </p:nvSpPr>
-        <p:spPr>
-          <a:xfrm>
-            <a:off x="502920" y="2395728"/>
-            <a:ext cx="384048" cy="384048"/>
-          </a:xfrm>
-          <a:prstGeom prst="rect">
-            <a:avLst/>
-          </a:prstGeom>
-          <a:noFill/>
-          <a:ln/>
-        </p:spPr>
-        <p:txBody>
-          <a:bodyPr wrap="square" lIns="0" tIns="0" rIns="0" bIns="0" rtlCol="0" anchor="ctr"/>
-          <a:lstStyle/>
-          <a:p>
-            <a:pPr algn="ctr" indent="0" marL="0">
-              <a:buNone/>
-            </a:pPr>
-            <a:r>
-              <a:rPr lang="en-US" sz="1400" b="1" dirty="0">
-                <a:solidFill>
-                  <a:srgbClr val="FFFFFF"/>
-                </a:solidFill>
-                <a:latin typeface="Calibri" pitchFamily="34" charset="0"/>
-                <a:ea typeface="Calibri" pitchFamily="34" charset="-122"/>
-                <a:cs typeface="Calibri" pitchFamily="34" charset="-120"/>
-              </a:rPr>
-              <a:t>2</a:t>
-            </a:r>
-            <a:endParaRPr lang="en-US" sz="1400" dirty="0"/>
-          </a:p>
-        </p:txBody>
-      </p:sp>
-      <p:sp>
-        <p:nvSpPr>
-          <p:cNvPr id="14" name="Text 11"/>
-          <p:cNvSpPr/>
-          <p:nvPr/>
-        </p:nvSpPr>
-        <p:spPr>
-          <a:xfrm>
-            <a:off x="1051560" y="2322576"/>
-            <a:ext cx="10652760" cy="822960"/>
-          </a:xfrm>
-          <a:prstGeom prst="rect">
-            <a:avLst/>
-          </a:prstGeom>
-          <a:noFill/>
-          <a:ln/>
-        </p:spPr>
-        <p:txBody>
-          <a:bodyPr wrap="square" lIns="0" tIns="0" rIns="0" bIns="0" rtlCol="0" anchor="t"/>
-          <a:lstStyle/>
-          <a:p>
-            <a:pPr indent="0" marL="0">
-              <a:buNone/>
-            </a:pPr>
-            <a:r>
-              <a:rPr lang="en-US" sz="1400" dirty="0">
-                <a:solidFill>
-                  <a:srgbClr val="3A2B28"/>
-                </a:solidFill>
-                <a:latin typeface="Calibri" pitchFamily="34" charset="0"/>
-                <a:ea typeface="Calibri" pitchFamily="34" charset="-122"/>
-                <a:cs typeface="Calibri" pitchFamily="34" charset="-120"/>
-              </a:rPr>
-              <a:t>Nêu 9 thành phần thể thức văn bản hành chính và các quy định về lề trang, phông chữ.</a:t>
-            </a:r>
-            <a:endParaRPr lang="en-US" sz="1400" dirty="0"/>
-          </a:p>
-        </p:txBody>
-      </p:sp>
-      <p:sp>
-        <p:nvSpPr>
-          <p:cNvPr id="15" name="Shape 12"/>
-          <p:cNvSpPr/>
-          <p:nvPr/>
-        </p:nvSpPr>
-        <p:spPr>
-          <a:xfrm>
-            <a:off x="502920" y="3218688"/>
-            <a:ext cx="384048" cy="384048"/>
-          </a:xfrm>
-          <a:prstGeom prst="ellipse">
-            <a:avLst/>
-          </a:prstGeom>
-          <a:solidFill>
-            <a:srgbClr val="DC756A"/>
-          </a:solidFill>
-          <a:ln/>
-        </p:spPr>
-        <p:txBody>
-          <a:bodyPr/>
-          <a:p/>
-        </p:txBody>
-      </p:sp>
-      <p:sp>
-        <p:nvSpPr>
-          <p:cNvPr id="16" name="Text 13"/>
-          <p:cNvSpPr/>
-          <p:nvPr/>
-        </p:nvSpPr>
-        <p:spPr>
-          <a:xfrm>
-            <a:off x="502920" y="3218688"/>
-            <a:ext cx="384048" cy="384048"/>
-          </a:xfrm>
-          <a:prstGeom prst="rect">
-            <a:avLst/>
-          </a:prstGeom>
-          <a:noFill/>
-          <a:ln/>
-        </p:spPr>
-        <p:txBody>
-          <a:bodyPr wrap="square" lIns="0" tIns="0" rIns="0" bIns="0" rtlCol="0" anchor="ctr"/>
-          <a:lstStyle/>
-          <a:p>
-            <a:pPr algn="ctr" indent="0" marL="0">
-              <a:buNone/>
-            </a:pPr>
-            <a:r>
-              <a:rPr lang="en-US" sz="1400" b="1" dirty="0">
-                <a:solidFill>
-                  <a:srgbClr val="FFFFFF"/>
-                </a:solidFill>
-                <a:latin typeface="Calibri" pitchFamily="34" charset="0"/>
-                <a:ea typeface="Calibri" pitchFamily="34" charset="-122"/>
-                <a:cs typeface="Calibri" pitchFamily="34" charset="-120"/>
-              </a:rPr>
-              <a:t>3</a:t>
-            </a:r>
-            <a:endParaRPr lang="en-US" sz="1400" dirty="0"/>
-          </a:p>
-        </p:txBody>
-      </p:sp>
-      <p:sp>
-        <p:nvSpPr>
-          <p:cNvPr id="17" name="Text 14"/>
-          <p:cNvSpPr/>
-          <p:nvPr/>
-        </p:nvSpPr>
-        <p:spPr>
-          <a:xfrm>
-            <a:off x="1051560" y="3145536"/>
-            <a:ext cx="10652760" cy="822960"/>
-          </a:xfrm>
-          <a:prstGeom prst="rect">
-            <a:avLst/>
-          </a:prstGeom>
-          <a:noFill/>
-          <a:ln/>
-        </p:spPr>
-        <p:txBody>
-          <a:bodyPr wrap="square" lIns="0" tIns="0" rIns="0" bIns="0" rtlCol="0" anchor="t"/>
-          <a:lstStyle/>
-          <a:p>
-            <a:pPr indent="0" marL="0">
-              <a:buNone/>
-            </a:pPr>
-            <a:r>
-              <a:rPr lang="en-US" sz="1400" dirty="0">
-                <a:solidFill>
-                  <a:srgbClr val="3A2B28"/>
-                </a:solidFill>
-                <a:latin typeface="Calibri" pitchFamily="34" charset="0"/>
-                <a:ea typeface="Calibri" pitchFamily="34" charset="-122"/>
-                <a:cs typeface="Calibri" pitchFamily="34" charset="-120"/>
-              </a:rPr>
-              <a:t>So sánh bố cục của quyết định, tờ trình và công văn.</a:t>
-            </a:r>
-            <a:endParaRPr lang="en-US" sz="1400" dirty="0"/>
-          </a:p>
-        </p:txBody>
-      </p:sp>
-      <p:sp>
-        <p:nvSpPr>
-          <p:cNvPr id="18" name="Shape 15"/>
-          <p:cNvSpPr/>
-          <p:nvPr/>
-        </p:nvSpPr>
-        <p:spPr>
-          <a:xfrm>
-            <a:off x="502920" y="4041648"/>
-            <a:ext cx="384048" cy="384048"/>
-          </a:xfrm>
-          <a:prstGeom prst="ellipse">
-            <a:avLst/>
-          </a:prstGeom>
-          <a:solidFill>
-            <a:srgbClr val="DC756A"/>
-          </a:solidFill>
-          <a:ln/>
-        </p:spPr>
-        <p:txBody>
-          <a:bodyPr/>
-          <a:p/>
-        </p:txBody>
-      </p:sp>
-      <p:sp>
-        <p:nvSpPr>
-          <p:cNvPr id="19" name="Text 16"/>
-          <p:cNvSpPr/>
-          <p:nvPr/>
-        </p:nvSpPr>
-        <p:spPr>
-          <a:xfrm>
-            <a:off x="502920" y="4041648"/>
-            <a:ext cx="384048" cy="384048"/>
-          </a:xfrm>
-          <a:prstGeom prst="rect">
-            <a:avLst/>
-          </a:prstGeom>
-          <a:noFill/>
-          <a:ln/>
-        </p:spPr>
-        <p:txBody>
-          <a:bodyPr wrap="square" lIns="0" tIns="0" rIns="0" bIns="0" rtlCol="0" anchor="ctr"/>
-          <a:lstStyle/>
-          <a:p>
-            <a:pPr algn="ctr" indent="0" marL="0">
-              <a:buNone/>
-            </a:pPr>
-            <a:r>
-              <a:rPr lang="en-US" sz="1400" b="1" dirty="0">
-                <a:solidFill>
-                  <a:srgbClr val="FFFFFF"/>
-                </a:solidFill>
-                <a:latin typeface="Calibri" pitchFamily="34" charset="0"/>
-                <a:ea typeface="Calibri" pitchFamily="34" charset="-122"/>
-                <a:cs typeface="Calibri" pitchFamily="34" charset="-120"/>
-              </a:rPr>
-              <a:t>4</a:t>
-            </a:r>
-            <a:endParaRPr lang="en-US" sz="1400" dirty="0"/>
-          </a:p>
-        </p:txBody>
-      </p:sp>
-      <p:sp>
-        <p:nvSpPr>
-          <p:cNvPr id="20" name="Text 17"/>
-          <p:cNvSpPr/>
-          <p:nvPr/>
-        </p:nvSpPr>
-        <p:spPr>
-          <a:xfrm>
-            <a:off x="1051560" y="3968496"/>
-            <a:ext cx="10652760" cy="822960"/>
-          </a:xfrm>
-          <a:prstGeom prst="rect">
-            <a:avLst/>
-          </a:prstGeom>
-          <a:noFill/>
-          <a:ln/>
-        </p:spPr>
-        <p:txBody>
-          <a:bodyPr wrap="square" lIns="0" tIns="0" rIns="0" bIns="0" rtlCol="0" anchor="t"/>
-          <a:lstStyle/>
-          <a:p>
-            <a:pPr indent="0" marL="0">
-              <a:buNone/>
-            </a:pPr>
-            <a:r>
-              <a:rPr lang="en-US" sz="1400" dirty="0">
-                <a:solidFill>
-                  <a:srgbClr val="3A2B28"/>
-                </a:solidFill>
-                <a:latin typeface="Calibri" pitchFamily="34" charset="0"/>
-                <a:ea typeface="Calibri" pitchFamily="34" charset="-122"/>
-                <a:cs typeface="Calibri" pitchFamily="34" charset="-120"/>
-              </a:rPr>
-              <a:t>Nêu nguyên tắc 5C và các điều khoản cơ bản của hợp đồng thương mại.</a:t>
-            </a:r>
-            <a:endParaRPr lang="en-US" sz="1400" dirty="0"/>
-          </a:p>
-        </p:txBody>
-      </p:sp>
-      <p:sp>
-        <p:nvSpPr>
-          <p:cNvPr id="21" name="Shape 18"/>
-          <p:cNvSpPr/>
-          <p:nvPr/>
-        </p:nvSpPr>
-        <p:spPr>
-          <a:xfrm>
-            <a:off x="502920" y="5074920"/>
-            <a:ext cx="11201400" cy="1097280"/>
-          </a:xfrm>
-          <a:prstGeom prst="roundRect">
-            <a:avLst>
-              <a:gd name="adj" fmla="val 7500"/>
-            </a:avLst>
-          </a:prstGeom>
-          <a:solidFill>
-            <a:srgbClr val="FBEDE0"/>
-          </a:solidFill>
-          <a:ln w="12700">
-            <a:solidFill>
-              <a:srgbClr val="C9A227"/>
-            </a:solidFill>
-            <a:prstDash val="solid"/>
-          </a:ln>
-        </p:spPr>
-        <p:txBody>
-          <a:bodyPr/>
-          <a:p/>
-        </p:txBody>
-      </p:sp>
-      <p:sp>
-        <p:nvSpPr>
-          <p:cNvPr id="22" name="Text 19"/>
-          <p:cNvSpPr/>
-          <p:nvPr/>
-        </p:nvSpPr>
-        <p:spPr>
-          <a:xfrm>
-            <a:off x="777240" y="5120640"/>
-            <a:ext cx="10698480" cy="1005840"/>
-          </a:xfrm>
-          <a:prstGeom prst="rect">
-            <a:avLst/>
-          </a:prstGeom>
-          <a:noFill/>
-          <a:ln/>
-        </p:spPr>
-        <p:txBody>
-          <a:bodyPr wrap="square" lIns="0" tIns="0" rIns="0" bIns="0" rtlCol="0" anchor="ctr"/>
-          <a:lstStyle/>
-          <a:p>
-            <a:pPr indent="0" marL="0">
-              <a:buNone/>
-            </a:pPr>
-            <a:r>
-              <a:rPr lang="en-US" sz="1300" b="1" dirty="0">
-                <a:solidFill>
-                  <a:srgbClr val="8A6510"/>
-                </a:solidFill>
-                <a:latin typeface="Calibri" pitchFamily="34" charset="0"/>
-                <a:ea typeface="Calibri" pitchFamily="34" charset="-122"/>
-                <a:cs typeface="Calibri" pitchFamily="34" charset="-120"/>
-              </a:rPr>
-              <a:t>CHUẨN BỊ CHO BUỔI SAU:  </a:t>
-            </a:r>
-            <a:pPr indent="0" marL="0">
-              <a:buNone/>
-            </a:pPr>
-            <a:r>
-              <a:rPr lang="en-US" sz="1300" dirty="0">
-                <a:solidFill>
-                  <a:srgbClr val="3A2B28"/>
-                </a:solidFill>
-                <a:latin typeface="Calibri" pitchFamily="34" charset="0"/>
-                <a:ea typeface="Calibri" pitchFamily="34" charset="-122"/>
-                <a:cs typeface="Calibri" pitchFamily="34" charset="-120"/>
-              </a:rPr>
-              <a:t>Phần thực hành tại phòng A0105 — Bài 1: Thể thức văn bản. Mang theo laptop, cài sẵn Microsoft Word và tải Nghị định 30/2020/NĐ-CP.</a:t>
-            </a:r>
-            <a:endParaRPr lang="en-US" sz="1300" dirty="0"/>
-          </a:p>
-        </p:txBody>
-      </p:sp>
-    </p:spTree>
-  </p:cSld>
-  <p:clrMapOvr>
-    <a:masterClrMapping/>
-  </p:clrMapOvr>
-</p:sld>
-</file>
-
-<file path=ppt/slides/slide17.xml><?xml version="1.0" encoding="utf-8"?>
-<p:sld xmlns:a="http://schemas.openxmlformats.org/drawingml/2006/main" xmlns:r="http://schemas.openxmlformats.org/officeDocument/2006/relationships" xmlns:p="http://schemas.openxmlformats.org/presentationml/2006/main">
-  <p:cSld name="Slide 17">
-    <p:bg>
-      <p:bgPr>
-        <a:solidFill>
-          <a:srgbClr val="FDFBF8"/>
-        </a:solidFill>
-      </p:bgPr>
-    </p:bg>
-    <p:spTree>
-      <p:nvGrpSpPr>
-        <p:cNvPr id="1" name=""/>
-        <p:cNvGrpSpPr/>
-        <p:nvPr/>
-      </p:nvGrpSpPr>
-      <p:grpSpPr>
-        <a:xfrm>
-          <a:off x="0" y="0"/>
-          <a:ext cx="0" cy="0"/>
-          <a:chOff x="0" y="0"/>
-          <a:chExt cx="0" cy="0"/>
-        </a:xfrm>
-      </p:grpSpPr>
-      <p:pic>
-        <p:nvPicPr>
-          <p:cNvPr id="2" name="Image 0" descr="assets/logo_tron.png">    </p:cNvPr>
-          <p:cNvPicPr>
-            <a:picLocks noChangeAspect="1"/>
-          </p:cNvPicPr>
-          <p:nvPr/>
-        </p:nvPicPr>
-        <p:blipFill>
-          <a:blip r:embed="rId1"/>
-          <a:stretch>
-            <a:fillRect/>
-          </a:stretch>
-        </p:blipFill>
-        <p:spPr>
-          <a:xfrm>
-            <a:off x="411480" y="6327648"/>
-            <a:ext cx="384048" cy="384048"/>
-          </a:xfrm>
-          <a:prstGeom prst="rect">
-            <a:avLst/>
-          </a:prstGeom>
-        </p:spPr>
-      </p:pic>
-      <p:sp>
-        <p:nvSpPr>
-          <p:cNvPr id="3" name="Text 0"/>
-          <p:cNvSpPr/>
-          <p:nvPr/>
-        </p:nvSpPr>
-        <p:spPr>
-          <a:xfrm>
-            <a:off x="868680" y="6355080"/>
-            <a:ext cx="7498080" cy="310896"/>
-          </a:xfrm>
-          <a:prstGeom prst="rect">
-            <a:avLst/>
-          </a:prstGeom>
-          <a:noFill/>
-          <a:ln/>
-        </p:spPr>
-        <p:txBody>
-          <a:bodyPr wrap="square" lIns="0" tIns="0" rIns="0" bIns="0" rtlCol="0" anchor="ctr"/>
-          <a:lstStyle/>
-          <a:p>
-            <a:pPr indent="0" marL="0">
-              <a:buNone/>
-            </a:pPr>
-            <a:r>
-              <a:rPr lang="en-US" sz="900" dirty="0">
-                <a:solidFill>
-                  <a:srgbClr val="8A7A76"/>
-                </a:solidFill>
-                <a:latin typeface="Calibri" pitchFamily="34" charset="0"/>
-                <a:ea typeface="Calibri" pitchFamily="34" charset="-122"/>
-                <a:cs typeface="Calibri" pitchFamily="34" charset="-120"/>
-              </a:rPr>
-              <a:t>Je m'appelle Huong  •  GV. Đỗ Thùy Hương  •  EC1103</a:t>
-            </a:r>
-            <a:endParaRPr lang="en-US" sz="900" dirty="0"/>
-          </a:p>
-        </p:txBody>
-      </p:sp>
-      <p:sp>
-        <p:nvSpPr>
-          <p:cNvPr id="4" name="Text 1"/>
-          <p:cNvSpPr/>
-          <p:nvPr/>
-        </p:nvSpPr>
-        <p:spPr>
-          <a:xfrm>
-            <a:off x="8503920" y="6355080"/>
-            <a:ext cx="2743200" cy="310896"/>
-          </a:xfrm>
-          <a:prstGeom prst="rect">
-            <a:avLst/>
-          </a:prstGeom>
-          <a:noFill/>
-          <a:ln/>
-        </p:spPr>
-        <p:txBody>
-          <a:bodyPr wrap="square" lIns="0" tIns="0" rIns="0" bIns="0" rtlCol="0" anchor="ctr"/>
-          <a:lstStyle/>
-          <a:p>
-            <a:pPr algn="r" indent="0" marL="0">
-              <a:buNone/>
-            </a:pPr>
-            <a:r>
-              <a:rPr lang="en-US" sz="900" dirty="0">
-                <a:solidFill>
-                  <a:srgbClr val="8A7A76"/>
-                </a:solidFill>
-                <a:latin typeface="Calibri" pitchFamily="34" charset="0"/>
-                <a:ea typeface="Calibri" pitchFamily="34" charset="-122"/>
-                <a:cs typeface="Calibri" pitchFamily="34" charset="-120"/>
-              </a:rPr>
-              <a:t>Chương 5</a:t>
-            </a:r>
-            <a:endParaRPr lang="en-US" sz="900" dirty="0"/>
-          </a:p>
-        </p:txBody>
-      </p:sp>
-      <p:sp>
-        <p:nvSpPr>
-          <p:cNvPr id="5" name="Shape 2"/>
-          <p:cNvSpPr/>
-          <p:nvPr/>
-        </p:nvSpPr>
-        <p:spPr>
-          <a:xfrm>
-            <a:off x="11430000" y="6327648"/>
-            <a:ext cx="365760" cy="365760"/>
-          </a:xfrm>
-          <a:prstGeom prst="ellipse">
-            <a:avLst/>
-          </a:prstGeom>
-          <a:solidFill>
-            <a:srgbClr val="DC756A"/>
-          </a:solidFill>
-          <a:ln/>
-        </p:spPr>
-        <p:txBody>
-          <a:bodyPr/>
-          <a:p/>
-        </p:txBody>
-      </p:sp>
-      <p:sp>
-        <p:nvSpPr>
-          <p:cNvPr id="6" name="Text 3"/>
-          <p:cNvSpPr/>
-          <p:nvPr/>
-        </p:nvSpPr>
-        <p:spPr>
-          <a:xfrm>
-            <a:off x="11430000" y="6327648"/>
-            <a:ext cx="365760" cy="365760"/>
-          </a:xfrm>
-          <a:prstGeom prst="rect">
-            <a:avLst/>
-          </a:prstGeom>
-          <a:noFill/>
-          <a:ln/>
-        </p:spPr>
-        <p:txBody>
-          <a:bodyPr wrap="square" lIns="0" tIns="0" rIns="0" bIns="0" rtlCol="0" anchor="ctr"/>
-          <a:lstStyle/>
-          <a:p>
-            <a:pPr algn="ctr" indent="0" marL="0">
-              <a:buNone/>
-            </a:pPr>
-            <a:r>
-              <a:rPr lang="en-US" sz="1000" b="1" dirty="0">
-                <a:solidFill>
-                  <a:srgbClr val="FFFFFF"/>
-                </a:solidFill>
-                <a:latin typeface="Calibri" pitchFamily="34" charset="0"/>
-                <a:ea typeface="Calibri" pitchFamily="34" charset="-122"/>
-                <a:cs typeface="Calibri" pitchFamily="34" charset="-120"/>
-              </a:rPr>
-              <a:t>17</a:t>
-            </a:r>
-            <a:endParaRPr lang="en-US" sz="1000" dirty="0"/>
-          </a:p>
-        </p:txBody>
-      </p:sp>
-      <p:sp>
-        <p:nvSpPr>
-          <p:cNvPr id="7" name="Text 4"/>
-          <p:cNvSpPr/>
-          <p:nvPr/>
-        </p:nvSpPr>
-        <p:spPr>
-          <a:xfrm>
-            <a:off x="502920" y="310896"/>
-            <a:ext cx="11155680" cy="274320"/>
-          </a:xfrm>
-          <a:prstGeom prst="rect">
-            <a:avLst/>
-          </a:prstGeom>
-          <a:noFill/>
-          <a:ln/>
-        </p:spPr>
-        <p:txBody>
-          <a:bodyPr wrap="square" lIns="0" tIns="0" rIns="0" bIns="0" rtlCol="0" anchor="ctr"/>
-          <a:lstStyle/>
-          <a:p>
-            <a:pPr indent="0" marL="0">
-              <a:buNone/>
-            </a:pPr>
-            <a:r>
-              <a:rPr lang="en-US" sz="1100" b="1" spc="300" kern="0" dirty="0">
-                <a:solidFill>
-                  <a:srgbClr val="DC756A"/>
-                </a:solidFill>
-                <a:latin typeface="Calibri" pitchFamily="34" charset="0"/>
-                <a:ea typeface="Calibri" pitchFamily="34" charset="-122"/>
-                <a:cs typeface="Calibri" pitchFamily="34" charset="-120"/>
-              </a:rPr>
-              <a:t>TÀI LIỆU</a:t>
-            </a:r>
-            <a:endParaRPr lang="en-US" sz="1100" dirty="0"/>
-          </a:p>
-        </p:txBody>
-      </p:sp>
-      <p:sp>
-        <p:nvSpPr>
-          <p:cNvPr id="8" name="Text 5"/>
-          <p:cNvSpPr/>
-          <p:nvPr/>
-        </p:nvSpPr>
-        <p:spPr>
-          <a:xfrm>
-            <a:off x="502920" y="576072"/>
-            <a:ext cx="11155680" cy="713232"/>
-          </a:xfrm>
-          <a:prstGeom prst="rect">
-            <a:avLst/>
-          </a:prstGeom>
-          <a:noFill/>
-          <a:ln/>
-        </p:spPr>
-        <p:txBody>
-          <a:bodyPr wrap="square" lIns="0" tIns="0" rIns="0" bIns="0" rtlCol="0" anchor="ctr"/>
-          <a:lstStyle/>
-          <a:p>
-            <a:pPr indent="0" marL="0">
-              <a:buNone/>
-            </a:pPr>
-            <a:r>
-              <a:rPr lang="en-US" sz="2700" b="1" dirty="0">
-                <a:solidFill>
-                  <a:srgbClr val="AC4D33"/>
-                </a:solidFill>
-                <a:latin typeface="Cambria" pitchFamily="34" charset="0"/>
-                <a:ea typeface="Cambria" pitchFamily="34" charset="-122"/>
-                <a:cs typeface="Cambria" pitchFamily="34" charset="-120"/>
-              </a:rPr>
-              <a:t>Tài liệu học tập</a:t>
-            </a:r>
-            <a:endParaRPr lang="en-US" sz="2700" dirty="0"/>
-          </a:p>
-        </p:txBody>
-      </p:sp>
-      <p:sp>
-        <p:nvSpPr>
-          <p:cNvPr id="9" name="Shape 6"/>
-          <p:cNvSpPr/>
-          <p:nvPr/>
-        </p:nvSpPr>
-        <p:spPr>
-          <a:xfrm>
-            <a:off x="502920" y="1463040"/>
-            <a:ext cx="11201400" cy="1322832"/>
-          </a:xfrm>
-          <a:prstGeom prst="roundRect">
-            <a:avLst>
-              <a:gd name="adj" fmla="val 6221"/>
-            </a:avLst>
-          </a:prstGeom>
-          <a:solidFill>
-            <a:srgbClr val="FDF1EF"/>
-          </a:solidFill>
-          <a:ln w="15875">
-            <a:solidFill>
-              <a:srgbClr val="FBCEC9"/>
-            </a:solidFill>
-            <a:prstDash val="solid"/>
-          </a:ln>
-        </p:spPr>
-        <p:txBody>
-          <a:bodyPr/>
-          <a:p/>
-        </p:txBody>
-      </p:sp>
-      <p:sp>
-        <p:nvSpPr>
-          <p:cNvPr id="10" name="Text 7"/>
-          <p:cNvSpPr/>
-          <p:nvPr/>
-        </p:nvSpPr>
-        <p:spPr>
-          <a:xfrm>
-            <a:off x="722376" y="1517904"/>
-            <a:ext cx="10762488" cy="1213104"/>
-          </a:xfrm>
-          <a:prstGeom prst="rect">
-            <a:avLst/>
-          </a:prstGeom>
-          <a:noFill/>
-          <a:ln/>
-        </p:spPr>
-        <p:txBody>
-          <a:bodyPr wrap="square" lIns="0" tIns="0" rIns="0" bIns="0" rtlCol="0" anchor="ctr"/>
-          <a:lstStyle/>
-          <a:p>
-            <a:pPr indent="0" marL="0">
-              <a:buNone/>
-            </a:pPr>
-            <a:r>
-              <a:rPr lang="en-US" sz="1500" b="1" dirty="0">
-                <a:solidFill>
-                  <a:srgbClr val="AC4D33"/>
-                </a:solidFill>
-                <a:latin typeface="Calibri" pitchFamily="34" charset="0"/>
-                <a:ea typeface="Calibri" pitchFamily="34" charset="-122"/>
-                <a:cs typeface="Calibri" pitchFamily="34" charset="-120"/>
-              </a:rPr>
-              <a:t>Giáo trình chính</a:t>
-            </a:r>
-            <a:endParaRPr lang="en-US" sz="1500" dirty="0"/>
-          </a:p>
-          <a:p>
-            <a:pPr indent="0" marL="0">
-              <a:buNone/>
-            </a:pPr>
-            <a:r>
-              <a:rPr lang="en-US" sz="1300" dirty="0">
-                <a:solidFill>
-                  <a:srgbClr val="3A2B28"/>
-                </a:solidFill>
-                <a:latin typeface="Calibri" pitchFamily="34" charset="0"/>
-                <a:ea typeface="Calibri" pitchFamily="34" charset="-122"/>
-                <a:cs typeface="Calibri" pitchFamily="34" charset="-120"/>
-              </a:rPr>
-              <a:t>Hà Nam Khánh Giao (2023), Giáo trình Giao tiếp kinh doanh, NXB Tài chính.</a:t>
-            </a:r>
-            <a:endParaRPr lang="en-US" sz="1500" dirty="0"/>
-          </a:p>
-        </p:txBody>
-      </p:sp>
-      <p:sp>
-        <p:nvSpPr>
-          <p:cNvPr id="11" name="Shape 8"/>
-          <p:cNvSpPr/>
-          <p:nvPr/>
-        </p:nvSpPr>
-        <p:spPr>
-          <a:xfrm>
-            <a:off x="502920" y="2950464"/>
-            <a:ext cx="11201400" cy="1322832"/>
-          </a:xfrm>
-          <a:prstGeom prst="roundRect">
-            <a:avLst>
-              <a:gd name="adj" fmla="val 6221"/>
-            </a:avLst>
-          </a:prstGeom>
-          <a:solidFill>
-            <a:srgbClr val="FDF1EF"/>
-          </a:solidFill>
-          <a:ln w="15875">
-            <a:solidFill>
-              <a:srgbClr val="FBCEC9"/>
-            </a:solidFill>
-            <a:prstDash val="solid"/>
-          </a:ln>
-        </p:spPr>
-        <p:txBody>
-          <a:bodyPr/>
-          <a:p/>
-        </p:txBody>
-      </p:sp>
-      <p:sp>
-        <p:nvSpPr>
-          <p:cNvPr id="12" name="Text 9"/>
-          <p:cNvSpPr/>
-          <p:nvPr/>
-        </p:nvSpPr>
-        <p:spPr>
-          <a:xfrm>
-            <a:off x="722376" y="3005328"/>
-            <a:ext cx="10762488" cy="1213104"/>
-          </a:xfrm>
-          <a:prstGeom prst="rect">
-            <a:avLst/>
-          </a:prstGeom>
-          <a:noFill/>
-          <a:ln/>
-        </p:spPr>
-        <p:txBody>
-          <a:bodyPr wrap="square" lIns="0" tIns="0" rIns="0" bIns="0" rtlCol="0" anchor="ctr"/>
-          <a:lstStyle/>
-          <a:p>
-            <a:pPr indent="0" marL="0">
-              <a:buNone/>
-            </a:pPr>
-            <a:r>
-              <a:rPr lang="en-US" sz="1500" b="1" dirty="0">
-                <a:solidFill>
-                  <a:srgbClr val="AC4D33"/>
-                </a:solidFill>
-                <a:latin typeface="Calibri" pitchFamily="34" charset="0"/>
-                <a:ea typeface="Calibri" pitchFamily="34" charset="-122"/>
-                <a:cs typeface="Calibri" pitchFamily="34" charset="-120"/>
-              </a:rPr>
-              <a:t>Văn bản pháp lý bắt buộc</a:t>
-            </a:r>
-            <a:endParaRPr lang="en-US" sz="1500" dirty="0"/>
-          </a:p>
-          <a:p>
-            <a:pPr indent="0" marL="0">
-              <a:buNone/>
-            </a:pPr>
-            <a:r>
-              <a:rPr lang="en-US" sz="1300" dirty="0">
-                <a:solidFill>
-                  <a:srgbClr val="3A2B28"/>
-                </a:solidFill>
-                <a:latin typeface="Calibri" pitchFamily="34" charset="0"/>
-                <a:ea typeface="Calibri" pitchFamily="34" charset="-122"/>
-                <a:cs typeface="Calibri" pitchFamily="34" charset="-120"/>
-              </a:rPr>
-              <a:t>Nghị định 30/2020/NĐ-CP ngày 05/3/2020 của Chính phủ về công tác văn thư — hướng dẫn thể thức và kỹ thuật trình bày văn bản hành chính.</a:t>
-            </a:r>
-            <a:endParaRPr lang="en-US" sz="1500" dirty="0"/>
-          </a:p>
-        </p:txBody>
-      </p:sp>
-      <p:sp>
-        <p:nvSpPr>
-          <p:cNvPr id="13" name="Shape 10"/>
-          <p:cNvSpPr/>
-          <p:nvPr/>
-        </p:nvSpPr>
-        <p:spPr>
-          <a:xfrm>
-            <a:off x="502920" y="4437888"/>
-            <a:ext cx="11201400" cy="1322832"/>
-          </a:xfrm>
-          <a:prstGeom prst="roundRect">
-            <a:avLst>
-              <a:gd name="adj" fmla="val 6221"/>
-            </a:avLst>
-          </a:prstGeom>
-          <a:solidFill>
-            <a:srgbClr val="FDF1EF"/>
-          </a:solidFill>
-          <a:ln w="15875">
-            <a:solidFill>
-              <a:srgbClr val="FBCEC9"/>
-            </a:solidFill>
-            <a:prstDash val="solid"/>
-          </a:ln>
-        </p:spPr>
-        <p:txBody>
-          <a:bodyPr/>
-          <a:p/>
-        </p:txBody>
-      </p:sp>
-      <p:sp>
-        <p:nvSpPr>
-          <p:cNvPr id="14" name="Text 11"/>
-          <p:cNvSpPr/>
-          <p:nvPr/>
-        </p:nvSpPr>
-        <p:spPr>
-          <a:xfrm>
-            <a:off x="722376" y="4492752"/>
-            <a:ext cx="10762488" cy="1213104"/>
-          </a:xfrm>
-          <a:prstGeom prst="rect">
-            <a:avLst/>
-          </a:prstGeom>
-          <a:noFill/>
-          <a:ln/>
-        </p:spPr>
-        <p:txBody>
-          <a:bodyPr wrap="square" lIns="0" tIns="0" rIns="0" bIns="0" rtlCol="0" anchor="ctr"/>
-          <a:lstStyle/>
-          <a:p>
-            <a:pPr indent="0" marL="0">
-              <a:buNone/>
-            </a:pPr>
-            <a:r>
-              <a:rPr lang="en-US" sz="1500" b="1" dirty="0">
-                <a:solidFill>
-                  <a:srgbClr val="AC4D33"/>
-                </a:solidFill>
-                <a:latin typeface="Calibri" pitchFamily="34" charset="0"/>
-                <a:ea typeface="Calibri" pitchFamily="34" charset="-122"/>
-                <a:cs typeface="Calibri" pitchFamily="34" charset="-120"/>
-              </a:rPr>
-              <a:t>Học liệu của giảng viên</a:t>
-            </a:r>
-            <a:endParaRPr lang="en-US" sz="1500" dirty="0"/>
-          </a:p>
-          <a:p>
-            <a:pPr indent="0" marL="0">
-              <a:buNone/>
-            </a:pPr>
-            <a:r>
-              <a:rPr lang="en-US" sz="1300" dirty="0">
-                <a:solidFill>
-                  <a:srgbClr val="3A2B28"/>
-                </a:solidFill>
-                <a:latin typeface="Calibri" pitchFamily="34" charset="0"/>
-                <a:ea typeface="Calibri" pitchFamily="34" charset="-122"/>
-                <a:cs typeface="Calibri" pitchFamily="34" charset="-120"/>
-              </a:rPr>
-              <a:t>Slide, biểu mẫu văn bản, tình huống và bài tập do GV. Đỗ Thùy Hương biên soạn; cung cấp sau mỗi buổi học.</a:t>
-            </a:r>
-            <a:endParaRPr lang="en-US" sz="1500" dirty="0"/>
-          </a:p>
-        </p:txBody>
-      </p:sp>
-    </p:spTree>
-  </p:cSld>
-  <p:clrMapOvr>
-    <a:masterClrMapping/>
-  </p:clrMapOvr>
-</p:sld>
-</file>
-
-<file path=ppt/slides/slide18.xml><?xml version="1.0" encoding="utf-8"?>
-<p:sld xmlns:a="http://schemas.openxmlformats.org/drawingml/2006/main" xmlns:p="http://schemas.openxmlformats.org/presentationml/2006/main" xmlns:r="http://schemas.openxmlformats.org/officeDocument/2006/relationships">
-  <p:cSld>
-    <p:spTree>
-      <p:nvGrpSpPr>
-        <p:cNvPr id="1" name=""/>
-        <p:cNvGrpSpPr/>
-        <p:nvPr/>
-      </p:nvGrpSpPr>
-      <p:grpSpPr/>
-      <p:sp>
-        <p:nvSpPr>
-          <p:cNvPr id="2" name="Rectangle 1"/>
-          <p:cNvSpPr/>
-          <p:nvPr/>
-        </p:nvSpPr>
-        <p:spPr>
-          <a:xfrm>
-            <a:off x="0" y="0"/>
-            <a:ext cx="12191695" cy="6858000"/>
-          </a:xfrm>
-          <a:prstGeom prst="rect">
-            <a:avLst/>
-          </a:prstGeom>
-          <a:solidFill>
-            <a:srgbClr val="FDFBF8"/>
-          </a:solidFill>
-          <a:ln>
-            <a:noFill/>
-          </a:ln>
-          <a:effectLst/>
-        </p:spPr>
-        <p:style>
-          <a:lnRef idx="1">
-            <a:schemeClr val="accent1"/>
-          </a:lnRef>
-          <a:fillRef idx="3">
-            <a:schemeClr val="accent1"/>
-          </a:fillRef>
-          <a:effectRef idx="2">
-            <a:schemeClr val="accent1"/>
-          </a:effectRef>
-          <a:fontRef idx="minor">
-            <a:schemeClr val="lt1"/>
-          </a:fontRef>
-        </p:style>
-        <p:txBody>
-          <a:bodyPr rtlCol="0" anchor="ctr"/>
-          <a:lstStyle/>
-          <a:p>
-            <a:pPr algn="ctr"/>
-          </a:p>
-        </p:txBody>
-      </p:sp>
-      <p:sp>
-        <p:nvSpPr>
-          <p:cNvPr id="3" name="TextBox 2"/>
-          <p:cNvSpPr txBox="1"/>
-          <p:nvPr/>
-        </p:nvSpPr>
-        <p:spPr>
-          <a:xfrm>
-            <a:off x="502920" y="292608"/>
-            <a:ext cx="11155680" cy="292608"/>
-          </a:xfrm>
-          <a:prstGeom prst="rect">
-            <a:avLst/>
-          </a:prstGeom>
-          <a:noFill/>
-        </p:spPr>
-        <p:txBody>
-          <a:bodyPr wrap="none">
-            <a:spAutoFit/>
-          </a:bodyPr>
-          <a:lstStyle/>
-          <a:p>
-            <a:r>
-              <a:rPr sz="1100" b="1">
-                <a:solidFill>
-                  <a:srgbClr val="DC756A"/>
-                </a:solidFill>
-                <a:latin typeface="Calibri"/>
-              </a:rPr>
-              <a:t>CON SỐ PHẢI NHỚ</a:t>
-            </a:r>
-          </a:p>
-        </p:txBody>
-      </p:sp>
-      <p:sp>
-        <p:nvSpPr>
-          <p:cNvPr id="4" name="TextBox 3"/>
-          <p:cNvSpPr txBox="1"/>
-          <p:nvPr/>
-        </p:nvSpPr>
-        <p:spPr>
-          <a:xfrm>
-            <a:off x="502920" y="603504"/>
-            <a:ext cx="11155680" cy="731520"/>
-          </a:xfrm>
-          <a:prstGeom prst="rect">
-            <a:avLst/>
-          </a:prstGeom>
-          <a:noFill/>
-        </p:spPr>
-        <p:txBody>
-          <a:bodyPr wrap="square">
-            <a:spAutoFit/>
-          </a:bodyPr>
-          <a:lstStyle/>
-          <a:p>
-            <a:r>
-              <a:rPr sz="2700" b="1">
-                <a:solidFill>
-                  <a:srgbClr val="3A2B28"/>
-                </a:solidFill>
-                <a:latin typeface="Cambria"/>
-              </a:rPr>
-              <a:t>Bốn con số của một trang văn bản đúng chuẩn</a:t>
-            </a:r>
-          </a:p>
-        </p:txBody>
-      </p:sp>
-      <p:sp>
-        <p:nvSpPr>
-          <p:cNvPr id="5" name="Rounded Rectangle 4"/>
-          <p:cNvSpPr/>
-          <p:nvPr/>
-        </p:nvSpPr>
-        <p:spPr>
-          <a:xfrm>
-            <a:off x="502920" y="1783080"/>
-            <a:ext cx="2622042" cy="3429000"/>
-          </a:xfrm>
-          <a:prstGeom prst="roundRect">
-            <a:avLst>
-              <a:gd name="adj" fmla="val 7000"/>
-            </a:avLst>
-          </a:prstGeom>
-          <a:solidFill>
-            <a:srgbClr val="FFFFFF"/>
-          </a:solidFill>
-          <a:ln w="15875">
-            <a:solidFill>
-              <a:srgbClr val="FBCEC9"/>
-            </a:solidFill>
-          </a:ln>
-          <a:effectLst/>
-        </p:spPr>
-        <p:style>
-          <a:lnRef idx="1">
-            <a:schemeClr val="accent1"/>
-          </a:lnRef>
-          <a:fillRef idx="3">
-            <a:schemeClr val="accent1"/>
-          </a:fillRef>
-          <a:effectRef idx="2">
-            <a:schemeClr val="accent1"/>
-          </a:effectRef>
-          <a:fontRef idx="minor">
-            <a:schemeClr val="lt1"/>
-          </a:fontRef>
-        </p:style>
-        <p:txBody>
-          <a:bodyPr rtlCol="0" anchor="ctr" wrap="square" lIns="182880" rIns="182880" tIns="274320" bIns="182880"/>
-          <a:lstStyle/>
-          <a:p>
-            <a:pPr algn="ctr"/>
-            <a:r>
-              <a:rPr sz="5800" b="1">
-                <a:solidFill>
-                  <a:srgbClr val="DC756A"/>
-                </a:solidFill>
-                <a:latin typeface="Cambria"/>
-              </a:rPr>
-              <a:t>A4</a:t>
-            </a:r>
-          </a:p>
-          <a:p>
-            <a:pPr algn="ctr"/>
-            <a:r>
-              <a:rPr sz="1400" b="1">
-                <a:solidFill>
-                  <a:srgbClr val="AC4D33"/>
-                </a:solidFill>
-                <a:latin typeface="Calibri"/>
-              </a:rPr>
-              <a:t>KHỔ GIẤY</a:t>
-            </a:r>
-          </a:p>
-          <a:p>
-            <a:pPr algn="ctr">
-              <a:spcBef>
-                <a:spcPts val="1200"/>
-              </a:spcBef>
-            </a:pPr>
-            <a:r>
-              <a:rPr sz="1250">
-                <a:solidFill>
-                  <a:srgbClr val="3A2B28"/>
-                </a:solidFill>
-                <a:latin typeface="Calibri"/>
-              </a:rPr>
-              <a:t>210 × 297 mm — không dùng khổ Letter</a:t>
-            </a:r>
-          </a:p>
-        </p:txBody>
-      </p:sp>
-      <p:sp>
-        <p:nvSpPr>
-          <p:cNvPr id="6" name="Rounded Rectangle 5"/>
-          <p:cNvSpPr/>
-          <p:nvPr/>
-        </p:nvSpPr>
-        <p:spPr>
-          <a:xfrm>
-            <a:off x="3362706" y="1783080"/>
-            <a:ext cx="2622042" cy="3429000"/>
-          </a:xfrm>
-          <a:prstGeom prst="roundRect">
-            <a:avLst>
-              <a:gd name="adj" fmla="val 7000"/>
-            </a:avLst>
-          </a:prstGeom>
-          <a:solidFill>
-            <a:srgbClr val="FFFFFF"/>
-          </a:solidFill>
-          <a:ln w="15875">
-            <a:solidFill>
-              <a:srgbClr val="FBCEC9"/>
-            </a:solidFill>
-          </a:ln>
-          <a:effectLst/>
-        </p:spPr>
-        <p:style>
-          <a:lnRef idx="1">
-            <a:schemeClr val="accent1"/>
-          </a:lnRef>
-          <a:fillRef idx="3">
-            <a:schemeClr val="accent1"/>
-          </a:fillRef>
-          <a:effectRef idx="2">
-            <a:schemeClr val="accent1"/>
-          </a:effectRef>
-          <a:fontRef idx="minor">
-            <a:schemeClr val="lt1"/>
-          </a:fontRef>
-        </p:style>
-        <p:txBody>
-          <a:bodyPr rtlCol="0" anchor="ctr" wrap="square" lIns="182880" rIns="182880" tIns="274320" bIns="182880"/>
-          <a:lstStyle/>
-          <a:p>
-            <a:pPr algn="ctr"/>
-            <a:r>
-              <a:rPr sz="5800" b="1">
-                <a:solidFill>
-                  <a:srgbClr val="DC756A"/>
-                </a:solidFill>
-                <a:latin typeface="Cambria"/>
-              </a:rPr>
-              <a:t>30–35</a:t>
-            </a:r>
-          </a:p>
-          <a:p>
-            <a:pPr algn="ctr"/>
-            <a:r>
-              <a:rPr sz="1400" b="1">
-                <a:solidFill>
-                  <a:srgbClr val="AC4D33"/>
-                </a:solidFill>
-                <a:latin typeface="Calibri"/>
-              </a:rPr>
-              <a:t>MILIMET</a:t>
-            </a:r>
-          </a:p>
-          <a:p>
-            <a:pPr algn="ctr">
-              <a:spcBef>
-                <a:spcPts val="1200"/>
-              </a:spcBef>
-            </a:pPr>
-            <a:r>
-              <a:rPr sz="1250">
-                <a:solidFill>
-                  <a:srgbClr val="3A2B28"/>
-                </a:solidFill>
-                <a:latin typeface="Calibri"/>
-              </a:rPr>
-              <a:t>Lề trái, rộng nhất để đóng gáy lưu trữ</a:t>
-            </a:r>
-          </a:p>
-        </p:txBody>
-      </p:sp>
-      <p:sp>
-        <p:nvSpPr>
-          <p:cNvPr id="7" name="Rounded Rectangle 6"/>
-          <p:cNvSpPr/>
-          <p:nvPr/>
-        </p:nvSpPr>
-        <p:spPr>
-          <a:xfrm>
-            <a:off x="6222492" y="1783080"/>
-            <a:ext cx="2622042" cy="3429000"/>
-          </a:xfrm>
-          <a:prstGeom prst="roundRect">
-            <a:avLst>
-              <a:gd name="adj" fmla="val 7000"/>
-            </a:avLst>
-          </a:prstGeom>
-          <a:solidFill>
-            <a:srgbClr val="FFFFFF"/>
-          </a:solidFill>
-          <a:ln w="15875">
-            <a:solidFill>
-              <a:srgbClr val="FBCEC9"/>
-            </a:solidFill>
-          </a:ln>
-          <a:effectLst/>
-        </p:spPr>
-        <p:style>
-          <a:lnRef idx="1">
-            <a:schemeClr val="accent1"/>
-          </a:lnRef>
-          <a:fillRef idx="3">
-            <a:schemeClr val="accent1"/>
-          </a:fillRef>
-          <a:effectRef idx="2">
-            <a:schemeClr val="accent1"/>
-          </a:effectRef>
-          <a:fontRef idx="minor">
-            <a:schemeClr val="lt1"/>
-          </a:fontRef>
-        </p:style>
-        <p:txBody>
-          <a:bodyPr rtlCol="0" anchor="ctr" wrap="square" lIns="182880" rIns="182880" tIns="274320" bIns="182880"/>
-          <a:lstStyle/>
-          <a:p>
-            <a:pPr algn="ctr"/>
-            <a:r>
-              <a:rPr sz="5800" b="1">
-                <a:solidFill>
-                  <a:srgbClr val="DC756A"/>
-                </a:solidFill>
-                <a:latin typeface="Cambria"/>
-              </a:rPr>
-              <a:t>13–14</a:t>
-            </a:r>
-          </a:p>
-          <a:p>
-            <a:pPr algn="ctr"/>
-            <a:r>
-              <a:rPr sz="1400" b="1">
-                <a:solidFill>
-                  <a:srgbClr val="AC4D33"/>
-                </a:solidFill>
-                <a:latin typeface="Calibri"/>
-              </a:rPr>
-              <a:t>CỠ CHỮ</a:t>
-            </a:r>
-          </a:p>
-          <a:p>
-            <a:pPr algn="ctr">
-              <a:spcBef>
-                <a:spcPts val="1200"/>
-              </a:spcBef>
-            </a:pPr>
-            <a:r>
-              <a:rPr sz="1250">
-                <a:solidFill>
-                  <a:srgbClr val="3A2B28"/>
-                </a:solidFill>
-                <a:latin typeface="Calibri"/>
-              </a:rPr>
-              <a:t>Times New Roman, bộ mã Unicode, màu đen</a:t>
-            </a:r>
-          </a:p>
-        </p:txBody>
-      </p:sp>
-      <p:sp>
-        <p:nvSpPr>
-          <p:cNvPr id="8" name="Rounded Rectangle 7"/>
-          <p:cNvSpPr/>
-          <p:nvPr/>
-        </p:nvSpPr>
-        <p:spPr>
-          <a:xfrm>
-            <a:off x="9082278" y="1783080"/>
-            <a:ext cx="2622042" cy="3429000"/>
-          </a:xfrm>
-          <a:prstGeom prst="roundRect">
-            <a:avLst>
-              <a:gd name="adj" fmla="val 7000"/>
-            </a:avLst>
-          </a:prstGeom>
-          <a:solidFill>
-            <a:srgbClr val="FFFFFF"/>
-          </a:solidFill>
-          <a:ln w="15875">
-            <a:solidFill>
-              <a:srgbClr val="FBCEC9"/>
-            </a:solidFill>
-          </a:ln>
-          <a:effectLst/>
-        </p:spPr>
-        <p:style>
-          <a:lnRef idx="1">
-            <a:schemeClr val="accent1"/>
-          </a:lnRef>
-          <a:fillRef idx="3">
-            <a:schemeClr val="accent1"/>
-          </a:fillRef>
-          <a:effectRef idx="2">
-            <a:schemeClr val="accent1"/>
-          </a:effectRef>
-          <a:fontRef idx="minor">
-            <a:schemeClr val="lt1"/>
-          </a:fontRef>
-        </p:style>
-        <p:txBody>
-          <a:bodyPr rtlCol="0" anchor="ctr" wrap="square" lIns="182880" rIns="182880" tIns="274320" bIns="182880"/>
-          <a:lstStyle/>
-          <a:p>
-            <a:pPr algn="ctr"/>
-            <a:r>
-              <a:rPr sz="5800" b="1">
-                <a:solidFill>
-                  <a:srgbClr val="DC756A"/>
-                </a:solidFill>
-                <a:latin typeface="Cambria"/>
-              </a:rPr>
-              <a:t>9</a:t>
-            </a:r>
-          </a:p>
-          <a:p>
-            <a:pPr algn="ctr"/>
-            <a:r>
-              <a:rPr sz="1400" b="1">
-                <a:solidFill>
-                  <a:srgbClr val="AC4D33"/>
-                </a:solidFill>
-                <a:latin typeface="Calibri"/>
-              </a:rPr>
-              <a:t>THÀNH PHẦN</a:t>
-            </a:r>
-          </a:p>
-          <a:p>
-            <a:pPr algn="ctr">
-              <a:spcBef>
-                <a:spcPts val="1200"/>
-              </a:spcBef>
-            </a:pPr>
-            <a:r>
-              <a:rPr sz="1250">
-                <a:solidFill>
-                  <a:srgbClr val="3A2B28"/>
-                </a:solidFill>
-                <a:latin typeface="Calibri"/>
-              </a:rPr>
-              <a:t>Số thành phần thể thức bắt buộc theo NĐ 30/2020</a:t>
-            </a:r>
-          </a:p>
-        </p:txBody>
-      </p:sp>
-      <p:sp>
-        <p:nvSpPr>
-          <p:cNvPr id="9" name="Rounded Rectangle 8"/>
-          <p:cNvSpPr/>
-          <p:nvPr/>
-        </p:nvSpPr>
-        <p:spPr>
-          <a:xfrm>
-            <a:off x="502920" y="5440680"/>
-            <a:ext cx="11201400" cy="685800"/>
-          </a:xfrm>
-          <a:prstGeom prst="roundRect">
-            <a:avLst>
-              <a:gd name="adj" fmla="val 12000"/>
-            </a:avLst>
-          </a:prstGeom>
-          <a:solidFill>
-            <a:srgbClr val="FDF1EF"/>
-          </a:solidFill>
-          <a:ln w="12700">
-            <a:solidFill>
-              <a:srgbClr val="FBCEC9"/>
-            </a:solidFill>
-          </a:ln>
-          <a:effectLst/>
-        </p:spPr>
-        <p:style>
-          <a:lnRef idx="1">
-            <a:schemeClr val="accent1"/>
-          </a:lnRef>
-          <a:fillRef idx="3">
-            <a:schemeClr val="accent1"/>
-          </a:fillRef>
-          <a:effectRef idx="2">
-            <a:schemeClr val="accent1"/>
-          </a:effectRef>
-          <a:fontRef idx="minor">
-            <a:schemeClr val="lt1"/>
-          </a:fontRef>
-        </p:style>
-        <p:txBody>
-          <a:bodyPr rtlCol="0" anchor="ctr" wrap="square" lIns="201168" rIns="201168"/>
-          <a:lstStyle/>
-          <a:p>
-            <a:pPr algn="ctr"/>
-            <a:r>
-              <a:rPr sz="1300">
-                <a:solidFill>
-                  <a:srgbClr val="3A2B28"/>
-                </a:solidFill>
-                <a:latin typeface="Calibri"/>
-              </a:rPr>
-              <a:t>Lề trên và dưới 20 – 25 mm • lề phải 15 – 20 mm • số trang đánh từ trang thứ hai, canh giữa theo lề trên.</a:t>
-            </a:r>
-          </a:p>
-        </p:txBody>
-      </p:sp>
-      <p:sp>
-        <p:nvSpPr>
-          <p:cNvPr id="10" name="TextBox 9"/>
-          <p:cNvSpPr txBox="1"/>
-          <p:nvPr/>
-        </p:nvSpPr>
-        <p:spPr>
-          <a:xfrm>
-            <a:off x="502920" y="6419088"/>
-            <a:ext cx="7772400" cy="292608"/>
-          </a:xfrm>
-          <a:prstGeom prst="rect">
-            <a:avLst/>
-          </a:prstGeom>
-          <a:noFill/>
-        </p:spPr>
-        <p:txBody>
-          <a:bodyPr wrap="none">
-            <a:spAutoFit/>
-          </a:bodyPr>
-          <a:lstStyle/>
-          <a:p>
-            <a:r>
-              <a:rPr sz="900">
-                <a:solidFill>
-                  <a:srgbClr val="8A7A76"/>
-                </a:solidFill>
-                <a:latin typeface="Calibri"/>
-              </a:rPr>
-              <a:t>Je m'appelle Huong  •  GV. Đỗ Thùy Hương  •  EC1103</a:t>
-            </a:r>
-          </a:p>
-        </p:txBody>
-      </p:sp>
-      <p:sp>
-        <p:nvSpPr>
-          <p:cNvPr id="11" name="TextBox 10"/>
-          <p:cNvSpPr txBox="1"/>
-          <p:nvPr/>
-        </p:nvSpPr>
-        <p:spPr>
-          <a:xfrm>
-            <a:off x="9326880" y="6419088"/>
-            <a:ext cx="1920240" cy="292608"/>
-          </a:xfrm>
-          <a:prstGeom prst="rect">
-            <a:avLst/>
-          </a:prstGeom>
-          <a:noFill/>
-        </p:spPr>
-        <p:txBody>
-          <a:bodyPr wrap="none">
-            <a:spAutoFit/>
-          </a:bodyPr>
-          <a:lstStyle/>
-          <a:p>
-            <a:pPr algn="r"/>
-            <a:r>
-              <a:rPr sz="900">
-                <a:solidFill>
-                  <a:srgbClr val="8A7A76"/>
-                </a:solidFill>
-                <a:latin typeface="Calibri"/>
-              </a:rPr>
-              <a:t>Chương 5</a:t>
-            </a:r>
-          </a:p>
-        </p:txBody>
-      </p:sp>
-    </p:spTree>
-  </p:cSld>
-  <p:clrMapOvr>
-    <a:masterClrMapping/>
-  </p:clrMapOvr>
-</p:sld>
-</file>
-
-<file path=ppt/slides/slide19.xml><?xml version="1.0" encoding="utf-8"?>
-<p:sld xmlns:a="http://schemas.openxmlformats.org/drawingml/2006/main" xmlns:p="http://schemas.openxmlformats.org/presentationml/2006/main" xmlns:r="http://schemas.openxmlformats.org/officeDocument/2006/relationships">
-  <p:cSld>
-    <p:spTree>
-      <p:nvGrpSpPr>
-        <p:cNvPr id="1" name=""/>
-        <p:cNvGrpSpPr/>
-        <p:nvPr/>
-      </p:nvGrpSpPr>
-      <p:grpSpPr/>
-      <p:sp>
-        <p:nvSpPr>
-          <p:cNvPr id="2" name="Rectangle 1"/>
-          <p:cNvSpPr/>
-          <p:nvPr/>
-        </p:nvSpPr>
-        <p:spPr>
-          <a:xfrm>
-            <a:off x="0" y="0"/>
-            <a:ext cx="12191695" cy="6858000"/>
-          </a:xfrm>
-          <a:prstGeom prst="rect">
-            <a:avLst/>
-          </a:prstGeom>
-          <a:solidFill>
-            <a:srgbClr val="FDFBF8"/>
-          </a:solidFill>
-          <a:ln>
-            <a:noFill/>
-          </a:ln>
-          <a:effectLst/>
-        </p:spPr>
-        <p:style>
-          <a:lnRef idx="1">
-            <a:schemeClr val="accent1"/>
-          </a:lnRef>
-          <a:fillRef idx="3">
-            <a:schemeClr val="accent1"/>
-          </a:fillRef>
-          <a:effectRef idx="2">
-            <a:schemeClr val="accent1"/>
-          </a:effectRef>
-          <a:fontRef idx="minor">
-            <a:schemeClr val="lt1"/>
-          </a:fontRef>
-        </p:style>
-        <p:txBody>
-          <a:bodyPr rtlCol="0" anchor="ctr"/>
-          <a:lstStyle/>
-          <a:p>
-            <a:pPr algn="ctr"/>
-          </a:p>
-        </p:txBody>
-      </p:sp>
-      <p:sp>
-        <p:nvSpPr>
-          <p:cNvPr id="3" name="Rectangle 2"/>
-          <p:cNvSpPr/>
-          <p:nvPr/>
-        </p:nvSpPr>
-        <p:spPr>
-          <a:xfrm>
-            <a:off x="0" y="2103120"/>
-            <a:ext cx="12191695" cy="2743200"/>
-          </a:xfrm>
-          <a:prstGeom prst="rect">
-            <a:avLst/>
-          </a:prstGeom>
-          <a:solidFill>
-            <a:srgbClr val="FDF1EF"/>
-          </a:solidFill>
-          <a:ln>
-            <a:noFill/>
-          </a:ln>
-          <a:effectLst/>
-        </p:spPr>
-        <p:style>
-          <a:lnRef idx="1">
-            <a:schemeClr val="accent1"/>
-          </a:lnRef>
-          <a:fillRef idx="3">
-            <a:schemeClr val="accent1"/>
-          </a:fillRef>
-          <a:effectRef idx="2">
-            <a:schemeClr val="accent1"/>
-          </a:effectRef>
-          <a:fontRef idx="minor">
-            <a:schemeClr val="lt1"/>
-          </a:fontRef>
-        </p:style>
-        <p:txBody>
-          <a:bodyPr rtlCol="0" anchor="ctr"/>
-          <a:lstStyle/>
-          <a:p>
-            <a:pPr algn="ctr"/>
-          </a:p>
-        </p:txBody>
-      </p:sp>
-      <p:sp>
-        <p:nvSpPr>
-          <p:cNvPr id="4" name="Rectangle 3"/>
-          <p:cNvSpPr/>
-          <p:nvPr/>
-        </p:nvSpPr>
-        <p:spPr>
-          <a:xfrm>
-            <a:off x="0" y="0"/>
-            <a:ext cx="274320" cy="6858000"/>
-          </a:xfrm>
-          <a:prstGeom prst="rect">
-            <a:avLst/>
-          </a:prstGeom>
-          <a:solidFill>
-            <a:srgbClr val="DC756A"/>
-          </a:solidFill>
-          <a:ln>
-            <a:noFill/>
-          </a:ln>
-          <a:effectLst/>
-        </p:spPr>
-        <p:style>
-          <a:lnRef idx="1">
-            <a:schemeClr val="accent1"/>
-          </a:lnRef>
-          <a:fillRef idx="3">
-            <a:schemeClr val="accent1"/>
-          </a:fillRef>
-          <a:effectRef idx="2">
-            <a:schemeClr val="accent1"/>
-          </a:effectRef>
-          <a:fontRef idx="minor">
-            <a:schemeClr val="lt1"/>
-          </a:fontRef>
-        </p:style>
-        <p:txBody>
-          <a:bodyPr rtlCol="0" anchor="ctr"/>
-          <a:lstStyle/>
-          <a:p>
-            <a:pPr algn="ctr"/>
-          </a:p>
-        </p:txBody>
-      </p:sp>
-      <p:sp>
-        <p:nvSpPr>
-          <p:cNvPr id="5" name="TextBox 4"/>
-          <p:cNvSpPr txBox="1"/>
-          <p:nvPr/>
-        </p:nvSpPr>
-        <p:spPr>
-          <a:xfrm>
-            <a:off x="1280160" y="2377440"/>
-            <a:ext cx="9692640" cy="411480"/>
-          </a:xfrm>
-          <a:prstGeom prst="rect">
-            <a:avLst/>
-          </a:prstGeom>
-          <a:noFill/>
-        </p:spPr>
-        <p:txBody>
-          <a:bodyPr wrap="none">
-            <a:spAutoFit/>
-          </a:bodyPr>
-          <a:lstStyle/>
-          <a:p>
-            <a:r>
-              <a:rPr sz="1500" b="1">
-                <a:solidFill>
-                  <a:srgbClr val="DC756A"/>
-                </a:solidFill>
-                <a:latin typeface="Calibri"/>
-              </a:rPr>
-              <a:t>MỤC 5.1 – 5.2</a:t>
-            </a:r>
-          </a:p>
-        </p:txBody>
-      </p:sp>
-      <p:sp>
-        <p:nvSpPr>
-          <p:cNvPr id="6" name="TextBox 5"/>
-          <p:cNvSpPr txBox="1"/>
-          <p:nvPr/>
-        </p:nvSpPr>
-        <p:spPr>
-          <a:xfrm>
-            <a:off x="1280160" y="2788920"/>
-            <a:ext cx="9601200" cy="1371600"/>
-          </a:xfrm>
-          <a:prstGeom prst="rect">
-            <a:avLst/>
-          </a:prstGeom>
-          <a:noFill/>
-        </p:spPr>
-        <p:txBody>
-          <a:bodyPr wrap="square">
-            <a:spAutoFit/>
-          </a:bodyPr>
-          <a:lstStyle/>
-          <a:p>
-            <a:r>
-              <a:rPr sz="3300" b="1">
-                <a:solidFill>
-                  <a:srgbClr val="AC4D33"/>
-                </a:solidFill>
-                <a:latin typeface="Cambria"/>
-              </a:rPr>
-              <a:t>Khái niệm, phân loại và thể thức văn bản</a:t>
-            </a:r>
-          </a:p>
-        </p:txBody>
-      </p:sp>
-      <p:sp>
-        <p:nvSpPr>
-          <p:cNvPr id="7" name="TextBox 6"/>
-          <p:cNvSpPr txBox="1"/>
-          <p:nvPr/>
-        </p:nvSpPr>
-        <p:spPr>
-          <a:xfrm>
-            <a:off x="1280160" y="4224528"/>
-            <a:ext cx="9418320" cy="640080"/>
-          </a:xfrm>
-          <a:prstGeom prst="rect">
-            <a:avLst/>
-          </a:prstGeom>
-          <a:noFill/>
-        </p:spPr>
-        <p:txBody>
-          <a:bodyPr wrap="square">
-            <a:spAutoFit/>
-          </a:bodyPr>
-          <a:lstStyle/>
-          <a:p>
-            <a:r>
-              <a:rPr sz="1450" i="1">
-                <a:solidFill>
-                  <a:srgbClr val="8A7A76"/>
-                </a:solidFill>
-                <a:latin typeface="Calibri"/>
-              </a:rPr>
-              <a:t>Nền tảng pháp lý và kỹ thuật: văn bản là gì và một trang văn bản đúng chuẩn trông thế nào.</a:t>
-            </a:r>
-          </a:p>
-        </p:txBody>
-      </p:sp>
-      <p:sp>
-        <p:nvSpPr>
-          <p:cNvPr id="8" name="TextBox 7"/>
-          <p:cNvSpPr txBox="1"/>
-          <p:nvPr/>
-        </p:nvSpPr>
-        <p:spPr>
-          <a:xfrm>
-            <a:off x="502920" y="6419088"/>
-            <a:ext cx="7772400" cy="292608"/>
-          </a:xfrm>
-          <a:prstGeom prst="rect">
-            <a:avLst/>
-          </a:prstGeom>
-          <a:noFill/>
-        </p:spPr>
-        <p:txBody>
-          <a:bodyPr wrap="none">
-            <a:spAutoFit/>
-          </a:bodyPr>
-          <a:lstStyle/>
-          <a:p>
-            <a:r>
-              <a:rPr sz="900">
-                <a:solidFill>
-                  <a:srgbClr val="8A7A76"/>
-                </a:solidFill>
-                <a:latin typeface="Calibri"/>
-              </a:rPr>
-              <a:t>Je m'appelle Huong  •  GV. Đỗ Thùy Hương  •  EC1103</a:t>
-            </a:r>
-          </a:p>
-        </p:txBody>
-      </p:sp>
-      <p:sp>
-        <p:nvSpPr>
-          <p:cNvPr id="9" name="TextBox 8"/>
-          <p:cNvSpPr txBox="1"/>
-          <p:nvPr/>
-        </p:nvSpPr>
-        <p:spPr>
-          <a:xfrm>
-            <a:off x="9326880" y="6419088"/>
-            <a:ext cx="1920240" cy="292608"/>
-          </a:xfrm>
-          <a:prstGeom prst="rect">
-            <a:avLst/>
-          </a:prstGeom>
-          <a:noFill/>
-        </p:spPr>
-        <p:txBody>
-          <a:bodyPr wrap="none">
-            <a:spAutoFit/>
-          </a:bodyPr>
-          <a:lstStyle/>
-          <a:p>
-            <a:pPr algn="r"/>
-            <a:r>
-              <a:rPr sz="900">
-                <a:solidFill>
-                  <a:srgbClr val="8A7A76"/>
-                </a:solidFill>
-                <a:latin typeface="Calibri"/>
-              </a:rPr>
-              <a:t>Chương 5</a:t>
-            </a:r>
           </a:p>
         </p:txBody>
       </p:sp>
@@ -9680,315 +9032,761 @@
 </file>
 
 <file path=ppt/slides/slide20.xml><?xml version="1.0" encoding="utf-8"?>
-<p:sld xmlns:a="http://schemas.openxmlformats.org/drawingml/2006/main" xmlns:p="http://schemas.openxmlformats.org/presentationml/2006/main" xmlns:r="http://schemas.openxmlformats.org/officeDocument/2006/relationships">
-  <p:cSld>
+<p:sld xmlns:a="http://schemas.openxmlformats.org/drawingml/2006/main" xmlns:r="http://schemas.openxmlformats.org/officeDocument/2006/relationships" xmlns:p="http://schemas.openxmlformats.org/presentationml/2006/main">
+  <p:cSld name="Slide 16">
+    <p:bg>
+      <p:bgPr>
+        <a:solidFill>
+          <a:srgbClr val="FDFBF8"/>
+        </a:solidFill>
+      </p:bgPr>
+    </p:bg>
     <p:spTree>
       <p:nvGrpSpPr>
         <p:cNvPr id="1" name=""/>
         <p:cNvGrpSpPr/>
         <p:nvPr/>
       </p:nvGrpSpPr>
-      <p:grpSpPr/>
-      <p:sp>
-        <p:nvSpPr>
-          <p:cNvPr id="2" name="Rectangle 1"/>
-          <p:cNvSpPr/>
-          <p:nvPr/>
-        </p:nvSpPr>
-        <p:spPr>
-          <a:xfrm>
-            <a:off x="0" y="0"/>
-            <a:ext cx="12191695" cy="6858000"/>
-          </a:xfrm>
-          <a:prstGeom prst="rect">
-            <a:avLst/>
-          </a:prstGeom>
-          <a:solidFill>
-            <a:srgbClr val="FDFBF8"/>
-          </a:solidFill>
-          <a:ln>
-            <a:noFill/>
-          </a:ln>
-          <a:effectLst/>
-        </p:spPr>
-        <p:style>
-          <a:lnRef idx="1">
-            <a:schemeClr val="accent1"/>
-          </a:lnRef>
-          <a:fillRef idx="3">
-            <a:schemeClr val="accent1"/>
-          </a:fillRef>
-          <a:effectRef idx="2">
-            <a:schemeClr val="accent1"/>
-          </a:effectRef>
-          <a:fontRef idx="minor">
-            <a:schemeClr val="lt1"/>
-          </a:fontRef>
-        </p:style>
-        <p:txBody>
-          <a:bodyPr rtlCol="0" anchor="ctr"/>
-          <a:lstStyle/>
-          <a:p>
-            <a:pPr algn="ctr"/>
-          </a:p>
-        </p:txBody>
-      </p:sp>
-      <p:sp>
-        <p:nvSpPr>
-          <p:cNvPr id="3" name="Rectangle 2"/>
-          <p:cNvSpPr/>
-          <p:nvPr/>
-        </p:nvSpPr>
-        <p:spPr>
-          <a:xfrm>
-            <a:off x="0" y="2103120"/>
-            <a:ext cx="12191695" cy="2743200"/>
-          </a:xfrm>
-          <a:prstGeom prst="rect">
-            <a:avLst/>
-          </a:prstGeom>
-          <a:solidFill>
-            <a:srgbClr val="FDF1EF"/>
-          </a:solidFill>
-          <a:ln>
-            <a:noFill/>
-          </a:ln>
-          <a:effectLst/>
-        </p:spPr>
-        <p:style>
-          <a:lnRef idx="1">
-            <a:schemeClr val="accent1"/>
-          </a:lnRef>
-          <a:fillRef idx="3">
-            <a:schemeClr val="accent1"/>
-          </a:fillRef>
-          <a:effectRef idx="2">
-            <a:schemeClr val="accent1"/>
-          </a:effectRef>
-          <a:fontRef idx="minor">
-            <a:schemeClr val="lt1"/>
-          </a:fontRef>
-        </p:style>
-        <p:txBody>
-          <a:bodyPr rtlCol="0" anchor="ctr"/>
-          <a:lstStyle/>
-          <a:p>
-            <a:pPr algn="ctr"/>
-          </a:p>
-        </p:txBody>
-      </p:sp>
-      <p:sp>
-        <p:nvSpPr>
-          <p:cNvPr id="4" name="Rectangle 3"/>
-          <p:cNvSpPr/>
-          <p:nvPr/>
-        </p:nvSpPr>
-        <p:spPr>
-          <a:xfrm>
-            <a:off x="0" y="0"/>
-            <a:ext cx="274320" cy="6858000"/>
-          </a:xfrm>
-          <a:prstGeom prst="rect">
+      <p:grpSpPr>
+        <a:xfrm>
+          <a:off x="0" y="0"/>
+          <a:ext cx="0" cy="0"/>
+          <a:chOff x="0" y="0"/>
+          <a:chExt cx="0" cy="0"/>
+        </a:xfrm>
+      </p:grpSpPr>
+      <p:pic>
+        <p:nvPicPr>
+          <p:cNvPr id="2" name="Image 0" descr="assets/logo_tron.png">    </p:cNvPr>
+          <p:cNvPicPr>
+            <a:picLocks noChangeAspect="1"/>
+          </p:cNvPicPr>
+          <p:nvPr/>
+        </p:nvPicPr>
+        <p:blipFill>
+          <a:blip r:embed="rId1"/>
+          <a:stretch>
+            <a:fillRect/>
+          </a:stretch>
+        </p:blipFill>
+        <p:spPr>
+          <a:xfrm>
+            <a:off x="411480" y="6327648"/>
+            <a:ext cx="384048" cy="384048"/>
+          </a:xfrm>
+          <a:prstGeom prst="rect">
+            <a:avLst/>
+          </a:prstGeom>
+        </p:spPr>
+      </p:pic>
+      <p:sp>
+        <p:nvSpPr>
+          <p:cNvPr id="3" name="Text 0"/>
+          <p:cNvSpPr/>
+          <p:nvPr/>
+        </p:nvSpPr>
+        <p:spPr>
+          <a:xfrm>
+            <a:off x="868680" y="6355080"/>
+            <a:ext cx="7498080" cy="310896"/>
+          </a:xfrm>
+          <a:prstGeom prst="rect">
+            <a:avLst/>
+          </a:prstGeom>
+          <a:noFill/>
+          <a:ln/>
+        </p:spPr>
+        <p:txBody>
+          <a:bodyPr wrap="square" lIns="0" tIns="0" rIns="0" bIns="0" rtlCol="0" anchor="ctr"/>
+          <a:lstStyle/>
+          <a:p>
+            <a:pPr indent="0" marL="0">
+              <a:buNone/>
+            </a:pPr>
+            <a:r>
+              <a:rPr lang="en-US" sz="900" dirty="0">
+                <a:solidFill>
+                  <a:srgbClr val="8A7A76"/>
+                </a:solidFill>
+                <a:latin typeface="Calibri" pitchFamily="34" charset="0"/>
+                <a:ea typeface="Calibri" pitchFamily="34" charset="-122"/>
+                <a:cs typeface="Calibri" pitchFamily="34" charset="-120"/>
+              </a:rPr>
+              <a:t>Je m'appelle Huong  •  GV. Đỗ Thùy Hương  •  EC1103</a:t>
+            </a:r>
+            <a:endParaRPr lang="en-US" sz="900" dirty="0"/>
+          </a:p>
+        </p:txBody>
+      </p:sp>
+      <p:sp>
+        <p:nvSpPr>
+          <p:cNvPr id="4" name="Text 1"/>
+          <p:cNvSpPr/>
+          <p:nvPr/>
+        </p:nvSpPr>
+        <p:spPr>
+          <a:xfrm>
+            <a:off x="8503920" y="6355080"/>
+            <a:ext cx="2743200" cy="310896"/>
+          </a:xfrm>
+          <a:prstGeom prst="rect">
+            <a:avLst/>
+          </a:prstGeom>
+          <a:noFill/>
+          <a:ln/>
+        </p:spPr>
+        <p:txBody>
+          <a:bodyPr wrap="square" lIns="0" tIns="0" rIns="0" bIns="0" rtlCol="0" anchor="ctr"/>
+          <a:lstStyle/>
+          <a:p>
+            <a:pPr algn="r" indent="0" marL="0">
+              <a:buNone/>
+            </a:pPr>
+            <a:r>
+              <a:rPr lang="en-US" sz="900" dirty="0">
+                <a:solidFill>
+                  <a:srgbClr val="8A7A76"/>
+                </a:solidFill>
+                <a:latin typeface="Calibri" pitchFamily="34" charset="0"/>
+                <a:ea typeface="Calibri" pitchFamily="34" charset="-122"/>
+                <a:cs typeface="Calibri" pitchFamily="34" charset="-120"/>
+              </a:rPr>
+              <a:t>Chương 5</a:t>
+            </a:r>
+            <a:endParaRPr lang="en-US" sz="900" dirty="0"/>
+          </a:p>
+        </p:txBody>
+      </p:sp>
+      <p:sp>
+        <p:nvSpPr>
+          <p:cNvPr id="5" name="Shape 2"/>
+          <p:cNvSpPr/>
+          <p:nvPr/>
+        </p:nvSpPr>
+        <p:spPr>
+          <a:xfrm>
+            <a:off x="11430000" y="6327648"/>
+            <a:ext cx="365760" cy="365760"/>
+          </a:xfrm>
+          <a:prstGeom prst="ellipse">
             <a:avLst/>
           </a:prstGeom>
           <a:solidFill>
             <a:srgbClr val="DC756A"/>
           </a:solidFill>
-          <a:ln>
-            <a:noFill/>
+          <a:ln/>
+        </p:spPr>
+        <p:txBody>
+          <a:bodyPr/>
+          <a:p/>
+        </p:txBody>
+      </p:sp>
+      <p:sp>
+        <p:nvSpPr>
+          <p:cNvPr id="6" name="Text 3"/>
+          <p:cNvSpPr/>
+          <p:nvPr/>
+        </p:nvSpPr>
+        <p:spPr>
+          <a:xfrm>
+            <a:off x="11430000" y="6327648"/>
+            <a:ext cx="365760" cy="365760"/>
+          </a:xfrm>
+          <a:prstGeom prst="rect">
+            <a:avLst/>
+          </a:prstGeom>
+          <a:noFill/>
+          <a:ln/>
+        </p:spPr>
+        <p:txBody>
+          <a:bodyPr wrap="square" lIns="0" tIns="0" rIns="0" bIns="0" rtlCol="0" anchor="ctr"/>
+          <a:lstStyle/>
+          <a:p>
+            <a:pPr algn="ctr" indent="0" marL="0">
+              <a:buNone/>
+            </a:pPr>
+            <a:r>
+              <a:rPr lang="en-US" sz="1000" b="1" dirty="0">
+                <a:solidFill>
+                  <a:srgbClr val="FFFFFF"/>
+                </a:solidFill>
+                <a:latin typeface="Calibri" pitchFamily="34" charset="0"/>
+                <a:ea typeface="Calibri" pitchFamily="34" charset="-122"/>
+                <a:cs typeface="Calibri" pitchFamily="34" charset="-120"/>
+              </a:rPr>
+              <a:t>16</a:t>
+            </a:r>
+            <a:endParaRPr lang="en-US" sz="1000" dirty="0"/>
+          </a:p>
+        </p:txBody>
+      </p:sp>
+      <p:sp>
+        <p:nvSpPr>
+          <p:cNvPr id="7" name="Text 4"/>
+          <p:cNvSpPr/>
+          <p:nvPr/>
+        </p:nvSpPr>
+        <p:spPr>
+          <a:xfrm>
+            <a:off x="502920" y="310896"/>
+            <a:ext cx="11155680" cy="274320"/>
+          </a:xfrm>
+          <a:prstGeom prst="rect">
+            <a:avLst/>
+          </a:prstGeom>
+          <a:noFill/>
+          <a:ln/>
+        </p:spPr>
+        <p:txBody>
+          <a:bodyPr wrap="square" lIns="0" tIns="0" rIns="0" bIns="0" rtlCol="0" anchor="ctr"/>
+          <a:lstStyle/>
+          <a:p>
+            <a:pPr indent="0" marL="0">
+              <a:buNone/>
+            </a:pPr>
+            <a:r>
+              <a:rPr lang="en-US" sz="1100" b="1" spc="300" kern="0" dirty="0">
+                <a:solidFill>
+                  <a:srgbClr val="DC756A"/>
+                </a:solidFill>
+                <a:latin typeface="Calibri" pitchFamily="34" charset="0"/>
+                <a:ea typeface="Calibri" pitchFamily="34" charset="-122"/>
+                <a:cs typeface="Calibri" pitchFamily="34" charset="-120"/>
+              </a:rPr>
+              <a:t>ÔN TẬP &amp; CHUẨN BỊ</a:t>
+            </a:r>
+            <a:endParaRPr lang="en-US" sz="1100" dirty="0"/>
+          </a:p>
+        </p:txBody>
+      </p:sp>
+      <p:sp>
+        <p:nvSpPr>
+          <p:cNvPr id="8" name="Text 5"/>
+          <p:cNvSpPr/>
+          <p:nvPr/>
+        </p:nvSpPr>
+        <p:spPr>
+          <a:xfrm>
+            <a:off x="502920" y="576072"/>
+            <a:ext cx="11155680" cy="713232"/>
+          </a:xfrm>
+          <a:prstGeom prst="rect">
+            <a:avLst/>
+          </a:prstGeom>
+          <a:noFill/>
+          <a:ln/>
+        </p:spPr>
+        <p:txBody>
+          <a:bodyPr wrap="square" lIns="0" tIns="0" rIns="0" bIns="0" rtlCol="0" anchor="ctr"/>
+          <a:lstStyle/>
+          <a:p>
+            <a:pPr indent="0" marL="0">
+              <a:buNone/>
+            </a:pPr>
+            <a:r>
+              <a:rPr lang="en-US" sz="2700" b="1" dirty="0">
+                <a:solidFill>
+                  <a:srgbClr val="AC4D33"/>
+                </a:solidFill>
+                <a:latin typeface="Cambria" pitchFamily="34" charset="0"/>
+                <a:ea typeface="Cambria" pitchFamily="34" charset="-122"/>
+                <a:cs typeface="Cambria" pitchFamily="34" charset="-120"/>
+              </a:rPr>
+              <a:t>Câu hỏi ôn tập</a:t>
+            </a:r>
+            <a:endParaRPr lang="en-US" sz="2700" dirty="0"/>
+          </a:p>
+        </p:txBody>
+      </p:sp>
+      <p:sp>
+        <p:nvSpPr>
+          <p:cNvPr id="9" name="Shape 6"/>
+          <p:cNvSpPr/>
+          <p:nvPr/>
+        </p:nvSpPr>
+        <p:spPr>
+          <a:xfrm>
+            <a:off x="502920" y="1572768"/>
+            <a:ext cx="384048" cy="384048"/>
+          </a:xfrm>
+          <a:prstGeom prst="ellipse">
+            <a:avLst/>
+          </a:prstGeom>
+          <a:solidFill>
+            <a:srgbClr val="DC756A"/>
+          </a:solidFill>
+          <a:ln/>
+        </p:spPr>
+        <p:txBody>
+          <a:bodyPr/>
+          <a:p/>
+        </p:txBody>
+      </p:sp>
+      <p:sp>
+        <p:nvSpPr>
+          <p:cNvPr id="10" name="Text 7"/>
+          <p:cNvSpPr/>
+          <p:nvPr/>
+        </p:nvSpPr>
+        <p:spPr>
+          <a:xfrm>
+            <a:off x="502920" y="1572768"/>
+            <a:ext cx="384048" cy="384048"/>
+          </a:xfrm>
+          <a:prstGeom prst="rect">
+            <a:avLst/>
+          </a:prstGeom>
+          <a:noFill/>
+          <a:ln/>
+        </p:spPr>
+        <p:txBody>
+          <a:bodyPr wrap="square" lIns="0" tIns="0" rIns="0" bIns="0" rtlCol="0" anchor="ctr"/>
+          <a:lstStyle/>
+          <a:p>
+            <a:pPr algn="ctr" indent="0" marL="0">
+              <a:buNone/>
+            </a:pPr>
+            <a:r>
+              <a:rPr lang="en-US" sz="1400" b="1" dirty="0">
+                <a:solidFill>
+                  <a:srgbClr val="FFFFFF"/>
+                </a:solidFill>
+                <a:latin typeface="Calibri" pitchFamily="34" charset="0"/>
+                <a:ea typeface="Calibri" pitchFamily="34" charset="-122"/>
+                <a:cs typeface="Calibri" pitchFamily="34" charset="-120"/>
+              </a:rPr>
+              <a:t>1</a:t>
+            </a:r>
+            <a:endParaRPr lang="en-US" sz="1400" dirty="0"/>
+          </a:p>
+        </p:txBody>
+      </p:sp>
+      <p:sp>
+        <p:nvSpPr>
+          <p:cNvPr id="11" name="Text 8"/>
+          <p:cNvSpPr/>
+          <p:nvPr/>
+        </p:nvSpPr>
+        <p:spPr>
+          <a:xfrm>
+            <a:off x="1051560" y="1499616"/>
+            <a:ext cx="10652760" cy="822960"/>
+          </a:xfrm>
+          <a:prstGeom prst="rect">
+            <a:avLst/>
+          </a:prstGeom>
+          <a:noFill/>
+          <a:ln/>
+        </p:spPr>
+        <p:txBody>
+          <a:bodyPr wrap="square" lIns="0" tIns="0" rIns="0" bIns="0" rtlCol="0" anchor="t"/>
+          <a:lstStyle/>
+          <a:p>
+            <a:pPr indent="0" marL="0">
+              <a:buNone/>
+            </a:pPr>
+            <a:r>
+              <a:rPr lang="en-US" sz="1400" dirty="0">
+                <a:solidFill>
+                  <a:srgbClr val="3A2B28"/>
+                </a:solidFill>
+                <a:latin typeface="Calibri" pitchFamily="34" charset="0"/>
+                <a:ea typeface="Calibri" pitchFamily="34" charset="-122"/>
+                <a:cs typeface="Calibri" pitchFamily="34" charset="-120"/>
+              </a:rPr>
+              <a:t>Trình bày khái niệm văn bản và các nhóm văn bản trong tổ chức.</a:t>
+            </a:r>
+            <a:endParaRPr lang="en-US" sz="1400" dirty="0"/>
+          </a:p>
+        </p:txBody>
+      </p:sp>
+      <p:sp>
+        <p:nvSpPr>
+          <p:cNvPr id="12" name="Shape 9"/>
+          <p:cNvSpPr/>
+          <p:nvPr/>
+        </p:nvSpPr>
+        <p:spPr>
+          <a:xfrm>
+            <a:off x="502920" y="2395728"/>
+            <a:ext cx="384048" cy="384048"/>
+          </a:xfrm>
+          <a:prstGeom prst="ellipse">
+            <a:avLst/>
+          </a:prstGeom>
+          <a:solidFill>
+            <a:srgbClr val="DC756A"/>
+          </a:solidFill>
+          <a:ln/>
+        </p:spPr>
+        <p:txBody>
+          <a:bodyPr/>
+          <a:p/>
+        </p:txBody>
+      </p:sp>
+      <p:sp>
+        <p:nvSpPr>
+          <p:cNvPr id="13" name="Text 10"/>
+          <p:cNvSpPr/>
+          <p:nvPr/>
+        </p:nvSpPr>
+        <p:spPr>
+          <a:xfrm>
+            <a:off x="502920" y="2395728"/>
+            <a:ext cx="384048" cy="384048"/>
+          </a:xfrm>
+          <a:prstGeom prst="rect">
+            <a:avLst/>
+          </a:prstGeom>
+          <a:noFill/>
+          <a:ln/>
+        </p:spPr>
+        <p:txBody>
+          <a:bodyPr wrap="square" lIns="0" tIns="0" rIns="0" bIns="0" rtlCol="0" anchor="ctr"/>
+          <a:lstStyle/>
+          <a:p>
+            <a:pPr algn="ctr" indent="0" marL="0">
+              <a:buNone/>
+            </a:pPr>
+            <a:r>
+              <a:rPr lang="en-US" sz="1400" b="1" dirty="0">
+                <a:solidFill>
+                  <a:srgbClr val="FFFFFF"/>
+                </a:solidFill>
+                <a:latin typeface="Calibri" pitchFamily="34" charset="0"/>
+                <a:ea typeface="Calibri" pitchFamily="34" charset="-122"/>
+                <a:cs typeface="Calibri" pitchFamily="34" charset="-120"/>
+              </a:rPr>
+              <a:t>2</a:t>
+            </a:r>
+            <a:endParaRPr lang="en-US" sz="1400" dirty="0"/>
+          </a:p>
+        </p:txBody>
+      </p:sp>
+      <p:sp>
+        <p:nvSpPr>
+          <p:cNvPr id="14" name="Text 11"/>
+          <p:cNvSpPr/>
+          <p:nvPr/>
+        </p:nvSpPr>
+        <p:spPr>
+          <a:xfrm>
+            <a:off x="1051560" y="2322576"/>
+            <a:ext cx="10652760" cy="822960"/>
+          </a:xfrm>
+          <a:prstGeom prst="rect">
+            <a:avLst/>
+          </a:prstGeom>
+          <a:noFill/>
+          <a:ln/>
+        </p:spPr>
+        <p:txBody>
+          <a:bodyPr wrap="square" lIns="0" tIns="0" rIns="0" bIns="0" rtlCol="0" anchor="t"/>
+          <a:lstStyle/>
+          <a:p>
+            <a:pPr indent="0" marL="0">
+              <a:buNone/>
+            </a:pPr>
+            <a:r>
+              <a:rPr lang="en-US" sz="1400" dirty="0">
+                <a:solidFill>
+                  <a:srgbClr val="3A2B28"/>
+                </a:solidFill>
+                <a:latin typeface="Calibri" pitchFamily="34" charset="0"/>
+                <a:ea typeface="Calibri" pitchFamily="34" charset="-122"/>
+                <a:cs typeface="Calibri" pitchFamily="34" charset="-120"/>
+              </a:rPr>
+              <a:t>Nêu 9 thành phần thể thức văn bản hành chính và các quy định về lề trang, phông chữ.</a:t>
+            </a:r>
+            <a:endParaRPr lang="en-US" sz="1400" dirty="0"/>
+          </a:p>
+        </p:txBody>
+      </p:sp>
+      <p:sp>
+        <p:nvSpPr>
+          <p:cNvPr id="15" name="Shape 12"/>
+          <p:cNvSpPr/>
+          <p:nvPr/>
+        </p:nvSpPr>
+        <p:spPr>
+          <a:xfrm>
+            <a:off x="502920" y="3218688"/>
+            <a:ext cx="384048" cy="384048"/>
+          </a:xfrm>
+          <a:prstGeom prst="ellipse">
+            <a:avLst/>
+          </a:prstGeom>
+          <a:solidFill>
+            <a:srgbClr val="DC756A"/>
+          </a:solidFill>
+          <a:ln/>
+        </p:spPr>
+        <p:txBody>
+          <a:bodyPr/>
+          <a:p/>
+        </p:txBody>
+      </p:sp>
+      <p:sp>
+        <p:nvSpPr>
+          <p:cNvPr id="16" name="Text 13"/>
+          <p:cNvSpPr/>
+          <p:nvPr/>
+        </p:nvSpPr>
+        <p:spPr>
+          <a:xfrm>
+            <a:off x="502920" y="3218688"/>
+            <a:ext cx="384048" cy="384048"/>
+          </a:xfrm>
+          <a:prstGeom prst="rect">
+            <a:avLst/>
+          </a:prstGeom>
+          <a:noFill/>
+          <a:ln/>
+        </p:spPr>
+        <p:txBody>
+          <a:bodyPr wrap="square" lIns="0" tIns="0" rIns="0" bIns="0" rtlCol="0" anchor="ctr"/>
+          <a:lstStyle/>
+          <a:p>
+            <a:pPr algn="ctr" indent="0" marL="0">
+              <a:buNone/>
+            </a:pPr>
+            <a:r>
+              <a:rPr lang="en-US" sz="1400" b="1" dirty="0">
+                <a:solidFill>
+                  <a:srgbClr val="FFFFFF"/>
+                </a:solidFill>
+                <a:latin typeface="Calibri" pitchFamily="34" charset="0"/>
+                <a:ea typeface="Calibri" pitchFamily="34" charset="-122"/>
+                <a:cs typeface="Calibri" pitchFamily="34" charset="-120"/>
+              </a:rPr>
+              <a:t>3</a:t>
+            </a:r>
+            <a:endParaRPr lang="en-US" sz="1400" dirty="0"/>
+          </a:p>
+        </p:txBody>
+      </p:sp>
+      <p:sp>
+        <p:nvSpPr>
+          <p:cNvPr id="17" name="Text 14"/>
+          <p:cNvSpPr/>
+          <p:nvPr/>
+        </p:nvSpPr>
+        <p:spPr>
+          <a:xfrm>
+            <a:off x="1051560" y="3145536"/>
+            <a:ext cx="10652760" cy="822960"/>
+          </a:xfrm>
+          <a:prstGeom prst="rect">
+            <a:avLst/>
+          </a:prstGeom>
+          <a:noFill/>
+          <a:ln/>
+        </p:spPr>
+        <p:txBody>
+          <a:bodyPr wrap="square" lIns="0" tIns="0" rIns="0" bIns="0" rtlCol="0" anchor="t"/>
+          <a:lstStyle/>
+          <a:p>
+            <a:pPr indent="0" marL="0">
+              <a:buNone/>
+            </a:pPr>
+            <a:r>
+              <a:rPr lang="en-US" sz="1400" dirty="0">
+                <a:solidFill>
+                  <a:srgbClr val="3A2B28"/>
+                </a:solidFill>
+                <a:latin typeface="Calibri" pitchFamily="34" charset="0"/>
+                <a:ea typeface="Calibri" pitchFamily="34" charset="-122"/>
+                <a:cs typeface="Calibri" pitchFamily="34" charset="-120"/>
+              </a:rPr>
+              <a:t>So sánh bố cục của quyết định, tờ trình và công văn.</a:t>
+            </a:r>
+            <a:endParaRPr lang="en-US" sz="1400" dirty="0"/>
+          </a:p>
+        </p:txBody>
+      </p:sp>
+      <p:sp>
+        <p:nvSpPr>
+          <p:cNvPr id="18" name="Shape 15"/>
+          <p:cNvSpPr/>
+          <p:nvPr/>
+        </p:nvSpPr>
+        <p:spPr>
+          <a:xfrm>
+            <a:off x="502920" y="4041648"/>
+            <a:ext cx="384048" cy="384048"/>
+          </a:xfrm>
+          <a:prstGeom prst="ellipse">
+            <a:avLst/>
+          </a:prstGeom>
+          <a:solidFill>
+            <a:srgbClr val="DC756A"/>
+          </a:solidFill>
+          <a:ln/>
+        </p:spPr>
+        <p:txBody>
+          <a:bodyPr/>
+          <a:p/>
+        </p:txBody>
+      </p:sp>
+      <p:sp>
+        <p:nvSpPr>
+          <p:cNvPr id="19" name="Text 16"/>
+          <p:cNvSpPr/>
+          <p:nvPr/>
+        </p:nvSpPr>
+        <p:spPr>
+          <a:xfrm>
+            <a:off x="502920" y="4041648"/>
+            <a:ext cx="384048" cy="384048"/>
+          </a:xfrm>
+          <a:prstGeom prst="rect">
+            <a:avLst/>
+          </a:prstGeom>
+          <a:noFill/>
+          <a:ln/>
+        </p:spPr>
+        <p:txBody>
+          <a:bodyPr wrap="square" lIns="0" tIns="0" rIns="0" bIns="0" rtlCol="0" anchor="ctr"/>
+          <a:lstStyle/>
+          <a:p>
+            <a:pPr algn="ctr" indent="0" marL="0">
+              <a:buNone/>
+            </a:pPr>
+            <a:r>
+              <a:rPr lang="en-US" sz="1400" b="1" dirty="0">
+                <a:solidFill>
+                  <a:srgbClr val="FFFFFF"/>
+                </a:solidFill>
+                <a:latin typeface="Calibri" pitchFamily="34" charset="0"/>
+                <a:ea typeface="Calibri" pitchFamily="34" charset="-122"/>
+                <a:cs typeface="Calibri" pitchFamily="34" charset="-120"/>
+              </a:rPr>
+              <a:t>4</a:t>
+            </a:r>
+            <a:endParaRPr lang="en-US" sz="1400" dirty="0"/>
+          </a:p>
+        </p:txBody>
+      </p:sp>
+      <p:sp>
+        <p:nvSpPr>
+          <p:cNvPr id="20" name="Text 17"/>
+          <p:cNvSpPr/>
+          <p:nvPr/>
+        </p:nvSpPr>
+        <p:spPr>
+          <a:xfrm>
+            <a:off x="1051560" y="3968496"/>
+            <a:ext cx="10652760" cy="822960"/>
+          </a:xfrm>
+          <a:prstGeom prst="rect">
+            <a:avLst/>
+          </a:prstGeom>
+          <a:noFill/>
+          <a:ln/>
+        </p:spPr>
+        <p:txBody>
+          <a:bodyPr wrap="square" lIns="0" tIns="0" rIns="0" bIns="0" rtlCol="0" anchor="t"/>
+          <a:lstStyle/>
+          <a:p>
+            <a:pPr indent="0" marL="0">
+              <a:buNone/>
+            </a:pPr>
+            <a:r>
+              <a:rPr lang="en-US" sz="1400" dirty="0">
+                <a:solidFill>
+                  <a:srgbClr val="3A2B28"/>
+                </a:solidFill>
+                <a:latin typeface="Calibri" pitchFamily="34" charset="0"/>
+                <a:ea typeface="Calibri" pitchFamily="34" charset="-122"/>
+                <a:cs typeface="Calibri" pitchFamily="34" charset="-120"/>
+              </a:rPr>
+              <a:t>Nêu nguyên tắc 5C và các điều khoản cơ bản của hợp đồng thương mại.</a:t>
+            </a:r>
+            <a:endParaRPr lang="en-US" sz="1400" dirty="0"/>
+          </a:p>
+        </p:txBody>
+      </p:sp>
+      <p:sp>
+        <p:nvSpPr>
+          <p:cNvPr id="21" name="Shape 18"/>
+          <p:cNvSpPr/>
+          <p:nvPr/>
+        </p:nvSpPr>
+        <p:spPr>
+          <a:xfrm>
+            <a:off x="502920" y="5074920"/>
+            <a:ext cx="11201400" cy="1097280"/>
+          </a:xfrm>
+          <a:prstGeom prst="roundRect">
+            <a:avLst>
+              <a:gd name="adj" fmla="val 7500"/>
+            </a:avLst>
+          </a:prstGeom>
+          <a:solidFill>
+            <a:srgbClr val="FBEDE0"/>
+          </a:solidFill>
+          <a:ln w="12700">
+            <a:solidFill>
+              <a:srgbClr val="C9A227"/>
+            </a:solidFill>
+            <a:prstDash val="solid"/>
           </a:ln>
-          <a:effectLst/>
-        </p:spPr>
-        <p:style>
-          <a:lnRef idx="1">
-            <a:schemeClr val="accent1"/>
-          </a:lnRef>
-          <a:fillRef idx="3">
-            <a:schemeClr val="accent1"/>
-          </a:fillRef>
-          <a:effectRef idx="2">
-            <a:schemeClr val="accent1"/>
-          </a:effectRef>
-          <a:fontRef idx="minor">
-            <a:schemeClr val="lt1"/>
-          </a:fontRef>
-        </p:style>
-        <p:txBody>
-          <a:bodyPr rtlCol="0" anchor="ctr"/>
-          <a:lstStyle/>
-          <a:p>
-            <a:pPr algn="ctr"/>
-          </a:p>
-        </p:txBody>
-      </p:sp>
-      <p:sp>
-        <p:nvSpPr>
-          <p:cNvPr id="5" name="TextBox 4"/>
-          <p:cNvSpPr txBox="1"/>
-          <p:nvPr/>
-        </p:nvSpPr>
-        <p:spPr>
-          <a:xfrm>
-            <a:off x="1280160" y="2377440"/>
-            <a:ext cx="9692640" cy="411480"/>
-          </a:xfrm>
-          <a:prstGeom prst="rect">
-            <a:avLst/>
-          </a:prstGeom>
-          <a:noFill/>
-        </p:spPr>
-        <p:txBody>
-          <a:bodyPr wrap="none">
-            <a:spAutoFit/>
-          </a:bodyPr>
-          <a:lstStyle/>
-          <a:p>
-            <a:r>
-              <a:rPr sz="1500" b="1">
-                <a:solidFill>
-                  <a:srgbClr val="DC756A"/>
-                </a:solidFill>
-                <a:latin typeface="Calibri"/>
-              </a:rPr>
-              <a:t>MỤC 5.3</a:t>
-            </a:r>
-          </a:p>
-        </p:txBody>
-      </p:sp>
-      <p:sp>
-        <p:nvSpPr>
-          <p:cNvPr id="6" name="TextBox 5"/>
-          <p:cNvSpPr txBox="1"/>
-          <p:nvPr/>
-        </p:nvSpPr>
-        <p:spPr>
-          <a:xfrm>
-            <a:off x="1280160" y="2788920"/>
-            <a:ext cx="9601200" cy="1371600"/>
-          </a:xfrm>
-          <a:prstGeom prst="rect">
-            <a:avLst/>
-          </a:prstGeom>
-          <a:noFill/>
-        </p:spPr>
-        <p:txBody>
-          <a:bodyPr wrap="square">
-            <a:spAutoFit/>
-          </a:bodyPr>
-          <a:lstStyle/>
-          <a:p>
-            <a:r>
-              <a:rPr sz="3300" b="1">
-                <a:solidFill>
-                  <a:srgbClr val="AC4D33"/>
-                </a:solidFill>
-                <a:latin typeface="Cambria"/>
-              </a:rPr>
-              <a:t>Soạn thảo văn bản hành chính thông dụng</a:t>
-            </a:r>
-          </a:p>
-        </p:txBody>
-      </p:sp>
-      <p:sp>
-        <p:nvSpPr>
-          <p:cNvPr id="7" name="TextBox 6"/>
-          <p:cNvSpPr txBox="1"/>
-          <p:nvPr/>
-        </p:nvSpPr>
-        <p:spPr>
-          <a:xfrm>
-            <a:off x="1280160" y="4224528"/>
-            <a:ext cx="9418320" cy="640080"/>
-          </a:xfrm>
-          <a:prstGeom prst="rect">
-            <a:avLst/>
-          </a:prstGeom>
-          <a:noFill/>
-        </p:spPr>
-        <p:txBody>
-          <a:bodyPr wrap="square">
-            <a:spAutoFit/>
-          </a:bodyPr>
-          <a:lstStyle/>
-          <a:p>
-            <a:r>
-              <a:rPr sz="1450" i="1">
-                <a:solidFill>
-                  <a:srgbClr val="8A7A76"/>
-                </a:solidFill>
-                <a:latin typeface="Calibri"/>
-              </a:rPr>
-              <a:t>Năm loại văn bản dùng hằng ngày trong mọi cơ quan, tổ chức.</a:t>
-            </a:r>
-          </a:p>
-        </p:txBody>
-      </p:sp>
-      <p:sp>
-        <p:nvSpPr>
-          <p:cNvPr id="8" name="TextBox 7"/>
-          <p:cNvSpPr txBox="1"/>
-          <p:nvPr/>
-        </p:nvSpPr>
-        <p:spPr>
-          <a:xfrm>
-            <a:off x="502920" y="6419088"/>
-            <a:ext cx="7772400" cy="292608"/>
-          </a:xfrm>
-          <a:prstGeom prst="rect">
-            <a:avLst/>
-          </a:prstGeom>
-          <a:noFill/>
-        </p:spPr>
-        <p:txBody>
-          <a:bodyPr wrap="none">
-            <a:spAutoFit/>
-          </a:bodyPr>
-          <a:lstStyle/>
-          <a:p>
-            <a:r>
-              <a:rPr sz="900">
-                <a:solidFill>
-                  <a:srgbClr val="8A7A76"/>
-                </a:solidFill>
-                <a:latin typeface="Calibri"/>
-              </a:rPr>
-              <a:t>Je m'appelle Huong  •  GV. Đỗ Thùy Hương  •  EC1103</a:t>
-            </a:r>
-          </a:p>
-        </p:txBody>
-      </p:sp>
-      <p:sp>
-        <p:nvSpPr>
-          <p:cNvPr id="9" name="TextBox 8"/>
-          <p:cNvSpPr txBox="1"/>
-          <p:nvPr/>
-        </p:nvSpPr>
-        <p:spPr>
-          <a:xfrm>
-            <a:off x="9326880" y="6419088"/>
-            <a:ext cx="1920240" cy="292608"/>
-          </a:xfrm>
-          <a:prstGeom prst="rect">
-            <a:avLst/>
-          </a:prstGeom>
-          <a:noFill/>
-        </p:spPr>
-        <p:txBody>
-          <a:bodyPr wrap="none">
-            <a:spAutoFit/>
-          </a:bodyPr>
-          <a:lstStyle/>
-          <a:p>
-            <a:pPr algn="r"/>
-            <a:r>
-              <a:rPr sz="900">
-                <a:solidFill>
-                  <a:srgbClr val="8A7A76"/>
-                </a:solidFill>
-                <a:latin typeface="Calibri"/>
-              </a:rPr>
-              <a:t>Chương 5</a:t>
-            </a:r>
+        </p:spPr>
+        <p:txBody>
+          <a:bodyPr/>
+          <a:p/>
+        </p:txBody>
+      </p:sp>
+      <p:sp>
+        <p:nvSpPr>
+          <p:cNvPr id="22" name="Text 19"/>
+          <p:cNvSpPr/>
+          <p:nvPr/>
+        </p:nvSpPr>
+        <p:spPr>
+          <a:xfrm>
+            <a:off x="777240" y="5120640"/>
+            <a:ext cx="10698480" cy="1005840"/>
+          </a:xfrm>
+          <a:prstGeom prst="rect">
+            <a:avLst/>
+          </a:prstGeom>
+          <a:noFill/>
+          <a:ln/>
+        </p:spPr>
+        <p:txBody>
+          <a:bodyPr wrap="square" lIns="0" tIns="0" rIns="0" bIns="0" rtlCol="0" anchor="ctr"/>
+          <a:lstStyle/>
+          <a:p>
+            <a:pPr indent="0" marL="0">
+              <a:buNone/>
+            </a:pPr>
+            <a:r>
+              <a:rPr lang="en-US" sz="1300" b="1" dirty="0">
+                <a:solidFill>
+                  <a:srgbClr val="8A6510"/>
+                </a:solidFill>
+                <a:latin typeface="Calibri" pitchFamily="34" charset="0"/>
+                <a:ea typeface="Calibri" pitchFamily="34" charset="-122"/>
+                <a:cs typeface="Calibri" pitchFamily="34" charset="-120"/>
+              </a:rPr>
+              <a:t>CHUẨN BỊ CHO BUỔI SAU:  </a:t>
+            </a:r>
+            <a:pPr indent="0" marL="0">
+              <a:buNone/>
+            </a:pPr>
+            <a:r>
+              <a:rPr lang="en-US" sz="1300" dirty="0">
+                <a:solidFill>
+                  <a:srgbClr val="3A2B28"/>
+                </a:solidFill>
+                <a:latin typeface="Calibri" pitchFamily="34" charset="0"/>
+                <a:ea typeface="Calibri" pitchFamily="34" charset="-122"/>
+                <a:cs typeface="Calibri" pitchFamily="34" charset="-120"/>
+              </a:rPr>
+              <a:t>Phần thực hành tại phòng A0105 — Bài 1: Thể thức văn bản. Mang theo laptop, cài sẵn Microsoft Word và tải Nghị định 30/2020/NĐ-CP.</a:t>
+            </a:r>
+            <a:endParaRPr lang="en-US" sz="1300" dirty="0"/>
           </a:p>
         </p:txBody>
       </p:sp>
@@ -10001,315 +9799,530 @@
 </file>
 
 <file path=ppt/slides/slide21.xml><?xml version="1.0" encoding="utf-8"?>
-<p:sld xmlns:a="http://schemas.openxmlformats.org/drawingml/2006/main" xmlns:p="http://schemas.openxmlformats.org/presentationml/2006/main" xmlns:r="http://schemas.openxmlformats.org/officeDocument/2006/relationships">
-  <p:cSld>
+<p:sld xmlns:a="http://schemas.openxmlformats.org/drawingml/2006/main" xmlns:r="http://schemas.openxmlformats.org/officeDocument/2006/relationships" xmlns:p="http://schemas.openxmlformats.org/presentationml/2006/main">
+  <p:cSld name="Slide 17">
+    <p:bg>
+      <p:bgPr>
+        <a:solidFill>
+          <a:srgbClr val="FDFBF8"/>
+        </a:solidFill>
+      </p:bgPr>
+    </p:bg>
     <p:spTree>
       <p:nvGrpSpPr>
         <p:cNvPr id="1" name=""/>
         <p:cNvGrpSpPr/>
         <p:nvPr/>
       </p:nvGrpSpPr>
-      <p:grpSpPr/>
-      <p:sp>
-        <p:nvSpPr>
-          <p:cNvPr id="2" name="Rectangle 1"/>
-          <p:cNvSpPr/>
-          <p:nvPr/>
-        </p:nvSpPr>
-        <p:spPr>
-          <a:xfrm>
-            <a:off x="0" y="0"/>
-            <a:ext cx="12191695" cy="6858000"/>
-          </a:xfrm>
-          <a:prstGeom prst="rect">
+      <p:grpSpPr>
+        <a:xfrm>
+          <a:off x="0" y="0"/>
+          <a:ext cx="0" cy="0"/>
+          <a:chOff x="0" y="0"/>
+          <a:chExt cx="0" cy="0"/>
+        </a:xfrm>
+      </p:grpSpPr>
+      <p:pic>
+        <p:nvPicPr>
+          <p:cNvPr id="2" name="Image 0" descr="assets/logo_tron.png">    </p:cNvPr>
+          <p:cNvPicPr>
+            <a:picLocks noChangeAspect="1"/>
+          </p:cNvPicPr>
+          <p:nvPr/>
+        </p:nvPicPr>
+        <p:blipFill>
+          <a:blip r:embed="rId1"/>
+          <a:stretch>
+            <a:fillRect/>
+          </a:stretch>
+        </p:blipFill>
+        <p:spPr>
+          <a:xfrm>
+            <a:off x="411480" y="6327648"/>
+            <a:ext cx="384048" cy="384048"/>
+          </a:xfrm>
+          <a:prstGeom prst="rect">
+            <a:avLst/>
+          </a:prstGeom>
+        </p:spPr>
+      </p:pic>
+      <p:sp>
+        <p:nvSpPr>
+          <p:cNvPr id="3" name="Text 0"/>
+          <p:cNvSpPr/>
+          <p:nvPr/>
+        </p:nvSpPr>
+        <p:spPr>
+          <a:xfrm>
+            <a:off x="868680" y="6355080"/>
+            <a:ext cx="7498080" cy="310896"/>
+          </a:xfrm>
+          <a:prstGeom prst="rect">
+            <a:avLst/>
+          </a:prstGeom>
+          <a:noFill/>
+          <a:ln/>
+        </p:spPr>
+        <p:txBody>
+          <a:bodyPr wrap="square" lIns="0" tIns="0" rIns="0" bIns="0" rtlCol="0" anchor="ctr"/>
+          <a:lstStyle/>
+          <a:p>
+            <a:pPr indent="0" marL="0">
+              <a:buNone/>
+            </a:pPr>
+            <a:r>
+              <a:rPr lang="en-US" sz="900" dirty="0">
+                <a:solidFill>
+                  <a:srgbClr val="8A7A76"/>
+                </a:solidFill>
+                <a:latin typeface="Calibri" pitchFamily="34" charset="0"/>
+                <a:ea typeface="Calibri" pitchFamily="34" charset="-122"/>
+                <a:cs typeface="Calibri" pitchFamily="34" charset="-120"/>
+              </a:rPr>
+              <a:t>Je m'appelle Huong  •  GV. Đỗ Thùy Hương  •  EC1103</a:t>
+            </a:r>
+            <a:endParaRPr lang="en-US" sz="900" dirty="0"/>
+          </a:p>
+        </p:txBody>
+      </p:sp>
+      <p:sp>
+        <p:nvSpPr>
+          <p:cNvPr id="4" name="Text 1"/>
+          <p:cNvSpPr/>
+          <p:nvPr/>
+        </p:nvSpPr>
+        <p:spPr>
+          <a:xfrm>
+            <a:off x="8503920" y="6355080"/>
+            <a:ext cx="2743200" cy="310896"/>
+          </a:xfrm>
+          <a:prstGeom prst="rect">
+            <a:avLst/>
+          </a:prstGeom>
+          <a:noFill/>
+          <a:ln/>
+        </p:spPr>
+        <p:txBody>
+          <a:bodyPr wrap="square" lIns="0" tIns="0" rIns="0" bIns="0" rtlCol="0" anchor="ctr"/>
+          <a:lstStyle/>
+          <a:p>
+            <a:pPr algn="r" indent="0" marL="0">
+              <a:buNone/>
+            </a:pPr>
+            <a:r>
+              <a:rPr lang="en-US" sz="900" dirty="0">
+                <a:solidFill>
+                  <a:srgbClr val="8A7A76"/>
+                </a:solidFill>
+                <a:latin typeface="Calibri" pitchFamily="34" charset="0"/>
+                <a:ea typeface="Calibri" pitchFamily="34" charset="-122"/>
+                <a:cs typeface="Calibri" pitchFamily="34" charset="-120"/>
+              </a:rPr>
+              <a:t>Chương 5</a:t>
+            </a:r>
+            <a:endParaRPr lang="en-US" sz="900" dirty="0"/>
+          </a:p>
+        </p:txBody>
+      </p:sp>
+      <p:sp>
+        <p:nvSpPr>
+          <p:cNvPr id="5" name="Shape 2"/>
+          <p:cNvSpPr/>
+          <p:nvPr/>
+        </p:nvSpPr>
+        <p:spPr>
+          <a:xfrm>
+            <a:off x="11430000" y="6327648"/>
+            <a:ext cx="365760" cy="365760"/>
+          </a:xfrm>
+          <a:prstGeom prst="ellipse">
             <a:avLst/>
           </a:prstGeom>
           <a:solidFill>
-            <a:srgbClr val="FDFBF8"/>
+            <a:srgbClr val="DC756A"/>
           </a:solidFill>
-          <a:ln>
-            <a:noFill/>
-          </a:ln>
-          <a:effectLst/>
-        </p:spPr>
-        <p:style>
-          <a:lnRef idx="1">
-            <a:schemeClr val="accent1"/>
-          </a:lnRef>
-          <a:fillRef idx="3">
-            <a:schemeClr val="accent1"/>
-          </a:fillRef>
-          <a:effectRef idx="2">
-            <a:schemeClr val="accent1"/>
-          </a:effectRef>
-          <a:fontRef idx="minor">
-            <a:schemeClr val="lt1"/>
-          </a:fontRef>
-        </p:style>
-        <p:txBody>
-          <a:bodyPr rtlCol="0" anchor="ctr"/>
-          <a:lstStyle/>
-          <a:p>
-            <a:pPr algn="ctr"/>
-          </a:p>
-        </p:txBody>
-      </p:sp>
-      <p:sp>
-        <p:nvSpPr>
-          <p:cNvPr id="3" name="Rectangle 2"/>
-          <p:cNvSpPr/>
-          <p:nvPr/>
-        </p:nvSpPr>
-        <p:spPr>
-          <a:xfrm>
-            <a:off x="0" y="2103120"/>
-            <a:ext cx="12191695" cy="2743200"/>
-          </a:xfrm>
-          <a:prstGeom prst="rect">
-            <a:avLst/>
+          <a:ln/>
+        </p:spPr>
+        <p:txBody>
+          <a:bodyPr/>
+          <a:p/>
+        </p:txBody>
+      </p:sp>
+      <p:sp>
+        <p:nvSpPr>
+          <p:cNvPr id="6" name="Text 3"/>
+          <p:cNvSpPr/>
+          <p:nvPr/>
+        </p:nvSpPr>
+        <p:spPr>
+          <a:xfrm>
+            <a:off x="11430000" y="6327648"/>
+            <a:ext cx="365760" cy="365760"/>
+          </a:xfrm>
+          <a:prstGeom prst="rect">
+            <a:avLst/>
+          </a:prstGeom>
+          <a:noFill/>
+          <a:ln/>
+        </p:spPr>
+        <p:txBody>
+          <a:bodyPr wrap="square" lIns="0" tIns="0" rIns="0" bIns="0" rtlCol="0" anchor="ctr"/>
+          <a:lstStyle/>
+          <a:p>
+            <a:pPr algn="ctr" indent="0" marL="0">
+              <a:buNone/>
+            </a:pPr>
+            <a:r>
+              <a:rPr lang="en-US" sz="1000" b="1" dirty="0">
+                <a:solidFill>
+                  <a:srgbClr val="FFFFFF"/>
+                </a:solidFill>
+                <a:latin typeface="Calibri" pitchFamily="34" charset="0"/>
+                <a:ea typeface="Calibri" pitchFamily="34" charset="-122"/>
+                <a:cs typeface="Calibri" pitchFamily="34" charset="-120"/>
+              </a:rPr>
+              <a:t>17</a:t>
+            </a:r>
+            <a:endParaRPr lang="en-US" sz="1000" dirty="0"/>
+          </a:p>
+        </p:txBody>
+      </p:sp>
+      <p:sp>
+        <p:nvSpPr>
+          <p:cNvPr id="7" name="Text 4"/>
+          <p:cNvSpPr/>
+          <p:nvPr/>
+        </p:nvSpPr>
+        <p:spPr>
+          <a:xfrm>
+            <a:off x="502920" y="310896"/>
+            <a:ext cx="11155680" cy="274320"/>
+          </a:xfrm>
+          <a:prstGeom prst="rect">
+            <a:avLst/>
+          </a:prstGeom>
+          <a:noFill/>
+          <a:ln/>
+        </p:spPr>
+        <p:txBody>
+          <a:bodyPr wrap="square" lIns="0" tIns="0" rIns="0" bIns="0" rtlCol="0" anchor="ctr"/>
+          <a:lstStyle/>
+          <a:p>
+            <a:pPr indent="0" marL="0">
+              <a:buNone/>
+            </a:pPr>
+            <a:r>
+              <a:rPr lang="en-US" sz="1100" b="1" spc="300" kern="0" dirty="0">
+                <a:solidFill>
+                  <a:srgbClr val="DC756A"/>
+                </a:solidFill>
+                <a:latin typeface="Calibri" pitchFamily="34" charset="0"/>
+                <a:ea typeface="Calibri" pitchFamily="34" charset="-122"/>
+                <a:cs typeface="Calibri" pitchFamily="34" charset="-120"/>
+              </a:rPr>
+              <a:t>TÀI LIỆU</a:t>
+            </a:r>
+            <a:endParaRPr lang="en-US" sz="1100" dirty="0"/>
+          </a:p>
+        </p:txBody>
+      </p:sp>
+      <p:sp>
+        <p:nvSpPr>
+          <p:cNvPr id="8" name="Text 5"/>
+          <p:cNvSpPr/>
+          <p:nvPr/>
+        </p:nvSpPr>
+        <p:spPr>
+          <a:xfrm>
+            <a:off x="502920" y="576072"/>
+            <a:ext cx="11155680" cy="713232"/>
+          </a:xfrm>
+          <a:prstGeom prst="rect">
+            <a:avLst/>
+          </a:prstGeom>
+          <a:noFill/>
+          <a:ln/>
+        </p:spPr>
+        <p:txBody>
+          <a:bodyPr wrap="square" lIns="0" tIns="0" rIns="0" bIns="0" rtlCol="0" anchor="ctr"/>
+          <a:lstStyle/>
+          <a:p>
+            <a:pPr indent="0" marL="0">
+              <a:buNone/>
+            </a:pPr>
+            <a:r>
+              <a:rPr lang="en-US" sz="2700" b="1" dirty="0">
+                <a:solidFill>
+                  <a:srgbClr val="AC4D33"/>
+                </a:solidFill>
+                <a:latin typeface="Cambria" pitchFamily="34" charset="0"/>
+                <a:ea typeface="Cambria" pitchFamily="34" charset="-122"/>
+                <a:cs typeface="Cambria" pitchFamily="34" charset="-120"/>
+              </a:rPr>
+              <a:t>Tài liệu học tập</a:t>
+            </a:r>
+            <a:endParaRPr lang="en-US" sz="2700" dirty="0"/>
+          </a:p>
+        </p:txBody>
+      </p:sp>
+      <p:sp>
+        <p:nvSpPr>
+          <p:cNvPr id="9" name="Shape 6"/>
+          <p:cNvSpPr/>
+          <p:nvPr/>
+        </p:nvSpPr>
+        <p:spPr>
+          <a:xfrm>
+            <a:off x="502920" y="1463040"/>
+            <a:ext cx="11201400" cy="1322832"/>
+          </a:xfrm>
+          <a:prstGeom prst="roundRect">
+            <a:avLst>
+              <a:gd name="adj" fmla="val 6221"/>
+            </a:avLst>
           </a:prstGeom>
           <a:solidFill>
             <a:srgbClr val="FDF1EF"/>
           </a:solidFill>
-          <a:ln>
-            <a:noFill/>
+          <a:ln w="15875">
+            <a:solidFill>
+              <a:srgbClr val="FBCEC9"/>
+            </a:solidFill>
+            <a:prstDash val="solid"/>
           </a:ln>
-          <a:effectLst/>
-        </p:spPr>
-        <p:style>
-          <a:lnRef idx="1">
-            <a:schemeClr val="accent1"/>
-          </a:lnRef>
-          <a:fillRef idx="3">
-            <a:schemeClr val="accent1"/>
-          </a:fillRef>
-          <a:effectRef idx="2">
-            <a:schemeClr val="accent1"/>
-          </a:effectRef>
-          <a:fontRef idx="minor">
-            <a:schemeClr val="lt1"/>
-          </a:fontRef>
-        </p:style>
-        <p:txBody>
-          <a:bodyPr rtlCol="0" anchor="ctr"/>
-          <a:lstStyle/>
-          <a:p>
-            <a:pPr algn="ctr"/>
-          </a:p>
-        </p:txBody>
-      </p:sp>
-      <p:sp>
-        <p:nvSpPr>
-          <p:cNvPr id="4" name="Rectangle 3"/>
-          <p:cNvSpPr/>
-          <p:nvPr/>
-        </p:nvSpPr>
-        <p:spPr>
-          <a:xfrm>
-            <a:off x="0" y="0"/>
-            <a:ext cx="274320" cy="6858000"/>
-          </a:xfrm>
-          <a:prstGeom prst="rect">
-            <a:avLst/>
+        </p:spPr>
+        <p:txBody>
+          <a:bodyPr/>
+          <a:p/>
+        </p:txBody>
+      </p:sp>
+      <p:sp>
+        <p:nvSpPr>
+          <p:cNvPr id="10" name="Text 7"/>
+          <p:cNvSpPr/>
+          <p:nvPr/>
+        </p:nvSpPr>
+        <p:spPr>
+          <a:xfrm>
+            <a:off x="722376" y="1517904"/>
+            <a:ext cx="10762488" cy="1213104"/>
+          </a:xfrm>
+          <a:prstGeom prst="rect">
+            <a:avLst/>
+          </a:prstGeom>
+          <a:noFill/>
+          <a:ln/>
+        </p:spPr>
+        <p:txBody>
+          <a:bodyPr wrap="square" lIns="0" tIns="0" rIns="0" bIns="0" rtlCol="0" anchor="ctr"/>
+          <a:lstStyle/>
+          <a:p>
+            <a:pPr indent="0" marL="0">
+              <a:buNone/>
+            </a:pPr>
+            <a:r>
+              <a:rPr lang="en-US" sz="1500" b="1" dirty="0">
+                <a:solidFill>
+                  <a:srgbClr val="AC4D33"/>
+                </a:solidFill>
+                <a:latin typeface="Calibri" pitchFamily="34" charset="0"/>
+                <a:ea typeface="Calibri" pitchFamily="34" charset="-122"/>
+                <a:cs typeface="Calibri" pitchFamily="34" charset="-120"/>
+              </a:rPr>
+              <a:t>Giáo trình chính</a:t>
+            </a:r>
+            <a:endParaRPr lang="en-US" sz="1500" dirty="0"/>
+          </a:p>
+          <a:p>
+            <a:pPr indent="0" marL="0">
+              <a:buNone/>
+            </a:pPr>
+            <a:r>
+              <a:rPr lang="en-US" sz="1300" dirty="0">
+                <a:solidFill>
+                  <a:srgbClr val="3A2B28"/>
+                </a:solidFill>
+                <a:latin typeface="Calibri" pitchFamily="34" charset="0"/>
+                <a:ea typeface="Calibri" pitchFamily="34" charset="-122"/>
+                <a:cs typeface="Calibri" pitchFamily="34" charset="-120"/>
+              </a:rPr>
+              <a:t>Hà Nam Khánh Giao (2023), Giáo trình Giao tiếp kinh doanh, NXB Tài chính.</a:t>
+            </a:r>
+            <a:endParaRPr lang="en-US" sz="1500" dirty="0"/>
+          </a:p>
+        </p:txBody>
+      </p:sp>
+      <p:sp>
+        <p:nvSpPr>
+          <p:cNvPr id="11" name="Shape 8"/>
+          <p:cNvSpPr/>
+          <p:nvPr/>
+        </p:nvSpPr>
+        <p:spPr>
+          <a:xfrm>
+            <a:off x="502920" y="2950464"/>
+            <a:ext cx="11201400" cy="1322832"/>
+          </a:xfrm>
+          <a:prstGeom prst="roundRect">
+            <a:avLst>
+              <a:gd name="adj" fmla="val 6221"/>
+            </a:avLst>
           </a:prstGeom>
           <a:solidFill>
-            <a:srgbClr val="DC756A"/>
+            <a:srgbClr val="FDF1EF"/>
           </a:solidFill>
-          <a:ln>
-            <a:noFill/>
+          <a:ln w="15875">
+            <a:solidFill>
+              <a:srgbClr val="FBCEC9"/>
+            </a:solidFill>
+            <a:prstDash val="solid"/>
           </a:ln>
-          <a:effectLst/>
-        </p:spPr>
-        <p:style>
-          <a:lnRef idx="1">
-            <a:schemeClr val="accent1"/>
-          </a:lnRef>
-          <a:fillRef idx="3">
-            <a:schemeClr val="accent1"/>
-          </a:fillRef>
-          <a:effectRef idx="2">
-            <a:schemeClr val="accent1"/>
-          </a:effectRef>
-          <a:fontRef idx="minor">
-            <a:schemeClr val="lt1"/>
-          </a:fontRef>
-        </p:style>
-        <p:txBody>
-          <a:bodyPr rtlCol="0" anchor="ctr"/>
-          <a:lstStyle/>
-          <a:p>
-            <a:pPr algn="ctr"/>
-          </a:p>
-        </p:txBody>
-      </p:sp>
-      <p:sp>
-        <p:nvSpPr>
-          <p:cNvPr id="5" name="TextBox 4"/>
-          <p:cNvSpPr txBox="1"/>
-          <p:nvPr/>
-        </p:nvSpPr>
-        <p:spPr>
-          <a:xfrm>
-            <a:off x="1280160" y="2377440"/>
-            <a:ext cx="9692640" cy="411480"/>
-          </a:xfrm>
-          <a:prstGeom prst="rect">
-            <a:avLst/>
-          </a:prstGeom>
-          <a:noFill/>
-        </p:spPr>
-        <p:txBody>
-          <a:bodyPr wrap="none">
-            <a:spAutoFit/>
-          </a:bodyPr>
-          <a:lstStyle/>
-          <a:p>
-            <a:r>
-              <a:rPr sz="1500" b="1">
-                <a:solidFill>
-                  <a:srgbClr val="DC756A"/>
-                </a:solidFill>
-                <a:latin typeface="Calibri"/>
-              </a:rPr>
-              <a:t>MỤC 5.4</a:t>
-            </a:r>
-          </a:p>
-        </p:txBody>
-      </p:sp>
-      <p:sp>
-        <p:nvSpPr>
-          <p:cNvPr id="6" name="TextBox 5"/>
-          <p:cNvSpPr txBox="1"/>
-          <p:nvPr/>
-        </p:nvSpPr>
-        <p:spPr>
-          <a:xfrm>
-            <a:off x="1280160" y="2788920"/>
-            <a:ext cx="9601200" cy="1371600"/>
-          </a:xfrm>
-          <a:prstGeom prst="rect">
-            <a:avLst/>
-          </a:prstGeom>
-          <a:noFill/>
-        </p:spPr>
-        <p:txBody>
-          <a:bodyPr wrap="square">
-            <a:spAutoFit/>
-          </a:bodyPr>
-          <a:lstStyle/>
-          <a:p>
-            <a:r>
-              <a:rPr sz="3800" b="1">
+        </p:spPr>
+        <p:txBody>
+          <a:bodyPr/>
+          <a:p/>
+        </p:txBody>
+      </p:sp>
+      <p:sp>
+        <p:nvSpPr>
+          <p:cNvPr id="12" name="Text 9"/>
+          <p:cNvSpPr/>
+          <p:nvPr/>
+        </p:nvSpPr>
+        <p:spPr>
+          <a:xfrm>
+            <a:off x="722376" y="3005328"/>
+            <a:ext cx="10762488" cy="1213104"/>
+          </a:xfrm>
+          <a:prstGeom prst="rect">
+            <a:avLst/>
+          </a:prstGeom>
+          <a:noFill/>
+          <a:ln/>
+        </p:spPr>
+        <p:txBody>
+          <a:bodyPr wrap="square" lIns="0" tIns="0" rIns="0" bIns="0" rtlCol="0" anchor="ctr"/>
+          <a:lstStyle/>
+          <a:p>
+            <a:pPr indent="0" marL="0">
+              <a:buNone/>
+            </a:pPr>
+            <a:r>
+              <a:rPr lang="en-US" sz="1500" b="1" dirty="0">
                 <a:solidFill>
                   <a:srgbClr val="AC4D33"/>
                 </a:solidFill>
-                <a:latin typeface="Cambria"/>
-              </a:rPr>
-              <a:t>Soạn thảo văn bản thương mại</a:t>
-            </a:r>
-          </a:p>
-        </p:txBody>
-      </p:sp>
-      <p:sp>
-        <p:nvSpPr>
-          <p:cNvPr id="7" name="TextBox 6"/>
-          <p:cNvSpPr txBox="1"/>
-          <p:nvPr/>
-        </p:nvSpPr>
-        <p:spPr>
-          <a:xfrm>
-            <a:off x="1280160" y="4224528"/>
-            <a:ext cx="9418320" cy="640080"/>
-          </a:xfrm>
-          <a:prstGeom prst="rect">
-            <a:avLst/>
-          </a:prstGeom>
-          <a:noFill/>
-        </p:spPr>
-        <p:txBody>
-          <a:bodyPr wrap="square">
-            <a:spAutoFit/>
-          </a:bodyPr>
-          <a:lstStyle/>
-          <a:p>
-            <a:r>
-              <a:rPr sz="1450" i="1">
-                <a:solidFill>
-                  <a:srgbClr val="8A7A76"/>
-                </a:solidFill>
-                <a:latin typeface="Calibri"/>
-              </a:rPr>
-              <a:t>Thư tín, báo giá và hợp đồng — bộ hồ sơ đưa một thương vụ đi đến đích.</a:t>
-            </a:r>
-          </a:p>
-        </p:txBody>
-      </p:sp>
-      <p:sp>
-        <p:nvSpPr>
-          <p:cNvPr id="8" name="TextBox 7"/>
-          <p:cNvSpPr txBox="1"/>
-          <p:nvPr/>
-        </p:nvSpPr>
-        <p:spPr>
-          <a:xfrm>
-            <a:off x="502920" y="6419088"/>
-            <a:ext cx="7772400" cy="292608"/>
-          </a:xfrm>
-          <a:prstGeom prst="rect">
-            <a:avLst/>
-          </a:prstGeom>
-          <a:noFill/>
-        </p:spPr>
-        <p:txBody>
-          <a:bodyPr wrap="none">
-            <a:spAutoFit/>
-          </a:bodyPr>
-          <a:lstStyle/>
-          <a:p>
-            <a:r>
-              <a:rPr sz="900">
-                <a:solidFill>
-                  <a:srgbClr val="8A7A76"/>
-                </a:solidFill>
-                <a:latin typeface="Calibri"/>
-              </a:rPr>
-              <a:t>Je m'appelle Huong  •  GV. Đỗ Thùy Hương  •  EC1103</a:t>
-            </a:r>
-          </a:p>
-        </p:txBody>
-      </p:sp>
-      <p:sp>
-        <p:nvSpPr>
-          <p:cNvPr id="9" name="TextBox 8"/>
-          <p:cNvSpPr txBox="1"/>
-          <p:nvPr/>
-        </p:nvSpPr>
-        <p:spPr>
-          <a:xfrm>
-            <a:off x="9326880" y="6419088"/>
-            <a:ext cx="1920240" cy="292608"/>
-          </a:xfrm>
-          <a:prstGeom prst="rect">
-            <a:avLst/>
-          </a:prstGeom>
-          <a:noFill/>
-        </p:spPr>
-        <p:txBody>
-          <a:bodyPr wrap="none">
-            <a:spAutoFit/>
-          </a:bodyPr>
-          <a:lstStyle/>
-          <a:p>
-            <a:pPr algn="r"/>
-            <a:r>
-              <a:rPr sz="900">
-                <a:solidFill>
-                  <a:srgbClr val="8A7A76"/>
-                </a:solidFill>
-                <a:latin typeface="Calibri"/>
-              </a:rPr>
-              <a:t>Chương 5</a:t>
-            </a:r>
+                <a:latin typeface="Calibri" pitchFamily="34" charset="0"/>
+                <a:ea typeface="Calibri" pitchFamily="34" charset="-122"/>
+                <a:cs typeface="Calibri" pitchFamily="34" charset="-120"/>
+              </a:rPr>
+              <a:t>Văn bản pháp lý bắt buộc</a:t>
+            </a:r>
+            <a:endParaRPr lang="en-US" sz="1500" dirty="0"/>
+          </a:p>
+          <a:p>
+            <a:pPr indent="0" marL="0">
+              <a:buNone/>
+            </a:pPr>
+            <a:r>
+              <a:rPr lang="en-US" sz="1300" dirty="0">
+                <a:solidFill>
+                  <a:srgbClr val="3A2B28"/>
+                </a:solidFill>
+                <a:latin typeface="Calibri" pitchFamily="34" charset="0"/>
+                <a:ea typeface="Calibri" pitchFamily="34" charset="-122"/>
+                <a:cs typeface="Calibri" pitchFamily="34" charset="-120"/>
+              </a:rPr>
+              <a:t>Nghị định 30/2020/NĐ-CP ngày 05/3/2020 của Chính phủ về công tác văn thư — hướng dẫn thể thức và kỹ thuật trình bày văn bản hành chính.</a:t>
+            </a:r>
+            <a:endParaRPr lang="en-US" sz="1500" dirty="0"/>
+          </a:p>
+        </p:txBody>
+      </p:sp>
+      <p:sp>
+        <p:nvSpPr>
+          <p:cNvPr id="13" name="Shape 10"/>
+          <p:cNvSpPr/>
+          <p:nvPr/>
+        </p:nvSpPr>
+        <p:spPr>
+          <a:xfrm>
+            <a:off x="502920" y="4437888"/>
+            <a:ext cx="11201400" cy="1322832"/>
+          </a:xfrm>
+          <a:prstGeom prst="roundRect">
+            <a:avLst>
+              <a:gd name="adj" fmla="val 6221"/>
+            </a:avLst>
+          </a:prstGeom>
+          <a:solidFill>
+            <a:srgbClr val="FDF1EF"/>
+          </a:solidFill>
+          <a:ln w="15875">
+            <a:solidFill>
+              <a:srgbClr val="FBCEC9"/>
+            </a:solidFill>
+            <a:prstDash val="solid"/>
+          </a:ln>
+        </p:spPr>
+        <p:txBody>
+          <a:bodyPr/>
+          <a:p/>
+        </p:txBody>
+      </p:sp>
+      <p:sp>
+        <p:nvSpPr>
+          <p:cNvPr id="14" name="Text 11"/>
+          <p:cNvSpPr/>
+          <p:nvPr/>
+        </p:nvSpPr>
+        <p:spPr>
+          <a:xfrm>
+            <a:off x="722376" y="4492752"/>
+            <a:ext cx="10762488" cy="1213104"/>
+          </a:xfrm>
+          <a:prstGeom prst="rect">
+            <a:avLst/>
+          </a:prstGeom>
+          <a:noFill/>
+          <a:ln/>
+        </p:spPr>
+        <p:txBody>
+          <a:bodyPr wrap="square" lIns="0" tIns="0" rIns="0" bIns="0" rtlCol="0" anchor="ctr"/>
+          <a:lstStyle/>
+          <a:p>
+            <a:pPr indent="0" marL="0">
+              <a:buNone/>
+            </a:pPr>
+            <a:r>
+              <a:rPr lang="en-US" sz="1500" b="1" dirty="0">
+                <a:solidFill>
+                  <a:srgbClr val="AC4D33"/>
+                </a:solidFill>
+                <a:latin typeface="Calibri" pitchFamily="34" charset="0"/>
+                <a:ea typeface="Calibri" pitchFamily="34" charset="-122"/>
+                <a:cs typeface="Calibri" pitchFamily="34" charset="-120"/>
+              </a:rPr>
+              <a:t>Học liệu của giảng viên</a:t>
+            </a:r>
+            <a:endParaRPr lang="en-US" sz="1500" dirty="0"/>
+          </a:p>
+          <a:p>
+            <a:pPr indent="0" marL="0">
+              <a:buNone/>
+            </a:pPr>
+            <a:r>
+              <a:rPr lang="en-US" sz="1300" dirty="0">
+                <a:solidFill>
+                  <a:srgbClr val="3A2B28"/>
+                </a:solidFill>
+                <a:latin typeface="Calibri" pitchFamily="34" charset="0"/>
+                <a:ea typeface="Calibri" pitchFamily="34" charset="-122"/>
+                <a:cs typeface="Calibri" pitchFamily="34" charset="-120"/>
+              </a:rPr>
+              <a:t>Slide, biểu mẫu văn bản, tình huống và bài tập do GV. Đỗ Thùy Hương biên soạn; cung cấp sau mỗi buổi học.</a:t>
+            </a:r>
+            <a:endParaRPr lang="en-US" sz="1500" dirty="0"/>
           </a:p>
         </p:txBody>
       </p:sp>
@@ -11061,6 +11074,327 @@
 </file>
 
 <file path=ppt/slides/slide4.xml><?xml version="1.0" encoding="utf-8"?>
+<p:sld xmlns:a="http://schemas.openxmlformats.org/drawingml/2006/main" xmlns:p="http://schemas.openxmlformats.org/presentationml/2006/main" xmlns:r="http://schemas.openxmlformats.org/officeDocument/2006/relationships">
+  <p:cSld>
+    <p:spTree>
+      <p:nvGrpSpPr>
+        <p:cNvPr id="1" name=""/>
+        <p:cNvGrpSpPr/>
+        <p:nvPr/>
+      </p:nvGrpSpPr>
+      <p:grpSpPr/>
+      <p:sp>
+        <p:nvSpPr>
+          <p:cNvPr id="2" name="Rectangle 1"/>
+          <p:cNvSpPr/>
+          <p:nvPr/>
+        </p:nvSpPr>
+        <p:spPr>
+          <a:xfrm>
+            <a:off x="0" y="0"/>
+            <a:ext cx="12191695" cy="6858000"/>
+          </a:xfrm>
+          <a:prstGeom prst="rect">
+            <a:avLst/>
+          </a:prstGeom>
+          <a:solidFill>
+            <a:srgbClr val="FDFBF8"/>
+          </a:solidFill>
+          <a:ln>
+            <a:noFill/>
+          </a:ln>
+          <a:effectLst/>
+        </p:spPr>
+        <p:style>
+          <a:lnRef idx="1">
+            <a:schemeClr val="accent1"/>
+          </a:lnRef>
+          <a:fillRef idx="3">
+            <a:schemeClr val="accent1"/>
+          </a:fillRef>
+          <a:effectRef idx="2">
+            <a:schemeClr val="accent1"/>
+          </a:effectRef>
+          <a:fontRef idx="minor">
+            <a:schemeClr val="lt1"/>
+          </a:fontRef>
+        </p:style>
+        <p:txBody>
+          <a:bodyPr rtlCol="0" anchor="ctr"/>
+          <a:lstStyle/>
+          <a:p>
+            <a:pPr algn="ctr"/>
+          </a:p>
+        </p:txBody>
+      </p:sp>
+      <p:sp>
+        <p:nvSpPr>
+          <p:cNvPr id="3" name="Rectangle 2"/>
+          <p:cNvSpPr/>
+          <p:nvPr/>
+        </p:nvSpPr>
+        <p:spPr>
+          <a:xfrm>
+            <a:off x="0" y="2103120"/>
+            <a:ext cx="12191695" cy="2743200"/>
+          </a:xfrm>
+          <a:prstGeom prst="rect">
+            <a:avLst/>
+          </a:prstGeom>
+          <a:solidFill>
+            <a:srgbClr val="FDF1EF"/>
+          </a:solidFill>
+          <a:ln>
+            <a:noFill/>
+          </a:ln>
+          <a:effectLst/>
+        </p:spPr>
+        <p:style>
+          <a:lnRef idx="1">
+            <a:schemeClr val="accent1"/>
+          </a:lnRef>
+          <a:fillRef idx="3">
+            <a:schemeClr val="accent1"/>
+          </a:fillRef>
+          <a:effectRef idx="2">
+            <a:schemeClr val="accent1"/>
+          </a:effectRef>
+          <a:fontRef idx="minor">
+            <a:schemeClr val="lt1"/>
+          </a:fontRef>
+        </p:style>
+        <p:txBody>
+          <a:bodyPr rtlCol="0" anchor="ctr"/>
+          <a:lstStyle/>
+          <a:p>
+            <a:pPr algn="ctr"/>
+          </a:p>
+        </p:txBody>
+      </p:sp>
+      <p:sp>
+        <p:nvSpPr>
+          <p:cNvPr id="4" name="Rectangle 3"/>
+          <p:cNvSpPr/>
+          <p:nvPr/>
+        </p:nvSpPr>
+        <p:spPr>
+          <a:xfrm>
+            <a:off x="0" y="0"/>
+            <a:ext cx="274320" cy="6858000"/>
+          </a:xfrm>
+          <a:prstGeom prst="rect">
+            <a:avLst/>
+          </a:prstGeom>
+          <a:solidFill>
+            <a:srgbClr val="DC756A"/>
+          </a:solidFill>
+          <a:ln>
+            <a:noFill/>
+          </a:ln>
+          <a:effectLst/>
+        </p:spPr>
+        <p:style>
+          <a:lnRef idx="1">
+            <a:schemeClr val="accent1"/>
+          </a:lnRef>
+          <a:fillRef idx="3">
+            <a:schemeClr val="accent1"/>
+          </a:fillRef>
+          <a:effectRef idx="2">
+            <a:schemeClr val="accent1"/>
+          </a:effectRef>
+          <a:fontRef idx="minor">
+            <a:schemeClr val="lt1"/>
+          </a:fontRef>
+        </p:style>
+        <p:txBody>
+          <a:bodyPr rtlCol="0" anchor="ctr"/>
+          <a:lstStyle/>
+          <a:p>
+            <a:pPr algn="ctr"/>
+          </a:p>
+        </p:txBody>
+      </p:sp>
+      <p:sp>
+        <p:nvSpPr>
+          <p:cNvPr id="5" name="TextBox 4"/>
+          <p:cNvSpPr txBox="1"/>
+          <p:nvPr/>
+        </p:nvSpPr>
+        <p:spPr>
+          <a:xfrm>
+            <a:off x="1280160" y="2377440"/>
+            <a:ext cx="9692640" cy="411480"/>
+          </a:xfrm>
+          <a:prstGeom prst="rect">
+            <a:avLst/>
+          </a:prstGeom>
+          <a:noFill/>
+        </p:spPr>
+        <p:txBody>
+          <a:bodyPr wrap="none">
+            <a:spAutoFit/>
+          </a:bodyPr>
+          <a:lstStyle/>
+          <a:p>
+            <a:r>
+              <a:rPr sz="1500" b="1">
+                <a:solidFill>
+                  <a:srgbClr val="DC756A"/>
+                </a:solidFill>
+                <a:latin typeface="Calibri"/>
+              </a:rPr>
+              <a:t>MỤC 5.1 – 5.2</a:t>
+            </a:r>
+          </a:p>
+        </p:txBody>
+      </p:sp>
+      <p:sp>
+        <p:nvSpPr>
+          <p:cNvPr id="6" name="TextBox 5"/>
+          <p:cNvSpPr txBox="1"/>
+          <p:nvPr/>
+        </p:nvSpPr>
+        <p:spPr>
+          <a:xfrm>
+            <a:off x="1280160" y="2788920"/>
+            <a:ext cx="9601200" cy="1371600"/>
+          </a:xfrm>
+          <a:prstGeom prst="rect">
+            <a:avLst/>
+          </a:prstGeom>
+          <a:noFill/>
+        </p:spPr>
+        <p:txBody>
+          <a:bodyPr wrap="square">
+            <a:spAutoFit/>
+          </a:bodyPr>
+          <a:lstStyle/>
+          <a:p>
+            <a:r>
+              <a:rPr sz="3300" b="1">
+                <a:solidFill>
+                  <a:srgbClr val="AC4D33"/>
+                </a:solidFill>
+                <a:latin typeface="Cambria"/>
+              </a:rPr>
+              <a:t>Khái niệm, phân loại và thể thức văn bản</a:t>
+            </a:r>
+          </a:p>
+        </p:txBody>
+      </p:sp>
+      <p:sp>
+        <p:nvSpPr>
+          <p:cNvPr id="7" name="TextBox 6"/>
+          <p:cNvSpPr txBox="1"/>
+          <p:nvPr/>
+        </p:nvSpPr>
+        <p:spPr>
+          <a:xfrm>
+            <a:off x="1280160" y="4224528"/>
+            <a:ext cx="9418320" cy="640080"/>
+          </a:xfrm>
+          <a:prstGeom prst="rect">
+            <a:avLst/>
+          </a:prstGeom>
+          <a:noFill/>
+        </p:spPr>
+        <p:txBody>
+          <a:bodyPr wrap="square">
+            <a:spAutoFit/>
+          </a:bodyPr>
+          <a:lstStyle/>
+          <a:p>
+            <a:r>
+              <a:rPr sz="1450" i="1">
+                <a:solidFill>
+                  <a:srgbClr val="8A7A76"/>
+                </a:solidFill>
+                <a:latin typeface="Calibri"/>
+              </a:rPr>
+              <a:t>Nền tảng pháp lý và kỹ thuật: văn bản là gì và một trang văn bản đúng chuẩn trông thế nào.</a:t>
+            </a:r>
+          </a:p>
+        </p:txBody>
+      </p:sp>
+      <p:sp>
+        <p:nvSpPr>
+          <p:cNvPr id="8" name="TextBox 7"/>
+          <p:cNvSpPr txBox="1"/>
+          <p:nvPr/>
+        </p:nvSpPr>
+        <p:spPr>
+          <a:xfrm>
+            <a:off x="502920" y="6419088"/>
+            <a:ext cx="7772400" cy="292608"/>
+          </a:xfrm>
+          <a:prstGeom prst="rect">
+            <a:avLst/>
+          </a:prstGeom>
+          <a:noFill/>
+        </p:spPr>
+        <p:txBody>
+          <a:bodyPr wrap="none">
+            <a:spAutoFit/>
+          </a:bodyPr>
+          <a:lstStyle/>
+          <a:p>
+            <a:r>
+              <a:rPr sz="900">
+                <a:solidFill>
+                  <a:srgbClr val="8A7A76"/>
+                </a:solidFill>
+                <a:latin typeface="Calibri"/>
+              </a:rPr>
+              <a:t>Je m'appelle Huong  •  GV. Đỗ Thùy Hương  •  EC1103</a:t>
+            </a:r>
+          </a:p>
+        </p:txBody>
+      </p:sp>
+      <p:sp>
+        <p:nvSpPr>
+          <p:cNvPr id="9" name="TextBox 8"/>
+          <p:cNvSpPr txBox="1"/>
+          <p:nvPr/>
+        </p:nvSpPr>
+        <p:spPr>
+          <a:xfrm>
+            <a:off x="9326880" y="6419088"/>
+            <a:ext cx="1920240" cy="292608"/>
+          </a:xfrm>
+          <a:prstGeom prst="rect">
+            <a:avLst/>
+          </a:prstGeom>
+          <a:noFill/>
+        </p:spPr>
+        <p:txBody>
+          <a:bodyPr wrap="none">
+            <a:spAutoFit/>
+          </a:bodyPr>
+          <a:lstStyle/>
+          <a:p>
+            <a:pPr algn="r"/>
+            <a:r>
+              <a:rPr sz="900">
+                <a:solidFill>
+                  <a:srgbClr val="8A7A76"/>
+                </a:solidFill>
+                <a:latin typeface="Calibri"/>
+              </a:rPr>
+              <a:t>Chương 5</a:t>
+            </a:r>
+          </a:p>
+        </p:txBody>
+      </p:sp>
+    </p:spTree>
+  </p:cSld>
+  <p:clrMapOvr>
+    <a:masterClrMapping/>
+  </p:clrMapOvr>
+</p:sld>
+</file>
+
+<file path=ppt/slides/slide5.xml><?xml version="1.0" encoding="utf-8"?>
 <p:sld xmlns:a="http://schemas.openxmlformats.org/drawingml/2006/main" xmlns:r="http://schemas.openxmlformats.org/officeDocument/2006/relationships" xmlns:p="http://schemas.openxmlformats.org/presentationml/2006/main">
   <p:cSld name="Slide 4">
     <p:bg>
@@ -11596,7 +11930,7 @@
 </p:sld>
 </file>
 
-<file path=ppt/slides/slide5.xml><?xml version="1.0" encoding="utf-8"?>
+<file path=ppt/slides/slide6.xml><?xml version="1.0" encoding="utf-8"?>
 <p:sld xmlns:a="http://schemas.openxmlformats.org/drawingml/2006/main" xmlns:r="http://schemas.openxmlformats.org/officeDocument/2006/relationships" xmlns:p="http://schemas.openxmlformats.org/presentationml/2006/main">
   <p:cSld name="Slide 5">
     <p:bg>
@@ -12219,7 +12553,7 @@
 </p:sld>
 </file>
 
-<file path=ppt/slides/slide6.xml><?xml version="1.0" encoding="utf-8"?>
+<file path=ppt/slides/slide7.xml><?xml version="1.0" encoding="utf-8"?>
 <p:sld xmlns:a="http://schemas.openxmlformats.org/drawingml/2006/main" xmlns:r="http://schemas.openxmlformats.org/officeDocument/2006/relationships" xmlns:p="http://schemas.openxmlformats.org/presentationml/2006/main">
   <p:cSld name="Slide 6">
     <p:bg>
@@ -12842,7 +13176,7 @@
 </p:sld>
 </file>
 
-<file path=ppt/slides/slide7.xml><?xml version="1.0" encoding="utf-8"?>
+<file path=ppt/slides/slide8.xml><?xml version="1.0" encoding="utf-8"?>
 <p:sld xmlns:a="http://schemas.openxmlformats.org/drawingml/2006/main" xmlns:r="http://schemas.openxmlformats.org/officeDocument/2006/relationships" xmlns:p="http://schemas.openxmlformats.org/presentationml/2006/main">
   <p:cSld name="Slide 7">
     <p:bg>
@@ -13141,7 +13475,7 @@
 </p:sld>
 </file>
 
-<file path=ppt/slides/slide8.xml><?xml version="1.0" encoding="utf-8"?>
+<file path=ppt/slides/slide9.xml><?xml version="1.0" encoding="utf-8"?>
 <p:sld xmlns:a="http://schemas.openxmlformats.org/drawingml/2006/main" xmlns:r="http://schemas.openxmlformats.org/officeDocument/2006/relationships" xmlns:p="http://schemas.openxmlformats.org/presentationml/2006/main">
   <p:cSld name="Slide 8">
     <p:bg>
@@ -13753,340 +14087,6 @@
               <a:t>Tiếng Việt chuẩn mực; viết hoa, viết tắt đúng quy định; số liệu dùng chữ số Ả Rập.</a:t>
             </a:r>
             <a:endParaRPr lang="en-US" sz="1500" dirty="0"/>
-          </a:p>
-        </p:txBody>
-      </p:sp>
-    </p:spTree>
-  </p:cSld>
-  <p:clrMapOvr>
-    <a:masterClrMapping/>
-  </p:clrMapOvr>
-</p:sld>
-</file>
-
-<file path=ppt/slides/slide9.xml><?xml version="1.0" encoding="utf-8"?>
-<p:sld xmlns:a="http://schemas.openxmlformats.org/drawingml/2006/main" xmlns:r="http://schemas.openxmlformats.org/officeDocument/2006/relationships" xmlns:p="http://schemas.openxmlformats.org/presentationml/2006/main">
-  <p:cSld name="Slide 9">
-    <p:bg>
-      <p:bgPr>
-        <a:solidFill>
-          <a:srgbClr val="FDFBF8"/>
-        </a:solidFill>
-      </p:bgPr>
-    </p:bg>
-    <p:spTree>
-      <p:nvGrpSpPr>
-        <p:cNvPr id="1" name=""/>
-        <p:cNvGrpSpPr/>
-        <p:nvPr/>
-      </p:nvGrpSpPr>
-      <p:grpSpPr>
-        <a:xfrm>
-          <a:off x="0" y="0"/>
-          <a:ext cx="0" cy="0"/>
-          <a:chOff x="0" y="0"/>
-          <a:chExt cx="0" cy="0"/>
-        </a:xfrm>
-      </p:grpSpPr>
-      <p:pic>
-        <p:nvPicPr>
-          <p:cNvPr id="2" name="Image 0" descr="assets/logo_tron.png">    </p:cNvPr>
-          <p:cNvPicPr>
-            <a:picLocks noChangeAspect="1"/>
-          </p:cNvPicPr>
-          <p:nvPr/>
-        </p:nvPicPr>
-        <p:blipFill>
-          <a:blip r:embed="rId1"/>
-          <a:stretch>
-            <a:fillRect/>
-          </a:stretch>
-        </p:blipFill>
-        <p:spPr>
-          <a:xfrm>
-            <a:off x="411480" y="6327648"/>
-            <a:ext cx="384048" cy="384048"/>
-          </a:xfrm>
-          <a:prstGeom prst="rect">
-            <a:avLst/>
-          </a:prstGeom>
-        </p:spPr>
-      </p:pic>
-      <p:sp>
-        <p:nvSpPr>
-          <p:cNvPr id="3" name="Text 0"/>
-          <p:cNvSpPr/>
-          <p:nvPr/>
-        </p:nvSpPr>
-        <p:spPr>
-          <a:xfrm>
-            <a:off x="868680" y="6355080"/>
-            <a:ext cx="7498080" cy="310896"/>
-          </a:xfrm>
-          <a:prstGeom prst="rect">
-            <a:avLst/>
-          </a:prstGeom>
-          <a:noFill/>
-          <a:ln/>
-        </p:spPr>
-        <p:txBody>
-          <a:bodyPr wrap="square" lIns="0" tIns="0" rIns="0" bIns="0" rtlCol="0" anchor="ctr"/>
-          <a:lstStyle/>
-          <a:p>
-            <a:pPr indent="0" marL="0">
-              <a:buNone/>
-            </a:pPr>
-            <a:r>
-              <a:rPr lang="en-US" sz="900" dirty="0">
-                <a:solidFill>
-                  <a:srgbClr val="8A7A76"/>
-                </a:solidFill>
-                <a:latin typeface="Calibri" pitchFamily="34" charset="0"/>
-                <a:ea typeface="Calibri" pitchFamily="34" charset="-122"/>
-                <a:cs typeface="Calibri" pitchFamily="34" charset="-120"/>
-              </a:rPr>
-              <a:t>Je m'appelle Huong  •  GV. Đỗ Thùy Hương  •  EC1103</a:t>
-            </a:r>
-            <a:endParaRPr lang="en-US" sz="900" dirty="0"/>
-          </a:p>
-        </p:txBody>
-      </p:sp>
-      <p:sp>
-        <p:nvSpPr>
-          <p:cNvPr id="4" name="Text 1"/>
-          <p:cNvSpPr/>
-          <p:nvPr/>
-        </p:nvSpPr>
-        <p:spPr>
-          <a:xfrm>
-            <a:off x="8503920" y="6355080"/>
-            <a:ext cx="2743200" cy="310896"/>
-          </a:xfrm>
-          <a:prstGeom prst="rect">
-            <a:avLst/>
-          </a:prstGeom>
-          <a:noFill/>
-          <a:ln/>
-        </p:spPr>
-        <p:txBody>
-          <a:bodyPr wrap="square" lIns="0" tIns="0" rIns="0" bIns="0" rtlCol="0" anchor="ctr"/>
-          <a:lstStyle/>
-          <a:p>
-            <a:pPr algn="r" indent="0" marL="0">
-              <a:buNone/>
-            </a:pPr>
-            <a:r>
-              <a:rPr lang="en-US" sz="900" dirty="0">
-                <a:solidFill>
-                  <a:srgbClr val="8A7A76"/>
-                </a:solidFill>
-                <a:latin typeface="Calibri" pitchFamily="34" charset="0"/>
-                <a:ea typeface="Calibri" pitchFamily="34" charset="-122"/>
-                <a:cs typeface="Calibri" pitchFamily="34" charset="-120"/>
-              </a:rPr>
-              <a:t>Chương 5</a:t>
-            </a:r>
-            <a:endParaRPr lang="en-US" sz="900" dirty="0"/>
-          </a:p>
-        </p:txBody>
-      </p:sp>
-      <p:sp>
-        <p:nvSpPr>
-          <p:cNvPr id="5" name="Shape 2"/>
-          <p:cNvSpPr/>
-          <p:nvPr/>
-        </p:nvSpPr>
-        <p:spPr>
-          <a:xfrm>
-            <a:off x="11430000" y="6327648"/>
-            <a:ext cx="365760" cy="365760"/>
-          </a:xfrm>
-          <a:prstGeom prst="ellipse">
-            <a:avLst/>
-          </a:prstGeom>
-          <a:solidFill>
-            <a:srgbClr val="DC756A"/>
-          </a:solidFill>
-          <a:ln/>
-        </p:spPr>
-        <p:txBody>
-          <a:bodyPr/>
-          <a:p/>
-        </p:txBody>
-      </p:sp>
-      <p:sp>
-        <p:nvSpPr>
-          <p:cNvPr id="6" name="Text 3"/>
-          <p:cNvSpPr/>
-          <p:nvPr/>
-        </p:nvSpPr>
-        <p:spPr>
-          <a:xfrm>
-            <a:off x="11430000" y="6327648"/>
-            <a:ext cx="365760" cy="365760"/>
-          </a:xfrm>
-          <a:prstGeom prst="rect">
-            <a:avLst/>
-          </a:prstGeom>
-          <a:noFill/>
-          <a:ln/>
-        </p:spPr>
-        <p:txBody>
-          <a:bodyPr wrap="square" lIns="0" tIns="0" rIns="0" bIns="0" rtlCol="0" anchor="ctr"/>
-          <a:lstStyle/>
-          <a:p>
-            <a:pPr algn="ctr" indent="0" marL="0">
-              <a:buNone/>
-            </a:pPr>
-            <a:r>
-              <a:rPr lang="en-US" sz="1000" b="1" dirty="0">
-                <a:solidFill>
-                  <a:srgbClr val="FFFFFF"/>
-                </a:solidFill>
-                <a:latin typeface="Calibri" pitchFamily="34" charset="0"/>
-                <a:ea typeface="Calibri" pitchFamily="34" charset="-122"/>
-                <a:cs typeface="Calibri" pitchFamily="34" charset="-120"/>
-              </a:rPr>
-              <a:t>9</a:t>
-            </a:r>
-            <a:endParaRPr lang="en-US" sz="1000" dirty="0"/>
-          </a:p>
-        </p:txBody>
-      </p:sp>
-      <p:sp>
-        <p:nvSpPr>
-          <p:cNvPr id="7" name="Text 4"/>
-          <p:cNvSpPr/>
-          <p:nvPr/>
-        </p:nvSpPr>
-        <p:spPr>
-          <a:xfrm>
-            <a:off x="502920" y="310896"/>
-            <a:ext cx="11155680" cy="274320"/>
-          </a:xfrm>
-          <a:prstGeom prst="rect">
-            <a:avLst/>
-          </a:prstGeom>
-          <a:noFill/>
-          <a:ln/>
-        </p:spPr>
-        <p:txBody>
-          <a:bodyPr wrap="square" lIns="0" tIns="0" rIns="0" bIns="0" rtlCol="0" anchor="ctr"/>
-          <a:lstStyle/>
-          <a:p>
-            <a:pPr indent="0" marL="0">
-              <a:buNone/>
-            </a:pPr>
-            <a:r>
-              <a:rPr lang="en-US" sz="1100" b="1" spc="300" kern="0" dirty="0">
-                <a:solidFill>
-                  <a:srgbClr val="DC756A"/>
-                </a:solidFill>
-                <a:latin typeface="Calibri" pitchFamily="34" charset="0"/>
-                <a:ea typeface="Calibri" pitchFamily="34" charset="-122"/>
-                <a:cs typeface="Calibri" pitchFamily="34" charset="-120"/>
-              </a:rPr>
-              <a:t>5.3</a:t>
-            </a:r>
-            <a:endParaRPr lang="en-US" sz="1100" dirty="0"/>
-          </a:p>
-        </p:txBody>
-      </p:sp>
-      <p:sp>
-        <p:nvSpPr>
-          <p:cNvPr id="8" name="Text 5"/>
-          <p:cNvSpPr/>
-          <p:nvPr/>
-        </p:nvSpPr>
-        <p:spPr>
-          <a:xfrm>
-            <a:off x="502920" y="576072"/>
-            <a:ext cx="11155680" cy="713232"/>
-          </a:xfrm>
-          <a:prstGeom prst="rect">
-            <a:avLst/>
-          </a:prstGeom>
-          <a:noFill/>
-          <a:ln/>
-        </p:spPr>
-        <p:txBody>
-          <a:bodyPr wrap="square" lIns="0" tIns="0" rIns="0" bIns="0" rtlCol="0" anchor="ctr"/>
-          <a:lstStyle/>
-          <a:p>
-            <a:pPr indent="0" marL="0">
-              <a:buNone/>
-            </a:pPr>
-            <a:r>
-              <a:rPr lang="en-US" sz="2700" b="1" dirty="0">
-                <a:solidFill>
-                  <a:srgbClr val="AC4D33"/>
-                </a:solidFill>
-                <a:latin typeface="Cambria" pitchFamily="34" charset="0"/>
-                <a:ea typeface="Cambria" pitchFamily="34" charset="-122"/>
-                <a:cs typeface="Cambria" pitchFamily="34" charset="-120"/>
-              </a:rPr>
-              <a:t>Năm văn bản hành chính thông dụng</a:t>
-            </a:r>
-            <a:endParaRPr lang="en-US" sz="2700" dirty="0"/>
-          </a:p>
-        </p:txBody>
-      </p:sp>
-      <p:pic>
-        <p:nvPicPr>
-          <p:cNvPr id="9" name="Picture 8" descr="c5-chuoi-van-ban-nt.png"/>
-          <p:cNvPicPr>
-            <a:picLocks noChangeAspect="1"/>
-          </p:cNvPicPr>
-          <p:nvPr/>
-        </p:nvPicPr>
-        <p:blipFill>
-          <a:blip r:embed="rId4"/>
-          <a:stretch>
-            <a:fillRect/>
-          </a:stretch>
-        </p:blipFill>
-        <p:spPr>
-          <a:xfrm>
-            <a:off x="981171" y="1481328"/>
-            <a:ext cx="10229353" cy="2940939"/>
-          </a:xfrm>
-          <a:prstGeom prst="rect">
-            <a:avLst/>
-          </a:prstGeom>
-        </p:spPr>
-      </p:pic>
-      <p:sp>
-        <p:nvSpPr>
-          <p:cNvPr id="10" name="TextBox 9"/>
-          <p:cNvSpPr txBox="1"/>
-          <p:nvPr/>
-        </p:nvSpPr>
-        <p:spPr>
-          <a:xfrm>
-            <a:off x="548640" y="4495419"/>
-            <a:ext cx="11109960" cy="310896"/>
-          </a:xfrm>
-          <a:prstGeom prst="rect">
-            <a:avLst/>
-          </a:prstGeom>
-          <a:noFill/>
-        </p:spPr>
-        <p:txBody>
-          <a:bodyPr wrap="square">
-            <a:spAutoFit/>
-          </a:bodyPr>
-          <a:lstStyle/>
-          <a:p>
-            <a:pPr algn="ctr"/>
-            <a:r>
-              <a:rPr sz="1150" i="1">
-                <a:solidFill>
-                  <a:srgbClr val="8A7A76"/>
-                </a:solidFill>
-                <a:latin typeface="Calibri"/>
-              </a:rPr>
-              <a:t>Chuỗi văn bản của một thương vụ — sinh viên sẽ soạn lại đúng chuỗi này trong phần thực hành.</a:t>
-            </a:r>
           </a:p>
         </p:txBody>
       </p:sp>

--- a/slides/05-soan-thao-van-ban.pptx
+++ b/slides/05-soan-thao-van-ban.pptx
@@ -3097,7 +3097,7 @@
                 <a:ea typeface="Calibri" pitchFamily="34" charset="-122"/>
                 <a:cs typeface="Calibri" pitchFamily="34" charset="-120"/>
               </a:rPr>
-              <a:t>© Đỗ Thùy Hương, 2026 — Bài giảng biên soạn cho lớp giảng dạy trực tiếp. Vui lòng ghi nguồn khi sử dụng.</a:t>
+              <a:t>© Đỗ Thùy Hương, 2026 — Bài giảng biên soạn cho lớp giảng dạy từ xa. Vui lòng ghi nguồn khi sử dụng.</a:t>
             </a:r>
             <a:endParaRPr lang="en-US" sz="900" dirty="0"/>
           </a:p>
@@ -3683,7 +3683,7 @@
                 </a:solidFill>
                 <a:latin typeface="Calibri"/>
               </a:rPr>
-              <a:t>Je m'appelle Huong  •  GV. Đỗ Thùy Hương  •  EC1103</a:t>
+              <a:t>Je m'appelle Huong  •  GV. Đỗ Thùy Hương  •  EC6000TX</a:t>
             </a:r>
           </a:p>
         </p:txBody>
@@ -4004,7 +4004,7 @@
                 </a:solidFill>
                 <a:latin typeface="Calibri"/>
               </a:rPr>
-              <a:t>Je m'appelle Huong  •  GV. Đỗ Thùy Hương  •  EC1103</a:t>
+              <a:t>Je m'appelle Huong  •  GV. Đỗ Thùy Hương  •  EC6000TX</a:t>
             </a:r>
           </a:p>
         </p:txBody>
@@ -4133,7 +4133,7 @@
                 <a:ea typeface="Calibri" pitchFamily="34" charset="-122"/>
                 <a:cs typeface="Calibri" pitchFamily="34" charset="-120"/>
               </a:rPr>
-              <a:t>Je m'appelle Huong  •  GV. Đỗ Thùy Hương  •  EC1103</a:t>
+              <a:t>Je m'appelle Huong  •  GV. Đỗ Thùy Hương  •  EC6000TX</a:t>
             </a:r>
             <a:endParaRPr lang="en-US" sz="900" dirty="0"/>
           </a:p>
@@ -4467,7 +4467,7 @@
                 <a:ea typeface="Calibri" pitchFamily="34" charset="-122"/>
                 <a:cs typeface="Calibri" pitchFamily="34" charset="-120"/>
               </a:rPr>
-              <a:t>Je m'appelle Huong  •  GV. Đỗ Thùy Hương  •  EC1103</a:t>
+              <a:t>Je m'appelle Huong  •  GV. Đỗ Thùy Hương  •  EC6000TX</a:t>
             </a:r>
             <a:endParaRPr lang="en-US" sz="900" dirty="0"/>
           </a:p>
@@ -5090,7 +5090,7 @@
                 <a:ea typeface="Calibri" pitchFamily="34" charset="-122"/>
                 <a:cs typeface="Calibri" pitchFamily="34" charset="-120"/>
               </a:rPr>
-              <a:t>Je m'appelle Huong  •  GV. Đỗ Thùy Hương  •  EC1103</a:t>
+              <a:t>Je m'appelle Huong  •  GV. Đỗ Thùy Hương  •  EC6000TX</a:t>
             </a:r>
             <a:endParaRPr lang="en-US" sz="900" dirty="0"/>
           </a:p>
@@ -5818,7 +5818,7 @@
                 </a:solidFill>
                 <a:latin typeface="Calibri"/>
               </a:rPr>
-              <a:t>Je m'appelle Huong  •  GV. Đỗ Thùy Hương  •  EC1103</a:t>
+              <a:t>Je m'appelle Huong  •  GV. Đỗ Thùy Hương  •  EC6000TX</a:t>
             </a:r>
           </a:p>
         </p:txBody>
@@ -5947,7 +5947,7 @@
                 <a:ea typeface="Calibri" pitchFamily="34" charset="-122"/>
                 <a:cs typeface="Calibri" pitchFamily="34" charset="-120"/>
               </a:rPr>
-              <a:t>Je m'appelle Huong  •  GV. Đỗ Thùy Hương  •  EC1103</a:t>
+              <a:t>Je m'appelle Huong  •  GV. Đỗ Thùy Hương  •  EC6000TX</a:t>
             </a:r>
             <a:endParaRPr lang="en-US" sz="900" dirty="0"/>
           </a:p>
@@ -6570,7 +6570,7 @@
                 <a:ea typeface="Calibri" pitchFamily="34" charset="-122"/>
                 <a:cs typeface="Calibri" pitchFamily="34" charset="-120"/>
               </a:rPr>
-              <a:t>Je m'appelle Huong  •  GV. Đỗ Thùy Hương  •  EC1103</a:t>
+              <a:t>Je m'appelle Huong  •  GV. Đỗ Thùy Hương  •  EC6000TX</a:t>
             </a:r>
             <a:endParaRPr lang="en-US" sz="900" dirty="0"/>
           </a:p>
@@ -7106,7 +7106,7 @@
                 <a:ea typeface="Calibri" pitchFamily="34" charset="-122"/>
                 <a:cs typeface="Calibri" pitchFamily="34" charset="-120"/>
               </a:rPr>
-              <a:t>Je m'appelle Huong  •  GV. Đỗ Thùy Hương  •  EC1103</a:t>
+              <a:t>Je m'appelle Huong  •  GV. Đỗ Thùy Hương  •  EC6000TX</a:t>
             </a:r>
             <a:endParaRPr lang="en-US" sz="900" dirty="0"/>
           </a:p>
@@ -7837,7 +7837,7 @@
                 <a:ea typeface="Calibri" pitchFamily="34" charset="-122"/>
                 <a:cs typeface="Calibri" pitchFamily="34" charset="-120"/>
               </a:rPr>
-              <a:t>Je m'appelle Huong  •  GV. Đỗ Thùy Hương  •  EC1103</a:t>
+              <a:t>Je m'appelle Huong  •  GV. Đỗ Thùy Hương  •  EC6000TX</a:t>
             </a:r>
             <a:endParaRPr lang="en-US" sz="900" dirty="0"/>
           </a:p>
@@ -8373,7 +8373,7 @@
                 <a:ea typeface="Calibri" pitchFamily="34" charset="-122"/>
                 <a:cs typeface="Calibri" pitchFamily="34" charset="-120"/>
               </a:rPr>
-              <a:t>Je m'appelle Huong  •  GV. Đỗ Thùy Hương  •  EC1103</a:t>
+              <a:t>Je m'appelle Huong  •  GV. Đỗ Thùy Hương  •  EC6000TX</a:t>
             </a:r>
             <a:endParaRPr lang="en-US" sz="900" dirty="0"/>
           </a:p>
@@ -9112,7 +9112,7 @@
                 <a:ea typeface="Calibri" pitchFamily="34" charset="-122"/>
                 <a:cs typeface="Calibri" pitchFamily="34" charset="-120"/>
               </a:rPr>
-              <a:t>Je m'appelle Huong  •  GV. Đỗ Thùy Hương  •  EC1103</a:t>
+              <a:t>Je m'appelle Huong  •  GV. Đỗ Thùy Hương  •  EC6000TX</a:t>
             </a:r>
             <a:endParaRPr lang="en-US" sz="900" dirty="0"/>
           </a:p>
@@ -9879,7 +9879,7 @@
                 <a:ea typeface="Calibri" pitchFamily="34" charset="-122"/>
                 <a:cs typeface="Calibri" pitchFamily="34" charset="-120"/>
               </a:rPr>
-              <a:t>Je m'appelle Huong  •  GV. Đỗ Thùy Hương  •  EC1103</a:t>
+              <a:t>Je m'appelle Huong  •  GV. Đỗ Thùy Hương  •  EC6000TX</a:t>
             </a:r>
             <a:endParaRPr lang="en-US" sz="900" dirty="0"/>
           </a:p>
@@ -10415,7 +10415,7 @@
                 <a:ea typeface="Calibri" pitchFamily="34" charset="-122"/>
                 <a:cs typeface="Calibri" pitchFamily="34" charset="-120"/>
               </a:rPr>
-              <a:t>Je m'appelle Huong  •  GV. Đỗ Thùy Hương  •  EC1103</a:t>
+              <a:t>Je m'appelle Huong  •  GV. Đỗ Thùy Hương  •  EC6000TX</a:t>
             </a:r>
             <a:endParaRPr lang="en-US" sz="900" dirty="0"/>
           </a:p>
@@ -11346,7 +11346,7 @@
                 </a:solidFill>
                 <a:latin typeface="Calibri"/>
               </a:rPr>
-              <a:t>Je m'appelle Huong  •  GV. Đỗ Thùy Hương  •  EC1103</a:t>
+              <a:t>Je m'appelle Huong  •  GV. Đỗ Thùy Hương  •  EC6000TX</a:t>
             </a:r>
           </a:p>
         </p:txBody>
@@ -11475,7 +11475,7 @@
                 <a:ea typeface="Calibri" pitchFamily="34" charset="-122"/>
                 <a:cs typeface="Calibri" pitchFamily="34" charset="-120"/>
               </a:rPr>
-              <a:t>Je m'appelle Huong  •  GV. Đỗ Thùy Hương  •  EC1103</a:t>
+              <a:t>Je m'appelle Huong  •  GV. Đỗ Thùy Hương  •  EC6000TX</a:t>
             </a:r>
             <a:endParaRPr lang="en-US" sz="900" dirty="0"/>
           </a:p>
@@ -12011,7 +12011,7 @@
                 <a:ea typeface="Calibri" pitchFamily="34" charset="-122"/>
                 <a:cs typeface="Calibri" pitchFamily="34" charset="-120"/>
               </a:rPr>
-              <a:t>Je m'appelle Huong  •  GV. Đỗ Thùy Hương  •  EC1103</a:t>
+              <a:t>Je m'appelle Huong  •  GV. Đỗ Thùy Hương  •  EC6000TX</a:t>
             </a:r>
             <a:endParaRPr lang="en-US" sz="900" dirty="0"/>
           </a:p>
@@ -12634,7 +12634,7 @@
                 <a:ea typeface="Calibri" pitchFamily="34" charset="-122"/>
                 <a:cs typeface="Calibri" pitchFamily="34" charset="-120"/>
               </a:rPr>
-              <a:t>Je m'appelle Huong  •  GV. Đỗ Thùy Hương  •  EC1103</a:t>
+              <a:t>Je m'appelle Huong  •  GV. Đỗ Thùy Hương  •  EC6000TX</a:t>
             </a:r>
             <a:endParaRPr lang="en-US" sz="900" dirty="0"/>
           </a:p>
@@ -13257,7 +13257,7 @@
                 <a:ea typeface="Calibri" pitchFamily="34" charset="-122"/>
                 <a:cs typeface="Calibri" pitchFamily="34" charset="-120"/>
               </a:rPr>
-              <a:t>Je m'appelle Huong  •  GV. Đỗ Thùy Hương  •  EC1103</a:t>
+              <a:t>Je m'appelle Huong  •  GV. Đỗ Thùy Hương  •  EC6000TX</a:t>
             </a:r>
             <a:endParaRPr lang="en-US" sz="900" dirty="0"/>
           </a:p>
@@ -13556,7 +13556,7 @@
                 <a:ea typeface="Calibri" pitchFamily="34" charset="-122"/>
                 <a:cs typeface="Calibri" pitchFamily="34" charset="-120"/>
               </a:rPr>
-              <a:t>Je m'appelle Huong  •  GV. Đỗ Thùy Hương  •  EC1103</a:t>
+              <a:t>Je m'appelle Huong  •  GV. Đỗ Thùy Hương  •  EC6000TX</a:t>
             </a:r>
             <a:endParaRPr lang="en-US" sz="900" dirty="0"/>
           </a:p>
